--- a/中间版/中期答辩_H_nature风.pptx
+++ b/中间版/中期答辩_H_nature风.pptx
@@ -13,6 +13,10 @@
     <p:sldId id="261" r:id="rId13"/>
     <p:sldId id="262" r:id="rId14"/>
     <p:sldId id="263" r:id="rId15"/>
+    <p:sldId id="264" r:id="rId16"/>
+    <p:sldId id="265" r:id="rId17"/>
+    <p:sldId id="266" r:id="rId18"/>
+    <p:sldId id="267" r:id="rId19"/>
   </p:sldIdLst>
   <p:sldSz cx="12191695" cy="6858000" type="screen4x3"/>
   <p:notesSz cx="6858000" cy="9144000"/>
@@ -534,6 +538,216 @@
 </p:notes>
 </file>
 
+<file path=ppt/notesSlides/notesSlide10.xml><?xml version="1.0" encoding="utf-8"?>
+<p:notes xmlns:a="http://schemas.openxmlformats.org/drawingml/2006/main" xmlns:p="http://schemas.openxmlformats.org/presentationml/2006/main" xmlns:r="http://schemas.openxmlformats.org/officeDocument/2006/relationships">
+  <p:cSld>
+    <p:spTree>
+      <p:nvGrpSpPr>
+        <p:cNvPr id="1" name=""/>
+        <p:cNvGrpSpPr/>
+        <p:nvPr/>
+      </p:nvGrpSpPr>
+      <p:grpSpPr>
+        <a:xfrm>
+          <a:off x="0" y="0"/>
+          <a:ext cx="0" cy="0"/>
+          <a:chOff x="0" y="0"/>
+          <a:chExt cx="0" cy="0"/>
+        </a:xfrm>
+      </p:grpSpPr>
+      <p:sp>
+        <p:nvSpPr>
+          <p:cNvPr id="2" name="Slide Image Placeholder 1"/>
+          <p:cNvSpPr>
+            <a:spLocks noGrp="1"/>
+          </p:cNvSpPr>
+          <p:nvPr>
+            <p:ph type="sldImg" idx="2"/>
+          </p:nvPr>
+        </p:nvSpPr>
+        <p:spPr/>
+      </p:sp>
+      <p:sp>
+        <p:nvSpPr>
+          <p:cNvPr id="3" name="Notes Placeholder 2"/>
+          <p:cNvSpPr>
+            <a:spLocks noGrp="1"/>
+          </p:cNvSpPr>
+          <p:nvPr>
+            <p:ph type="body" idx="3" sz="quarter"/>
+          </p:nvPr>
+        </p:nvSpPr>
+        <p:spPr/>
+        <p:txBody>
+          <a:bodyPr/>
+          <a:lstStyle/>
+          <a:p>
+            <a:r>
+              <a:t>为什么 AD 患者体内的抗菌肽更多？因为存在一个正反馈：菌群失衡与肠屏障通透性增加使内毒素和病原体长期刺激宿主，经 TLR4 与 NF-κB 通路升高促炎因子，而促炎因子又上调 Aβ 与抗菌肽的生成；Aβ 与抗菌肽聚集后激活小胶质细胞，产生更多炎症介质，循环自我加强。这也是抗菌保护假说的现代表述：一项有益的先天免疫反应，在长期失衡后被放大成病理过程。</a:t>
+            </a:r>
+          </a:p>
+        </p:txBody>
+      </p:sp>
+      <p:sp>
+        <p:nvSpPr>
+          <p:cNvPr id="4" name="Slide Number Placeholder 3"/>
+          <p:cNvSpPr>
+            <a:spLocks noGrp="1"/>
+          </p:cNvSpPr>
+          <p:nvPr>
+            <p:ph type="sldNum" idx="5" sz="quarter"/>
+          </p:nvPr>
+        </p:nvSpPr>
+        <p:spPr/>
+      </p:sp>
+    </p:spTree>
+  </p:cSld>
+  <p:clrMapOvr>
+    <a:masterClrMapping/>
+  </p:clrMapOvr>
+</p:notes>
+</file>
+
+<file path=ppt/notesSlides/notesSlide11.xml><?xml version="1.0" encoding="utf-8"?>
+<p:notes xmlns:a="http://schemas.openxmlformats.org/drawingml/2006/main" xmlns:p="http://schemas.openxmlformats.org/presentationml/2006/main" xmlns:r="http://schemas.openxmlformats.org/officeDocument/2006/relationships">
+  <p:cSld>
+    <p:spTree>
+      <p:nvGrpSpPr>
+        <p:cNvPr id="1" name=""/>
+        <p:cNvGrpSpPr/>
+        <p:nvPr/>
+      </p:nvGrpSpPr>
+      <p:grpSpPr>
+        <a:xfrm>
+          <a:off x="0" y="0"/>
+          <a:ext cx="0" cy="0"/>
+          <a:chOff x="0" y="0"/>
+          <a:chExt cx="0" cy="0"/>
+        </a:xfrm>
+      </p:grpSpPr>
+      <p:sp>
+        <p:nvSpPr>
+          <p:cNvPr id="2" name="Slide Image Placeholder 1"/>
+          <p:cNvSpPr>
+            <a:spLocks noGrp="1"/>
+          </p:cNvSpPr>
+          <p:nvPr>
+            <p:ph type="sldImg" idx="2"/>
+          </p:nvPr>
+        </p:nvSpPr>
+        <p:spPr/>
+      </p:sp>
+      <p:sp>
+        <p:nvSpPr>
+          <p:cNvPr id="3" name="Notes Placeholder 2"/>
+          <p:cNvSpPr>
+            <a:spLocks noGrp="1"/>
+          </p:cNvSpPr>
+          <p:nvPr>
+            <p:ph type="body" idx="3" sz="quarter"/>
+          </p:nvPr>
+        </p:nvSpPr>
+        <p:spPr/>
+        <p:txBody>
+          <a:bodyPr/>
+          <a:lstStyle/>
+          <a:p>
+            <a:r>
+              <a:t>机制落点参照 AChE–Aβ 复合物的分子动力学研究：Aβ 对接进外周阴离子位点 PAS 后，复合物在 1 微秒模拟中保持稳定，主要停留区为 344–361 区段，该区段紧邻 PAS 但不受双位点抑制剂的位阻。由此提出三个可检验假设：H1 竞争 PAS 减少成核、H2 直接结合 Aβ 改变聚集路径、H3 在膜水平影响小胶质识别。我们用对接与动力学给出优先序，再用抑菌与酶活实验验证。</a:t>
+            </a:r>
+          </a:p>
+        </p:txBody>
+      </p:sp>
+      <p:sp>
+        <p:nvSpPr>
+          <p:cNvPr id="4" name="Slide Number Placeholder 3"/>
+          <p:cNvSpPr>
+            <a:spLocks noGrp="1"/>
+          </p:cNvSpPr>
+          <p:nvPr>
+            <p:ph type="sldNum" idx="5" sz="quarter"/>
+          </p:nvPr>
+        </p:nvSpPr>
+        <p:spPr/>
+      </p:sp>
+    </p:spTree>
+  </p:cSld>
+  <p:clrMapOvr>
+    <a:masterClrMapping/>
+  </p:clrMapOvr>
+</p:notes>
+</file>
+
+<file path=ppt/notesSlides/notesSlide12.xml><?xml version="1.0" encoding="utf-8"?>
+<p:notes xmlns:a="http://schemas.openxmlformats.org/drawingml/2006/main" xmlns:p="http://schemas.openxmlformats.org/presentationml/2006/main" xmlns:r="http://schemas.openxmlformats.org/officeDocument/2006/relationships">
+  <p:cSld>
+    <p:spTree>
+      <p:nvGrpSpPr>
+        <p:cNvPr id="1" name=""/>
+        <p:cNvGrpSpPr/>
+        <p:nvPr/>
+      </p:nvGrpSpPr>
+      <p:grpSpPr>
+        <a:xfrm>
+          <a:off x="0" y="0"/>
+          <a:ext cx="0" cy="0"/>
+          <a:chOff x="0" y="0"/>
+          <a:chExt cx="0" cy="0"/>
+        </a:xfrm>
+      </p:grpSpPr>
+      <p:sp>
+        <p:nvSpPr>
+          <p:cNvPr id="2" name="Slide Image Placeholder 1"/>
+          <p:cNvSpPr>
+            <a:spLocks noGrp="1"/>
+          </p:cNvSpPr>
+          <p:nvPr>
+            <p:ph type="sldImg" idx="2"/>
+          </p:nvPr>
+        </p:nvSpPr>
+        <p:spPr/>
+      </p:sp>
+      <p:sp>
+        <p:nvSpPr>
+          <p:cNvPr id="3" name="Notes Placeholder 2"/>
+          <p:cNvSpPr>
+            <a:spLocks noGrp="1"/>
+          </p:cNvSpPr>
+          <p:nvPr>
+            <p:ph type="body" idx="3" sz="quarter"/>
+          </p:nvPr>
+        </p:nvSpPr>
+        <p:spPr/>
+        <p:txBody>
+          <a:bodyPr/>
+          <a:lstStyle/>
+          <a:p>
+            <a:r>
+              <a:t>这张表说明每一环的证据强度，以及本课题要补的是哪一块：宿主来源抗菌肽、Aβ 的抗菌活性、AChE 经 PAS 促进聚集，这些已有较强证据；微生物源抗菌肽在 AD 患者中增多、以及候选肽经 AChE–Aβ 界面影响成核，是本课题要回答的问题。这样既讲清了关联，也没有夸大因果。</a:t>
+            </a:r>
+          </a:p>
+        </p:txBody>
+      </p:sp>
+      <p:sp>
+        <p:nvSpPr>
+          <p:cNvPr id="4" name="Slide Number Placeholder 3"/>
+          <p:cNvSpPr>
+            <a:spLocks noGrp="1"/>
+          </p:cNvSpPr>
+          <p:nvPr>
+            <p:ph type="sldNum" idx="5" sz="quarter"/>
+          </p:nvPr>
+        </p:nvSpPr>
+        <p:spPr/>
+      </p:sp>
+    </p:spTree>
+  </p:cSld>
+  <p:clrMapOvr>
+    <a:masterClrMapping/>
+  </p:clrMapOvr>
+</p:notes>
+</file>
+
 <file path=ppt/notesSlides/notesSlide2.xml><?xml version="1.0" encoding="utf-8"?>
 <p:notes xmlns:a="http://schemas.openxmlformats.org/drawingml/2006/main" xmlns:p="http://schemas.openxmlformats.org/presentationml/2006/main" xmlns:r="http://schemas.openxmlformats.org/officeDocument/2006/relationships">
   <p:cSld>
@@ -1000,6 +1214,76 @@
           <a:p>
             <a:r>
               <a:t>总结一下：主体分析工作已经在中期完成，后续是机制关联的结论整理、抑菌实验验证和论文撰写，整体风险可控。我的汇报到此结束，请各位老师批评指正。</a:t>
+            </a:r>
+          </a:p>
+        </p:txBody>
+      </p:sp>
+      <p:sp>
+        <p:nvSpPr>
+          <p:cNvPr id="4" name="Slide Number Placeholder 3"/>
+          <p:cNvSpPr>
+            <a:spLocks noGrp="1"/>
+          </p:cNvSpPr>
+          <p:nvPr>
+            <p:ph type="sldNum" idx="5" sz="quarter"/>
+          </p:nvPr>
+        </p:nvSpPr>
+        <p:spPr/>
+      </p:sp>
+    </p:spTree>
+  </p:cSld>
+  <p:clrMapOvr>
+    <a:masterClrMapping/>
+  </p:clrMapOvr>
+</p:notes>
+</file>
+
+<file path=ppt/notesSlides/notesSlide9.xml><?xml version="1.0" encoding="utf-8"?>
+<p:notes xmlns:a="http://schemas.openxmlformats.org/drawingml/2006/main" xmlns:p="http://schemas.openxmlformats.org/presentationml/2006/main" xmlns:r="http://schemas.openxmlformats.org/officeDocument/2006/relationships">
+  <p:cSld>
+    <p:spTree>
+      <p:nvGrpSpPr>
+        <p:cNvPr id="1" name=""/>
+        <p:cNvGrpSpPr/>
+        <p:nvPr/>
+      </p:nvGrpSpPr>
+      <p:grpSpPr>
+        <a:xfrm>
+          <a:off x="0" y="0"/>
+          <a:ext cx="0" cy="0"/>
+          <a:chOff x="0" y="0"/>
+          <a:chExt cx="0" cy="0"/>
+        </a:xfrm>
+      </p:grpSpPr>
+      <p:sp>
+        <p:nvSpPr>
+          <p:cNvPr id="2" name="Slide Image Placeholder 1"/>
+          <p:cNvSpPr>
+            <a:spLocks noGrp="1"/>
+          </p:cNvSpPr>
+          <p:nvPr>
+            <p:ph type="sldImg" idx="2"/>
+          </p:nvPr>
+        </p:nvSpPr>
+        <p:spPr/>
+      </p:sp>
+      <p:sp>
+        <p:nvSpPr>
+          <p:cNvPr id="3" name="Notes Placeholder 2"/>
+          <p:cNvSpPr>
+            <a:spLocks noGrp="1"/>
+          </p:cNvSpPr>
+          <p:nvPr>
+            <p:ph type="body" idx="3" sz="quarter"/>
+          </p:nvPr>
+        </p:nvSpPr>
+        <p:spPr/>
+        <p:txBody>
+          <a:bodyPr/>
+          <a:lstStyle/>
+          <a:p>
+            <a:r>
+              <a:t>这张图把抗菌肽与 AD 的关联拆成七环，并标出每一环的证据强度：蓝色是已有实验或临床证据，绿色是计算方法能给出候选与优先序的部分，橙色是本课题要回答或需要验证的部分。这样讲的好处是：老师问任何一环，都能说清这一环目前的证据到什么程度。</a:t>
             </a:r>
           </a:p>
         </p:txBody>
@@ -4466,7 +4750,1697 @@
                 <a:ea typeface="微软雅黑"/>
                 <a:cs typeface="Arial"/>
               </a:rPr>
-              <a:t>1 / 8</a:t>
+              <a:t>1 / 12</a:t>
+            </a:r>
+          </a:p>
+        </p:txBody>
+      </p:sp>
+    </p:spTree>
+  </p:cSld>
+  <p:clrMapOvr>
+    <a:masterClrMapping/>
+  </p:clrMapOvr>
+</p:sld>
+</file>
+
+<file path=ppt/slides/slide10.xml><?xml version="1.0" encoding="utf-8"?>
+<p:sld xmlns:a="http://schemas.openxmlformats.org/drawingml/2006/main" xmlns:p="http://schemas.openxmlformats.org/presentationml/2006/main" xmlns:r="http://schemas.openxmlformats.org/officeDocument/2006/relationships">
+  <p:cSld>
+    <p:spTree>
+      <p:nvGrpSpPr>
+        <p:cNvPr id="1" name=""/>
+        <p:cNvGrpSpPr/>
+        <p:nvPr/>
+      </p:nvGrpSpPr>
+      <p:grpSpPr/>
+      <p:sp>
+        <p:nvSpPr>
+          <p:cNvPr id="2" name="TextBox 1"/>
+          <p:cNvSpPr txBox="1"/>
+          <p:nvPr/>
+        </p:nvSpPr>
+        <p:spPr>
+          <a:xfrm>
+            <a:off x="640080" y="365760"/>
+            <a:ext cx="10908792" cy="548640"/>
+          </a:xfrm>
+          <a:prstGeom prst="rect">
+            <a:avLst/>
+          </a:prstGeom>
+          <a:noFill/>
+        </p:spPr>
+        <p:txBody>
+          <a:bodyPr wrap="square" anchor="t" lIns="27432" rIns="27432" tIns="0" bIns="0">
+            <a:spAutoFit/>
+          </a:bodyPr>
+          <a:lstStyle/>
+          <a:p>
+            <a:pPr algn="l">
+              <a:lnSpc>
+                <a:spcPct val="100000"/>
+              </a:lnSpc>
+              <a:spcBef>
+                <a:spcPts val="0"/>
+              </a:spcBef>
+              <a:spcAft>
+                <a:spcPts val="0"/>
+              </a:spcAft>
+            </a:pPr>
+            <a:r>
+              <a:rPr sz="2600" b="1">
+                <a:solidFill>
+                  <a:srgbClr val="111111"/>
+                </a:solidFill>
+                <a:latin typeface="Arial"/>
+                <a:ea typeface="微软雅黑"/>
+                <a:cs typeface="Arial"/>
+              </a:rPr>
+              <a:t>为什么 AD 更多：炎症—Aβ—抗菌肽构成正反馈</a:t>
+            </a:r>
+          </a:p>
+        </p:txBody>
+      </p:sp>
+      <p:sp>
+        <p:nvSpPr>
+          <p:cNvPr id="3" name="Rectangle 2"/>
+          <p:cNvSpPr/>
+          <p:nvPr/>
+        </p:nvSpPr>
+        <p:spPr>
+          <a:xfrm>
+            <a:off x="640080" y="969264"/>
+            <a:ext cx="10908792" cy="12700"/>
+          </a:xfrm>
+          <a:prstGeom prst="rect">
+            <a:avLst/>
+          </a:prstGeom>
+          <a:solidFill>
+            <a:srgbClr val="DDDDDA"/>
+          </a:solidFill>
+          <a:ln>
+            <a:noFill/>
+          </a:ln>
+          <a:effectLst/>
+        </p:spPr>
+        <p:style>
+          <a:lnRef idx="1">
+            <a:schemeClr val="accent1"/>
+          </a:lnRef>
+          <a:fillRef idx="3">
+            <a:schemeClr val="accent1"/>
+          </a:fillRef>
+          <a:effectRef idx="2">
+            <a:schemeClr val="accent1"/>
+          </a:effectRef>
+          <a:fontRef idx="minor">
+            <a:schemeClr val="lt1"/>
+          </a:fontRef>
+        </p:style>
+        <p:txBody>
+          <a:bodyPr rtlCol="0" anchor="ctr"/>
+          <a:lstStyle/>
+          <a:p>
+            <a:pPr algn="ctr"/>
+          </a:p>
+        </p:txBody>
+      </p:sp>
+      <p:sp>
+        <p:nvSpPr>
+          <p:cNvPr id="4" name="TextBox 3"/>
+          <p:cNvSpPr txBox="1"/>
+          <p:nvPr/>
+        </p:nvSpPr>
+        <p:spPr>
+          <a:xfrm>
+            <a:off x="640080" y="1481328"/>
+            <a:ext cx="7223760" cy="3108960"/>
+          </a:xfrm>
+          <a:prstGeom prst="rect">
+            <a:avLst/>
+          </a:prstGeom>
+          <a:noFill/>
+        </p:spPr>
+        <p:txBody>
+          <a:bodyPr wrap="square" anchor="t" lIns="27432" rIns="27432" tIns="0" bIns="0">
+            <a:spAutoFit/>
+          </a:bodyPr>
+          <a:lstStyle/>
+          <a:p>
+            <a:pPr algn="l">
+              <a:lnSpc>
+                <a:spcPct val="134000"/>
+              </a:lnSpc>
+              <a:spcBef>
+                <a:spcPts val="0"/>
+              </a:spcBef>
+              <a:spcAft>
+                <a:spcPts val="0"/>
+              </a:spcAft>
+            </a:pPr>
+            <a:r>
+              <a:rPr sz="1800" b="0">
+                <a:solidFill>
+                  <a:srgbClr val="333333"/>
+                </a:solidFill>
+                <a:latin typeface="Arial"/>
+                <a:ea typeface="微软雅黑"/>
+                <a:cs typeface="Arial"/>
+              </a:rPr>
+              <a:t>菌群失衡与肠屏障通透性增加，使内毒素与病原体长期刺激宿主；</a:t>
+            </a:r>
+          </a:p>
+          <a:p>
+            <a:pPr algn="l">
+              <a:lnSpc>
+                <a:spcPct val="134000"/>
+              </a:lnSpc>
+              <a:spcBef>
+                <a:spcPts val="1400"/>
+              </a:spcBef>
+              <a:spcAft>
+                <a:spcPts val="0"/>
+              </a:spcAft>
+            </a:pPr>
+            <a:r>
+              <a:rPr sz="1800" b="0">
+                <a:solidFill>
+                  <a:srgbClr val="333333"/>
+                </a:solidFill>
+                <a:latin typeface="Arial"/>
+                <a:ea typeface="微软雅黑"/>
+                <a:cs typeface="Arial"/>
+              </a:rPr>
+              <a:t>经 TLR4/NF-κB 升高促炎因子，促炎因子又上调 Aβ 与抗菌肽的生成；</a:t>
+            </a:r>
+          </a:p>
+          <a:p>
+            <a:pPr algn="l">
+              <a:lnSpc>
+                <a:spcPct val="134000"/>
+              </a:lnSpc>
+              <a:spcBef>
+                <a:spcPts val="1400"/>
+              </a:spcBef>
+              <a:spcAft>
+                <a:spcPts val="0"/>
+              </a:spcAft>
+            </a:pPr>
+            <a:r>
+              <a:rPr sz="1800" b="0">
+                <a:solidFill>
+                  <a:srgbClr val="333333"/>
+                </a:solidFill>
+                <a:latin typeface="Arial"/>
+                <a:ea typeface="微软雅黑"/>
+                <a:cs typeface="Arial"/>
+              </a:rPr>
+              <a:t>Aβ 与抗菌肽聚集、成核并激活小胶质细胞，产生更多炎症介质，循环自我加强。</a:t>
+            </a:r>
+          </a:p>
+        </p:txBody>
+      </p:sp>
+      <p:sp>
+        <p:nvSpPr>
+          <p:cNvPr id="5" name="Rectangle 4"/>
+          <p:cNvSpPr/>
+          <p:nvPr/>
+        </p:nvSpPr>
+        <p:spPr>
+          <a:xfrm>
+            <a:off x="8229600" y="1481328"/>
+            <a:ext cx="12700" cy="3017520"/>
+          </a:xfrm>
+          <a:prstGeom prst="rect">
+            <a:avLst/>
+          </a:prstGeom>
+          <a:solidFill>
+            <a:srgbClr val="DDDDDA"/>
+          </a:solidFill>
+          <a:ln>
+            <a:noFill/>
+          </a:ln>
+          <a:effectLst/>
+        </p:spPr>
+        <p:style>
+          <a:lnRef idx="1">
+            <a:schemeClr val="accent1"/>
+          </a:lnRef>
+          <a:fillRef idx="3">
+            <a:schemeClr val="accent1"/>
+          </a:fillRef>
+          <a:effectRef idx="2">
+            <a:schemeClr val="accent1"/>
+          </a:effectRef>
+          <a:fontRef idx="minor">
+            <a:schemeClr val="lt1"/>
+          </a:fontRef>
+        </p:style>
+        <p:txBody>
+          <a:bodyPr rtlCol="0" anchor="ctr"/>
+          <a:lstStyle/>
+          <a:p>
+            <a:pPr algn="ctr"/>
+          </a:p>
+        </p:txBody>
+      </p:sp>
+      <p:sp>
+        <p:nvSpPr>
+          <p:cNvPr id="6" name="TextBox 5"/>
+          <p:cNvSpPr txBox="1"/>
+          <p:nvPr/>
+        </p:nvSpPr>
+        <p:spPr>
+          <a:xfrm>
+            <a:off x="8549640" y="1481328"/>
+            <a:ext cx="2999232" cy="3108960"/>
+          </a:xfrm>
+          <a:prstGeom prst="rect">
+            <a:avLst/>
+          </a:prstGeom>
+          <a:noFill/>
+        </p:spPr>
+        <p:txBody>
+          <a:bodyPr wrap="square" anchor="t" lIns="27432" rIns="27432" tIns="0" bIns="0">
+            <a:spAutoFit/>
+          </a:bodyPr>
+          <a:lstStyle/>
+          <a:p>
+            <a:pPr algn="l">
+              <a:lnSpc>
+                <a:spcPct val="130000"/>
+              </a:lnSpc>
+              <a:spcBef>
+                <a:spcPts val="0"/>
+              </a:spcBef>
+              <a:spcAft>
+                <a:spcPts val="0"/>
+              </a:spcAft>
+            </a:pPr>
+            <a:r>
+              <a:rPr sz="1600" b="0">
+                <a:solidFill>
+                  <a:srgbClr val="777777"/>
+                </a:solidFill>
+                <a:latin typeface="Arial"/>
+                <a:ea typeface="微软雅黑"/>
+                <a:cs typeface="Arial"/>
+              </a:rPr>
+              <a:t>表述口径：</a:t>
+            </a:r>
+          </a:p>
+          <a:p>
+            <a:pPr algn="l">
+              <a:lnSpc>
+                <a:spcPct val="130000"/>
+              </a:lnSpc>
+              <a:spcBef>
+                <a:spcPts val="1200"/>
+              </a:spcBef>
+              <a:spcAft>
+                <a:spcPts val="0"/>
+              </a:spcAft>
+            </a:pPr>
+            <a:r>
+              <a:rPr sz="1600" b="0">
+                <a:solidFill>
+                  <a:srgbClr val="777777"/>
+                </a:solidFill>
+                <a:latin typeface="Arial"/>
+                <a:ea typeface="微软雅黑"/>
+                <a:cs typeface="Arial"/>
+              </a:rPr>
+              <a:t>抗体外证据为主；</a:t>
+            </a:r>
+          </a:p>
+          <a:p>
+            <a:pPr algn="l">
+              <a:lnSpc>
+                <a:spcPct val="130000"/>
+              </a:lnSpc>
+              <a:spcBef>
+                <a:spcPts val="1200"/>
+              </a:spcBef>
+              <a:spcAft>
+                <a:spcPts val="0"/>
+              </a:spcAft>
+            </a:pPr>
+            <a:r>
+              <a:rPr sz="1600" b="0">
+                <a:solidFill>
+                  <a:srgbClr val="777777"/>
+                </a:solidFill>
+                <a:latin typeface="Arial"/>
+                <a:ea typeface="微软雅黑"/>
+                <a:cs typeface="Arial"/>
+              </a:rPr>
+              <a:t>区分宿主来源与</a:t>
+            </a:r>
+          </a:p>
+          <a:p>
+            <a:pPr algn="l">
+              <a:lnSpc>
+                <a:spcPct val="130000"/>
+              </a:lnSpc>
+              <a:spcBef>
+                <a:spcPts val="1200"/>
+              </a:spcBef>
+              <a:spcAft>
+                <a:spcPts val="0"/>
+              </a:spcAft>
+            </a:pPr>
+            <a:r>
+              <a:rPr sz="1600" b="0">
+                <a:solidFill>
+                  <a:srgbClr val="777777"/>
+                </a:solidFill>
+                <a:latin typeface="Arial"/>
+                <a:ea typeface="微软雅黑"/>
+                <a:cs typeface="Arial"/>
+              </a:rPr>
+              <a:t>微生物来源、局部</a:t>
+            </a:r>
+          </a:p>
+          <a:p>
+            <a:pPr algn="l">
+              <a:lnSpc>
+                <a:spcPct val="130000"/>
+              </a:lnSpc>
+              <a:spcBef>
+                <a:spcPts val="1200"/>
+              </a:spcBef>
+              <a:spcAft>
+                <a:spcPts val="0"/>
+              </a:spcAft>
+            </a:pPr>
+            <a:r>
+              <a:rPr sz="1600" b="0">
+                <a:solidFill>
+                  <a:srgbClr val="777777"/>
+                </a:solidFill>
+                <a:latin typeface="Arial"/>
+                <a:ea typeface="微软雅黑"/>
+                <a:cs typeface="Arial"/>
+              </a:rPr>
+              <a:t>与系统、阶段差异。</a:t>
+            </a:r>
+          </a:p>
+        </p:txBody>
+      </p:sp>
+      <p:sp>
+        <p:nvSpPr>
+          <p:cNvPr id="7" name="TextBox 6"/>
+          <p:cNvSpPr txBox="1"/>
+          <p:nvPr/>
+        </p:nvSpPr>
+        <p:spPr>
+          <a:xfrm>
+            <a:off x="640080" y="6419088"/>
+            <a:ext cx="8778240" cy="310896"/>
+          </a:xfrm>
+          <a:prstGeom prst="rect">
+            <a:avLst/>
+          </a:prstGeom>
+          <a:noFill/>
+        </p:spPr>
+        <p:txBody>
+          <a:bodyPr wrap="square" anchor="t" lIns="27432" rIns="27432" tIns="0" bIns="0">
+            <a:spAutoFit/>
+          </a:bodyPr>
+          <a:lstStyle/>
+          <a:p>
+            <a:pPr algn="l">
+              <a:lnSpc>
+                <a:spcPct val="100000"/>
+              </a:lnSpc>
+              <a:spcBef>
+                <a:spcPts val="0"/>
+              </a:spcBef>
+              <a:spcAft>
+                <a:spcPts val="0"/>
+              </a:spcAft>
+            </a:pPr>
+            <a:r>
+              <a:rPr sz="1500" b="0">
+                <a:solidFill>
+                  <a:srgbClr val="777777"/>
+                </a:solidFill>
+                <a:latin typeface="Arial"/>
+                <a:ea typeface="微软雅黑"/>
+                <a:cs typeface="Arial"/>
+              </a:rPr>
+              <a:t>研究生论文中期检查 · 文绍华</a:t>
+            </a:r>
+          </a:p>
+        </p:txBody>
+      </p:sp>
+      <p:sp>
+        <p:nvSpPr>
+          <p:cNvPr id="8" name="TextBox 7"/>
+          <p:cNvSpPr txBox="1"/>
+          <p:nvPr/>
+        </p:nvSpPr>
+        <p:spPr>
+          <a:xfrm>
+            <a:off x="10058400" y="6419088"/>
+            <a:ext cx="1490472" cy="310896"/>
+          </a:xfrm>
+          <a:prstGeom prst="rect">
+            <a:avLst/>
+          </a:prstGeom>
+          <a:noFill/>
+        </p:spPr>
+        <p:txBody>
+          <a:bodyPr wrap="square" anchor="t" lIns="27432" rIns="27432" tIns="0" bIns="0">
+            <a:spAutoFit/>
+          </a:bodyPr>
+          <a:lstStyle/>
+          <a:p>
+            <a:pPr algn="r">
+              <a:lnSpc>
+                <a:spcPct val="100000"/>
+              </a:lnSpc>
+              <a:spcBef>
+                <a:spcPts val="0"/>
+              </a:spcBef>
+              <a:spcAft>
+                <a:spcPts val="0"/>
+              </a:spcAft>
+            </a:pPr>
+            <a:r>
+              <a:rPr sz="1500" b="0">
+                <a:solidFill>
+                  <a:srgbClr val="777777"/>
+                </a:solidFill>
+                <a:latin typeface="Arial"/>
+                <a:ea typeface="微软雅黑"/>
+                <a:cs typeface="Arial"/>
+              </a:rPr>
+              <a:t>10 / 12</a:t>
+            </a:r>
+          </a:p>
+        </p:txBody>
+      </p:sp>
+    </p:spTree>
+  </p:cSld>
+  <p:clrMapOvr>
+    <a:masterClrMapping/>
+  </p:clrMapOvr>
+</p:sld>
+</file>
+
+<file path=ppt/slides/slide11.xml><?xml version="1.0" encoding="utf-8"?>
+<p:sld xmlns:a="http://schemas.openxmlformats.org/drawingml/2006/main" xmlns:p="http://schemas.openxmlformats.org/presentationml/2006/main" xmlns:r="http://schemas.openxmlformats.org/officeDocument/2006/relationships">
+  <p:cSld>
+    <p:spTree>
+      <p:nvGrpSpPr>
+        <p:cNvPr id="1" name=""/>
+        <p:cNvGrpSpPr/>
+        <p:nvPr/>
+      </p:nvGrpSpPr>
+      <p:grpSpPr/>
+      <p:sp>
+        <p:nvSpPr>
+          <p:cNvPr id="2" name="TextBox 1"/>
+          <p:cNvSpPr txBox="1"/>
+          <p:nvPr/>
+        </p:nvSpPr>
+        <p:spPr>
+          <a:xfrm>
+            <a:off x="640080" y="365760"/>
+            <a:ext cx="10908792" cy="548640"/>
+          </a:xfrm>
+          <a:prstGeom prst="rect">
+            <a:avLst/>
+          </a:prstGeom>
+          <a:noFill/>
+        </p:spPr>
+        <p:txBody>
+          <a:bodyPr wrap="square" anchor="t" lIns="27432" rIns="27432" tIns="0" bIns="0">
+            <a:spAutoFit/>
+          </a:bodyPr>
+          <a:lstStyle/>
+          <a:p>
+            <a:pPr algn="l">
+              <a:lnSpc>
+                <a:spcPct val="100000"/>
+              </a:lnSpc>
+              <a:spcBef>
+                <a:spcPts val="0"/>
+              </a:spcBef>
+              <a:spcAft>
+                <a:spcPts val="0"/>
+              </a:spcAft>
+            </a:pPr>
+            <a:r>
+              <a:rPr sz="2500" b="1">
+                <a:solidFill>
+                  <a:srgbClr val="111111"/>
+                </a:solidFill>
+                <a:latin typeface="Arial"/>
+                <a:ea typeface="微软雅黑"/>
+                <a:cs typeface="Arial"/>
+              </a:rPr>
+              <a:t>机制落点：AChE–Aβ 复合物与候选肽的三个假设</a:t>
+            </a:r>
+          </a:p>
+        </p:txBody>
+      </p:sp>
+      <p:sp>
+        <p:nvSpPr>
+          <p:cNvPr id="3" name="Rectangle 2"/>
+          <p:cNvSpPr/>
+          <p:nvPr/>
+        </p:nvSpPr>
+        <p:spPr>
+          <a:xfrm>
+            <a:off x="640080" y="969264"/>
+            <a:ext cx="10908792" cy="12700"/>
+          </a:xfrm>
+          <a:prstGeom prst="rect">
+            <a:avLst/>
+          </a:prstGeom>
+          <a:solidFill>
+            <a:srgbClr val="DDDDDA"/>
+          </a:solidFill>
+          <a:ln>
+            <a:noFill/>
+          </a:ln>
+          <a:effectLst/>
+        </p:spPr>
+        <p:style>
+          <a:lnRef idx="1">
+            <a:schemeClr val="accent1"/>
+          </a:lnRef>
+          <a:fillRef idx="3">
+            <a:schemeClr val="accent1"/>
+          </a:fillRef>
+          <a:effectRef idx="2">
+            <a:schemeClr val="accent1"/>
+          </a:effectRef>
+          <a:fontRef idx="minor">
+            <a:schemeClr val="lt1"/>
+          </a:fontRef>
+        </p:style>
+        <p:txBody>
+          <a:bodyPr rtlCol="0" anchor="ctr"/>
+          <a:lstStyle/>
+          <a:p>
+            <a:pPr algn="ctr"/>
+          </a:p>
+        </p:txBody>
+      </p:sp>
+      <p:pic>
+        <p:nvPicPr>
+          <p:cNvPr id="4" name="Picture 3" descr="figM2_AChE_Aβ_机制.png"/>
+          <p:cNvPicPr>
+            <a:picLocks noChangeAspect="1"/>
+          </p:cNvPicPr>
+          <p:nvPr/>
+        </p:nvPicPr>
+        <p:blipFill>
+          <a:blip r:embed="rId2"/>
+          <a:stretch>
+            <a:fillRect/>
+          </a:stretch>
+        </p:blipFill>
+        <p:spPr>
+          <a:xfrm>
+            <a:off x="640080" y="1188720"/>
+            <a:ext cx="7863840" cy="3943173"/>
+          </a:xfrm>
+          <a:prstGeom prst="rect">
+            <a:avLst/>
+          </a:prstGeom>
+        </p:spPr>
+      </p:pic>
+      <p:sp>
+        <p:nvSpPr>
+          <p:cNvPr id="5" name="TextBox 4"/>
+          <p:cNvSpPr txBox="1"/>
+          <p:nvPr/>
+        </p:nvSpPr>
+        <p:spPr>
+          <a:xfrm>
+            <a:off x="8549640" y="1188720"/>
+            <a:ext cx="2999232" cy="4480560"/>
+          </a:xfrm>
+          <a:prstGeom prst="rect">
+            <a:avLst/>
+          </a:prstGeom>
+          <a:noFill/>
+        </p:spPr>
+        <p:txBody>
+          <a:bodyPr wrap="square" anchor="t" lIns="27432" rIns="27432" tIns="0" bIns="0">
+            <a:spAutoFit/>
+          </a:bodyPr>
+          <a:lstStyle/>
+          <a:p>
+            <a:pPr algn="l">
+              <a:lnSpc>
+                <a:spcPct val="110000"/>
+              </a:lnSpc>
+              <a:spcBef>
+                <a:spcPts val="0"/>
+              </a:spcBef>
+              <a:spcAft>
+                <a:spcPts val="0"/>
+              </a:spcAft>
+            </a:pPr>
+            <a:r>
+              <a:rPr sz="1600" b="1">
+                <a:solidFill>
+                  <a:srgbClr val="2F5D62"/>
+                </a:solidFill>
+                <a:latin typeface="Arial"/>
+                <a:ea typeface="微软雅黑"/>
+                <a:cs typeface="Arial"/>
+              </a:rPr>
+              <a:t>解读</a:t>
+            </a:r>
+          </a:p>
+          <a:p>
+            <a:pPr algn="l">
+              <a:lnSpc>
+                <a:spcPct val="130000"/>
+              </a:lnSpc>
+              <a:spcBef>
+                <a:spcPts val="800"/>
+              </a:spcBef>
+              <a:spcAft>
+                <a:spcPts val="0"/>
+              </a:spcAft>
+            </a:pPr>
+            <a:r>
+              <a:rPr sz="1600" b="0">
+                <a:solidFill>
+                  <a:srgbClr val="333333"/>
+                </a:solidFill>
+                <a:latin typeface="Arial"/>
+                <a:ea typeface="微软雅黑"/>
+                <a:cs typeface="Arial"/>
+              </a:rPr>
+              <a:t>AChE 的 PAS 是 Aβ 聚集的成核中心；分子动力学显示复合物在 1 μs 内稳定，Aβ 主要停留于 344–361 区段，且该区段不受双位点抑制剂位阻。由此提出：H1 竞争 PAS 减少成核、H2 结合 Aβ 改变聚集路径、H3 膜水平影响炎症信号；以对接与动力学给优先序，以抑菌与酶活实验验证。</a:t>
+            </a:r>
+          </a:p>
+        </p:txBody>
+      </p:sp>
+      <p:sp>
+        <p:nvSpPr>
+          <p:cNvPr id="6" name="TextBox 5"/>
+          <p:cNvSpPr txBox="1"/>
+          <p:nvPr/>
+        </p:nvSpPr>
+        <p:spPr>
+          <a:xfrm>
+            <a:off x="640080" y="6419088"/>
+            <a:ext cx="8778240" cy="310896"/>
+          </a:xfrm>
+          <a:prstGeom prst="rect">
+            <a:avLst/>
+          </a:prstGeom>
+          <a:noFill/>
+        </p:spPr>
+        <p:txBody>
+          <a:bodyPr wrap="square" anchor="t" lIns="27432" rIns="27432" tIns="0" bIns="0">
+            <a:spAutoFit/>
+          </a:bodyPr>
+          <a:lstStyle/>
+          <a:p>
+            <a:pPr algn="l">
+              <a:lnSpc>
+                <a:spcPct val="100000"/>
+              </a:lnSpc>
+              <a:spcBef>
+                <a:spcPts val="0"/>
+              </a:spcBef>
+              <a:spcAft>
+                <a:spcPts val="0"/>
+              </a:spcAft>
+            </a:pPr>
+            <a:r>
+              <a:rPr sz="1500" b="0">
+                <a:solidFill>
+                  <a:srgbClr val="777777"/>
+                </a:solidFill>
+                <a:latin typeface="Arial"/>
+                <a:ea typeface="微软雅黑"/>
+                <a:cs typeface="Arial"/>
+              </a:rPr>
+              <a:t>研究生论文中期检查 · 文绍华</a:t>
+            </a:r>
+          </a:p>
+        </p:txBody>
+      </p:sp>
+      <p:sp>
+        <p:nvSpPr>
+          <p:cNvPr id="7" name="TextBox 6"/>
+          <p:cNvSpPr txBox="1"/>
+          <p:nvPr/>
+        </p:nvSpPr>
+        <p:spPr>
+          <a:xfrm>
+            <a:off x="10058400" y="6419088"/>
+            <a:ext cx="1490472" cy="310896"/>
+          </a:xfrm>
+          <a:prstGeom prst="rect">
+            <a:avLst/>
+          </a:prstGeom>
+          <a:noFill/>
+        </p:spPr>
+        <p:txBody>
+          <a:bodyPr wrap="square" anchor="t" lIns="27432" rIns="27432" tIns="0" bIns="0">
+            <a:spAutoFit/>
+          </a:bodyPr>
+          <a:lstStyle/>
+          <a:p>
+            <a:pPr algn="r">
+              <a:lnSpc>
+                <a:spcPct val="100000"/>
+              </a:lnSpc>
+              <a:spcBef>
+                <a:spcPts val="0"/>
+              </a:spcBef>
+              <a:spcAft>
+                <a:spcPts val="0"/>
+              </a:spcAft>
+            </a:pPr>
+            <a:r>
+              <a:rPr sz="1500" b="0">
+                <a:solidFill>
+                  <a:srgbClr val="777777"/>
+                </a:solidFill>
+                <a:latin typeface="Arial"/>
+                <a:ea typeface="微软雅黑"/>
+                <a:cs typeface="Arial"/>
+              </a:rPr>
+              <a:t>11 / 12</a:t>
+            </a:r>
+          </a:p>
+        </p:txBody>
+      </p:sp>
+    </p:spTree>
+  </p:cSld>
+  <p:clrMapOvr>
+    <a:masterClrMapping/>
+  </p:clrMapOvr>
+</p:sld>
+</file>
+
+<file path=ppt/slides/slide12.xml><?xml version="1.0" encoding="utf-8"?>
+<p:sld xmlns:a="http://schemas.openxmlformats.org/drawingml/2006/main" xmlns:p="http://schemas.openxmlformats.org/presentationml/2006/main" xmlns:r="http://schemas.openxmlformats.org/officeDocument/2006/relationships">
+  <p:cSld>
+    <p:spTree>
+      <p:nvGrpSpPr>
+        <p:cNvPr id="1" name=""/>
+        <p:cNvGrpSpPr/>
+        <p:nvPr/>
+      </p:nvGrpSpPr>
+      <p:grpSpPr/>
+      <p:sp>
+        <p:nvSpPr>
+          <p:cNvPr id="2" name="TextBox 1"/>
+          <p:cNvSpPr txBox="1"/>
+          <p:nvPr/>
+        </p:nvSpPr>
+        <p:spPr>
+          <a:xfrm>
+            <a:off x="640080" y="365760"/>
+            <a:ext cx="10908792" cy="548640"/>
+          </a:xfrm>
+          <a:prstGeom prst="rect">
+            <a:avLst/>
+          </a:prstGeom>
+          <a:noFill/>
+        </p:spPr>
+        <p:txBody>
+          <a:bodyPr wrap="square" anchor="t" lIns="27432" rIns="27432" tIns="0" bIns="0">
+            <a:spAutoFit/>
+          </a:bodyPr>
+          <a:lstStyle/>
+          <a:p>
+            <a:pPr algn="l">
+              <a:lnSpc>
+                <a:spcPct val="100000"/>
+              </a:lnSpc>
+              <a:spcBef>
+                <a:spcPts val="0"/>
+              </a:spcBef>
+              <a:spcAft>
+                <a:spcPts val="0"/>
+              </a:spcAft>
+            </a:pPr>
+            <a:r>
+              <a:rPr sz="2500" b="1">
+                <a:solidFill>
+                  <a:srgbClr val="111111"/>
+                </a:solidFill>
+                <a:latin typeface="Arial"/>
+                <a:ea typeface="微软雅黑"/>
+                <a:cs typeface="Arial"/>
+              </a:rPr>
+              <a:t>证据到哪一步：分级与验证路径</a:t>
+            </a:r>
+          </a:p>
+        </p:txBody>
+      </p:sp>
+      <p:sp>
+        <p:nvSpPr>
+          <p:cNvPr id="3" name="Rectangle 2"/>
+          <p:cNvSpPr/>
+          <p:nvPr/>
+        </p:nvSpPr>
+        <p:spPr>
+          <a:xfrm>
+            <a:off x="640080" y="969264"/>
+            <a:ext cx="10908792" cy="12700"/>
+          </a:xfrm>
+          <a:prstGeom prst="rect">
+            <a:avLst/>
+          </a:prstGeom>
+          <a:solidFill>
+            <a:srgbClr val="DDDDDA"/>
+          </a:solidFill>
+          <a:ln>
+            <a:noFill/>
+          </a:ln>
+          <a:effectLst/>
+        </p:spPr>
+        <p:style>
+          <a:lnRef idx="1">
+            <a:schemeClr val="accent1"/>
+          </a:lnRef>
+          <a:fillRef idx="3">
+            <a:schemeClr val="accent1"/>
+          </a:fillRef>
+          <a:effectRef idx="2">
+            <a:schemeClr val="accent1"/>
+          </a:effectRef>
+          <a:fontRef idx="minor">
+            <a:schemeClr val="lt1"/>
+          </a:fontRef>
+        </p:style>
+        <p:txBody>
+          <a:bodyPr rtlCol="0" anchor="ctr"/>
+          <a:lstStyle/>
+          <a:p>
+            <a:pPr algn="ctr"/>
+          </a:p>
+        </p:txBody>
+      </p:sp>
+      <p:graphicFrame>
+        <p:nvGraphicFramePr>
+          <p:cNvPr id="4" name="Table 3"/>
+          <p:cNvGraphicFramePr>
+            <a:graphicFrameLocks noGrp="1"/>
+          </p:cNvGraphicFramePr>
+          <p:nvPr/>
+        </p:nvGraphicFramePr>
+        <p:xfrm>
+          <a:off x="640080" y="1234440"/>
+          <a:ext cx="10972800" cy="3328416"/>
+        </p:xfrm>
+        <a:graphic>
+          <a:graphicData uri="http://schemas.openxmlformats.org/drawingml/2006/table">
+            <a:tbl>
+              <a:tblPr firstRow="1" bandRow="1">
+                <a:tableStyleId>{5C22544A-7EE6-4342-B048-85BDC9FD1C3A}</a:tableStyleId>
+              </a:tblPr>
+              <a:tblGrid>
+                <a:gridCol w="4206240"/>
+                <a:gridCol w="3108960"/>
+                <a:gridCol w="3657600"/>
+              </a:tblGrid>
+              <a:tr h="475488">
+                <a:tc>
+                  <a:txBody>
+                    <a:bodyPr/>
+                    <a:lstStyle/>
+                    <a:p>
+                      <a:pPr algn="l">
+                        <a:lnSpc>
+                          <a:spcPct val="105000"/>
+                        </a:lnSpc>
+                        <a:spcBef>
+                          <a:spcPts val="0"/>
+                        </a:spcBef>
+                        <a:spcAft>
+                          <a:spcPts val="0"/>
+                        </a:spcAft>
+                      </a:pPr>
+                      <a:r>
+                        <a:rPr sz="1500" b="1">
+                          <a:solidFill>
+                            <a:srgbClr val="111111"/>
+                          </a:solidFill>
+                          <a:latin typeface="Arial"/>
+                          <a:ea typeface="微软雅黑"/>
+                          <a:cs typeface="Arial"/>
+                        </a:rPr>
+                        <a:t>要点</a:t>
+                      </a:r>
+                    </a:p>
+                  </a:txBody>
+                  <a:tcPr>
+                    <a:solidFill>
+                      <a:srgbClr val="F7F7F5"/>
+                    </a:solidFill>
+                  </a:tcPr>
+                </a:tc>
+                <a:tc>
+                  <a:txBody>
+                    <a:bodyPr/>
+                    <a:lstStyle/>
+                    <a:p>
+                      <a:pPr algn="l">
+                        <a:lnSpc>
+                          <a:spcPct val="105000"/>
+                        </a:lnSpc>
+                        <a:spcBef>
+                          <a:spcPts val="0"/>
+                        </a:spcBef>
+                        <a:spcAft>
+                          <a:spcPts val="0"/>
+                        </a:spcAft>
+                      </a:pPr>
+                      <a:r>
+                        <a:rPr sz="1500" b="1">
+                          <a:solidFill>
+                            <a:srgbClr val="111111"/>
+                          </a:solidFill>
+                          <a:latin typeface="Arial"/>
+                          <a:ea typeface="微软雅黑"/>
+                          <a:cs typeface="Arial"/>
+                        </a:rPr>
+                        <a:t>证据强度</a:t>
+                      </a:r>
+                    </a:p>
+                  </a:txBody>
+                  <a:tcPr>
+                    <a:solidFill>
+                      <a:srgbClr val="F7F7F5"/>
+                    </a:solidFill>
+                  </a:tcPr>
+                </a:tc>
+                <a:tc>
+                  <a:txBody>
+                    <a:bodyPr/>
+                    <a:lstStyle/>
+                    <a:p>
+                      <a:pPr algn="l">
+                        <a:lnSpc>
+                          <a:spcPct val="105000"/>
+                        </a:lnSpc>
+                        <a:spcBef>
+                          <a:spcPts val="0"/>
+                        </a:spcBef>
+                        <a:spcAft>
+                          <a:spcPts val="0"/>
+                        </a:spcAft>
+                      </a:pPr>
+                      <a:r>
+                        <a:rPr sz="1500" b="1">
+                          <a:solidFill>
+                            <a:srgbClr val="111111"/>
+                          </a:solidFill>
+                          <a:latin typeface="Arial"/>
+                          <a:ea typeface="微软雅黑"/>
+                          <a:cs typeface="Arial"/>
+                        </a:rPr>
+                        <a:t>与本课题的关系</a:t>
+                      </a:r>
+                    </a:p>
+                  </a:txBody>
+                  <a:tcPr>
+                    <a:solidFill>
+                      <a:srgbClr val="F7F7F5"/>
+                    </a:solidFill>
+                  </a:tcPr>
+                </a:tc>
+              </a:tr>
+              <a:tr h="475488">
+                <a:tc>
+                  <a:txBody>
+                    <a:bodyPr/>
+                    <a:lstStyle/>
+                    <a:p>
+                      <a:pPr algn="l">
+                        <a:lnSpc>
+                          <a:spcPct val="110000"/>
+                        </a:lnSpc>
+                        <a:spcBef>
+                          <a:spcPts val="0"/>
+                        </a:spcBef>
+                        <a:spcAft>
+                          <a:spcPts val="0"/>
+                        </a:spcAft>
+                      </a:pPr>
+                      <a:r>
+                        <a:rPr sz="1500" b="0">
+                          <a:solidFill>
+                            <a:srgbClr val="333333"/>
+                          </a:solidFill>
+                          <a:latin typeface="Arial"/>
+                          <a:ea typeface="微软雅黑"/>
+                          <a:cs typeface="Arial"/>
+                        </a:rPr>
+                        <a:t>Aβ 具抗菌活性，AD 脑匀浆活性更高</a:t>
+                      </a:r>
+                    </a:p>
+                  </a:txBody>
+                  <a:tcPr/>
+                </a:tc>
+                <a:tc>
+                  <a:txBody>
+                    <a:bodyPr/>
+                    <a:lstStyle/>
+                    <a:p>
+                      <a:pPr algn="l">
+                        <a:lnSpc>
+                          <a:spcPct val="110000"/>
+                        </a:lnSpc>
+                        <a:spcBef>
+                          <a:spcPts val="0"/>
+                        </a:spcBef>
+                        <a:spcAft>
+                          <a:spcPts val="0"/>
+                        </a:spcAft>
+                      </a:pPr>
+                      <a:r>
+                        <a:rPr sz="1500" b="0">
+                          <a:solidFill>
+                            <a:srgbClr val="333333"/>
+                          </a:solidFill>
+                          <a:latin typeface="Arial"/>
+                          <a:ea typeface="微软雅黑"/>
+                          <a:cs typeface="Arial"/>
+                        </a:rPr>
+                        <a:t>强：体外 + 人脑组织</a:t>
+                      </a:r>
+                    </a:p>
+                  </a:txBody>
+                  <a:tcPr/>
+                </a:tc>
+                <a:tc>
+                  <a:txBody>
+                    <a:bodyPr/>
+                    <a:lstStyle/>
+                    <a:p>
+                      <a:pPr algn="l">
+                        <a:lnSpc>
+                          <a:spcPct val="110000"/>
+                        </a:lnSpc>
+                        <a:spcBef>
+                          <a:spcPts val="0"/>
+                        </a:spcBef>
+                        <a:spcAft>
+                          <a:spcPts val="0"/>
+                        </a:spcAft>
+                      </a:pPr>
+                      <a:r>
+                        <a:rPr sz="1500" b="0">
+                          <a:solidFill>
+                            <a:srgbClr val="333333"/>
+                          </a:solidFill>
+                          <a:latin typeface="Arial"/>
+                          <a:ea typeface="微软雅黑"/>
+                          <a:cs typeface="Arial"/>
+                        </a:rPr>
+                        <a:t>提供抗菌肽研究的出发点</a:t>
+                      </a:r>
+                    </a:p>
+                  </a:txBody>
+                  <a:tcPr/>
+                </a:tc>
+              </a:tr>
+              <a:tr h="475488">
+                <a:tc>
+                  <a:txBody>
+                    <a:bodyPr/>
+                    <a:lstStyle/>
+                    <a:p>
+                      <a:pPr algn="l">
+                        <a:lnSpc>
+                          <a:spcPct val="110000"/>
+                        </a:lnSpc>
+                        <a:spcBef>
+                          <a:spcPts val="0"/>
+                        </a:spcBef>
+                        <a:spcAft>
+                          <a:spcPts val="0"/>
+                        </a:spcAft>
+                      </a:pPr>
+                      <a:r>
+                        <a:rPr sz="1500" b="0">
+                          <a:solidFill>
+                            <a:srgbClr val="333333"/>
+                          </a:solidFill>
+                          <a:latin typeface="Arial"/>
+                          <a:ea typeface="微软雅黑"/>
+                          <a:cs typeface="Arial"/>
+                        </a:rPr>
+                        <a:t>AD 脑内宿主抗菌肽上调</a:t>
+                      </a:r>
+                    </a:p>
+                  </a:txBody>
+                  <a:tcPr/>
+                </a:tc>
+                <a:tc>
+                  <a:txBody>
+                    <a:bodyPr/>
+                    <a:lstStyle/>
+                    <a:p>
+                      <a:pPr algn="l">
+                        <a:lnSpc>
+                          <a:spcPct val="110000"/>
+                        </a:lnSpc>
+                        <a:spcBef>
+                          <a:spcPts val="0"/>
+                        </a:spcBef>
+                        <a:spcAft>
+                          <a:spcPts val="0"/>
+                        </a:spcAft>
+                      </a:pPr>
+                      <a:r>
+                        <a:rPr sz="1500" b="0">
+                          <a:solidFill>
+                            <a:srgbClr val="333333"/>
+                          </a:solidFill>
+                          <a:latin typeface="Arial"/>
+                          <a:ea typeface="微软雅黑"/>
+                          <a:cs typeface="Arial"/>
+                        </a:rPr>
+                        <a:t>中—强：尸检组织，样本有限</a:t>
+                      </a:r>
+                    </a:p>
+                  </a:txBody>
+                  <a:tcPr/>
+                </a:tc>
+                <a:tc>
+                  <a:txBody>
+                    <a:bodyPr/>
+                    <a:lstStyle/>
+                    <a:p>
+                      <a:pPr algn="l">
+                        <a:lnSpc>
+                          <a:spcPct val="110000"/>
+                        </a:lnSpc>
+                        <a:spcBef>
+                          <a:spcPts val="0"/>
+                        </a:spcBef>
+                        <a:spcAft>
+                          <a:spcPts val="0"/>
+                        </a:spcAft>
+                      </a:pPr>
+                      <a:r>
+                        <a:rPr sz="1500" b="0">
+                          <a:solidFill>
+                            <a:srgbClr val="333333"/>
+                          </a:solidFill>
+                          <a:latin typeface="Arial"/>
+                          <a:ea typeface="微软雅黑"/>
+                          <a:cs typeface="Arial"/>
+                        </a:rPr>
+                        <a:t>作为宿主来源的参照系</a:t>
+                      </a:r>
+                    </a:p>
+                  </a:txBody>
+                  <a:tcPr/>
+                </a:tc>
+              </a:tr>
+              <a:tr h="475488">
+                <a:tc>
+                  <a:txBody>
+                    <a:bodyPr/>
+                    <a:lstStyle/>
+                    <a:p>
+                      <a:pPr algn="l">
+                        <a:lnSpc>
+                          <a:spcPct val="110000"/>
+                        </a:lnSpc>
+                        <a:spcBef>
+                          <a:spcPts val="0"/>
+                        </a:spcBef>
+                        <a:spcAft>
+                          <a:spcPts val="0"/>
+                        </a:spcAft>
+                      </a:pPr>
+                      <a:r>
+                        <a:rPr sz="1500" b="0">
+                          <a:solidFill>
+                            <a:srgbClr val="333333"/>
+                          </a:solidFill>
+                          <a:latin typeface="Arial"/>
+                          <a:ea typeface="微软雅黑"/>
+                          <a:cs typeface="Arial"/>
+                        </a:rPr>
+                        <a:t>AChE 经 PAS 促进 Aβ 聚集</a:t>
+                      </a:r>
+                    </a:p>
+                  </a:txBody>
+                  <a:tcPr/>
+                </a:tc>
+                <a:tc>
+                  <a:txBody>
+                    <a:bodyPr/>
+                    <a:lstStyle/>
+                    <a:p>
+                      <a:pPr algn="l">
+                        <a:lnSpc>
+                          <a:spcPct val="110000"/>
+                        </a:lnSpc>
+                        <a:spcBef>
+                          <a:spcPts val="0"/>
+                        </a:spcBef>
+                        <a:spcAft>
+                          <a:spcPts val="0"/>
+                        </a:spcAft>
+                      </a:pPr>
+                      <a:r>
+                        <a:rPr sz="1500" b="0">
+                          <a:solidFill>
+                            <a:srgbClr val="333333"/>
+                          </a:solidFill>
+                          <a:latin typeface="Arial"/>
+                          <a:ea typeface="微软雅黑"/>
+                          <a:cs typeface="Arial"/>
+                        </a:rPr>
+                        <a:t>强：体外动力学 + 位点阻断</a:t>
+                      </a:r>
+                    </a:p>
+                  </a:txBody>
+                  <a:tcPr/>
+                </a:tc>
+                <a:tc>
+                  <a:txBody>
+                    <a:bodyPr/>
+                    <a:lstStyle/>
+                    <a:p>
+                      <a:pPr algn="l">
+                        <a:lnSpc>
+                          <a:spcPct val="110000"/>
+                        </a:lnSpc>
+                        <a:spcBef>
+                          <a:spcPts val="0"/>
+                        </a:spcBef>
+                        <a:spcAft>
+                          <a:spcPts val="0"/>
+                        </a:spcAft>
+                      </a:pPr>
+                      <a:r>
+                        <a:rPr sz="1500" b="0">
+                          <a:solidFill>
+                            <a:srgbClr val="333333"/>
+                          </a:solidFill>
+                          <a:latin typeface="Arial"/>
+                          <a:ea typeface="微软雅黑"/>
+                          <a:cs typeface="Arial"/>
+                        </a:rPr>
+                        <a:t>机制关联的参照体系</a:t>
+                      </a:r>
+                    </a:p>
+                  </a:txBody>
+                  <a:tcPr/>
+                </a:tc>
+              </a:tr>
+              <a:tr h="475488">
+                <a:tc>
+                  <a:txBody>
+                    <a:bodyPr/>
+                    <a:lstStyle/>
+                    <a:p>
+                      <a:pPr algn="l">
+                        <a:lnSpc>
+                          <a:spcPct val="110000"/>
+                        </a:lnSpc>
+                        <a:spcBef>
+                          <a:spcPts val="0"/>
+                        </a:spcBef>
+                        <a:spcAft>
+                          <a:spcPts val="0"/>
+                        </a:spcAft>
+                      </a:pPr>
+                      <a:r>
+                        <a:rPr sz="1500" b="0">
+                          <a:solidFill>
+                            <a:srgbClr val="333333"/>
+                          </a:solidFill>
+                          <a:latin typeface="Arial"/>
+                          <a:ea typeface="微软雅黑"/>
+                          <a:cs typeface="Arial"/>
+                        </a:rPr>
+                        <a:t>AD 患者菌群失衡与炎症升高</a:t>
+                      </a:r>
+                    </a:p>
+                  </a:txBody>
+                  <a:tcPr/>
+                </a:tc>
+                <a:tc>
+                  <a:txBody>
+                    <a:bodyPr/>
+                    <a:lstStyle/>
+                    <a:p>
+                      <a:pPr algn="l">
+                        <a:lnSpc>
+                          <a:spcPct val="110000"/>
+                        </a:lnSpc>
+                        <a:spcBef>
+                          <a:spcPts val="0"/>
+                        </a:spcBef>
+                        <a:spcAft>
+                          <a:spcPts val="0"/>
+                        </a:spcAft>
+                      </a:pPr>
+                      <a:r>
+                        <a:rPr sz="1500" b="0">
+                          <a:solidFill>
+                            <a:srgbClr val="333333"/>
+                          </a:solidFill>
+                          <a:latin typeface="Arial"/>
+                          <a:ea typeface="微软雅黑"/>
+                          <a:cs typeface="Arial"/>
+                        </a:rPr>
+                        <a:t>中：研究异质性大</a:t>
+                      </a:r>
+                    </a:p>
+                  </a:txBody>
+                  <a:tcPr/>
+                </a:tc>
+                <a:tc>
+                  <a:txBody>
+                    <a:bodyPr/>
+                    <a:lstStyle/>
+                    <a:p>
+                      <a:pPr algn="l">
+                        <a:lnSpc>
+                          <a:spcPct val="110000"/>
+                        </a:lnSpc>
+                        <a:spcBef>
+                          <a:spcPts val="0"/>
+                        </a:spcBef>
+                        <a:spcAft>
+                          <a:spcPts val="0"/>
+                        </a:spcAft>
+                      </a:pPr>
+                      <a:r>
+                        <a:rPr sz="1500" b="0">
+                          <a:solidFill>
+                            <a:srgbClr val="333333"/>
+                          </a:solidFill>
+                          <a:latin typeface="Arial"/>
+                          <a:ea typeface="微软雅黑"/>
+                          <a:cs typeface="Arial"/>
+                        </a:rPr>
+                        <a:t>阶段特异性抗菌肽的合理性</a:t>
+                      </a:r>
+                    </a:p>
+                  </a:txBody>
+                  <a:tcPr/>
+                </a:tc>
+              </a:tr>
+              <a:tr h="475488">
+                <a:tc>
+                  <a:txBody>
+                    <a:bodyPr/>
+                    <a:lstStyle/>
+                    <a:p>
+                      <a:pPr algn="l">
+                        <a:lnSpc>
+                          <a:spcPct val="110000"/>
+                        </a:lnSpc>
+                        <a:spcBef>
+                          <a:spcPts val="0"/>
+                        </a:spcBef>
+                        <a:spcAft>
+                          <a:spcPts val="0"/>
+                        </a:spcAft>
+                      </a:pPr>
+                      <a:r>
+                        <a:rPr sz="1500" b="0">
+                          <a:solidFill>
+                            <a:srgbClr val="333333"/>
+                          </a:solidFill>
+                          <a:latin typeface="Arial"/>
+                          <a:ea typeface="微软雅黑"/>
+                          <a:cs typeface="Arial"/>
+                        </a:rPr>
+                        <a:t>微生物源抗菌肽在 AD 增多</a:t>
+                      </a:r>
+                    </a:p>
+                  </a:txBody>
+                  <a:tcPr/>
+                </a:tc>
+                <a:tc>
+                  <a:txBody>
+                    <a:bodyPr/>
+                    <a:lstStyle/>
+                    <a:p>
+                      <a:pPr algn="l">
+                        <a:lnSpc>
+                          <a:spcPct val="110000"/>
+                        </a:lnSpc>
+                        <a:spcBef>
+                          <a:spcPts val="0"/>
+                        </a:spcBef>
+                        <a:spcAft>
+                          <a:spcPts val="0"/>
+                        </a:spcAft>
+                      </a:pPr>
+                      <a:r>
+                        <a:rPr sz="1500" b="0">
+                          <a:solidFill>
+                            <a:srgbClr val="333333"/>
+                          </a:solidFill>
+                          <a:latin typeface="Arial"/>
+                          <a:ea typeface="微软雅黑"/>
+                          <a:cs typeface="Arial"/>
+                        </a:rPr>
+                        <a:t>待验证</a:t>
+                      </a:r>
+                    </a:p>
+                  </a:txBody>
+                  <a:tcPr/>
+                </a:tc>
+                <a:tc>
+                  <a:txBody>
+                    <a:bodyPr/>
+                    <a:lstStyle/>
+                    <a:p>
+                      <a:pPr algn="l">
+                        <a:lnSpc>
+                          <a:spcPct val="110000"/>
+                        </a:lnSpc>
+                        <a:spcBef>
+                          <a:spcPts val="0"/>
+                        </a:spcBef>
+                        <a:spcAft>
+                          <a:spcPts val="0"/>
+                        </a:spcAft>
+                      </a:pPr>
+                      <a:r>
+                        <a:rPr sz="1500" b="0">
+                          <a:solidFill>
+                            <a:srgbClr val="333333"/>
+                          </a:solidFill>
+                          <a:latin typeface="Arial"/>
+                          <a:ea typeface="微软雅黑"/>
+                          <a:cs typeface="Arial"/>
+                        </a:rPr>
+                        <a:t>本课题要回答的问题</a:t>
+                      </a:r>
+                    </a:p>
+                  </a:txBody>
+                  <a:tcPr/>
+                </a:tc>
+              </a:tr>
+              <a:tr h="475488">
+                <a:tc>
+                  <a:txBody>
+                    <a:bodyPr/>
+                    <a:lstStyle/>
+                    <a:p>
+                      <a:pPr algn="l">
+                        <a:lnSpc>
+                          <a:spcPct val="110000"/>
+                        </a:lnSpc>
+                        <a:spcBef>
+                          <a:spcPts val="0"/>
+                        </a:spcBef>
+                        <a:spcAft>
+                          <a:spcPts val="0"/>
+                        </a:spcAft>
+                      </a:pPr>
+                      <a:r>
+                        <a:rPr sz="1500" b="0">
+                          <a:solidFill>
+                            <a:srgbClr val="333333"/>
+                          </a:solidFill>
+                          <a:latin typeface="Arial"/>
+                          <a:ea typeface="微软雅黑"/>
+                          <a:cs typeface="Arial"/>
+                        </a:rPr>
+                        <a:t>候选肽经 AChE–Aβ 界面影响成核</a:t>
+                      </a:r>
+                    </a:p>
+                  </a:txBody>
+                  <a:tcPr/>
+                </a:tc>
+                <a:tc>
+                  <a:txBody>
+                    <a:bodyPr/>
+                    <a:lstStyle/>
+                    <a:p>
+                      <a:pPr algn="l">
+                        <a:lnSpc>
+                          <a:spcPct val="110000"/>
+                        </a:lnSpc>
+                        <a:spcBef>
+                          <a:spcPts val="0"/>
+                        </a:spcBef>
+                        <a:spcAft>
+                          <a:spcPts val="0"/>
+                        </a:spcAft>
+                      </a:pPr>
+                      <a:r>
+                        <a:rPr sz="1500" b="0">
+                          <a:solidFill>
+                            <a:srgbClr val="333333"/>
+                          </a:solidFill>
+                          <a:latin typeface="Arial"/>
+                          <a:ea typeface="微软雅黑"/>
+                          <a:cs typeface="Arial"/>
+                        </a:rPr>
+                        <a:t>待验证（H1—H3）</a:t>
+                      </a:r>
+                    </a:p>
+                  </a:txBody>
+                  <a:tcPr/>
+                </a:tc>
+                <a:tc>
+                  <a:txBody>
+                    <a:bodyPr/>
+                    <a:lstStyle/>
+                    <a:p>
+                      <a:pPr algn="l">
+                        <a:lnSpc>
+                          <a:spcPct val="110000"/>
+                        </a:lnSpc>
+                        <a:spcBef>
+                          <a:spcPts val="0"/>
+                        </a:spcBef>
+                        <a:spcAft>
+                          <a:spcPts val="0"/>
+                        </a:spcAft>
+                      </a:pPr>
+                      <a:r>
+                        <a:rPr sz="1500" b="0">
+                          <a:solidFill>
+                            <a:srgbClr val="333333"/>
+                          </a:solidFill>
+                          <a:latin typeface="Arial"/>
+                          <a:ea typeface="微软雅黑"/>
+                          <a:cs typeface="Arial"/>
+                        </a:rPr>
+                        <a:t>下一步的对接、动力学与实验</a:t>
+                      </a:r>
+                    </a:p>
+                  </a:txBody>
+                  <a:tcPr/>
+                </a:tc>
+              </a:tr>
+            </a:tbl>
+          </a:graphicData>
+        </a:graphic>
+      </p:graphicFrame>
+      <p:sp>
+        <p:nvSpPr>
+          <p:cNvPr id="5" name="TextBox 4"/>
+          <p:cNvSpPr txBox="1"/>
+          <p:nvPr/>
+        </p:nvSpPr>
+        <p:spPr>
+          <a:xfrm>
+            <a:off x="640080" y="6419088"/>
+            <a:ext cx="8778240" cy="310896"/>
+          </a:xfrm>
+          <a:prstGeom prst="rect">
+            <a:avLst/>
+          </a:prstGeom>
+          <a:noFill/>
+        </p:spPr>
+        <p:txBody>
+          <a:bodyPr wrap="square" anchor="t" lIns="27432" rIns="27432" tIns="0" bIns="0">
+            <a:spAutoFit/>
+          </a:bodyPr>
+          <a:lstStyle/>
+          <a:p>
+            <a:pPr algn="l">
+              <a:lnSpc>
+                <a:spcPct val="100000"/>
+              </a:lnSpc>
+              <a:spcBef>
+                <a:spcPts val="0"/>
+              </a:spcBef>
+              <a:spcAft>
+                <a:spcPts val="0"/>
+              </a:spcAft>
+            </a:pPr>
+            <a:r>
+              <a:rPr sz="1500" b="0">
+                <a:solidFill>
+                  <a:srgbClr val="777777"/>
+                </a:solidFill>
+                <a:latin typeface="Arial"/>
+                <a:ea typeface="微软雅黑"/>
+                <a:cs typeface="Arial"/>
+              </a:rPr>
+              <a:t>研究生论文中期检查 · 文绍华</a:t>
+            </a:r>
+          </a:p>
+        </p:txBody>
+      </p:sp>
+      <p:sp>
+        <p:nvSpPr>
+          <p:cNvPr id="6" name="TextBox 5"/>
+          <p:cNvSpPr txBox="1"/>
+          <p:nvPr/>
+        </p:nvSpPr>
+        <p:spPr>
+          <a:xfrm>
+            <a:off x="10058400" y="6419088"/>
+            <a:ext cx="1490472" cy="310896"/>
+          </a:xfrm>
+          <a:prstGeom prst="rect">
+            <a:avLst/>
+          </a:prstGeom>
+          <a:noFill/>
+        </p:spPr>
+        <p:txBody>
+          <a:bodyPr wrap="square" anchor="t" lIns="27432" rIns="27432" tIns="0" bIns="0">
+            <a:spAutoFit/>
+          </a:bodyPr>
+          <a:lstStyle/>
+          <a:p>
+            <a:pPr algn="r">
+              <a:lnSpc>
+                <a:spcPct val="100000"/>
+              </a:lnSpc>
+              <a:spcBef>
+                <a:spcPts val="0"/>
+              </a:spcBef>
+              <a:spcAft>
+                <a:spcPts val="0"/>
+              </a:spcAft>
+            </a:pPr>
+            <a:r>
+              <a:rPr sz="1500" b="0">
+                <a:solidFill>
+                  <a:srgbClr val="777777"/>
+                </a:solidFill>
+                <a:latin typeface="Arial"/>
+                <a:ea typeface="微软雅黑"/>
+                <a:cs typeface="Arial"/>
+              </a:rPr>
+              <a:t>12 / 12</a:t>
             </a:r>
           </a:p>
         </p:txBody>
@@ -4903,7 +6877,7 @@
                 <a:ea typeface="微软雅黑"/>
                 <a:cs typeface="Arial"/>
               </a:rPr>
-              <a:t>2 / 8</a:t>
+              <a:t>2 / 12</a:t>
             </a:r>
           </a:p>
         </p:txBody>
@@ -5224,7 +7198,7 @@
                 <a:ea typeface="微软雅黑"/>
                 <a:cs typeface="Arial"/>
               </a:rPr>
-              <a:t>3 / 8</a:t>
+              <a:t>3 / 12</a:t>
             </a:r>
           </a:p>
         </p:txBody>
@@ -5522,7 +7496,7 @@
                 <a:ea typeface="微软雅黑"/>
                 <a:cs typeface="Arial"/>
               </a:rPr>
-              <a:t>4 / 8</a:t>
+              <a:t>4 / 12</a:t>
             </a:r>
           </a:p>
         </p:txBody>
@@ -5843,7 +7817,7 @@
                 <a:ea typeface="微软雅黑"/>
                 <a:cs typeface="Arial"/>
               </a:rPr>
-              <a:t>5 / 8</a:t>
+              <a:t>5 / 12</a:t>
             </a:r>
           </a:p>
         </p:txBody>
@@ -6141,7 +8115,7 @@
                 <a:ea typeface="微软雅黑"/>
                 <a:cs typeface="Arial"/>
               </a:rPr>
-              <a:t>6 / 8</a:t>
+              <a:t>6 / 12</a:t>
             </a:r>
           </a:p>
         </p:txBody>
@@ -6858,7 +8832,7 @@
                 <a:ea typeface="微软雅黑"/>
                 <a:cs typeface="Arial"/>
               </a:rPr>
-              <a:t>7 / 8</a:t>
+              <a:t>7 / 12</a:t>
             </a:r>
           </a:p>
         </p:txBody>
@@ -7247,7 +9221,328 @@
                 <a:ea typeface="微软雅黑"/>
                 <a:cs typeface="Arial"/>
               </a:rPr>
-              <a:t>8 / 8</a:t>
+              <a:t>8 / 12</a:t>
+            </a:r>
+          </a:p>
+        </p:txBody>
+      </p:sp>
+    </p:spTree>
+  </p:cSld>
+  <p:clrMapOvr>
+    <a:masterClrMapping/>
+  </p:clrMapOvr>
+</p:sld>
+</file>
+
+<file path=ppt/slides/slide9.xml><?xml version="1.0" encoding="utf-8"?>
+<p:sld xmlns:a="http://schemas.openxmlformats.org/drawingml/2006/main" xmlns:p="http://schemas.openxmlformats.org/presentationml/2006/main" xmlns:r="http://schemas.openxmlformats.org/officeDocument/2006/relationships">
+  <p:cSld>
+    <p:spTree>
+      <p:nvGrpSpPr>
+        <p:cNvPr id="1" name=""/>
+        <p:cNvGrpSpPr/>
+        <p:nvPr/>
+      </p:nvGrpSpPr>
+      <p:grpSpPr/>
+      <p:sp>
+        <p:nvSpPr>
+          <p:cNvPr id="2" name="TextBox 1"/>
+          <p:cNvSpPr txBox="1"/>
+          <p:nvPr/>
+        </p:nvSpPr>
+        <p:spPr>
+          <a:xfrm>
+            <a:off x="640080" y="365760"/>
+            <a:ext cx="10908792" cy="548640"/>
+          </a:xfrm>
+          <a:prstGeom prst="rect">
+            <a:avLst/>
+          </a:prstGeom>
+          <a:noFill/>
+        </p:spPr>
+        <p:txBody>
+          <a:bodyPr wrap="square" anchor="t" lIns="27432" rIns="27432" tIns="0" bIns="0">
+            <a:spAutoFit/>
+          </a:bodyPr>
+          <a:lstStyle/>
+          <a:p>
+            <a:pPr algn="l">
+              <a:lnSpc>
+                <a:spcPct val="100000"/>
+              </a:lnSpc>
+              <a:spcBef>
+                <a:spcPts val="0"/>
+              </a:spcBef>
+              <a:spcAft>
+                <a:spcPts val="0"/>
+              </a:spcAft>
+            </a:pPr>
+            <a:r>
+              <a:rPr sz="2500" b="1">
+                <a:solidFill>
+                  <a:srgbClr val="111111"/>
+                </a:solidFill>
+                <a:latin typeface="Arial"/>
+                <a:ea typeface="微软雅黑"/>
+                <a:cs typeface="Arial"/>
+              </a:rPr>
+              <a:t>抗菌肽与 AD 的关联可以拆成七环，每环的证据强度不同</a:t>
+            </a:r>
+          </a:p>
+        </p:txBody>
+      </p:sp>
+      <p:sp>
+        <p:nvSpPr>
+          <p:cNvPr id="3" name="Rectangle 2"/>
+          <p:cNvSpPr/>
+          <p:nvPr/>
+        </p:nvSpPr>
+        <p:spPr>
+          <a:xfrm>
+            <a:off x="640080" y="969264"/>
+            <a:ext cx="10908792" cy="12700"/>
+          </a:xfrm>
+          <a:prstGeom prst="rect">
+            <a:avLst/>
+          </a:prstGeom>
+          <a:solidFill>
+            <a:srgbClr val="DDDDDA"/>
+          </a:solidFill>
+          <a:ln>
+            <a:noFill/>
+          </a:ln>
+          <a:effectLst/>
+        </p:spPr>
+        <p:style>
+          <a:lnRef idx="1">
+            <a:schemeClr val="accent1"/>
+          </a:lnRef>
+          <a:fillRef idx="3">
+            <a:schemeClr val="accent1"/>
+          </a:fillRef>
+          <a:effectRef idx="2">
+            <a:schemeClr val="accent1"/>
+          </a:effectRef>
+          <a:fontRef idx="minor">
+            <a:schemeClr val="lt1"/>
+          </a:fontRef>
+        </p:style>
+        <p:txBody>
+          <a:bodyPr rtlCol="0" anchor="ctr"/>
+          <a:lstStyle/>
+          <a:p>
+            <a:pPr algn="ctr"/>
+          </a:p>
+        </p:txBody>
+      </p:sp>
+      <p:pic>
+        <p:nvPicPr>
+          <p:cNvPr id="4" name="Picture 3" descr="figM1_关联逻辑链.png"/>
+          <p:cNvPicPr>
+            <a:picLocks noChangeAspect="1"/>
+          </p:cNvPicPr>
+          <p:nvPr/>
+        </p:nvPicPr>
+        <p:blipFill>
+          <a:blip r:embed="rId2"/>
+          <a:stretch>
+            <a:fillRect/>
+          </a:stretch>
+        </p:blipFill>
+        <p:spPr>
+          <a:xfrm>
+            <a:off x="640080" y="1188720"/>
+            <a:ext cx="10073906" cy="4315968"/>
+          </a:xfrm>
+          <a:prstGeom prst="rect">
+            <a:avLst/>
+          </a:prstGeom>
+        </p:spPr>
+      </p:pic>
+      <p:sp>
+        <p:nvSpPr>
+          <p:cNvPr id="5" name="TextBox 4"/>
+          <p:cNvSpPr txBox="1"/>
+          <p:nvPr/>
+        </p:nvSpPr>
+        <p:spPr>
+          <a:xfrm>
+            <a:off x="640080" y="6053328"/>
+            <a:ext cx="10908792" cy="329184"/>
+          </a:xfrm>
+          <a:prstGeom prst="rect">
+            <a:avLst/>
+          </a:prstGeom>
+          <a:noFill/>
+        </p:spPr>
+        <p:txBody>
+          <a:bodyPr wrap="square" anchor="t" lIns="27432" rIns="27432" tIns="0" bIns="0">
+            <a:spAutoFit/>
+          </a:bodyPr>
+          <a:lstStyle/>
+          <a:p>
+            <a:pPr algn="l">
+              <a:lnSpc>
+                <a:spcPct val="100000"/>
+              </a:lnSpc>
+              <a:spcBef>
+                <a:spcPts val="0"/>
+              </a:spcBef>
+              <a:spcAft>
+                <a:spcPts val="0"/>
+              </a:spcAft>
+            </a:pPr>
+            <a:r>
+              <a:rPr sz="1500" b="0">
+                <a:solidFill>
+                  <a:srgbClr val="777777"/>
+                </a:solidFill>
+                <a:latin typeface="Arial"/>
+                <a:ea typeface="微软雅黑"/>
+                <a:cs typeface="Arial"/>
+              </a:rPr>
+              <a:t>图：本项目自制（results/figures）</a:t>
+            </a:r>
+          </a:p>
+        </p:txBody>
+      </p:sp>
+      <p:sp>
+        <p:nvSpPr>
+          <p:cNvPr id="6" name="TextBox 5"/>
+          <p:cNvSpPr txBox="1"/>
+          <p:nvPr/>
+        </p:nvSpPr>
+        <p:spPr>
+          <a:xfrm>
+            <a:off x="640080" y="4626864"/>
+            <a:ext cx="10908792" cy="1280160"/>
+          </a:xfrm>
+          <a:prstGeom prst="rect">
+            <a:avLst/>
+          </a:prstGeom>
+          <a:noFill/>
+        </p:spPr>
+        <p:txBody>
+          <a:bodyPr wrap="square" anchor="t" lIns="27432" rIns="27432" tIns="0" bIns="0">
+            <a:spAutoFit/>
+          </a:bodyPr>
+          <a:lstStyle/>
+          <a:p>
+            <a:pPr algn="l">
+              <a:lnSpc>
+                <a:spcPct val="130000"/>
+              </a:lnSpc>
+              <a:spcBef>
+                <a:spcPts val="0"/>
+              </a:spcBef>
+              <a:spcAft>
+                <a:spcPts val="0"/>
+              </a:spcAft>
+            </a:pPr>
+            <a:r>
+              <a:rPr sz="1700" b="0">
+                <a:solidFill>
+                  <a:srgbClr val="333333"/>
+                </a:solidFill>
+                <a:latin typeface="Arial"/>
+                <a:ea typeface="微软雅黑"/>
+                <a:cs typeface="Arial"/>
+              </a:rPr>
+              <a:t>① AD 与感染相关、② 感染与炎症驱动抗菌肽与 Aβ 生成、③ Aβ 本身即抗菌肽；④ 抗菌活性可计算预测、⑤ AD 组特异抗菌肽随阶段变化、⑥ 双刃剑效应；⑦ 为什么 AD 更多与 AChE–Aβ 机制落点，是本课题要回答的部分。</a:t>
+            </a:r>
+          </a:p>
+        </p:txBody>
+      </p:sp>
+      <p:sp>
+        <p:nvSpPr>
+          <p:cNvPr id="7" name="TextBox 6"/>
+          <p:cNvSpPr txBox="1"/>
+          <p:nvPr/>
+        </p:nvSpPr>
+        <p:spPr>
+          <a:xfrm>
+            <a:off x="640080" y="6419088"/>
+            <a:ext cx="8778240" cy="310896"/>
+          </a:xfrm>
+          <a:prstGeom prst="rect">
+            <a:avLst/>
+          </a:prstGeom>
+          <a:noFill/>
+        </p:spPr>
+        <p:txBody>
+          <a:bodyPr wrap="square" anchor="t" lIns="27432" rIns="27432" tIns="0" bIns="0">
+            <a:spAutoFit/>
+          </a:bodyPr>
+          <a:lstStyle/>
+          <a:p>
+            <a:pPr algn="l">
+              <a:lnSpc>
+                <a:spcPct val="100000"/>
+              </a:lnSpc>
+              <a:spcBef>
+                <a:spcPts val="0"/>
+              </a:spcBef>
+              <a:spcAft>
+                <a:spcPts val="0"/>
+              </a:spcAft>
+            </a:pPr>
+            <a:r>
+              <a:rPr sz="1500" b="0">
+                <a:solidFill>
+                  <a:srgbClr val="777777"/>
+                </a:solidFill>
+                <a:latin typeface="Arial"/>
+                <a:ea typeface="微软雅黑"/>
+                <a:cs typeface="Arial"/>
+              </a:rPr>
+              <a:t>研究生论文中期检查 · 文绍华</a:t>
+            </a:r>
+          </a:p>
+        </p:txBody>
+      </p:sp>
+      <p:sp>
+        <p:nvSpPr>
+          <p:cNvPr id="8" name="TextBox 7"/>
+          <p:cNvSpPr txBox="1"/>
+          <p:nvPr/>
+        </p:nvSpPr>
+        <p:spPr>
+          <a:xfrm>
+            <a:off x="10058400" y="6419088"/>
+            <a:ext cx="1490472" cy="310896"/>
+          </a:xfrm>
+          <a:prstGeom prst="rect">
+            <a:avLst/>
+          </a:prstGeom>
+          <a:noFill/>
+        </p:spPr>
+        <p:txBody>
+          <a:bodyPr wrap="square" anchor="t" lIns="27432" rIns="27432" tIns="0" bIns="0">
+            <a:spAutoFit/>
+          </a:bodyPr>
+          <a:lstStyle/>
+          <a:p>
+            <a:pPr algn="r">
+              <a:lnSpc>
+                <a:spcPct val="100000"/>
+              </a:lnSpc>
+              <a:spcBef>
+                <a:spcPts val="0"/>
+              </a:spcBef>
+              <a:spcAft>
+                <a:spcPts val="0"/>
+              </a:spcAft>
+            </a:pPr>
+            <a:r>
+              <a:rPr sz="1500" b="0">
+                <a:solidFill>
+                  <a:srgbClr val="777777"/>
+                </a:solidFill>
+                <a:latin typeface="Arial"/>
+                <a:ea typeface="微软雅黑"/>
+                <a:cs typeface="Arial"/>
+              </a:rPr>
+              <a:t>9 / 12</a:t>
             </a:r>
           </a:p>
         </p:txBody>

--- a/中间版/中期答辩_H_nature风.pptx
+++ b/中间版/中期答辩_H_nature风.pptx
@@ -583,7 +583,7 @@
           <a:lstStyle/>
           <a:p>
             <a:r>
-              <a:t>为什么 AD 患者体内的抗菌肽更多？因为存在一个正反馈：菌群失衡与肠屏障通透性增加使内毒素和病原体长期刺激宿主，经 TLR4 与 NF-κB 通路升高促炎因子，而促炎因子又上调 Aβ 与抗菌肽的生成；Aβ 与抗菌肽聚集后激活小胶质细胞，产生更多炎症介质，循环自我加强。这也是抗菌保护假说的现代表述：一项有益的先天免疫反应，在长期失衡后被放大成病理过程。</a:t>
+              <a:t>为什么AD更多：因为存在正反馈。菌群失衡与肠屏障通透性增加使LPS长期刺激宿主，经TLR4/NF-κB升高促炎因子，促炎因子又上调Aβ与抗菌肽生成；Aβ与抗菌肽聚集激活小胶质，产生更多炎症介质，循环加强。这是抗菌保护假说的现代表述。</a:t>
             </a:r>
           </a:p>
         </p:txBody>
@@ -653,7 +653,7 @@
           <a:lstStyle/>
           <a:p>
             <a:r>
-              <a:t>机制落点参照 AChE–Aβ 复合物的分子动力学研究：Aβ 对接进外周阴离子位点 PAS 后，复合物在 1 微秒模拟中保持稳定，主要停留区为 344–361 区段，该区段紧邻 PAS 但不受双位点抑制剂的位阻。由此提出三个可检验假设：H1 竞争 PAS 减少成核、H2 直接结合 Aβ 改变聚集路径、H3 在膜水平影响小胶质识别。我们用对接与动力学给出优先序，再用抑菌与酶活实验验证。</a:t>
+              <a:t>机制落点不只一篇动力学：Inestrosa 1996年首次报道AChE加速聚集可被PAS配体propidium抑制，De Ferrari 2001鉴定疏水基序，Inestrosa 2008综述，Atanasova 2020做1μs MD显示344-361区段稳定且不受双位点抑制剂位阻，由此提出H1-H3。</a:t>
             </a:r>
           </a:p>
         </p:txBody>
@@ -723,7 +723,7 @@
           <a:lstStyle/>
           <a:p>
             <a:r>
-              <a:t>这张表说明每一环的证据强度，以及本课题要补的是哪一块：宿主来源抗菌肽、Aβ 的抗菌活性、AChE 经 PAS 促进聚集，这些已有较强证据；微生物源抗菌肽在 AD 患者中增多、以及候选肽经 AChE–Aβ 界面影响成核，是本课题要回答的问题。这样既讲清了关联，也没有夸大因果。</a:t>
+              <a:t>证据分级表说明每一环的强度，待验证一栏与本课题直接对应。抗菌活性预测部分补充文献：Ma 2022和Santos-Junior 2024的大规模验证，说明从序列预测活性是可行且被验证的路线。正常人vs AD谁更多：AD侧更高但需分层，微生物源以数据为准。</a:t>
             </a:r>
           </a:p>
         </p:txBody>
@@ -1283,7 +1283,7 @@
           <a:lstStyle/>
           <a:p>
             <a:r>
-              <a:t>这张图把抗菌肽与 AD 的关联拆成七环，并标出每一环的证据强度：蓝色是已有实验或临床证据，绿色是计算方法能给出候选与优先序的部分，橙色是本课题要回答或需要验证的部分。这样讲的好处是：老师问任何一环，都能说清这一环目前的证据到什么程度。</a:t>
+              <a:t>七环逻辑链：把抗菌肽与AD的关联拆成七环，蓝色是已有实验或临床证据，绿色是计算方法能给出候选与优先序的部分，橙色是本课题要回答或需要验证的部分。老师问任何一环都能说清证据到哪一步。</a:t>
             </a:r>
           </a:p>
         </p:txBody>
@@ -4807,7 +4807,7 @@
               </a:spcAft>
             </a:pPr>
             <a:r>
-              <a:rPr sz="2600" b="1">
+              <a:rPr sz="2400" b="1">
                 <a:solidFill>
                   <a:srgbClr val="111111"/>
                 </a:solidFill>
@@ -4815,7 +4815,7 @@
                 <a:ea typeface="微软雅黑"/>
                 <a:cs typeface="Arial"/>
               </a:rPr>
-              <a:t>为什么 AD 更多：炎症—Aβ—抗菌肽构成正反馈</a:t>
+              <a:t>为什么AD更多：炎症—Aβ—抗菌肽正反馈环</a:t>
             </a:r>
           </a:p>
         </p:txBody>
@@ -4872,8 +4872,8 @@
         </p:nvSpPr>
         <p:spPr>
           <a:xfrm>
-            <a:off x="640080" y="1481328"/>
-            <a:ext cx="7223760" cy="3108960"/>
+            <a:off x="640080" y="1463040"/>
+            <a:ext cx="6858000" cy="3657600"/>
           </a:xfrm>
           <a:prstGeom prst="rect">
             <a:avLst/>
@@ -4888,7 +4888,7 @@
           <a:p>
             <a:pPr algn="l">
               <a:lnSpc>
-                <a:spcPct val="134000"/>
+                <a:spcPct val="130000"/>
               </a:lnSpc>
               <a:spcBef>
                 <a:spcPts val="0"/>
@@ -4898,21 +4898,93 @@
               </a:spcAft>
             </a:pPr>
             <a:r>
-              <a:rPr sz="1800" b="0">
-                <a:solidFill>
-                  <a:srgbClr val="333333"/>
+              <a:rPr sz="1700" b="1">
+                <a:solidFill>
+                  <a:srgbClr val="111111"/>
                 </a:solidFill>
                 <a:latin typeface="Arial"/>
                 <a:ea typeface="微软雅黑"/>
                 <a:cs typeface="Arial"/>
               </a:rPr>
-              <a:t>菌群失衡与肠屏障通透性增加，使内毒素与病原体长期刺激宿主；</a:t>
+              <a:t>上游驱动：菌群失衡与肠屏障↑，LPS持续入血</a:t>
             </a:r>
           </a:p>
           <a:p>
             <a:pPr algn="l">
               <a:lnSpc>
-                <a:spcPct val="134000"/>
+                <a:spcPct val="125000"/>
+              </a:lnSpc>
+              <a:spcBef>
+                <a:spcPts val="600"/>
+              </a:spcBef>
+              <a:spcAft>
+                <a:spcPts val="0"/>
+              </a:spcAft>
+            </a:pPr>
+            <a:r>
+              <a:rPr sz="1500" b="0">
+                <a:solidFill>
+                  <a:srgbClr val="333333"/>
+                </a:solidFill>
+                <a:latin typeface="Arial"/>
+                <a:ea typeface="微软雅黑"/>
+                <a:cs typeface="Arial"/>
+              </a:rPr>
+              <a:t>• 促炎菌 Escherichia/Shigella、Proteobacteria 富集</a:t>
+            </a:r>
+          </a:p>
+          <a:p>
+            <a:pPr algn="l">
+              <a:lnSpc>
+                <a:spcPct val="125000"/>
+              </a:lnSpc>
+              <a:spcBef>
+                <a:spcPts val="400"/>
+              </a:spcBef>
+              <a:spcAft>
+                <a:spcPts val="0"/>
+              </a:spcAft>
+            </a:pPr>
+            <a:r>
+              <a:rPr sz="1500" b="0">
+                <a:solidFill>
+                  <a:srgbClr val="333333"/>
+                </a:solidFill>
+                <a:latin typeface="Arial"/>
+                <a:ea typeface="微软雅黑"/>
+                <a:cs typeface="Arial"/>
+              </a:rPr>
+              <a:t>• 产丁酸菌 Eubacterium、Faecalibacterium 降低</a:t>
+            </a:r>
+          </a:p>
+          <a:p>
+            <a:pPr algn="l">
+              <a:lnSpc>
+                <a:spcPct val="125000"/>
+              </a:lnSpc>
+              <a:spcBef>
+                <a:spcPts val="400"/>
+              </a:spcBef>
+              <a:spcAft>
+                <a:spcPts val="0"/>
+              </a:spcAft>
+            </a:pPr>
+            <a:r>
+              <a:rPr sz="1500" b="0">
+                <a:solidFill>
+                  <a:srgbClr val="333333"/>
+                </a:solidFill>
+                <a:latin typeface="Arial"/>
+                <a:ea typeface="微软雅黑"/>
+                <a:cs typeface="Arial"/>
+              </a:rPr>
+              <a:t>• 血浆LPS约3倍，与单核活化正相关 [13,14]</a:t>
+            </a:r>
+          </a:p>
+          <a:p>
+            <a:pPr algn="l">
+              <a:lnSpc>
+                <a:spcPct val="130000"/>
               </a:lnSpc>
               <a:spcBef>
                 <a:spcPts val="1400"/>
@@ -4922,21 +4994,45 @@
               </a:spcAft>
             </a:pPr>
             <a:r>
-              <a:rPr sz="1800" b="0">
-                <a:solidFill>
-                  <a:srgbClr val="333333"/>
+              <a:rPr sz="1700" b="1">
+                <a:solidFill>
+                  <a:srgbClr val="111111"/>
                 </a:solidFill>
                 <a:latin typeface="Arial"/>
                 <a:ea typeface="微软雅黑"/>
                 <a:cs typeface="Arial"/>
               </a:rPr>
-              <a:t>经 TLR4/NF-κB 升高促炎因子，促炎因子又上调 Aβ 与抗菌肽的生成；</a:t>
+              <a:t>中游放大：TLR4/NF-κB → 促炎因子 → 上调Aβ/抗菌肽</a:t>
             </a:r>
           </a:p>
           <a:p>
             <a:pPr algn="l">
               <a:lnSpc>
-                <a:spcPct val="134000"/>
+                <a:spcPct val="125000"/>
+              </a:lnSpc>
+              <a:spcBef>
+                <a:spcPts val="600"/>
+              </a:spcBef>
+              <a:spcAft>
+                <a:spcPts val="0"/>
+              </a:spcAft>
+            </a:pPr>
+            <a:r>
+              <a:rPr sz="1500" b="0">
+                <a:solidFill>
+                  <a:srgbClr val="333333"/>
+                </a:solidFill>
+                <a:latin typeface="Arial"/>
+                <a:ea typeface="微软雅黑"/>
+                <a:cs typeface="Arial"/>
+              </a:rPr>
+              <a:t>• LPS与Aβ均为TLR4/CD14激动剂</a:t>
+            </a:r>
+          </a:p>
+          <a:p>
+            <a:pPr algn="l">
+              <a:lnSpc>
+                <a:spcPct val="130000"/>
               </a:lnSpc>
               <a:spcBef>
                 <a:spcPts val="1400"/>
@@ -4946,15 +5042,63 @@
               </a:spcAft>
             </a:pPr>
             <a:r>
-              <a:rPr sz="1800" b="0">
-                <a:solidFill>
-                  <a:srgbClr val="333333"/>
+              <a:rPr sz="1700" b="1">
+                <a:solidFill>
+                  <a:srgbClr val="111111"/>
                 </a:solidFill>
                 <a:latin typeface="Arial"/>
                 <a:ea typeface="微软雅黑"/>
                 <a:cs typeface="Arial"/>
               </a:rPr>
-              <a:t>Aβ 与抗菌肽聚集、成核并激活小胶质细胞，产生更多炎症介质，循环自我加强。</a:t>
+              <a:t>下游循环：Aβ/抗菌肽聚集 → 小胶质活化 → 更多炎症</a:t>
+            </a:r>
+          </a:p>
+          <a:p>
+            <a:pPr algn="l">
+              <a:lnSpc>
+                <a:spcPct val="125000"/>
+              </a:lnSpc>
+              <a:spcBef>
+                <a:spcPts val="600"/>
+              </a:spcBef>
+              <a:spcAft>
+                <a:spcPts val="0"/>
+              </a:spcAft>
+            </a:pPr>
+            <a:r>
+              <a:rPr sz="1500" b="0">
+                <a:solidFill>
+                  <a:srgbClr val="333333"/>
+                </a:solidFill>
+                <a:latin typeface="Arial"/>
+                <a:ea typeface="微软雅黑"/>
+                <a:cs typeface="Arial"/>
+              </a:rPr>
+              <a:t>• LL-37经CLIC1致ROS与神经毒性 [11]</a:t>
+            </a:r>
+          </a:p>
+          <a:p>
+            <a:pPr algn="l">
+              <a:lnSpc>
+                <a:spcPct val="125000"/>
+              </a:lnSpc>
+              <a:spcBef>
+                <a:spcPts val="400"/>
+              </a:spcBef>
+              <a:spcAft>
+                <a:spcPts val="0"/>
+              </a:spcAft>
+            </a:pPr>
+            <a:r>
+              <a:rPr sz="1500" b="0">
+                <a:solidFill>
+                  <a:srgbClr val="333333"/>
+                </a:solidFill>
+                <a:latin typeface="Arial"/>
+                <a:ea typeface="微软雅黑"/>
+                <a:cs typeface="Arial"/>
+              </a:rPr>
+              <a:t>• AChE-PAS促纤维化 [27-32]</a:t>
             </a:r>
           </a:p>
         </p:txBody>
@@ -4967,17 +5111,19 @@
         </p:nvSpPr>
         <p:spPr>
           <a:xfrm>
-            <a:off x="8229600" y="1481328"/>
-            <a:ext cx="12700" cy="3017520"/>
+            <a:off x="7863840" y="1463040"/>
+            <a:ext cx="3657600" cy="3657600"/>
           </a:xfrm>
           <a:prstGeom prst="rect">
             <a:avLst/>
           </a:prstGeom>
           <a:solidFill>
-            <a:srgbClr val="DDDDDA"/>
+            <a:srgbClr val="F7F7F5"/>
           </a:solidFill>
-          <a:ln>
-            <a:noFill/>
+          <a:ln w="9525">
+            <a:solidFill>
+              <a:srgbClr val="DDDDDA"/>
+            </a:solidFill>
           </a:ln>
           <a:effectLst/>
         </p:spPr>
@@ -5011,8 +5157,8 @@
         </p:nvSpPr>
         <p:spPr>
           <a:xfrm>
-            <a:off x="8549640" y="1481328"/>
-            <a:ext cx="2999232" cy="3108960"/>
+            <a:off x="8046720" y="1554480"/>
+            <a:ext cx="3291840" cy="3474720"/>
           </a:xfrm>
           <a:prstGeom prst="rect">
             <a:avLst/>
@@ -5027,7 +5173,7 @@
           <a:p>
             <a:pPr algn="l">
               <a:lnSpc>
-                <a:spcPct val="130000"/>
+                <a:spcPct val="110000"/>
               </a:lnSpc>
               <a:spcBef>
                 <a:spcPts val="0"/>
@@ -5037,111 +5183,135 @@
               </a:spcAft>
             </a:pPr>
             <a:r>
-              <a:rPr sz="1600" b="0">
-                <a:solidFill>
-                  <a:srgbClr val="777777"/>
+              <a:rPr sz="1600" b="1">
+                <a:solidFill>
+                  <a:srgbClr val="B03A2E"/>
                 </a:solidFill>
                 <a:latin typeface="Arial"/>
                 <a:ea typeface="微软雅黑"/>
                 <a:cs typeface="Arial"/>
               </a:rPr>
-              <a:t>表述口径：</a:t>
+              <a:t>抗菌保护假说</a:t>
             </a:r>
           </a:p>
           <a:p>
             <a:pPr algn="l">
               <a:lnSpc>
-                <a:spcPct val="130000"/>
+                <a:spcPct val="125000"/>
               </a:lnSpc>
               <a:spcBef>
-                <a:spcPts val="1200"/>
+                <a:spcPts val="800"/>
               </a:spcBef>
               <a:spcAft>
                 <a:spcPts val="0"/>
               </a:spcAft>
             </a:pPr>
             <a:r>
-              <a:rPr sz="1600" b="0">
-                <a:solidFill>
-                  <a:srgbClr val="777777"/>
+              <a:rPr sz="1500" b="0">
+                <a:solidFill>
+                  <a:srgbClr val="333333"/>
                 </a:solidFill>
                 <a:latin typeface="Arial"/>
                 <a:ea typeface="微软雅黑"/>
                 <a:cs typeface="Arial"/>
               </a:rPr>
-              <a:t>抗体外证据为主；</a:t>
+              <a:t>AD病理部分源于有益的先天免疫反应在长期失衡后被放大 [3]</a:t>
             </a:r>
           </a:p>
           <a:p>
             <a:pPr algn="l">
               <a:lnSpc>
-                <a:spcPct val="130000"/>
+                <a:spcPct val="110000"/>
               </a:lnSpc>
               <a:spcBef>
-                <a:spcPts val="1200"/>
+                <a:spcPts val="1400"/>
               </a:spcBef>
               <a:spcAft>
                 <a:spcPts val="0"/>
               </a:spcAft>
             </a:pPr>
             <a:r>
-              <a:rPr sz="1600" b="0">
-                <a:solidFill>
-                  <a:srgbClr val="777777"/>
+              <a:rPr sz="1600" b="1">
+                <a:solidFill>
+                  <a:srgbClr val="2F5D62"/>
                 </a:solidFill>
                 <a:latin typeface="Arial"/>
                 <a:ea typeface="微软雅黑"/>
                 <a:cs typeface="Arial"/>
               </a:rPr>
-              <a:t>区分宿主来源与</a:t>
+              <a:t>双刃剑</a:t>
             </a:r>
           </a:p>
           <a:p>
             <a:pPr algn="l">
               <a:lnSpc>
-                <a:spcPct val="130000"/>
+                <a:spcPct val="125000"/>
               </a:lnSpc>
               <a:spcBef>
-                <a:spcPts val="1200"/>
+                <a:spcPts val="800"/>
               </a:spcBef>
               <a:spcAft>
                 <a:spcPts val="0"/>
               </a:spcAft>
             </a:pPr>
             <a:r>
-              <a:rPr sz="1600" b="0">
-                <a:solidFill>
-                  <a:srgbClr val="777777"/>
+              <a:rPr sz="1500" b="0">
+                <a:solidFill>
+                  <a:srgbClr val="333333"/>
                 </a:solidFill>
                 <a:latin typeface="Arial"/>
                 <a:ea typeface="微软雅黑"/>
                 <a:cs typeface="Arial"/>
               </a:rPr>
-              <a:t>微生物来源、局部</a:t>
+              <a:t>抑制感染（生理）vs 促进聚集与炎症（病理）</a:t>
             </a:r>
           </a:p>
           <a:p>
             <a:pPr algn="l">
               <a:lnSpc>
-                <a:spcPct val="130000"/>
+                <a:spcPct val="110000"/>
               </a:lnSpc>
               <a:spcBef>
-                <a:spcPts val="1200"/>
+                <a:spcPts val="1400"/>
               </a:spcBef>
               <a:spcAft>
                 <a:spcPts val="0"/>
               </a:spcAft>
             </a:pPr>
             <a:r>
-              <a:rPr sz="1600" b="0">
-                <a:solidFill>
-                  <a:srgbClr val="777777"/>
+              <a:rPr sz="1600" b="1">
+                <a:solidFill>
+                  <a:srgbClr val="2F5D62"/>
                 </a:solidFill>
                 <a:latin typeface="Arial"/>
                 <a:ea typeface="微软雅黑"/>
                 <a:cs typeface="Arial"/>
               </a:rPr>
-              <a:t>与系统、阶段差异。</a:t>
+              <a:t>口径</a:t>
+            </a:r>
+          </a:p>
+          <a:p>
+            <a:pPr algn="l">
+              <a:lnSpc>
+                <a:spcPct val="125000"/>
+              </a:lnSpc>
+              <a:spcBef>
+                <a:spcPts val="800"/>
+              </a:spcBef>
+              <a:spcAft>
+                <a:spcPts val="0"/>
+              </a:spcAft>
+            </a:pPr>
+            <a:r>
+              <a:rPr sz="1500" b="0">
+                <a:solidFill>
+                  <a:srgbClr val="777777"/>
+                </a:solidFill>
+                <a:latin typeface="Arial"/>
+                <a:ea typeface="微软雅黑"/>
+                <a:cs typeface="Arial"/>
+              </a:rPr>
+              <a:t>区分宿主/微生物源、局部/系统、阶段</a:t>
             </a:r>
           </a:p>
         </p:txBody>
@@ -5292,7 +5462,7 @@
               </a:spcAft>
             </a:pPr>
             <a:r>
-              <a:rPr sz="2500" b="1">
+              <a:rPr sz="2300" b="1">
                 <a:solidFill>
                   <a:srgbClr val="111111"/>
                 </a:solidFill>
@@ -5300,7 +5470,7 @@
                 <a:ea typeface="微软雅黑"/>
                 <a:cs typeface="Arial"/>
               </a:rPr>
-              <a:t>机制落点：AChE–Aβ 复合物与候选肽的三个假设</a:t>
+              <a:t>机制落点：AChE–Aβ复合物与三个可检验假设（多文献）</a:t>
             </a:r>
           </a:p>
         </p:txBody>
@@ -5366,7 +5536,7 @@
         <p:spPr>
           <a:xfrm>
             <a:off x="640080" y="1188720"/>
-            <a:ext cx="7863840" cy="3943173"/>
+            <a:ext cx="6564890" cy="3291840"/>
           </a:xfrm>
           <a:prstGeom prst="rect">
             <a:avLst/>
@@ -5375,14 +5545,60 @@
       </p:pic>
       <p:sp>
         <p:nvSpPr>
-          <p:cNvPr id="5" name="TextBox 4"/>
+          <p:cNvPr id="5" name="Rectangle 4"/>
+          <p:cNvSpPr/>
+          <p:nvPr/>
+        </p:nvSpPr>
+        <p:spPr>
+          <a:xfrm>
+            <a:off x="7863840" y="1325880"/>
+            <a:ext cx="3657600" cy="1234440"/>
+          </a:xfrm>
+          <a:prstGeom prst="rect">
+            <a:avLst/>
+          </a:prstGeom>
+          <a:solidFill>
+            <a:srgbClr val="F7F7F5"/>
+          </a:solidFill>
+          <a:ln w="9525">
+            <a:solidFill>
+              <a:srgbClr val="2F5D62"/>
+            </a:solidFill>
+          </a:ln>
+          <a:effectLst/>
+        </p:spPr>
+        <p:style>
+          <a:lnRef idx="1">
+            <a:schemeClr val="accent1"/>
+          </a:lnRef>
+          <a:fillRef idx="3">
+            <a:schemeClr val="accent1"/>
+          </a:fillRef>
+          <a:effectRef idx="2">
+            <a:schemeClr val="accent1"/>
+          </a:effectRef>
+          <a:fontRef idx="minor">
+            <a:schemeClr val="lt1"/>
+          </a:fontRef>
+        </p:style>
+        <p:txBody>
+          <a:bodyPr rtlCol="0" anchor="ctr"/>
+          <a:lstStyle/>
+          <a:p>
+            <a:pPr algn="ctr"/>
+          </a:p>
+        </p:txBody>
+      </p:sp>
+      <p:sp>
+        <p:nvSpPr>
+          <p:cNvPr id="6" name="TextBox 5"/>
           <p:cNvSpPr txBox="1"/>
           <p:nvPr/>
         </p:nvSpPr>
         <p:spPr>
           <a:xfrm>
-            <a:off x="8549640" y="1188720"/>
-            <a:ext cx="2999232" cy="4480560"/>
+            <a:off x="8046720" y="1371600"/>
+            <a:ext cx="3291840" cy="1143000"/>
           </a:xfrm>
           <a:prstGeom prst="rect">
             <a:avLst/>
@@ -5409,29 +5625,29 @@
             <a:r>
               <a:rPr sz="1600" b="1">
                 <a:solidFill>
-                  <a:srgbClr val="2F5D62"/>
+                  <a:srgbClr val="111111"/>
                 </a:solidFill>
                 <a:latin typeface="Arial"/>
                 <a:ea typeface="微软雅黑"/>
                 <a:cs typeface="Arial"/>
               </a:rPr>
-              <a:t>解读</a:t>
+              <a:t>H1 竞争PAS</a:t>
             </a:r>
           </a:p>
           <a:p>
             <a:pPr algn="l">
               <a:lnSpc>
-                <a:spcPct val="130000"/>
+                <a:spcPct val="120000"/>
               </a:lnSpc>
               <a:spcBef>
-                <a:spcPts val="800"/>
+                <a:spcPts val="400"/>
               </a:spcBef>
               <a:spcAft>
                 <a:spcPts val="0"/>
               </a:spcAft>
             </a:pPr>
             <a:r>
-              <a:rPr sz="1600" b="0">
+              <a:rPr sz="1500" b="0">
                 <a:solidFill>
                   <a:srgbClr val="333333"/>
                 </a:solidFill>
@@ -5439,14 +5655,367 @@
                 <a:ea typeface="微软雅黑"/>
                 <a:cs typeface="Arial"/>
               </a:rPr>
-              <a:t>AChE 的 PAS 是 Aβ 聚集的成核中心；分子动力学显示复合物在 1 μs 内稳定，Aβ 主要停留于 344–361 区段，且该区段不受双位点抑制剂位阻。由此提出：H1 竞争 PAS 减少成核、H2 结合 Aβ 改变聚集路径、H3 膜水平影响炎症信号；以对接与动力学给优先序，以抑菌与酶活实验验证。</a:t>
-            </a:r>
-          </a:p>
-        </p:txBody>
-      </p:sp>
-      <p:sp>
-        <p:nvSpPr>
-          <p:cNvPr id="6" name="TextBox 5"/>
+              <a:t>结合PAS，减少AChE诱导成核</a:t>
+            </a:r>
+          </a:p>
+          <a:p>
+            <a:pPr algn="l">
+              <a:lnSpc>
+                <a:spcPct val="120000"/>
+              </a:lnSpc>
+              <a:spcBef>
+                <a:spcPts val="400"/>
+              </a:spcBef>
+              <a:spcAft>
+                <a:spcPts val="0"/>
+              </a:spcAft>
+            </a:pPr>
+            <a:r>
+              <a:rPr sz="1500" b="0">
+                <a:solidFill>
+                  <a:srgbClr val="777777"/>
+                </a:solidFill>
+                <a:latin typeface="Arial"/>
+                <a:ea typeface="微软雅黑"/>
+                <a:cs typeface="Arial"/>
+              </a:rPr>
+              <a:t>对接+MD；propidium竞争；酶活</a:t>
+            </a:r>
+          </a:p>
+        </p:txBody>
+      </p:sp>
+      <p:sp>
+        <p:nvSpPr>
+          <p:cNvPr id="7" name="Rectangle 6"/>
+          <p:cNvSpPr/>
+          <p:nvPr/>
+        </p:nvSpPr>
+        <p:spPr>
+          <a:xfrm>
+            <a:off x="7863840" y="2743200"/>
+            <a:ext cx="3657600" cy="1234440"/>
+          </a:xfrm>
+          <a:prstGeom prst="rect">
+            <a:avLst/>
+          </a:prstGeom>
+          <a:solidFill>
+            <a:srgbClr val="F7F7F5"/>
+          </a:solidFill>
+          <a:ln w="9525">
+            <a:solidFill>
+              <a:srgbClr val="2F5D62"/>
+            </a:solidFill>
+          </a:ln>
+          <a:effectLst/>
+        </p:spPr>
+        <p:style>
+          <a:lnRef idx="1">
+            <a:schemeClr val="accent1"/>
+          </a:lnRef>
+          <a:fillRef idx="3">
+            <a:schemeClr val="accent1"/>
+          </a:fillRef>
+          <a:effectRef idx="2">
+            <a:schemeClr val="accent1"/>
+          </a:effectRef>
+          <a:fontRef idx="minor">
+            <a:schemeClr val="lt1"/>
+          </a:fontRef>
+        </p:style>
+        <p:txBody>
+          <a:bodyPr rtlCol="0" anchor="ctr"/>
+          <a:lstStyle/>
+          <a:p>
+            <a:pPr algn="ctr"/>
+          </a:p>
+        </p:txBody>
+      </p:sp>
+      <p:sp>
+        <p:nvSpPr>
+          <p:cNvPr id="8" name="TextBox 7"/>
+          <p:cNvSpPr txBox="1"/>
+          <p:nvPr/>
+        </p:nvSpPr>
+        <p:spPr>
+          <a:xfrm>
+            <a:off x="8046720" y="2788920"/>
+            <a:ext cx="3291840" cy="1143000"/>
+          </a:xfrm>
+          <a:prstGeom prst="rect">
+            <a:avLst/>
+          </a:prstGeom>
+          <a:noFill/>
+        </p:spPr>
+        <p:txBody>
+          <a:bodyPr wrap="square" anchor="t" lIns="27432" rIns="27432" tIns="0" bIns="0">
+            <a:spAutoFit/>
+          </a:bodyPr>
+          <a:lstStyle/>
+          <a:p>
+            <a:pPr algn="l">
+              <a:lnSpc>
+                <a:spcPct val="110000"/>
+              </a:lnSpc>
+              <a:spcBef>
+                <a:spcPts val="0"/>
+              </a:spcBef>
+              <a:spcAft>
+                <a:spcPts val="0"/>
+              </a:spcAft>
+            </a:pPr>
+            <a:r>
+              <a:rPr sz="1600" b="1">
+                <a:solidFill>
+                  <a:srgbClr val="111111"/>
+                </a:solidFill>
+                <a:latin typeface="Arial"/>
+                <a:ea typeface="微软雅黑"/>
+                <a:cs typeface="Arial"/>
+              </a:rPr>
+              <a:t>H2 结合Aβ</a:t>
+            </a:r>
+          </a:p>
+          <a:p>
+            <a:pPr algn="l">
+              <a:lnSpc>
+                <a:spcPct val="120000"/>
+              </a:lnSpc>
+              <a:spcBef>
+                <a:spcPts val="400"/>
+              </a:spcBef>
+              <a:spcAft>
+                <a:spcPts val="0"/>
+              </a:spcAft>
+            </a:pPr>
+            <a:r>
+              <a:rPr sz="1500" b="0">
+                <a:solidFill>
+                  <a:srgbClr val="333333"/>
+                </a:solidFill>
+                <a:latin typeface="Arial"/>
+                <a:ea typeface="微软雅黑"/>
+                <a:cs typeface="Arial"/>
+              </a:rPr>
+              <a:t>结合Aβ，改变聚集路径</a:t>
+            </a:r>
+          </a:p>
+          <a:p>
+            <a:pPr algn="l">
+              <a:lnSpc>
+                <a:spcPct val="120000"/>
+              </a:lnSpc>
+              <a:spcBef>
+                <a:spcPts val="400"/>
+              </a:spcBef>
+              <a:spcAft>
+                <a:spcPts val="0"/>
+              </a:spcAft>
+            </a:pPr>
+            <a:r>
+              <a:rPr sz="1500" b="0">
+                <a:solidFill>
+                  <a:srgbClr val="777777"/>
+                </a:solidFill>
+                <a:latin typeface="Arial"/>
+                <a:ea typeface="微软雅黑"/>
+                <a:cs typeface="Arial"/>
+              </a:rPr>
+              <a:t>ThT+电镜/AFM；MD残基；参照[10-12]</a:t>
+            </a:r>
+          </a:p>
+        </p:txBody>
+      </p:sp>
+      <p:sp>
+        <p:nvSpPr>
+          <p:cNvPr id="9" name="Rectangle 8"/>
+          <p:cNvSpPr/>
+          <p:nvPr/>
+        </p:nvSpPr>
+        <p:spPr>
+          <a:xfrm>
+            <a:off x="7863840" y="4160520"/>
+            <a:ext cx="3657600" cy="1234440"/>
+          </a:xfrm>
+          <a:prstGeom prst="rect">
+            <a:avLst/>
+          </a:prstGeom>
+          <a:solidFill>
+            <a:srgbClr val="F7F7F5"/>
+          </a:solidFill>
+          <a:ln w="9525">
+            <a:solidFill>
+              <a:srgbClr val="B03A2E"/>
+            </a:solidFill>
+          </a:ln>
+          <a:effectLst/>
+        </p:spPr>
+        <p:style>
+          <a:lnRef idx="1">
+            <a:schemeClr val="accent1"/>
+          </a:lnRef>
+          <a:fillRef idx="3">
+            <a:schemeClr val="accent1"/>
+          </a:fillRef>
+          <a:effectRef idx="2">
+            <a:schemeClr val="accent1"/>
+          </a:effectRef>
+          <a:fontRef idx="minor">
+            <a:schemeClr val="lt1"/>
+          </a:fontRef>
+        </p:style>
+        <p:txBody>
+          <a:bodyPr rtlCol="0" anchor="ctr"/>
+          <a:lstStyle/>
+          <a:p>
+            <a:pPr algn="ctr"/>
+          </a:p>
+        </p:txBody>
+      </p:sp>
+      <p:sp>
+        <p:nvSpPr>
+          <p:cNvPr id="10" name="TextBox 9"/>
+          <p:cNvSpPr txBox="1"/>
+          <p:nvPr/>
+        </p:nvSpPr>
+        <p:spPr>
+          <a:xfrm>
+            <a:off x="8046720" y="4206240"/>
+            <a:ext cx="3291840" cy="1143000"/>
+          </a:xfrm>
+          <a:prstGeom prst="rect">
+            <a:avLst/>
+          </a:prstGeom>
+          <a:noFill/>
+        </p:spPr>
+        <p:txBody>
+          <a:bodyPr wrap="square" anchor="t" lIns="27432" rIns="27432" tIns="0" bIns="0">
+            <a:spAutoFit/>
+          </a:bodyPr>
+          <a:lstStyle/>
+          <a:p>
+            <a:pPr algn="l">
+              <a:lnSpc>
+                <a:spcPct val="110000"/>
+              </a:lnSpc>
+              <a:spcBef>
+                <a:spcPts val="0"/>
+              </a:spcBef>
+              <a:spcAft>
+                <a:spcPts val="0"/>
+              </a:spcAft>
+            </a:pPr>
+            <a:r>
+              <a:rPr sz="1600" b="1">
+                <a:solidFill>
+                  <a:srgbClr val="111111"/>
+                </a:solidFill>
+                <a:latin typeface="Arial"/>
+                <a:ea typeface="微软雅黑"/>
+                <a:cs typeface="Arial"/>
+              </a:rPr>
+              <a:t>H3 膜水平</a:t>
+            </a:r>
+          </a:p>
+          <a:p>
+            <a:pPr algn="l">
+              <a:lnSpc>
+                <a:spcPct val="120000"/>
+              </a:lnSpc>
+              <a:spcBef>
+                <a:spcPts val="400"/>
+              </a:spcBef>
+              <a:spcAft>
+                <a:spcPts val="0"/>
+              </a:spcAft>
+            </a:pPr>
+            <a:r>
+              <a:rPr sz="1500" b="0">
+                <a:solidFill>
+                  <a:srgbClr val="333333"/>
+                </a:solidFill>
+                <a:latin typeface="Arial"/>
+                <a:ea typeface="微软雅黑"/>
+                <a:cs typeface="Arial"/>
+              </a:rPr>
+              <a:t>影响膜互作与小胶质识别</a:t>
+            </a:r>
+          </a:p>
+          <a:p>
+            <a:pPr algn="l">
+              <a:lnSpc>
+                <a:spcPct val="120000"/>
+              </a:lnSpc>
+              <a:spcBef>
+                <a:spcPts val="400"/>
+              </a:spcBef>
+              <a:spcAft>
+                <a:spcPts val="0"/>
+              </a:spcAft>
+            </a:pPr>
+            <a:r>
+              <a:rPr sz="1500" b="0">
+                <a:solidFill>
+                  <a:srgbClr val="777777"/>
+                </a:solidFill>
+                <a:latin typeface="Arial"/>
+                <a:ea typeface="微软雅黑"/>
+                <a:cs typeface="Arial"/>
+              </a:rPr>
+              <a:t>脂膜MD+炎症因子；参照[11]</a:t>
+            </a:r>
+          </a:p>
+        </p:txBody>
+      </p:sp>
+      <p:sp>
+        <p:nvSpPr>
+          <p:cNvPr id="11" name="TextBox 10"/>
+          <p:cNvSpPr txBox="1"/>
+          <p:nvPr/>
+        </p:nvSpPr>
+        <p:spPr>
+          <a:xfrm>
+            <a:off x="640080" y="4846320"/>
+            <a:ext cx="10908792" cy="548640"/>
+          </a:xfrm>
+          <a:prstGeom prst="rect">
+            <a:avLst/>
+          </a:prstGeom>
+          <a:noFill/>
+        </p:spPr>
+        <p:txBody>
+          <a:bodyPr wrap="square" anchor="t" lIns="27432" rIns="27432" tIns="0" bIns="0">
+            <a:spAutoFit/>
+          </a:bodyPr>
+          <a:lstStyle/>
+          <a:p>
+            <a:pPr algn="l">
+              <a:lnSpc>
+                <a:spcPct val="120000"/>
+              </a:lnSpc>
+              <a:spcBef>
+                <a:spcPts val="0"/>
+              </a:spcBef>
+              <a:spcAft>
+                <a:spcPts val="0"/>
+              </a:spcAft>
+            </a:pPr>
+            <a:r>
+              <a:rPr sz="1500" b="0">
+                <a:solidFill>
+                  <a:srgbClr val="777777"/>
+                </a:solidFill>
+                <a:latin typeface="Arial"/>
+                <a:ea typeface="微软雅黑"/>
+                <a:cs typeface="Arial"/>
+              </a:rPr>
+              <a:t>文献链：Inestrosa 1996[27] → De Ferrari 2001[29] → Inestrosa 2008[30] → Atanasova 2020 MD[32]，344-361为第二界面</a:t>
+            </a:r>
+          </a:p>
+        </p:txBody>
+      </p:sp>
+      <p:sp>
+        <p:nvSpPr>
+          <p:cNvPr id="12" name="TextBox 11"/>
           <p:cNvSpPr txBox="1"/>
           <p:nvPr/>
         </p:nvSpPr>
@@ -5493,7 +6062,7 @@
       </p:sp>
       <p:sp>
         <p:nvSpPr>
-          <p:cNvPr id="7" name="TextBox 6"/>
+          <p:cNvPr id="13" name="TextBox 12"/>
           <p:cNvSpPr txBox="1"/>
           <p:nvPr/>
         </p:nvSpPr>
@@ -5590,7 +6159,7 @@
               </a:spcAft>
             </a:pPr>
             <a:r>
-              <a:rPr sz="2500" b="1">
+              <a:rPr sz="2400" b="1">
                 <a:solidFill>
                   <a:srgbClr val="111111"/>
                 </a:solidFill>
@@ -5598,7 +6167,7 @@
                 <a:ea typeface="微软雅黑"/>
                 <a:cs typeface="Arial"/>
               </a:rPr>
-              <a:t>证据到哪一步：分级与验证路径</a:t>
+              <a:t>证据分级与抗菌活性预测的文献基础</a:t>
             </a:r>
           </a:p>
         </p:txBody>
@@ -5656,8 +6225,8 @@
           <p:nvPr/>
         </p:nvGraphicFramePr>
         <p:xfrm>
-          <a:off x="640080" y="1234440"/>
-          <a:ext cx="10972800" cy="3328416"/>
+          <a:off x="640080" y="1280160"/>
+          <a:ext cx="7132320" cy="2926080"/>
         </p:xfrm>
         <a:graphic>
           <a:graphicData uri="http://schemas.openxmlformats.org/drawingml/2006/table">
@@ -5666,11 +6235,11 @@
                 <a:tableStyleId>{5C22544A-7EE6-4342-B048-85BDC9FD1C3A}</a:tableStyleId>
               </a:tblPr>
               <a:tblGrid>
-                <a:gridCol w="4206240"/>
                 <a:gridCol w="3108960"/>
-                <a:gridCol w="3657600"/>
+                <a:gridCol w="1645920"/>
+                <a:gridCol w="2377440"/>
               </a:tblGrid>
-              <a:tr h="475488">
+              <a:tr h="418011">
                 <a:tc>
                   <a:txBody>
                     <a:bodyPr/>
@@ -5731,7 +6300,7 @@
                           <a:ea typeface="微软雅黑"/>
                           <a:cs typeface="Arial"/>
                         </a:rPr>
-                        <a:t>证据强度</a:t>
+                        <a:t>强度</a:t>
                       </a:r>
                     </a:p>
                   </a:txBody>
@@ -5766,7 +6335,7 @@
                           <a:ea typeface="微软雅黑"/>
                           <a:cs typeface="Arial"/>
                         </a:rPr>
-                        <a:t>与本课题的关系</a:t>
+                        <a:t>来源</a:t>
                       </a:r>
                     </a:p>
                   </a:txBody>
@@ -5777,7 +6346,7 @@
                   </a:tcPr>
                 </a:tc>
               </a:tr>
-              <a:tr h="475488">
+              <a:tr h="418011">
                 <a:tc>
                   <a:txBody>
                     <a:bodyPr/>
@@ -5785,7 +6354,7 @@
                     <a:p>
                       <a:pPr algn="l">
                         <a:lnSpc>
-                          <a:spcPct val="110000"/>
+                          <a:spcPct val="105000"/>
                         </a:lnSpc>
                         <a:spcBef>
                           <a:spcPts val="0"/>
@@ -5803,7 +6372,7 @@
                           <a:ea typeface="微软雅黑"/>
                           <a:cs typeface="Arial"/>
                         </a:rPr>
-                        <a:t>Aβ 具抗菌活性，AD 脑匀浆活性更高</a:t>
+                        <a:t>Aβ抗菌活性 AD脑&gt;对照</a:t>
                       </a:r>
                     </a:p>
                   </a:txBody>
@@ -5816,7 +6385,7 @@
                     <a:p>
                       <a:pPr algn="l">
                         <a:lnSpc>
-                          <a:spcPct val="110000"/>
+                          <a:spcPct val="105000"/>
                         </a:lnSpc>
                         <a:spcBef>
                           <a:spcPts val="0"/>
@@ -5834,7 +6403,7 @@
                           <a:ea typeface="微软雅黑"/>
                           <a:cs typeface="Arial"/>
                         </a:rPr>
-                        <a:t>强：体外 + 人脑组织</a:t>
+                        <a:t>强</a:t>
                       </a:r>
                     </a:p>
                   </a:txBody>
@@ -5847,7 +6416,7 @@
                     <a:p>
                       <a:pPr algn="l">
                         <a:lnSpc>
-                          <a:spcPct val="110000"/>
+                          <a:spcPct val="105000"/>
                         </a:lnSpc>
                         <a:spcBef>
                           <a:spcPts val="0"/>
@@ -5865,14 +6434,14 @@
                           <a:ea typeface="微软雅黑"/>
                           <a:cs typeface="Arial"/>
                         </a:rPr>
-                        <a:t>提供抗菌肽研究的出发点</a:t>
+                        <a:t>Soscia 2010 [1]</a:t>
                       </a:r>
                     </a:p>
                   </a:txBody>
                   <a:tcPr/>
                 </a:tc>
               </a:tr>
-              <a:tr h="475488">
+              <a:tr h="418011">
                 <a:tc>
                   <a:txBody>
                     <a:bodyPr/>
@@ -5880,7 +6449,7 @@
                     <a:p>
                       <a:pPr algn="l">
                         <a:lnSpc>
-                          <a:spcPct val="110000"/>
+                          <a:spcPct val="105000"/>
                         </a:lnSpc>
                         <a:spcBef>
                           <a:spcPts val="0"/>
@@ -5898,7 +6467,7 @@
                           <a:ea typeface="微软雅黑"/>
                           <a:cs typeface="Arial"/>
                         </a:rPr>
-                        <a:t>AD 脑内宿主抗菌肽上调</a:t>
+                        <a:t>Aβ保护抗感染 寡聚化必需</a:t>
                       </a:r>
                     </a:p>
                   </a:txBody>
@@ -5911,7 +6480,7 @@
                     <a:p>
                       <a:pPr algn="l">
                         <a:lnSpc>
-                          <a:spcPct val="110000"/>
+                          <a:spcPct val="105000"/>
                         </a:lnSpc>
                         <a:spcBef>
                           <a:spcPts val="0"/>
@@ -5929,7 +6498,7 @@
                           <a:ea typeface="微软雅黑"/>
                           <a:cs typeface="Arial"/>
                         </a:rPr>
-                        <a:t>中—强：尸检组织，样本有限</a:t>
+                        <a:t>强</a:t>
                       </a:r>
                     </a:p>
                   </a:txBody>
@@ -5942,7 +6511,7 @@
                     <a:p>
                       <a:pPr algn="l">
                         <a:lnSpc>
-                          <a:spcPct val="110000"/>
+                          <a:spcPct val="105000"/>
                         </a:lnSpc>
                         <a:spcBef>
                           <a:spcPts val="0"/>
@@ -5960,14 +6529,14 @@
                           <a:ea typeface="微软雅黑"/>
                           <a:cs typeface="Arial"/>
                         </a:rPr>
-                        <a:t>作为宿主来源的参照系</a:t>
+                        <a:t>Kumar 2016 [2]</a:t>
                       </a:r>
                     </a:p>
                   </a:txBody>
                   <a:tcPr/>
                 </a:tc>
               </a:tr>
-              <a:tr h="475488">
+              <a:tr h="418011">
                 <a:tc>
                   <a:txBody>
                     <a:bodyPr/>
@@ -5975,7 +6544,7 @@
                     <a:p>
                       <a:pPr algn="l">
                         <a:lnSpc>
-                          <a:spcPct val="110000"/>
+                          <a:spcPct val="105000"/>
                         </a:lnSpc>
                         <a:spcBef>
                           <a:spcPts val="0"/>
@@ -5993,7 +6562,7 @@
                           <a:ea typeface="微软雅黑"/>
                           <a:cs typeface="Arial"/>
                         </a:rPr>
-                        <a:t>AChE 经 PAS 促进 Aβ 聚集</a:t>
+                        <a:t>宿主AMP上调 hBD-1/LL-37</a:t>
                       </a:r>
                     </a:p>
                   </a:txBody>
@@ -6006,7 +6575,7 @@
                     <a:p>
                       <a:pPr algn="l">
                         <a:lnSpc>
-                          <a:spcPct val="110000"/>
+                          <a:spcPct val="105000"/>
                         </a:lnSpc>
                         <a:spcBef>
                           <a:spcPts val="0"/>
@@ -6024,7 +6593,7 @@
                           <a:ea typeface="微软雅黑"/>
                           <a:cs typeface="Arial"/>
                         </a:rPr>
-                        <a:t>强：体外动力学 + 位点阻断</a:t>
+                        <a:t>中-强</a:t>
                       </a:r>
                     </a:p>
                   </a:txBody>
@@ -6037,7 +6606,7 @@
                     <a:p>
                       <a:pPr algn="l">
                         <a:lnSpc>
-                          <a:spcPct val="110000"/>
+                          <a:spcPct val="105000"/>
                         </a:lnSpc>
                         <a:spcBef>
                           <a:spcPts val="0"/>
@@ -6055,14 +6624,14 @@
                           <a:ea typeface="微软雅黑"/>
                           <a:cs typeface="Arial"/>
                         </a:rPr>
-                        <a:t>机制关联的参照体系</a:t>
+                        <a:t>Williams 2013等</a:t>
                       </a:r>
                     </a:p>
                   </a:txBody>
                   <a:tcPr/>
                 </a:tc>
               </a:tr>
-              <a:tr h="475488">
+              <a:tr h="418011">
                 <a:tc>
                   <a:txBody>
                     <a:bodyPr/>
@@ -6070,7 +6639,7 @@
                     <a:p>
                       <a:pPr algn="l">
                         <a:lnSpc>
-                          <a:spcPct val="110000"/>
+                          <a:spcPct val="105000"/>
                         </a:lnSpc>
                         <a:spcBef>
                           <a:spcPts val="0"/>
@@ -6088,7 +6657,7 @@
                           <a:ea typeface="微软雅黑"/>
                           <a:cs typeface="Arial"/>
                         </a:rPr>
-                        <a:t>AD 患者菌群失衡与炎症升高</a:t>
+                        <a:t>AChE经PAS促聚集</a:t>
                       </a:r>
                     </a:p>
                   </a:txBody>
@@ -6101,7 +6670,7 @@
                     <a:p>
                       <a:pPr algn="l">
                         <a:lnSpc>
-                          <a:spcPct val="110000"/>
+                          <a:spcPct val="105000"/>
                         </a:lnSpc>
                         <a:spcBef>
                           <a:spcPts val="0"/>
@@ -6119,7 +6688,7 @@
                           <a:ea typeface="微软雅黑"/>
                           <a:cs typeface="Arial"/>
                         </a:rPr>
-                        <a:t>中：研究异质性大</a:t>
+                        <a:t>强</a:t>
                       </a:r>
                     </a:p>
                   </a:txBody>
@@ -6132,7 +6701,7 @@
                     <a:p>
                       <a:pPr algn="l">
                         <a:lnSpc>
-                          <a:spcPct val="110000"/>
+                          <a:spcPct val="105000"/>
                         </a:lnSpc>
                         <a:spcBef>
                           <a:spcPts val="0"/>
@@ -6150,14 +6719,14 @@
                           <a:ea typeface="微软雅黑"/>
                           <a:cs typeface="Arial"/>
                         </a:rPr>
-                        <a:t>阶段特异性抗菌肽的合理性</a:t>
+                        <a:t>Inestrosa 1996 [27]</a:t>
                       </a:r>
                     </a:p>
                   </a:txBody>
                   <a:tcPr/>
                 </a:tc>
               </a:tr>
-              <a:tr h="475488">
+              <a:tr h="418011">
                 <a:tc>
                   <a:txBody>
                     <a:bodyPr/>
@@ -6165,7 +6734,7 @@
                     <a:p>
                       <a:pPr algn="l">
                         <a:lnSpc>
-                          <a:spcPct val="110000"/>
+                          <a:spcPct val="105000"/>
                         </a:lnSpc>
                         <a:spcBef>
                           <a:spcPts val="0"/>
@@ -6183,7 +6752,7 @@
                           <a:ea typeface="微软雅黑"/>
                           <a:cs typeface="Arial"/>
                         </a:rPr>
-                        <a:t>微生物源抗菌肽在 AD 增多</a:t>
+                        <a:t>AChE-Aβ MD稳定 344-361</a:t>
                       </a:r>
                     </a:p>
                   </a:txBody>
@@ -6196,7 +6765,7 @@
                     <a:p>
                       <a:pPr algn="l">
                         <a:lnSpc>
-                          <a:spcPct val="110000"/>
+                          <a:spcPct val="105000"/>
                         </a:lnSpc>
                         <a:spcBef>
                           <a:spcPts val="0"/>
@@ -6214,7 +6783,7 @@
                           <a:ea typeface="微软雅黑"/>
                           <a:cs typeface="Arial"/>
                         </a:rPr>
-                        <a:t>待验证</a:t>
+                        <a:t>中</a:t>
                       </a:r>
                     </a:p>
                   </a:txBody>
@@ -6227,7 +6796,7 @@
                     <a:p>
                       <a:pPr algn="l">
                         <a:lnSpc>
-                          <a:spcPct val="110000"/>
+                          <a:spcPct val="105000"/>
                         </a:lnSpc>
                         <a:spcBef>
                           <a:spcPts val="0"/>
@@ -6245,14 +6814,14 @@
                           <a:ea typeface="微软雅黑"/>
                           <a:cs typeface="Arial"/>
                         </a:rPr>
-                        <a:t>本课题要回答的问题</a:t>
+                        <a:t>Atanasova 2020 [32]</a:t>
                       </a:r>
                     </a:p>
                   </a:txBody>
                   <a:tcPr/>
                 </a:tc>
               </a:tr>
-              <a:tr h="475488">
+              <a:tr h="418014">
                 <a:tc>
                   <a:txBody>
                     <a:bodyPr/>
@@ -6260,7 +6829,7 @@
                     <a:p>
                       <a:pPr algn="l">
                         <a:lnSpc>
-                          <a:spcPct val="110000"/>
+                          <a:spcPct val="105000"/>
                         </a:lnSpc>
                         <a:spcBef>
                           <a:spcPts val="0"/>
@@ -6278,7 +6847,7 @@
                           <a:ea typeface="微软雅黑"/>
                           <a:cs typeface="Arial"/>
                         </a:rPr>
-                        <a:t>候选肽经 AChE–Aβ 界面影响成核</a:t>
+                        <a:t>菌群失衡 促炎↑产丁酸↓</a:t>
                       </a:r>
                     </a:p>
                   </a:txBody>
@@ -6291,7 +6860,7 @@
                     <a:p>
                       <a:pPr algn="l">
                         <a:lnSpc>
-                          <a:spcPct val="110000"/>
+                          <a:spcPct val="105000"/>
                         </a:lnSpc>
                         <a:spcBef>
                           <a:spcPts val="0"/>
@@ -6309,7 +6878,7 @@
                           <a:ea typeface="微软雅黑"/>
                           <a:cs typeface="Arial"/>
                         </a:rPr>
-                        <a:t>待验证（H1—H3）</a:t>
+                        <a:t>中</a:t>
                       </a:r>
                     </a:p>
                   </a:txBody>
@@ -6322,7 +6891,7 @@
                     <a:p>
                       <a:pPr algn="l">
                         <a:lnSpc>
-                          <a:spcPct val="110000"/>
+                          <a:spcPct val="105000"/>
                         </a:lnSpc>
                         <a:spcBef>
                           <a:spcPts val="0"/>
@@ -6340,7 +6909,7 @@
                           <a:ea typeface="微软雅黑"/>
                           <a:cs typeface="Arial"/>
                         </a:rPr>
-                        <a:t>下一步的对接、动力学与实验</a:t>
+                        <a:t>Vogt 2017等</a:t>
                       </a:r>
                     </a:p>
                   </a:txBody>
@@ -6353,7 +6922,267 @@
       </p:graphicFrame>
       <p:sp>
         <p:nvSpPr>
-          <p:cNvPr id="5" name="TextBox 4"/>
+          <p:cNvPr id="5" name="Rectangle 4"/>
+          <p:cNvSpPr/>
+          <p:nvPr/>
+        </p:nvSpPr>
+        <p:spPr>
+          <a:xfrm>
+            <a:off x="7863840" y="1280160"/>
+            <a:ext cx="3657600" cy="2926080"/>
+          </a:xfrm>
+          <a:prstGeom prst="rect">
+            <a:avLst/>
+          </a:prstGeom>
+          <a:solidFill>
+            <a:srgbClr val="F7F7F5"/>
+          </a:solidFill>
+          <a:ln w="9525">
+            <a:solidFill>
+              <a:srgbClr val="DDDDDA"/>
+            </a:solidFill>
+          </a:ln>
+          <a:effectLst/>
+        </p:spPr>
+        <p:style>
+          <a:lnRef idx="1">
+            <a:schemeClr val="accent1"/>
+          </a:lnRef>
+          <a:fillRef idx="3">
+            <a:schemeClr val="accent1"/>
+          </a:fillRef>
+          <a:effectRef idx="2">
+            <a:schemeClr val="accent1"/>
+          </a:effectRef>
+          <a:fontRef idx="minor">
+            <a:schemeClr val="lt1"/>
+          </a:fontRef>
+        </p:style>
+        <p:txBody>
+          <a:bodyPr rtlCol="0" anchor="ctr"/>
+          <a:lstStyle/>
+          <a:p>
+            <a:pPr algn="ctr"/>
+          </a:p>
+        </p:txBody>
+      </p:sp>
+      <p:sp>
+        <p:nvSpPr>
+          <p:cNvPr id="6" name="TextBox 5"/>
+          <p:cNvSpPr txBox="1"/>
+          <p:nvPr/>
+        </p:nvSpPr>
+        <p:spPr>
+          <a:xfrm>
+            <a:off x="8046720" y="1371600"/>
+            <a:ext cx="3291840" cy="2743200"/>
+          </a:xfrm>
+          <a:prstGeom prst="rect">
+            <a:avLst/>
+          </a:prstGeom>
+          <a:noFill/>
+        </p:spPr>
+        <p:txBody>
+          <a:bodyPr wrap="square" anchor="t" lIns="27432" rIns="27432" tIns="0" bIns="0">
+            <a:spAutoFit/>
+          </a:bodyPr>
+          <a:lstStyle/>
+          <a:p>
+            <a:pPr algn="l">
+              <a:lnSpc>
+                <a:spcPct val="110000"/>
+              </a:lnSpc>
+              <a:spcBef>
+                <a:spcPts val="0"/>
+              </a:spcBef>
+              <a:spcAft>
+                <a:spcPts val="0"/>
+              </a:spcAft>
+            </a:pPr>
+            <a:r>
+              <a:rPr sz="1500" b="1">
+                <a:solidFill>
+                  <a:srgbClr val="2F5D62"/>
+                </a:solidFill>
+                <a:latin typeface="Arial"/>
+                <a:ea typeface="微软雅黑"/>
+                <a:cs typeface="Arial"/>
+              </a:rPr>
+              <a:t>抗菌活性预测为何可行</a:t>
+            </a:r>
+          </a:p>
+          <a:p>
+            <a:pPr algn="l">
+              <a:lnSpc>
+                <a:spcPct val="120000"/>
+              </a:lnSpc>
+              <a:spcBef>
+                <a:spcPts val="800"/>
+              </a:spcBef>
+              <a:spcAft>
+                <a:spcPts val="0"/>
+              </a:spcAft>
+            </a:pPr>
+            <a:r>
+              <a:rPr sz="1500" b="0">
+                <a:solidFill>
+                  <a:srgbClr val="333333"/>
+                </a:solidFill>
+                <a:latin typeface="Arial"/>
+                <a:ea typeface="微软雅黑"/>
+                <a:cs typeface="Arial"/>
+              </a:rPr>
+              <a:t>• Ma 2022 Nat Biotech：2349候选→216合成→181活性83% [22]</a:t>
+            </a:r>
+          </a:p>
+          <a:p>
+            <a:pPr algn="l">
+              <a:lnSpc>
+                <a:spcPct val="120000"/>
+              </a:lnSpc>
+              <a:spcBef>
+                <a:spcPts val="600"/>
+              </a:spcBef>
+              <a:spcAft>
+                <a:spcPts val="0"/>
+              </a:spcAft>
+            </a:pPr>
+            <a:r>
+              <a:rPr sz="1500" b="0">
+                <a:solidFill>
+                  <a:srgbClr val="333333"/>
+                </a:solidFill>
+                <a:latin typeface="Arial"/>
+                <a:ea typeface="微软雅黑"/>
+                <a:cs typeface="Arial"/>
+              </a:rPr>
+              <a:t>• Santos-Junior 2024 Cell：86万肽，100→79活性 [23]</a:t>
+            </a:r>
+          </a:p>
+          <a:p>
+            <a:pPr algn="l">
+              <a:lnSpc>
+                <a:spcPct val="120000"/>
+              </a:lnSpc>
+              <a:spcBef>
+                <a:spcPts val="600"/>
+              </a:spcBef>
+              <a:spcAft>
+                <a:spcPts val="0"/>
+              </a:spcAft>
+            </a:pPr>
+            <a:r>
+              <a:rPr sz="1500" b="0">
+                <a:solidFill>
+                  <a:srgbClr val="333333"/>
+                </a:solidFill>
+                <a:latin typeface="Arial"/>
+                <a:ea typeface="微软雅黑"/>
+                <a:cs typeface="Arial"/>
+              </a:rPr>
+              <a:t>• Wan 2024综述 [24]</a:t>
+            </a:r>
+          </a:p>
+          <a:p>
+            <a:pPr algn="l">
+              <a:lnSpc>
+                <a:spcPct val="110000"/>
+              </a:lnSpc>
+              <a:spcBef>
+                <a:spcPts val="1200"/>
+              </a:spcBef>
+              <a:spcAft>
+                <a:spcPts val="0"/>
+              </a:spcAft>
+            </a:pPr>
+            <a:r>
+              <a:rPr sz="1500" b="1">
+                <a:solidFill>
+                  <a:srgbClr val="2F5D62"/>
+                </a:solidFill>
+                <a:latin typeface="Arial"/>
+                <a:ea typeface="微软雅黑"/>
+                <a:cs typeface="Arial"/>
+              </a:rPr>
+              <a:t>本课题：三模型共识→去重→实验验证</a:t>
+            </a:r>
+          </a:p>
+          <a:p>
+            <a:pPr algn="l">
+              <a:lnSpc>
+                <a:spcPct val="120000"/>
+              </a:lnSpc>
+              <a:spcBef>
+                <a:spcPts val="600"/>
+              </a:spcBef>
+              <a:spcAft>
+                <a:spcPts val="0"/>
+              </a:spcAft>
+            </a:pPr>
+            <a:r>
+              <a:rPr sz="1500" b="0">
+                <a:solidFill>
+                  <a:srgbClr val="333333"/>
+                </a:solidFill>
+                <a:latin typeface="Arial"/>
+                <a:ea typeface="微软雅黑"/>
+                <a:cs typeface="Arial"/>
+              </a:rPr>
+              <a:t>纸片扩散初筛+MIC，设阳性/阴性对照</a:t>
+            </a:r>
+          </a:p>
+        </p:txBody>
+      </p:sp>
+      <p:sp>
+        <p:nvSpPr>
+          <p:cNvPr id="7" name="TextBox 6"/>
+          <p:cNvSpPr txBox="1"/>
+          <p:nvPr/>
+        </p:nvSpPr>
+        <p:spPr>
+          <a:xfrm>
+            <a:off x="640080" y="4572000"/>
+            <a:ext cx="10908792" cy="1280160"/>
+          </a:xfrm>
+          <a:prstGeom prst="rect">
+            <a:avLst/>
+          </a:prstGeom>
+          <a:noFill/>
+        </p:spPr>
+        <p:txBody>
+          <a:bodyPr wrap="square" anchor="t" lIns="27432" rIns="27432" tIns="0" bIns="0">
+            <a:spAutoFit/>
+          </a:bodyPr>
+          <a:lstStyle/>
+          <a:p>
+            <a:pPr algn="l">
+              <a:lnSpc>
+                <a:spcPct val="125000"/>
+              </a:lnSpc>
+              <a:spcBef>
+                <a:spcPts val="0"/>
+              </a:spcBef>
+              <a:spcAft>
+                <a:spcPts val="0"/>
+              </a:spcAft>
+            </a:pPr>
+            <a:r>
+              <a:rPr sz="1500" b="0">
+                <a:solidFill>
+                  <a:srgbClr val="333333"/>
+                </a:solidFill>
+                <a:latin typeface="Arial"/>
+                <a:ea typeface="微软雅黑"/>
+                <a:cs typeface="Arial"/>
+              </a:rPr>
+              <a:t>正常人 vs AD谁更多：AD侧更高，区分宿主/微生物源、局部/系统、阶段；微生物源以数据为准。为什么多：感染—炎症—Aβ/抗菌肽正反馈，促炎菌富集驱动。</a:t>
+            </a:r>
+          </a:p>
+        </p:txBody>
+      </p:sp>
+      <p:sp>
+        <p:nvSpPr>
+          <p:cNvPr id="8" name="TextBox 7"/>
           <p:cNvSpPr txBox="1"/>
           <p:nvPr/>
         </p:nvSpPr>
@@ -6400,7 +7229,7 @@
       </p:sp>
       <p:sp>
         <p:nvSpPr>
-          <p:cNvPr id="6" name="TextBox 5"/>
+          <p:cNvPr id="9" name="TextBox 8"/>
           <p:cNvSpPr txBox="1"/>
           <p:nvPr/>
         </p:nvSpPr>
@@ -9278,7 +10107,7 @@
               </a:spcAft>
             </a:pPr>
             <a:r>
-              <a:rPr sz="2500" b="1">
+              <a:rPr sz="2400" b="1">
                 <a:solidFill>
                   <a:srgbClr val="111111"/>
                 </a:solidFill>
@@ -9286,7 +10115,7 @@
                 <a:ea typeface="微软雅黑"/>
                 <a:cs typeface="Arial"/>
               </a:rPr>
-              <a:t>抗菌肽与 AD 的关联可以拆成七环，每环的证据强度不同</a:t>
+              <a:t>抗菌肽与AD关联可拆为七环，证据强度分层</a:t>
             </a:r>
           </a:p>
         </p:txBody>
@@ -9352,7 +10181,7 @@
         <p:spPr>
           <a:xfrm>
             <a:off x="640080" y="1188720"/>
-            <a:ext cx="10073906" cy="4315968"/>
+            <a:ext cx="8110348" cy="3474720"/>
           </a:xfrm>
           <a:prstGeom prst="rect">
             <a:avLst/>
@@ -9401,7 +10230,7 @@
                 <a:ea typeface="微软雅黑"/>
                 <a:cs typeface="Arial"/>
               </a:rPr>
-              <a:t>图：本项目自制（results/figures）</a:t>
+              <a:t>图：本项目自制，蓝=已有实验/临床证据，绿=计算可预测，橙=本课题待验证</a:t>
             </a:r>
           </a:p>
         </p:txBody>
@@ -9414,8 +10243,8 @@
         </p:nvSpPr>
         <p:spPr>
           <a:xfrm>
-            <a:off x="640080" y="4626864"/>
-            <a:ext cx="10908792" cy="1280160"/>
+            <a:off x="640080" y="4937760"/>
+            <a:ext cx="10908792" cy="1371600"/>
           </a:xfrm>
           <a:prstGeom prst="rect">
             <a:avLst/>
@@ -9430,7 +10259,7 @@
           <a:p>
             <a:pPr algn="l">
               <a:lnSpc>
-                <a:spcPct val="130000"/>
+                <a:spcPct val="125000"/>
               </a:lnSpc>
               <a:spcBef>
                 <a:spcPts val="0"/>
@@ -9440,7 +10269,7 @@
               </a:spcAft>
             </a:pPr>
             <a:r>
-              <a:rPr sz="1700" b="0">
+              <a:rPr sz="1500" b="0">
                 <a:solidFill>
                   <a:srgbClr val="333333"/>
                 </a:solidFill>
@@ -9448,7 +10277,7 @@
                 <a:ea typeface="微软雅黑"/>
                 <a:cs typeface="Arial"/>
               </a:rPr>
-              <a:t>① AD 与感染相关、② 感染与炎症驱动抗菌肽与 Aβ 生成、③ Aβ 本身即抗菌肽；④ 抗菌活性可计算预测、⑤ AD 组特异抗菌肽随阶段变化、⑥ 双刃剑效应；⑦ 为什么 AD 更多与 AChE–Aβ 机制落点，是本课题要回答的部分。</a:t>
+              <a:t>① AD与感染相关 ② 感染驱动抗菌肽/Aβ生成 ③ Aβ本身是抗菌肽 ④ 活性可计算预测 ⑤ AD组特异肽随阶段变化 ⑥ 双刃剑 ⑦ 正反馈环与AChE-PAS落点</a:t>
             </a:r>
           </a:p>
         </p:txBody>

--- a/中间版/中期答辩_H_nature风.pptx
+++ b/中间版/中期答辩_H_nature风.pptx
@@ -17,6 +17,8 @@
     <p:sldId id="265" r:id="rId17"/>
     <p:sldId id="266" r:id="rId18"/>
     <p:sldId id="267" r:id="rId19"/>
+    <p:sldId id="268" r:id="rId20"/>
+    <p:sldId id="269" r:id="rId21"/>
   </p:sldIdLst>
   <p:sldSz cx="12191695" cy="6858000" type="screen4x3"/>
   <p:notesSz cx="6858000" cy="9144000"/>
@@ -583,7 +585,7 @@
           <a:lstStyle/>
           <a:p>
             <a:r>
-              <a:t>为什么 AD 患者体内的抗菌肽更多？因为存在一个正反馈：菌群失衡与肠屏障通透性增加使内毒素和病原体长期刺激宿主，经 TLR4 与 NF-κB 通路升高促炎因子，而促炎因子又上调 Aβ 与抗菌肽的生成；Aβ 与抗菌肽聚集后激活小胶质细胞，产生更多炎症介质，循环自我加强。这也是抗菌保护假说的现代表述：一项有益的先天免疫反应，在长期失衡后被放大成病理过程。</a:t>
+              <a:t>主体分析工作已经在中期完成，后续是机制关联的结论整理、抑菌实验验证和论文撰写，整体风险可控。我的汇报到此结束，请各位老师批评指正。</a:t>
             </a:r>
           </a:p>
         </p:txBody>
@@ -653,7 +655,7 @@
           <a:lstStyle/>
           <a:p>
             <a:r>
-              <a:t>机制落点参照 AChE–Aβ 复合物的分子动力学研究：Aβ 对接进外周阴离子位点 PAS 后，复合物在 1 微秒模拟中保持稳定，主要停留区为 344–361 区段，该区段紧邻 PAS 但不受双位点抑制剂的位阻。由此提出三个可检验假设：H1 竞争 PAS 减少成核、H2 直接结合 Aβ 改变聚集路径、H3 在膜水平影响小胶质识别。我们用对接与动力学给出优先序，再用抑菌与酶活实验验证。</a:t>
+              <a:t>这页把抗菌肽与 AD 的关联拆成七环，并标出每一环的证据强度：蓝色是已有实验或临床证据，绿色是计算方法能给出候选与优先序的部分，橙色是本课题要回答或需要验证的部分。老师问任何一环，都能说清这一环目前的证据到什么程度。</a:t>
             </a:r>
           </a:p>
         </p:txBody>
@@ -723,7 +725,147 @@
           <a:lstStyle/>
           <a:p>
             <a:r>
-              <a:t>这张表说明每一环的证据强度，以及本课题要补的是哪一块：宿主来源抗菌肽、Aβ 的抗菌活性、AChE 经 PAS 促进聚集，这些已有较强证据；微生物源抗菌肽在 AD 患者中增多、以及候选肽经 AChE–Aβ 界面影响成核，是本课题要回答的问题。这样既讲清了关联，也没有夸大因果。</a:t>
+              <a:t>机制落点参照 AChE–Aβ 复合物的分子动力学研究：Aβ 对接进 PAS 后，复合物在 1 微秒模拟中保持稳定，主要停留区段是 344—361，该区段紧邻 PAS 但不受双位点抑制剂的位阻。同一界面的其他实验证据包括：丙锭可阻断 AChE 诱导的聚集而催化位点抑制剂无效、PAS 负电荷触发 β-发夹构象、丁酰胆碱酯酶反向延缓纤维形成。由此提出三个假设，并用对接与动力学给出优先序。</a:t>
+            </a:r>
+          </a:p>
+        </p:txBody>
+      </p:sp>
+      <p:sp>
+        <p:nvSpPr>
+          <p:cNvPr id="4" name="Slide Number Placeholder 3"/>
+          <p:cNvSpPr>
+            <a:spLocks noGrp="1"/>
+          </p:cNvSpPr>
+          <p:nvPr>
+            <p:ph type="sldNum" idx="5" sz="quarter"/>
+          </p:nvPr>
+        </p:nvSpPr>
+        <p:spPr/>
+      </p:sp>
+    </p:spTree>
+  </p:cSld>
+  <p:clrMapOvr>
+    <a:masterClrMapping/>
+  </p:clrMapOvr>
+</p:notes>
+</file>
+
+<file path=ppt/notesSlides/notesSlide13.xml><?xml version="1.0" encoding="utf-8"?>
+<p:notes xmlns:a="http://schemas.openxmlformats.org/drawingml/2006/main" xmlns:p="http://schemas.openxmlformats.org/presentationml/2006/main" xmlns:r="http://schemas.openxmlformats.org/officeDocument/2006/relationships">
+  <p:cSld>
+    <p:spTree>
+      <p:nvGrpSpPr>
+        <p:cNvPr id="1" name=""/>
+        <p:cNvGrpSpPr/>
+        <p:nvPr/>
+      </p:nvGrpSpPr>
+      <p:grpSpPr>
+        <a:xfrm>
+          <a:off x="0" y="0"/>
+          <a:ext cx="0" cy="0"/>
+          <a:chOff x="0" y="0"/>
+          <a:chExt cx="0" cy="0"/>
+        </a:xfrm>
+      </p:grpSpPr>
+      <p:sp>
+        <p:nvSpPr>
+          <p:cNvPr id="2" name="Slide Image Placeholder 1"/>
+          <p:cNvSpPr>
+            <a:spLocks noGrp="1"/>
+          </p:cNvSpPr>
+          <p:nvPr>
+            <p:ph type="sldImg" idx="2"/>
+          </p:nvPr>
+        </p:nvSpPr>
+        <p:spPr/>
+      </p:sp>
+      <p:sp>
+        <p:nvSpPr>
+          <p:cNvPr id="3" name="Notes Placeholder 2"/>
+          <p:cNvSpPr>
+            <a:spLocks noGrp="1"/>
+          </p:cNvSpPr>
+          <p:nvPr>
+            <p:ph type="body" idx="3" sz="quarter"/>
+          </p:nvPr>
+        </p:nvSpPr>
+        <p:spPr/>
+        <p:txBody>
+          <a:bodyPr/>
+          <a:lstStyle/>
+          <a:p>
+            <a:r>
+              <a:t>这张表把老师提出的八个问题逐条列出，并给出答案要点与证据强度。需要说明的是：关联类结论的证据强度较高，方向类结论（谁更多、促进还是抑制）存在例外与条件依赖，因此标注为中；微生物源抗菌肽在 AD 中的变化属于待验证部分，正是本课题要补的一环。</a:t>
+            </a:r>
+          </a:p>
+        </p:txBody>
+      </p:sp>
+      <p:sp>
+        <p:nvSpPr>
+          <p:cNvPr id="4" name="Slide Number Placeholder 3"/>
+          <p:cNvSpPr>
+            <a:spLocks noGrp="1"/>
+          </p:cNvSpPr>
+          <p:nvPr>
+            <p:ph type="sldNum" idx="5" sz="quarter"/>
+          </p:nvPr>
+        </p:nvSpPr>
+        <p:spPr/>
+      </p:sp>
+    </p:spTree>
+  </p:cSld>
+  <p:clrMapOvr>
+    <a:masterClrMapping/>
+  </p:clrMapOvr>
+</p:notes>
+</file>
+
+<file path=ppt/notesSlides/notesSlide14.xml><?xml version="1.0" encoding="utf-8"?>
+<p:notes xmlns:a="http://schemas.openxmlformats.org/drawingml/2006/main" xmlns:p="http://schemas.openxmlformats.org/presentationml/2006/main" xmlns:r="http://schemas.openxmlformats.org/officeDocument/2006/relationships">
+  <p:cSld>
+    <p:spTree>
+      <p:nvGrpSpPr>
+        <p:cNvPr id="1" name=""/>
+        <p:cNvGrpSpPr/>
+        <p:nvPr/>
+      </p:nvGrpSpPr>
+      <p:grpSpPr>
+        <a:xfrm>
+          <a:off x="0" y="0"/>
+          <a:ext cx="0" cy="0"/>
+          <a:chOff x="0" y="0"/>
+          <a:chExt cx="0" cy="0"/>
+        </a:xfrm>
+      </p:grpSpPr>
+      <p:sp>
+        <p:nvSpPr>
+          <p:cNvPr id="2" name="Slide Image Placeholder 1"/>
+          <p:cNvSpPr>
+            <a:spLocks noGrp="1"/>
+          </p:cNvSpPr>
+          <p:nvPr>
+            <p:ph type="sldImg" idx="2"/>
+          </p:nvPr>
+        </p:nvSpPr>
+        <p:spPr/>
+      </p:sp>
+      <p:sp>
+        <p:nvSpPr>
+          <p:cNvPr id="3" name="Notes Placeholder 2"/>
+          <p:cNvSpPr>
+            <a:spLocks noGrp="1"/>
+          </p:cNvSpPr>
+          <p:nvPr>
+            <p:ph type="body" idx="3" sz="quarter"/>
+          </p:nvPr>
+        </p:nvSpPr>
+        <p:spPr/>
+        <p:txBody>
+          <a:bodyPr/>
+          <a:lstStyle/>
+          <a:p>
+            <a:r>
+              <a:t>机制说明文档《抗菌肽与AD关联机制说明》共整理 46 条文献，覆盖 AD 与感染、宿主抗菌肽在 AD 中的变化、抗菌肽预测方法、菌群分期、AChE–Aβ 与交叉成核的分子模拟，以及作为反例的乳铁蛋白下降证据。这里列出其中十条代表性文献及其结论。</a:t>
             </a:r>
           </a:p>
         </p:txBody>
@@ -793,7 +935,7 @@
           <a:lstStyle/>
           <a:p>
             <a:r>
-              <a:t>研究背景可以概括为两句话：AD 与肠道微生物组的关系已有较多证据；微生物基因组编码的抗菌肽是可能的效应分子。现有研究缺少面向 AD 人群、按认知阶段分层的分析，这就是本课题的切入点。本次汇报重点说明研究思路和各项工作的完成程度。</a:t>
+              <a:t>研究背景可以概括为两句话：AD 与肠道微生物组的关系已有较多证据；微生物基因组编码的抗菌肽是可能的效应分子。现有研究缺少面向 AD 人群、按认知阶段分层的分析，这就是本课题的切入点；本次汇报重点说明研究思路和各项工作的完成程度。</a:t>
             </a:r>
           </a:p>
         </p:txBody>
@@ -933,7 +1075,7 @@
           <a:lstStyle/>
           <a:p>
             <a:r>
-              <a:t>队列按认知功能分为 NC、SCS、SCD、MCI 与 AD 五个阶段，样本的临床分组信息与测序数据一一对应。预测环节采用 Attention、LSTM、BERT 三个模型分别预测，只有三者一致判为阳性的序列才纳入候选集合，目的是降低单一模型的假阳性。这一步已经完成。</a:t>
+              <a:t>这页说明整体流程：从测序数据到候选抗菌肽清单，共十二步，输入输出都可追溯。前九步已经在中期前完成，最后三步正在推进——机制关联分析、抑菌实验验证与结果整理。</a:t>
             </a:r>
           </a:p>
         </p:txBody>
@@ -1003,7 +1145,7 @@
           <a:lstStyle/>
           <a:p>
             <a:r>
-              <a:t>差异分析按认知阶段分组比较候选抗菌肽的丰度与组成差异；随后引入宏蛋白组表达证据做二次去重，只保留在蛋白层面可检出的序列，再按组内共有、组间特比较，得到健康人群特有与各阶段特有的抗菌肽清单。这两步都已完成。</a:t>
+              <a:t>分组方式是这页的重点：五个认知阶段，每阶段内再按性别与三个年龄段分层，共三十个分层单元；每个单元内按年龄与性别匹配，得到结构一致的比较亚队列。各阶段的样本量相同、性别构成相同、组间平均年龄差小于两岁，这样阶段之间的差异不会来自年龄与性别构成。</a:t>
             </a:r>
           </a:p>
         </p:txBody>
@@ -1073,7 +1215,7 @@
           <a:lstStyle/>
           <a:p>
             <a:r>
-              <a:t>机制关联参照乙酰胆碱酯酶—β-淀粉样肽复合物分子模拟研究的思路，从与 Aβ 的相互作用、与 AChE 外周阴离子位点结合、以及免疫与炎症通路三个方向展开，把结论定位为线索发现。抑菌实验验证选取有代表性的候选抗菌肽人工合成，以大肠杆菌与金黄色葡萄球菌为指示菌，先用纸片扩散法初筛，再用微量肉汤稀释法测最低抑菌浓度。两项工作正在开展。</a:t>
+              <a:t>预测环节采用 Attention、LSTM、BERT 三个模型分别预测，只有三者一致判为阳性的序列才纳入候选集合，目的是降低单一模型的假阳性。</a:t>
             </a:r>
           </a:p>
         </p:txBody>
@@ -1143,7 +1285,7 @@
           <a:lstStyle/>
           <a:p>
             <a:r>
-              <a:t>这张表把开题计划与现阶段结果逐条对照：数据准备、候选肽挖掘、差异分析三项已完成；模型方案由自建模型改为三个已发表模型协同预测；机制与验证环节正在实施。研究方向没有变，调整都发生在方法层面。</a:t>
+              <a:t>序列层面去冗余解决重复；宏蛋白组表达证据解决“有预测、无表达”的假阳性。二次去重后按组内共有、组间特比较，得到健康人群特有与各疾病阶段特有的抗菌肽清单。</a:t>
             </a:r>
           </a:p>
         </p:txBody>
@@ -1213,7 +1355,7 @@
           <a:lstStyle/>
           <a:p>
             <a:r>
-              <a:t>总结一下：主体分析工作已经在中期完成，后续是机制关联的结论整理、抑菌实验验证和论文撰写，整体风险可控。我的汇报到此结束，请各位老师批评指正。</a:t>
+              <a:t>机制关联参照乙酰胆碱酯酶—β-淀粉样肽复合物分子模拟研究的思路，从三个方向展开，把结论定位为线索发现；抑菌实验验证选取有代表性的候选抗菌肽人工合成，以大肠杆菌与金黄色葡萄球菌为指示菌，先用纸片扩散法初筛，再用微量肉汤稀释法测最低抑菌浓度。</a:t>
             </a:r>
           </a:p>
         </p:txBody>
@@ -1283,7 +1425,7 @@
           <a:lstStyle/>
           <a:p>
             <a:r>
-              <a:t>这张图把抗菌肽与 AD 的关联拆成七环，并标出每一环的证据强度：蓝色是已有实验或临床证据，绿色是计算方法能给出候选与优先序的部分，橙色是本课题要回答或需要验证的部分。这样讲的好处是：老师问任何一环，都能说清这一环目前的证据到什么程度。</a:t>
+              <a:t>数据准备、候选肽挖掘、差异分析三项已完成；模型方案由自建模型改为三个已发表模型协同预测；机制与验证环节正在实施。研究方向没有变，调整都发生在方法层面。</a:t>
             </a:r>
           </a:p>
         </p:txBody>
@@ -4750,7 +4892,7 @@
                 <a:ea typeface="微软雅黑"/>
                 <a:cs typeface="Arial"/>
               </a:rPr>
-              <a:t>1 / 12</a:t>
+              <a:t>1 / 14</a:t>
             </a:r>
           </a:p>
         </p:txBody>
@@ -4807,7 +4949,7 @@
               </a:spcAft>
             </a:pPr>
             <a:r>
-              <a:rPr sz="2600" b="1">
+              <a:rPr sz="2500" b="1">
                 <a:solidFill>
                   <a:srgbClr val="111111"/>
                 </a:solidFill>
@@ -4815,7 +4957,7 @@
                 <a:ea typeface="微软雅黑"/>
                 <a:cs typeface="Arial"/>
               </a:rPr>
-              <a:t>为什么 AD 更多：炎症—Aβ—抗菌肽构成正反馈</a:t>
+              <a:t>主体分析已完成，后续安排集中在验证与撰写</a:t>
             </a:r>
           </a:p>
         </p:txBody>
@@ -4873,7 +5015,7 @@
         <p:spPr>
           <a:xfrm>
             <a:off x="640080" y="1481328"/>
-            <a:ext cx="7223760" cy="3108960"/>
+            <a:ext cx="10424160" cy="3291840"/>
           </a:xfrm>
           <a:prstGeom prst="rect">
             <a:avLst/>
@@ -4906,7 +5048,7 @@
                 <a:ea typeface="微软雅黑"/>
                 <a:cs typeface="Arial"/>
               </a:rPr>
-              <a:t>菌群失衡与肠屏障通透性增加，使内毒素与病原体长期刺激宿主；</a:t>
+              <a:t>已完成：数据资源与参考集、短肽库、三模型共识预测、分阶段差异分析、宏蛋白组二次去重与特有抗菌肽筛选。</a:t>
             </a:r>
           </a:p>
           <a:p>
@@ -4930,7 +5072,7 @@
                 <a:ea typeface="微软雅黑"/>
                 <a:cs typeface="Arial"/>
               </a:rPr>
-              <a:t>经 TLR4/NF-κB 升高促炎因子，促炎因子又上调 Aβ 与抗菌肽的生成；</a:t>
+              <a:t>进行中：特有抗菌肽的机制关联分析、候选抗菌肽的抑菌实验验证，以及学位论文与以第一作者投稿的 SCI 论文撰写。</a:t>
             </a:r>
           </a:p>
           <a:p>
@@ -4954,7 +5096,7 @@
                 <a:ea typeface="微软雅黑"/>
                 <a:cs typeface="Arial"/>
               </a:rPr>
-              <a:t>Aβ 与抗菌肽聚集、成核并激活小胶质细胞，产生更多炎症介质，循环自我加强。</a:t>
+              <a:t>时间安排：按开题计划推进，后续不依赖新的数据生产，整体风险可控。</a:t>
             </a:r>
           </a:p>
         </p:txBody>
@@ -4967,14 +5109,14 @@
         </p:nvSpPr>
         <p:spPr>
           <a:xfrm>
-            <a:off x="8229600" y="1481328"/>
-            <a:ext cx="12700" cy="3017520"/>
+            <a:off x="640080" y="4846320"/>
+            <a:ext cx="1920240" cy="30480"/>
           </a:xfrm>
           <a:prstGeom prst="rect">
             <a:avLst/>
           </a:prstGeom>
           <a:solidFill>
-            <a:srgbClr val="DDDDDA"/>
+            <a:srgbClr val="B03A2E"/>
           </a:solidFill>
           <a:ln>
             <a:noFill/>
@@ -5011,8 +5153,8 @@
         </p:nvSpPr>
         <p:spPr>
           <a:xfrm>
-            <a:off x="8549640" y="1481328"/>
-            <a:ext cx="2999232" cy="3108960"/>
+            <a:off x="640080" y="5084064"/>
+            <a:ext cx="10424160" cy="731520"/>
           </a:xfrm>
           <a:prstGeom prst="rect">
             <a:avLst/>
@@ -5027,7 +5169,7 @@
           <a:p>
             <a:pPr algn="l">
               <a:lnSpc>
-                <a:spcPct val="130000"/>
+                <a:spcPct val="110000"/>
               </a:lnSpc>
               <a:spcBef>
                 <a:spcPts val="0"/>
@@ -5037,111 +5179,15 @@
               </a:spcAft>
             </a:pPr>
             <a:r>
-              <a:rPr sz="1600" b="0">
+              <a:rPr sz="2000" b="1">
                 <a:solidFill>
-                  <a:srgbClr val="777777"/>
+                  <a:srgbClr val="111111"/>
                 </a:solidFill>
                 <a:latin typeface="Arial"/>
                 <a:ea typeface="微软雅黑"/>
                 <a:cs typeface="Arial"/>
               </a:rPr>
-              <a:t>表述口径：</a:t>
-            </a:r>
-          </a:p>
-          <a:p>
-            <a:pPr algn="l">
-              <a:lnSpc>
-                <a:spcPct val="130000"/>
-              </a:lnSpc>
-              <a:spcBef>
-                <a:spcPts val="1200"/>
-              </a:spcBef>
-              <a:spcAft>
-                <a:spcPts val="0"/>
-              </a:spcAft>
-            </a:pPr>
-            <a:r>
-              <a:rPr sz="1600" b="0">
-                <a:solidFill>
-                  <a:srgbClr val="777777"/>
-                </a:solidFill>
-                <a:latin typeface="Arial"/>
-                <a:ea typeface="微软雅黑"/>
-                <a:cs typeface="Arial"/>
-              </a:rPr>
-              <a:t>抗体外证据为主；</a:t>
-            </a:r>
-          </a:p>
-          <a:p>
-            <a:pPr algn="l">
-              <a:lnSpc>
-                <a:spcPct val="130000"/>
-              </a:lnSpc>
-              <a:spcBef>
-                <a:spcPts val="1200"/>
-              </a:spcBef>
-              <a:spcAft>
-                <a:spcPts val="0"/>
-              </a:spcAft>
-            </a:pPr>
-            <a:r>
-              <a:rPr sz="1600" b="0">
-                <a:solidFill>
-                  <a:srgbClr val="777777"/>
-                </a:solidFill>
-                <a:latin typeface="Arial"/>
-                <a:ea typeface="微软雅黑"/>
-                <a:cs typeface="Arial"/>
-              </a:rPr>
-              <a:t>区分宿主来源与</a:t>
-            </a:r>
-          </a:p>
-          <a:p>
-            <a:pPr algn="l">
-              <a:lnSpc>
-                <a:spcPct val="130000"/>
-              </a:lnSpc>
-              <a:spcBef>
-                <a:spcPts val="1200"/>
-              </a:spcBef>
-              <a:spcAft>
-                <a:spcPts val="0"/>
-              </a:spcAft>
-            </a:pPr>
-            <a:r>
-              <a:rPr sz="1600" b="0">
-                <a:solidFill>
-                  <a:srgbClr val="777777"/>
-                </a:solidFill>
-                <a:latin typeface="Arial"/>
-                <a:ea typeface="微软雅黑"/>
-                <a:cs typeface="Arial"/>
-              </a:rPr>
-              <a:t>微生物来源、局部</a:t>
-            </a:r>
-          </a:p>
-          <a:p>
-            <a:pPr algn="l">
-              <a:lnSpc>
-                <a:spcPct val="130000"/>
-              </a:lnSpc>
-              <a:spcBef>
-                <a:spcPts val="1200"/>
-              </a:spcBef>
-              <a:spcAft>
-                <a:spcPts val="0"/>
-              </a:spcAft>
-            </a:pPr>
-            <a:r>
-              <a:rPr sz="1600" b="0">
-                <a:solidFill>
-                  <a:srgbClr val="777777"/>
-                </a:solidFill>
-                <a:latin typeface="Arial"/>
-                <a:ea typeface="微软雅黑"/>
-                <a:cs typeface="Arial"/>
-              </a:rPr>
-              <a:t>与系统、阶段差异。</a:t>
+              <a:t>谢谢各位老师，请批评指正。</a:t>
             </a:r>
           </a:p>
         </p:txBody>
@@ -5235,7 +5281,7 @@
                 <a:ea typeface="微软雅黑"/>
                 <a:cs typeface="Arial"/>
               </a:rPr>
-              <a:t>10 / 12</a:t>
+              <a:t>10 / 14</a:t>
             </a:r>
           </a:p>
         </p:txBody>
@@ -5300,7 +5346,7 @@
                 <a:ea typeface="微软雅黑"/>
                 <a:cs typeface="Arial"/>
               </a:rPr>
-              <a:t>机制落点：AChE–Aβ 复合物与候选肽的三个假设</a:t>
+              <a:t>抗菌肽与 AD 的关联可以拆成七环，每环的证据强度不同</a:t>
             </a:r>
           </a:p>
         </p:txBody>
@@ -5351,7 +5397,7 @@
       </p:sp>
       <p:pic>
         <p:nvPicPr>
-          <p:cNvPr id="4" name="Picture 3" descr="figM2_AChE_Aβ_机制.png"/>
+          <p:cNvPr id="4" name="Picture 3" descr="figM1_关联逻辑链.png"/>
           <p:cNvPicPr>
             <a:picLocks noChangeAspect="1"/>
           </p:cNvPicPr>
@@ -5365,8 +5411,8 @@
         </p:blipFill>
         <p:spPr>
           <a:xfrm>
-            <a:off x="640080" y="1188720"/>
-            <a:ext cx="7863840" cy="3943173"/>
+            <a:off x="1697813" y="1188720"/>
+            <a:ext cx="8793325" cy="3767328"/>
           </a:xfrm>
           <a:prstGeom prst="rect">
             <a:avLst/>
@@ -5381,8 +5427,8 @@
         </p:nvSpPr>
         <p:spPr>
           <a:xfrm>
-            <a:off x="8549640" y="1188720"/>
-            <a:ext cx="2999232" cy="4480560"/>
+            <a:off x="640080" y="5074920"/>
+            <a:ext cx="10908792" cy="868680"/>
           </a:xfrm>
           <a:prstGeom prst="rect">
             <a:avLst/>
@@ -5394,44 +5440,20 @@
             <a:spAutoFit/>
           </a:bodyPr>
           <a:lstStyle/>
-          <a:p>
-            <a:pPr algn="l">
-              <a:lnSpc>
-                <a:spcPct val="110000"/>
-              </a:lnSpc>
-              <a:spcBef>
-                <a:spcPts val="0"/>
-              </a:spcBef>
-              <a:spcAft>
-                <a:spcPts val="0"/>
-              </a:spcAft>
-            </a:pPr>
-            <a:r>
-              <a:rPr sz="1600" b="1">
-                <a:solidFill>
-                  <a:srgbClr val="2F5D62"/>
-                </a:solidFill>
-                <a:latin typeface="Arial"/>
-                <a:ea typeface="微软雅黑"/>
-                <a:cs typeface="Arial"/>
-              </a:rPr>
-              <a:t>解读</a:t>
-            </a:r>
-          </a:p>
           <a:p>
             <a:pPr algn="l">
               <a:lnSpc>
                 <a:spcPct val="130000"/>
               </a:lnSpc>
               <a:spcBef>
-                <a:spcPts val="800"/>
+                <a:spcPts val="0"/>
               </a:spcBef>
               <a:spcAft>
                 <a:spcPts val="0"/>
               </a:spcAft>
             </a:pPr>
             <a:r>
-              <a:rPr sz="1600" b="0">
+              <a:rPr sz="1700" b="0">
                 <a:solidFill>
                   <a:srgbClr val="333333"/>
                 </a:solidFill>
@@ -5439,7 +5461,7 @@
                 <a:ea typeface="微软雅黑"/>
                 <a:cs typeface="Arial"/>
               </a:rPr>
-              <a:t>AChE 的 PAS 是 Aβ 聚集的成核中心；分子动力学显示复合物在 1 μs 内稳定，Aβ 主要停留于 344–361 区段，且该区段不受双位点抑制剂位阻。由此提出：H1 竞争 PAS 减少成核、H2 结合 Aβ 改变聚集路径、H3 膜水平影响炎症信号；以对接与动力学给优先序，以抑菌与酶活实验验证。</a:t>
+              <a:t>① AD 与感染相关、② 感染与炎症驱动抗菌肽与 Aβ 生成、③ Aβ 本身即抗菌肽；④ 抗菌活性可计算预测、⑤ AD 组特异抗菌肽随阶段变化、⑥ 双刃剑效应；⑦ 为什么 AD 更多与分子机制落点，是本课题要回答的部分。</a:t>
             </a:r>
           </a:p>
         </p:txBody>
@@ -5447,6 +5469,53 @@
       <p:sp>
         <p:nvSpPr>
           <p:cNvPr id="6" name="TextBox 5"/>
+          <p:cNvSpPr txBox="1"/>
+          <p:nvPr/>
+        </p:nvSpPr>
+        <p:spPr>
+          <a:xfrm>
+            <a:off x="640080" y="6053328"/>
+            <a:ext cx="10908792" cy="329184"/>
+          </a:xfrm>
+          <a:prstGeom prst="rect">
+            <a:avLst/>
+          </a:prstGeom>
+          <a:noFill/>
+        </p:spPr>
+        <p:txBody>
+          <a:bodyPr wrap="square" anchor="t" lIns="27432" rIns="27432" tIns="0" bIns="0">
+            <a:spAutoFit/>
+          </a:bodyPr>
+          <a:lstStyle/>
+          <a:p>
+            <a:pPr algn="l">
+              <a:lnSpc>
+                <a:spcPct val="100000"/>
+              </a:lnSpc>
+              <a:spcBef>
+                <a:spcPts val="0"/>
+              </a:spcBef>
+              <a:spcAft>
+                <a:spcPts val="0"/>
+              </a:spcAft>
+            </a:pPr>
+            <a:r>
+              <a:rPr sz="1500" b="0">
+                <a:solidFill>
+                  <a:srgbClr val="777777"/>
+                </a:solidFill>
+                <a:latin typeface="Arial"/>
+                <a:ea typeface="微软雅黑"/>
+                <a:cs typeface="Arial"/>
+              </a:rPr>
+              <a:t>图：本项目自制（results/figures）</a:t>
+            </a:r>
+          </a:p>
+        </p:txBody>
+      </p:sp>
+      <p:sp>
+        <p:nvSpPr>
+          <p:cNvPr id="7" name="TextBox 6"/>
           <p:cNvSpPr txBox="1"/>
           <p:nvPr/>
         </p:nvSpPr>
@@ -5493,7 +5562,7 @@
       </p:sp>
       <p:sp>
         <p:nvSpPr>
-          <p:cNvPr id="7" name="TextBox 6"/>
+          <p:cNvPr id="8" name="TextBox 7"/>
           <p:cNvSpPr txBox="1"/>
           <p:nvPr/>
         </p:nvSpPr>
@@ -5533,7 +5602,7 @@
                 <a:ea typeface="微软雅黑"/>
                 <a:cs typeface="Arial"/>
               </a:rPr>
-              <a:t>11 / 12</a:t>
+              <a:t>11 / 14</a:t>
             </a:r>
           </a:p>
         </p:txBody>
@@ -5598,7 +5667,7 @@
                 <a:ea typeface="微软雅黑"/>
                 <a:cs typeface="Arial"/>
               </a:rPr>
-              <a:t>证据到哪一步：分级与验证路径</a:t>
+              <a:t>分子机制（一）：AChE–Aβ 复合物的动力学要点</a:t>
             </a:r>
           </a:p>
         </p:txBody>
@@ -5647,6 +5716,327 @@
           </a:p>
         </p:txBody>
       </p:sp>
+      <p:pic>
+        <p:nvPicPr>
+          <p:cNvPr id="4" name="Picture 3" descr="figM2_AChE_Aβ_机制.png"/>
+          <p:cNvPicPr>
+            <a:picLocks noChangeAspect="1"/>
+          </p:cNvPicPr>
+          <p:nvPr/>
+        </p:nvPicPr>
+        <p:blipFill>
+          <a:blip r:embed="rId2"/>
+          <a:stretch>
+            <a:fillRect/>
+          </a:stretch>
+        </p:blipFill>
+        <p:spPr>
+          <a:xfrm>
+            <a:off x="825790" y="1188720"/>
+            <a:ext cx="10537371" cy="3931920"/>
+          </a:xfrm>
+          <a:prstGeom prst="rect">
+            <a:avLst/>
+          </a:prstGeom>
+        </p:spPr>
+      </p:pic>
+      <p:sp>
+        <p:nvSpPr>
+          <p:cNvPr id="5" name="TextBox 4"/>
+          <p:cNvSpPr txBox="1"/>
+          <p:nvPr/>
+        </p:nvSpPr>
+        <p:spPr>
+          <a:xfrm>
+            <a:off x="640080" y="5248655"/>
+            <a:ext cx="10908792" cy="749808"/>
+          </a:xfrm>
+          <a:prstGeom prst="rect">
+            <a:avLst/>
+          </a:prstGeom>
+          <a:noFill/>
+        </p:spPr>
+        <p:txBody>
+          <a:bodyPr wrap="square" anchor="t" lIns="27432" rIns="27432" tIns="0" bIns="0">
+            <a:spAutoFit/>
+          </a:bodyPr>
+          <a:lstStyle/>
+          <a:p>
+            <a:pPr algn="l">
+              <a:lnSpc>
+                <a:spcPct val="124000"/>
+              </a:lnSpc>
+              <a:spcBef>
+                <a:spcPts val="0"/>
+              </a:spcBef>
+              <a:spcAft>
+                <a:spcPts val="0"/>
+              </a:spcAft>
+            </a:pPr>
+            <a:r>
+              <a:rPr sz="1600" b="0">
+                <a:solidFill>
+                  <a:srgbClr val="333333"/>
+                </a:solidFill>
+                <a:latin typeface="Arial"/>
+                <a:ea typeface="微软雅黑"/>
+                <a:cs typeface="Arial"/>
+              </a:rPr>
+              <a:t>PAS 是 Aβ 聚集的成核中心：1 μs 模拟中复合物稳定，Aβ 主要停留于 344—361 区段，不受双位点抑制剂位阻 [31]；丙锭阻断 PAS 后聚集被抑制 [33]。</a:t>
+            </a:r>
+          </a:p>
+        </p:txBody>
+      </p:sp>
+      <p:sp>
+        <p:nvSpPr>
+          <p:cNvPr id="6" name="TextBox 5"/>
+          <p:cNvSpPr txBox="1"/>
+          <p:nvPr/>
+        </p:nvSpPr>
+        <p:spPr>
+          <a:xfrm>
+            <a:off x="640080" y="6053328"/>
+            <a:ext cx="10908792" cy="329184"/>
+          </a:xfrm>
+          <a:prstGeom prst="rect">
+            <a:avLst/>
+          </a:prstGeom>
+          <a:noFill/>
+        </p:spPr>
+        <p:txBody>
+          <a:bodyPr wrap="square" anchor="t" lIns="27432" rIns="27432" tIns="0" bIns="0">
+            <a:spAutoFit/>
+          </a:bodyPr>
+          <a:lstStyle/>
+          <a:p>
+            <a:pPr algn="l">
+              <a:lnSpc>
+                <a:spcPct val="100000"/>
+              </a:lnSpc>
+              <a:spcBef>
+                <a:spcPts val="0"/>
+              </a:spcBef>
+              <a:spcAft>
+                <a:spcPts val="0"/>
+              </a:spcAft>
+            </a:pPr>
+            <a:r>
+              <a:rPr sz="1500" b="0">
+                <a:solidFill>
+                  <a:srgbClr val="777777"/>
+                </a:solidFill>
+                <a:latin typeface="Arial"/>
+                <a:ea typeface="微软雅黑"/>
+                <a:cs typeface="Arial"/>
+              </a:rPr>
+              <a:t>图：本项目自制（results/figures/figM2）</a:t>
+            </a:r>
+          </a:p>
+        </p:txBody>
+      </p:sp>
+      <p:sp>
+        <p:nvSpPr>
+          <p:cNvPr id="7" name="TextBox 6"/>
+          <p:cNvSpPr txBox="1"/>
+          <p:nvPr/>
+        </p:nvSpPr>
+        <p:spPr>
+          <a:xfrm>
+            <a:off x="640080" y="6419088"/>
+            <a:ext cx="8778240" cy="310896"/>
+          </a:xfrm>
+          <a:prstGeom prst="rect">
+            <a:avLst/>
+          </a:prstGeom>
+          <a:noFill/>
+        </p:spPr>
+        <p:txBody>
+          <a:bodyPr wrap="square" anchor="t" lIns="27432" rIns="27432" tIns="0" bIns="0">
+            <a:spAutoFit/>
+          </a:bodyPr>
+          <a:lstStyle/>
+          <a:p>
+            <a:pPr algn="l">
+              <a:lnSpc>
+                <a:spcPct val="100000"/>
+              </a:lnSpc>
+              <a:spcBef>
+                <a:spcPts val="0"/>
+              </a:spcBef>
+              <a:spcAft>
+                <a:spcPts val="0"/>
+              </a:spcAft>
+            </a:pPr>
+            <a:r>
+              <a:rPr sz="1500" b="0">
+                <a:solidFill>
+                  <a:srgbClr val="777777"/>
+                </a:solidFill>
+                <a:latin typeface="Arial"/>
+                <a:ea typeface="微软雅黑"/>
+                <a:cs typeface="Arial"/>
+              </a:rPr>
+              <a:t>研究生论文中期检查 · 文绍华</a:t>
+            </a:r>
+          </a:p>
+        </p:txBody>
+      </p:sp>
+      <p:sp>
+        <p:nvSpPr>
+          <p:cNvPr id="8" name="TextBox 7"/>
+          <p:cNvSpPr txBox="1"/>
+          <p:nvPr/>
+        </p:nvSpPr>
+        <p:spPr>
+          <a:xfrm>
+            <a:off x="10058400" y="6419088"/>
+            <a:ext cx="1490472" cy="310896"/>
+          </a:xfrm>
+          <a:prstGeom prst="rect">
+            <a:avLst/>
+          </a:prstGeom>
+          <a:noFill/>
+        </p:spPr>
+        <p:txBody>
+          <a:bodyPr wrap="square" anchor="t" lIns="27432" rIns="27432" tIns="0" bIns="0">
+            <a:spAutoFit/>
+          </a:bodyPr>
+          <a:lstStyle/>
+          <a:p>
+            <a:pPr algn="r">
+              <a:lnSpc>
+                <a:spcPct val="100000"/>
+              </a:lnSpc>
+              <a:spcBef>
+                <a:spcPts val="0"/>
+              </a:spcBef>
+              <a:spcAft>
+                <a:spcPts val="0"/>
+              </a:spcAft>
+            </a:pPr>
+            <a:r>
+              <a:rPr sz="1500" b="0">
+                <a:solidFill>
+                  <a:srgbClr val="777777"/>
+                </a:solidFill>
+                <a:latin typeface="Arial"/>
+                <a:ea typeface="微软雅黑"/>
+                <a:cs typeface="Arial"/>
+              </a:rPr>
+              <a:t>12 / 14</a:t>
+            </a:r>
+          </a:p>
+        </p:txBody>
+      </p:sp>
+    </p:spTree>
+  </p:cSld>
+  <p:clrMapOvr>
+    <a:masterClrMapping/>
+  </p:clrMapOvr>
+</p:sld>
+</file>
+
+<file path=ppt/slides/slide13.xml><?xml version="1.0" encoding="utf-8"?>
+<p:sld xmlns:a="http://schemas.openxmlformats.org/drawingml/2006/main" xmlns:p="http://schemas.openxmlformats.org/presentationml/2006/main" xmlns:r="http://schemas.openxmlformats.org/officeDocument/2006/relationships">
+  <p:cSld>
+    <p:spTree>
+      <p:nvGrpSpPr>
+        <p:cNvPr id="1" name=""/>
+        <p:cNvGrpSpPr/>
+        <p:nvPr/>
+      </p:nvGrpSpPr>
+      <p:grpSpPr/>
+      <p:sp>
+        <p:nvSpPr>
+          <p:cNvPr id="2" name="TextBox 1"/>
+          <p:cNvSpPr txBox="1"/>
+          <p:nvPr/>
+        </p:nvSpPr>
+        <p:spPr>
+          <a:xfrm>
+            <a:off x="640080" y="365760"/>
+            <a:ext cx="10908792" cy="548640"/>
+          </a:xfrm>
+          <a:prstGeom prst="rect">
+            <a:avLst/>
+          </a:prstGeom>
+          <a:noFill/>
+        </p:spPr>
+        <p:txBody>
+          <a:bodyPr wrap="square" anchor="t" lIns="27432" rIns="27432" tIns="0" bIns="0">
+            <a:spAutoFit/>
+          </a:bodyPr>
+          <a:lstStyle/>
+          <a:p>
+            <a:pPr algn="l">
+              <a:lnSpc>
+                <a:spcPct val="100000"/>
+              </a:lnSpc>
+              <a:spcBef>
+                <a:spcPts val="0"/>
+              </a:spcBef>
+              <a:spcAft>
+                <a:spcPts val="0"/>
+              </a:spcAft>
+            </a:pPr>
+            <a:r>
+              <a:rPr sz="2500" b="1">
+                <a:solidFill>
+                  <a:srgbClr val="111111"/>
+                </a:solidFill>
+                <a:latin typeface="Arial"/>
+                <a:ea typeface="微软雅黑"/>
+                <a:cs typeface="Arial"/>
+              </a:rPr>
+              <a:t>八个问题逐一作答：结论方向与证据强度</a:t>
+            </a:r>
+          </a:p>
+        </p:txBody>
+      </p:sp>
+      <p:sp>
+        <p:nvSpPr>
+          <p:cNvPr id="3" name="Rectangle 2"/>
+          <p:cNvSpPr/>
+          <p:nvPr/>
+        </p:nvSpPr>
+        <p:spPr>
+          <a:xfrm>
+            <a:off x="640080" y="969264"/>
+            <a:ext cx="10908792" cy="12700"/>
+          </a:xfrm>
+          <a:prstGeom prst="rect">
+            <a:avLst/>
+          </a:prstGeom>
+          <a:solidFill>
+            <a:srgbClr val="DDDDDA"/>
+          </a:solidFill>
+          <a:ln>
+            <a:noFill/>
+          </a:ln>
+          <a:effectLst/>
+        </p:spPr>
+        <p:style>
+          <a:lnRef idx="1">
+            <a:schemeClr val="accent1"/>
+          </a:lnRef>
+          <a:fillRef idx="3">
+            <a:schemeClr val="accent1"/>
+          </a:fillRef>
+          <a:effectRef idx="2">
+            <a:schemeClr val="accent1"/>
+          </a:effectRef>
+          <a:fontRef idx="minor">
+            <a:schemeClr val="lt1"/>
+          </a:fontRef>
+        </p:style>
+        <p:txBody>
+          <a:bodyPr rtlCol="0" anchor="ctr"/>
+          <a:lstStyle/>
+          <a:p>
+            <a:pPr algn="ctr"/>
+          </a:p>
+        </p:txBody>
+      </p:sp>
       <p:graphicFrame>
         <p:nvGraphicFramePr>
           <p:cNvPr id="4" name="Table 3"/>
@@ -5657,7 +6047,7 @@
         </p:nvGraphicFramePr>
         <p:xfrm>
           <a:off x="640080" y="1234440"/>
-          <a:ext cx="10972800" cy="3328416"/>
+          <a:ext cx="10908792" cy="4279392"/>
         </p:xfrm>
         <a:graphic>
           <a:graphicData uri="http://schemas.openxmlformats.org/drawingml/2006/table">
@@ -5666,9 +6056,10 @@
                 <a:tableStyleId>{5C22544A-7EE6-4342-B048-85BDC9FD1C3A}</a:tableStyleId>
               </a:tblPr>
               <a:tblGrid>
-                <a:gridCol w="4206240"/>
-                <a:gridCol w="3108960"/>
-                <a:gridCol w="3657600"/>
+                <a:gridCol w="2788920"/>
+                <a:gridCol w="5120640"/>
+                <a:gridCol w="1417320"/>
+                <a:gridCol w="1581912"/>
               </a:tblGrid>
               <a:tr h="475488">
                 <a:tc>
@@ -5696,11 +6087,11 @@
                           <a:ea typeface="微软雅黑"/>
                           <a:cs typeface="Arial"/>
                         </a:rPr>
-                        <a:t>要点</a:t>
+                        <a:t>问题</a:t>
                       </a:r>
                     </a:p>
                   </a:txBody>
-                  <a:tcPr>
+                  <a:tcPr marT="27432" marB="27432">
                     <a:solidFill>
                       <a:srgbClr val="F7F7F5"/>
                     </a:solidFill>
@@ -5731,11 +6122,11 @@
                           <a:ea typeface="微软雅黑"/>
                           <a:cs typeface="Arial"/>
                         </a:rPr>
-                        <a:t>证据强度</a:t>
+                        <a:t>本课题的回答要点</a:t>
                       </a:r>
                     </a:p>
                   </a:txBody>
-                  <a:tcPr>
+                  <a:tcPr marT="27432" marB="27432">
                     <a:solidFill>
                       <a:srgbClr val="F7F7F5"/>
                     </a:solidFill>
@@ -5766,11 +6157,46 @@
                           <a:ea typeface="微软雅黑"/>
                           <a:cs typeface="Arial"/>
                         </a:rPr>
-                        <a:t>与本课题的关系</a:t>
+                        <a:t>证据强度</a:t>
                       </a:r>
                     </a:p>
                   </a:txBody>
-                  <a:tcPr>
+                  <a:tcPr marT="27432" marB="27432">
+                    <a:solidFill>
+                      <a:srgbClr val="F7F7F5"/>
+                    </a:solidFill>
+                  </a:tcPr>
+                </a:tc>
+                <a:tc>
+                  <a:txBody>
+                    <a:bodyPr/>
+                    <a:lstStyle/>
+                    <a:p>
+                      <a:pPr algn="l">
+                        <a:lnSpc>
+                          <a:spcPct val="105000"/>
+                        </a:lnSpc>
+                        <a:spcBef>
+                          <a:spcPts val="0"/>
+                        </a:spcBef>
+                        <a:spcAft>
+                          <a:spcPts val="0"/>
+                        </a:spcAft>
+                      </a:pPr>
+                      <a:r>
+                        <a:rPr sz="1500" b="1">
+                          <a:solidFill>
+                            <a:srgbClr val="111111"/>
+                          </a:solidFill>
+                          <a:latin typeface="Arial"/>
+                          <a:ea typeface="微软雅黑"/>
+                          <a:cs typeface="Arial"/>
+                        </a:rPr>
+                        <a:t>代表文献</a:t>
+                      </a:r>
+                    </a:p>
+                  </a:txBody>
+                  <a:tcPr marT="27432" marB="27432">
                     <a:solidFill>
                       <a:srgbClr val="F7F7F5"/>
                     </a:solidFill>
@@ -5785,7 +6211,42 @@
                     <a:p>
                       <a:pPr algn="l">
                         <a:lnSpc>
-                          <a:spcPct val="110000"/>
+                          <a:spcPct val="105000"/>
+                        </a:lnSpc>
+                        <a:spcBef>
+                          <a:spcPts val="0"/>
+                        </a:spcBef>
+                        <a:spcAft>
+                          <a:spcPts val="0"/>
+                        </a:spcAft>
+                      </a:pPr>
+                      <a:r>
+                        <a:rPr sz="1500" b="0">
+                          <a:solidFill>
+                            <a:srgbClr val="111111"/>
+                          </a:solidFill>
+                          <a:latin typeface="Arial"/>
+                          <a:ea typeface="微软雅黑"/>
+                          <a:cs typeface="Arial"/>
+                        </a:rPr>
+                        <a:t>① 抗菌肽与 AD 的关联</a:t>
+                      </a:r>
+                    </a:p>
+                  </a:txBody>
+                  <a:tcPr marT="27432" marB="27432">
+                    <a:solidFill>
+                      <a:srgbClr val="FFFFFF"/>
+                    </a:solidFill>
+                  </a:tcPr>
+                </a:tc>
+                <a:tc>
+                  <a:txBody>
+                    <a:bodyPr/>
+                    <a:lstStyle/>
+                    <a:p>
+                      <a:pPr algn="l">
+                        <a:lnSpc>
+                          <a:spcPct val="105000"/>
                         </a:lnSpc>
                         <a:spcBef>
                           <a:spcPts val="0"/>
@@ -5803,11 +6264,15 @@
                           <a:ea typeface="微软雅黑"/>
                           <a:cs typeface="Arial"/>
                         </a:rPr>
-                        <a:t>Aβ 具抗菌活性，AD 脑匀浆活性更高</a:t>
+                        <a:t>Aβ 本身即抗菌肽，宿主抗菌肽在 AD 中上调</a:t>
                       </a:r>
                     </a:p>
                   </a:txBody>
-                  <a:tcPr/>
+                  <a:tcPr marT="27432" marB="27432">
+                    <a:solidFill>
+                      <a:srgbClr val="FFFFFF"/>
+                    </a:solidFill>
+                  </a:tcPr>
                 </a:tc>
                 <a:tc>
                   <a:txBody>
@@ -5816,7 +6281,7 @@
                     <a:p>
                       <a:pPr algn="l">
                         <a:lnSpc>
-                          <a:spcPct val="110000"/>
+                          <a:spcPct val="105000"/>
                         </a:lnSpc>
                         <a:spcBef>
                           <a:spcPts val="0"/>
@@ -5834,11 +6299,15 @@
                           <a:ea typeface="微软雅黑"/>
                           <a:cs typeface="Arial"/>
                         </a:rPr>
-                        <a:t>强：体外 + 人脑组织</a:t>
+                        <a:t>强</a:t>
                       </a:r>
                     </a:p>
                   </a:txBody>
-                  <a:tcPr/>
+                  <a:tcPr marT="27432" marB="27432">
+                    <a:solidFill>
+                      <a:srgbClr val="FFFFFF"/>
+                    </a:solidFill>
+                  </a:tcPr>
                 </a:tc>
                 <a:tc>
                   <a:txBody>
@@ -5847,7 +6316,7 @@
                     <a:p>
                       <a:pPr algn="l">
                         <a:lnSpc>
-                          <a:spcPct val="110000"/>
+                          <a:spcPct val="105000"/>
                         </a:lnSpc>
                         <a:spcBef>
                           <a:spcPts val="0"/>
@@ -5865,11 +6334,15 @@
                           <a:ea typeface="微软雅黑"/>
                           <a:cs typeface="Arial"/>
                         </a:rPr>
-                        <a:t>提供抗菌肽研究的出发点</a:t>
+                        <a:t>[1][2][8][9]</a:t>
                       </a:r>
                     </a:p>
                   </a:txBody>
-                  <a:tcPr/>
+                  <a:tcPr marT="27432" marB="27432">
+                    <a:solidFill>
+                      <a:srgbClr val="FFFFFF"/>
+                    </a:solidFill>
+                  </a:tcPr>
                 </a:tc>
               </a:tr>
               <a:tr h="475488">
@@ -5880,7 +6353,42 @@
                     <a:p>
                       <a:pPr algn="l">
                         <a:lnSpc>
-                          <a:spcPct val="110000"/>
+                          <a:spcPct val="105000"/>
+                        </a:lnSpc>
+                        <a:spcBef>
+                          <a:spcPts val="0"/>
+                        </a:spcBef>
+                        <a:spcAft>
+                          <a:spcPts val="0"/>
+                        </a:spcAft>
+                      </a:pPr>
+                      <a:r>
+                        <a:rPr sz="1500" b="0">
+                          <a:solidFill>
+                            <a:srgbClr val="111111"/>
+                          </a:solidFill>
+                          <a:latin typeface="Arial"/>
+                          <a:ea typeface="微软雅黑"/>
+                          <a:cs typeface="Arial"/>
+                        </a:rPr>
+                        <a:t>② AD 与感染的关联</a:t>
+                      </a:r>
+                    </a:p>
+                  </a:txBody>
+                  <a:tcPr marT="27432" marB="27432">
+                    <a:solidFill>
+                      <a:srgbClr val="FFFFFF"/>
+                    </a:solidFill>
+                  </a:tcPr>
+                </a:tc>
+                <a:tc>
+                  <a:txBody>
+                    <a:bodyPr/>
+                    <a:lstStyle/>
+                    <a:p>
+                      <a:pPr algn="l">
+                        <a:lnSpc>
+                          <a:spcPct val="105000"/>
                         </a:lnSpc>
                         <a:spcBef>
                           <a:spcPts val="0"/>
@@ -5898,11 +6406,15 @@
                           <a:ea typeface="微软雅黑"/>
                           <a:cs typeface="Arial"/>
                         </a:rPr>
-                        <a:t>AD 脑内宿主抗菌肽上调</a:t>
+                        <a:t>AD 脑细菌读段与内毒素升高，多类病原体检出</a:t>
                       </a:r>
                     </a:p>
                   </a:txBody>
-                  <a:tcPr/>
+                  <a:tcPr marT="27432" marB="27432">
+                    <a:solidFill>
+                      <a:srgbClr val="FFFFFF"/>
+                    </a:solidFill>
+                  </a:tcPr>
                 </a:tc>
                 <a:tc>
                   <a:txBody>
@@ -5911,7 +6423,7 @@
                     <a:p>
                       <a:pPr algn="l">
                         <a:lnSpc>
-                          <a:spcPct val="110000"/>
+                          <a:spcPct val="105000"/>
                         </a:lnSpc>
                         <a:spcBef>
                           <a:spcPts val="0"/>
@@ -5929,11 +6441,15 @@
                           <a:ea typeface="微软雅黑"/>
                           <a:cs typeface="Arial"/>
                         </a:rPr>
-                        <a:t>中—强：尸检组织，样本有限</a:t>
+                        <a:t>中—强</a:t>
                       </a:r>
                     </a:p>
                   </a:txBody>
-                  <a:tcPr/>
+                  <a:tcPr marT="27432" marB="27432">
+                    <a:solidFill>
+                      <a:srgbClr val="FFFFFF"/>
+                    </a:solidFill>
+                  </a:tcPr>
                 </a:tc>
                 <a:tc>
                   <a:txBody>
@@ -5942,7 +6458,7 @@
                     <a:p>
                       <a:pPr algn="l">
                         <a:lnSpc>
-                          <a:spcPct val="110000"/>
+                          <a:spcPct val="105000"/>
                         </a:lnSpc>
                         <a:spcBef>
                           <a:spcPts val="0"/>
@@ -5960,11 +6476,15 @@
                           <a:ea typeface="微软雅黑"/>
                           <a:cs typeface="Arial"/>
                         </a:rPr>
-                        <a:t>作为宿主来源的参照系</a:t>
+                        <a:t>[11][12][13][14]</a:t>
                       </a:r>
                     </a:p>
                   </a:txBody>
-                  <a:tcPr/>
+                  <a:tcPr marT="27432" marB="27432">
+                    <a:solidFill>
+                      <a:srgbClr val="FFFFFF"/>
+                    </a:solidFill>
+                  </a:tcPr>
                 </a:tc>
               </a:tr>
               <a:tr h="475488">
@@ -5975,7 +6495,42 @@
                     <a:p>
                       <a:pPr algn="l">
                         <a:lnSpc>
-                          <a:spcPct val="110000"/>
+                          <a:spcPct val="105000"/>
+                        </a:lnSpc>
+                        <a:spcBef>
+                          <a:spcPts val="0"/>
+                        </a:spcBef>
+                        <a:spcAft>
+                          <a:spcPts val="0"/>
+                        </a:spcAft>
+                      </a:pPr>
+                      <a:r>
+                        <a:rPr sz="1500" b="0">
+                          <a:solidFill>
+                            <a:srgbClr val="111111"/>
+                          </a:solidFill>
+                          <a:latin typeface="Arial"/>
+                          <a:ea typeface="微软雅黑"/>
+                          <a:cs typeface="Arial"/>
+                        </a:rPr>
+                        <a:t>③ 抗菌活性可预测</a:t>
+                      </a:r>
+                    </a:p>
+                  </a:txBody>
+                  <a:tcPr marT="27432" marB="27432">
+                    <a:solidFill>
+                      <a:srgbClr val="FFFFFF"/>
+                    </a:solidFill>
+                  </a:tcPr>
+                </a:tc>
+                <a:tc>
+                  <a:txBody>
+                    <a:bodyPr/>
+                    <a:lstStyle/>
+                    <a:p>
+                      <a:pPr algn="l">
+                        <a:lnSpc>
+                          <a:spcPct val="105000"/>
                         </a:lnSpc>
                         <a:spcBef>
                           <a:spcPts val="0"/>
@@ -5993,11 +6548,15 @@
                           <a:ea typeface="微软雅黑"/>
                           <a:cs typeface="Arial"/>
                         </a:rPr>
-                        <a:t>AChE 经 PAS 促进 Aβ 聚集</a:t>
+                        <a:t>宏基因组 + 深度学习挖掘已有完整先例</a:t>
                       </a:r>
                     </a:p>
                   </a:txBody>
-                  <a:tcPr/>
+                  <a:tcPr marT="27432" marB="27432">
+                    <a:solidFill>
+                      <a:srgbClr val="FFFFFF"/>
+                    </a:solidFill>
+                  </a:tcPr>
                 </a:tc>
                 <a:tc>
                   <a:txBody>
@@ -6006,7 +6565,7 @@
                     <a:p>
                       <a:pPr algn="l">
                         <a:lnSpc>
-                          <a:spcPct val="110000"/>
+                          <a:spcPct val="105000"/>
                         </a:lnSpc>
                         <a:spcBef>
                           <a:spcPts val="0"/>
@@ -6024,11 +6583,15 @@
                           <a:ea typeface="微软雅黑"/>
                           <a:cs typeface="Arial"/>
                         </a:rPr>
-                        <a:t>强：体外动力学 + 位点阻断</a:t>
+                        <a:t>强</a:t>
                       </a:r>
                     </a:p>
                   </a:txBody>
-                  <a:tcPr/>
+                  <a:tcPr marT="27432" marB="27432">
+                    <a:solidFill>
+                      <a:srgbClr val="FFFFFF"/>
+                    </a:solidFill>
+                  </a:tcPr>
                 </a:tc>
                 <a:tc>
                   <a:txBody>
@@ -6037,7 +6600,7 @@
                     <a:p>
                       <a:pPr algn="l">
                         <a:lnSpc>
-                          <a:spcPct val="110000"/>
+                          <a:spcPct val="105000"/>
                         </a:lnSpc>
                         <a:spcBef>
                           <a:spcPts val="0"/>
@@ -6055,11 +6618,15 @@
                           <a:ea typeface="微软雅黑"/>
                           <a:cs typeface="Arial"/>
                         </a:rPr>
-                        <a:t>机制关联的参照体系</a:t>
+                        <a:t>[21][22][24]</a:t>
                       </a:r>
                     </a:p>
                   </a:txBody>
-                  <a:tcPr/>
+                  <a:tcPr marT="27432" marB="27432">
+                    <a:solidFill>
+                      <a:srgbClr val="FFFFFF"/>
+                    </a:solidFill>
+                  </a:tcPr>
                 </a:tc>
               </a:tr>
               <a:tr h="475488">
@@ -6070,7 +6637,42 @@
                     <a:p>
                       <a:pPr algn="l">
                         <a:lnSpc>
-                          <a:spcPct val="110000"/>
+                          <a:spcPct val="105000"/>
+                        </a:lnSpc>
+                        <a:spcBef>
+                          <a:spcPts val="0"/>
+                        </a:spcBef>
+                        <a:spcAft>
+                          <a:spcPts val="0"/>
+                        </a:spcAft>
+                      </a:pPr>
+                      <a:r>
+                        <a:rPr sz="1500" b="0">
+                          <a:solidFill>
+                            <a:srgbClr val="111111"/>
+                          </a:solidFill>
+                          <a:latin typeface="Arial"/>
+                          <a:ea typeface="微软雅黑"/>
+                          <a:cs typeface="Arial"/>
+                        </a:rPr>
+                        <a:t>④ AD 组特有肽</a:t>
+                      </a:r>
+                    </a:p>
+                  </a:txBody>
+                  <a:tcPr marT="27432" marB="27432">
+                    <a:solidFill>
+                      <a:srgbClr val="FFFFFF"/>
+                    </a:solidFill>
+                  </a:tcPr>
+                </a:tc>
+                <a:tc>
+                  <a:txBody>
+                    <a:bodyPr/>
+                    <a:lstStyle/>
+                    <a:p>
+                      <a:pPr algn="l">
+                        <a:lnSpc>
+                          <a:spcPct val="105000"/>
                         </a:lnSpc>
                         <a:spcBef>
                           <a:spcPts val="0"/>
@@ -6088,11 +6690,15 @@
                           <a:ea typeface="微软雅黑"/>
                           <a:cs typeface="Arial"/>
                         </a:rPr>
-                        <a:t>AD 患者菌群失衡与炎症升高</a:t>
+                        <a:t>菌群随认知阶段梯度变化，阶段特有肽有依据</a:t>
                       </a:r>
                     </a:p>
                   </a:txBody>
-                  <a:tcPr/>
+                  <a:tcPr marT="27432" marB="27432">
+                    <a:solidFill>
+                      <a:srgbClr val="FFFFFF"/>
+                    </a:solidFill>
+                  </a:tcPr>
                 </a:tc>
                 <a:tc>
                   <a:txBody>
@@ -6101,7 +6707,7 @@
                     <a:p>
                       <a:pPr algn="l">
                         <a:lnSpc>
-                          <a:spcPct val="110000"/>
+                          <a:spcPct val="105000"/>
                         </a:lnSpc>
                         <a:spcBef>
                           <a:spcPts val="0"/>
@@ -6119,11 +6725,15 @@
                           <a:ea typeface="微软雅黑"/>
                           <a:cs typeface="Arial"/>
                         </a:rPr>
-                        <a:t>中：研究异质性大</a:t>
+                        <a:t>中</a:t>
                       </a:r>
                     </a:p>
                   </a:txBody>
-                  <a:tcPr/>
+                  <a:tcPr marT="27432" marB="27432">
+                    <a:solidFill>
+                      <a:srgbClr val="FFFFFF"/>
+                    </a:solidFill>
+                  </a:tcPr>
                 </a:tc>
                 <a:tc>
                   <a:txBody>
@@ -6132,7 +6742,7 @@
                     <a:p>
                       <a:pPr algn="l">
                         <a:lnSpc>
-                          <a:spcPct val="110000"/>
+                          <a:spcPct val="105000"/>
                         </a:lnSpc>
                         <a:spcBef>
                           <a:spcPts val="0"/>
@@ -6150,11 +6760,15 @@
                           <a:ea typeface="微软雅黑"/>
                           <a:cs typeface="Arial"/>
                         </a:rPr>
-                        <a:t>阶段特异性抗菌肽的合理性</a:t>
+                        <a:t>[26][28][30]</a:t>
                       </a:r>
                     </a:p>
                   </a:txBody>
-                  <a:tcPr/>
+                  <a:tcPr marT="27432" marB="27432">
+                    <a:solidFill>
+                      <a:srgbClr val="FFFFFF"/>
+                    </a:solidFill>
+                  </a:tcPr>
                 </a:tc>
               </a:tr>
               <a:tr h="475488">
@@ -6165,7 +6779,42 @@
                     <a:p>
                       <a:pPr algn="l">
                         <a:lnSpc>
-                          <a:spcPct val="110000"/>
+                          <a:spcPct val="105000"/>
+                        </a:lnSpc>
+                        <a:spcBef>
+                          <a:spcPts val="0"/>
+                        </a:spcBef>
+                        <a:spcAft>
+                          <a:spcPts val="0"/>
+                        </a:spcAft>
+                      </a:pPr>
+                      <a:r>
+                        <a:rPr sz="1500" b="0">
+                          <a:solidFill>
+                            <a:srgbClr val="111111"/>
+                          </a:solidFill>
+                          <a:latin typeface="Arial"/>
+                          <a:ea typeface="微软雅黑"/>
+                          <a:cs typeface="Arial"/>
+                        </a:rPr>
+                        <a:t>⑤ 促进还是抑制</a:t>
+                      </a:r>
+                    </a:p>
+                  </a:txBody>
+                  <a:tcPr marT="27432" marB="27432">
+                    <a:solidFill>
+                      <a:srgbClr val="FFFFFF"/>
+                    </a:solidFill>
+                  </a:tcPr>
+                </a:tc>
+                <a:tc>
+                  <a:txBody>
+                    <a:bodyPr/>
+                    <a:lstStyle/>
+                    <a:p>
+                      <a:pPr algn="l">
+                        <a:lnSpc>
+                          <a:spcPct val="105000"/>
                         </a:lnSpc>
                         <a:spcBef>
                           <a:spcPts val="0"/>
@@ -6183,11 +6832,15 @@
                           <a:ea typeface="微软雅黑"/>
                           <a:cs typeface="Arial"/>
                         </a:rPr>
-                        <a:t>微生物源抗菌肽在 AD 增多</a:t>
+                        <a:t>两者同时成立：低浓度抗菌，长期过量致病</a:t>
                       </a:r>
                     </a:p>
                   </a:txBody>
-                  <a:tcPr/>
+                  <a:tcPr marT="27432" marB="27432">
+                    <a:solidFill>
+                      <a:srgbClr val="FFFFFF"/>
+                    </a:solidFill>
+                  </a:tcPr>
                 </a:tc>
                 <a:tc>
                   <a:txBody>
@@ -6196,7 +6849,7 @@
                     <a:p>
                       <a:pPr algn="l">
                         <a:lnSpc>
-                          <a:spcPct val="110000"/>
+                          <a:spcPct val="105000"/>
                         </a:lnSpc>
                         <a:spcBef>
                           <a:spcPts val="0"/>
@@ -6214,11 +6867,15 @@
                           <a:ea typeface="微软雅黑"/>
                           <a:cs typeface="Arial"/>
                         </a:rPr>
-                        <a:t>待验证</a:t>
+                        <a:t>中—强</a:t>
                       </a:r>
                     </a:p>
                   </a:txBody>
-                  <a:tcPr/>
+                  <a:tcPr marT="27432" marB="27432">
+                    <a:solidFill>
+                      <a:srgbClr val="FFFFFF"/>
+                    </a:solidFill>
+                  </a:tcPr>
                 </a:tc>
                 <a:tc>
                   <a:txBody>
@@ -6227,7 +6884,7 @@
                     <a:p>
                       <a:pPr algn="l">
                         <a:lnSpc>
-                          <a:spcPct val="110000"/>
+                          <a:spcPct val="105000"/>
                         </a:lnSpc>
                         <a:spcBef>
                           <a:spcPts val="0"/>
@@ -6245,11 +6902,15 @@
                           <a:ea typeface="微软雅黑"/>
                           <a:cs typeface="Arial"/>
                         </a:rPr>
-                        <a:t>本课题要回答的问题</a:t>
+                        <a:t>[1][3][6][20]</a:t>
                       </a:r>
                     </a:p>
                   </a:txBody>
-                  <a:tcPr/>
+                  <a:tcPr marT="27432" marB="27432">
+                    <a:solidFill>
+                      <a:srgbClr val="FFFFFF"/>
+                    </a:solidFill>
+                  </a:tcPr>
                 </a:tc>
               </a:tr>
               <a:tr h="475488">
@@ -6260,7 +6921,42 @@
                     <a:p>
                       <a:pPr algn="l">
                         <a:lnSpc>
-                          <a:spcPct val="110000"/>
+                          <a:spcPct val="105000"/>
+                        </a:lnSpc>
+                        <a:spcBef>
+                          <a:spcPts val="0"/>
+                        </a:spcBef>
+                        <a:spcAft>
+                          <a:spcPts val="0"/>
+                        </a:spcAft>
+                      </a:pPr>
+                      <a:r>
+                        <a:rPr sz="1500" b="0">
+                          <a:solidFill>
+                            <a:srgbClr val="111111"/>
+                          </a:solidFill>
+                          <a:latin typeface="Arial"/>
+                          <a:ea typeface="微软雅黑"/>
+                          <a:cs typeface="Arial"/>
+                        </a:rPr>
+                        <a:t>⑥ 抑制感染证据</a:t>
+                      </a:r>
+                    </a:p>
+                  </a:txBody>
+                  <a:tcPr marT="27432" marB="27432">
+                    <a:solidFill>
+                      <a:srgbClr val="FFFFFF"/>
+                    </a:solidFill>
+                  </a:tcPr>
+                </a:tc>
+                <a:tc>
+                  <a:txBody>
+                    <a:bodyPr/>
+                    <a:lstStyle/>
+                    <a:p>
+                      <a:pPr algn="l">
+                        <a:lnSpc>
+                          <a:spcPct val="105000"/>
                         </a:lnSpc>
                         <a:spcBef>
                           <a:spcPts val="0"/>
@@ -6278,11 +6974,15 @@
                           <a:ea typeface="微软雅黑"/>
                           <a:cs typeface="Arial"/>
                         </a:rPr>
-                        <a:t>候选肽经 AChE–Aβ 界面影响成核</a:t>
+                        <a:t>小鼠抗感染更强；纤维网捕获病原体</a:t>
                       </a:r>
                     </a:p>
                   </a:txBody>
-                  <a:tcPr/>
+                  <a:tcPr marT="27432" marB="27432">
+                    <a:solidFill>
+                      <a:srgbClr val="FFFFFF"/>
+                    </a:solidFill>
+                  </a:tcPr>
                 </a:tc>
                 <a:tc>
                   <a:txBody>
@@ -6291,7 +6991,7 @@
                     <a:p>
                       <a:pPr algn="l">
                         <a:lnSpc>
-                          <a:spcPct val="110000"/>
+                          <a:spcPct val="105000"/>
                         </a:lnSpc>
                         <a:spcBef>
                           <a:spcPts val="0"/>
@@ -6309,11 +7009,15 @@
                           <a:ea typeface="微软雅黑"/>
                           <a:cs typeface="Arial"/>
                         </a:rPr>
-                        <a:t>待验证（H1—H3）</a:t>
+                        <a:t>强</a:t>
                       </a:r>
                     </a:p>
                   </a:txBody>
-                  <a:tcPr/>
+                  <a:tcPr marT="27432" marB="27432">
+                    <a:solidFill>
+                      <a:srgbClr val="FFFFFF"/>
+                    </a:solidFill>
+                  </a:tcPr>
                 </a:tc>
                 <a:tc>
                   <a:txBody>
@@ -6322,7 +7026,7 @@
                     <a:p>
                       <a:pPr algn="l">
                         <a:lnSpc>
-                          <a:spcPct val="110000"/>
+                          <a:spcPct val="105000"/>
                         </a:lnSpc>
                         <a:spcBef>
                           <a:spcPts val="0"/>
@@ -6340,11 +7044,299 @@
                           <a:ea typeface="微软雅黑"/>
                           <a:cs typeface="Arial"/>
                         </a:rPr>
-                        <a:t>下一步的对接、动力学与实验</a:t>
+                        <a:t>[1][3][4]</a:t>
                       </a:r>
                     </a:p>
                   </a:txBody>
-                  <a:tcPr/>
+                  <a:tcPr marT="27432" marB="27432">
+                    <a:solidFill>
+                      <a:srgbClr val="FFFFFF"/>
+                    </a:solidFill>
+                  </a:tcPr>
+                </a:tc>
+              </a:tr>
+              <a:tr h="475488">
+                <a:tc>
+                  <a:txBody>
+                    <a:bodyPr/>
+                    <a:lstStyle/>
+                    <a:p>
+                      <a:pPr algn="l">
+                        <a:lnSpc>
+                          <a:spcPct val="105000"/>
+                        </a:lnSpc>
+                        <a:spcBef>
+                          <a:spcPts val="0"/>
+                        </a:spcBef>
+                        <a:spcAft>
+                          <a:spcPts val="0"/>
+                        </a:spcAft>
+                      </a:pPr>
+                      <a:r>
+                        <a:rPr sz="1500" b="0">
+                          <a:solidFill>
+                            <a:srgbClr val="111111"/>
+                          </a:solidFill>
+                          <a:latin typeface="Arial"/>
+                          <a:ea typeface="微软雅黑"/>
+                          <a:cs typeface="Arial"/>
+                        </a:rPr>
+                        <a:t>⑦ 为什么 AD 更多</a:t>
+                      </a:r>
+                    </a:p>
+                  </a:txBody>
+                  <a:tcPr marT="27432" marB="27432">
+                    <a:solidFill>
+                      <a:srgbClr val="FFFFFF"/>
+                    </a:solidFill>
+                  </a:tcPr>
+                </a:tc>
+                <a:tc>
+                  <a:txBody>
+                    <a:bodyPr/>
+                    <a:lstStyle/>
+                    <a:p>
+                      <a:pPr algn="l">
+                        <a:lnSpc>
+                          <a:spcPct val="105000"/>
+                        </a:lnSpc>
+                        <a:spcBef>
+                          <a:spcPts val="0"/>
+                        </a:spcBef>
+                        <a:spcAft>
+                          <a:spcPts val="0"/>
+                        </a:spcAft>
+                      </a:pPr>
+                      <a:r>
+                        <a:rPr sz="1500" b="0">
+                          <a:solidFill>
+                            <a:srgbClr val="333333"/>
+                          </a:solidFill>
+                          <a:latin typeface="Arial"/>
+                          <a:ea typeface="微软雅黑"/>
+                          <a:cs typeface="Arial"/>
+                        </a:rPr>
+                        <a:t>LPS–TLR4/NF-κB 上调 Aβ 与抗菌肽，形成正反馈</a:t>
+                      </a:r>
+                    </a:p>
+                  </a:txBody>
+                  <a:tcPr marT="27432" marB="27432">
+                    <a:solidFill>
+                      <a:srgbClr val="FFFFFF"/>
+                    </a:solidFill>
+                  </a:tcPr>
+                </a:tc>
+                <a:tc>
+                  <a:txBody>
+                    <a:bodyPr/>
+                    <a:lstStyle/>
+                    <a:p>
+                      <a:pPr algn="l">
+                        <a:lnSpc>
+                          <a:spcPct val="105000"/>
+                        </a:lnSpc>
+                        <a:spcBef>
+                          <a:spcPts val="0"/>
+                        </a:spcBef>
+                        <a:spcAft>
+                          <a:spcPts val="0"/>
+                        </a:spcAft>
+                      </a:pPr>
+                      <a:r>
+                        <a:rPr sz="1500" b="0">
+                          <a:solidFill>
+                            <a:srgbClr val="333333"/>
+                          </a:solidFill>
+                          <a:latin typeface="Arial"/>
+                          <a:ea typeface="微软雅黑"/>
+                          <a:cs typeface="Arial"/>
+                        </a:rPr>
+                        <a:t>中—强</a:t>
+                      </a:r>
+                    </a:p>
+                  </a:txBody>
+                  <a:tcPr marT="27432" marB="27432">
+                    <a:solidFill>
+                      <a:srgbClr val="FFFFFF"/>
+                    </a:solidFill>
+                  </a:tcPr>
+                </a:tc>
+                <a:tc>
+                  <a:txBody>
+                    <a:bodyPr/>
+                    <a:lstStyle/>
+                    <a:p>
+                      <a:pPr algn="l">
+                        <a:lnSpc>
+                          <a:spcPct val="105000"/>
+                        </a:lnSpc>
+                        <a:spcBef>
+                          <a:spcPts val="0"/>
+                        </a:spcBef>
+                        <a:spcAft>
+                          <a:spcPts val="0"/>
+                        </a:spcAft>
+                      </a:pPr>
+                      <a:r>
+                        <a:rPr sz="1500" b="0">
+                          <a:solidFill>
+                            <a:srgbClr val="333333"/>
+                          </a:solidFill>
+                          <a:latin typeface="Arial"/>
+                          <a:ea typeface="微软雅黑"/>
+                          <a:cs typeface="Arial"/>
+                        </a:rPr>
+                        <a:t>[9][11][46]</a:t>
+                      </a:r>
+                    </a:p>
+                  </a:txBody>
+                  <a:tcPr marT="27432" marB="27432">
+                    <a:solidFill>
+                      <a:srgbClr val="FFFFFF"/>
+                    </a:solidFill>
+                  </a:tcPr>
+                </a:tc>
+              </a:tr>
+              <a:tr h="475488">
+                <a:tc>
+                  <a:txBody>
+                    <a:bodyPr/>
+                    <a:lstStyle/>
+                    <a:p>
+                      <a:pPr algn="l">
+                        <a:lnSpc>
+                          <a:spcPct val="105000"/>
+                        </a:lnSpc>
+                        <a:spcBef>
+                          <a:spcPts val="0"/>
+                        </a:spcBef>
+                        <a:spcAft>
+                          <a:spcPts val="0"/>
+                        </a:spcAft>
+                      </a:pPr>
+                      <a:r>
+                        <a:rPr sz="1500" b="0">
+                          <a:solidFill>
+                            <a:srgbClr val="111111"/>
+                          </a:solidFill>
+                          <a:latin typeface="Arial"/>
+                          <a:ea typeface="微软雅黑"/>
+                          <a:cs typeface="Arial"/>
+                        </a:rPr>
+                        <a:t>⑧ 谁更多（对照）</a:t>
+                      </a:r>
+                    </a:p>
+                  </a:txBody>
+                  <a:tcPr marT="27432" marB="27432">
+                    <a:solidFill>
+                      <a:srgbClr val="FFFFFF"/>
+                    </a:solidFill>
+                  </a:tcPr>
+                </a:tc>
+                <a:tc>
+                  <a:txBody>
+                    <a:bodyPr/>
+                    <a:lstStyle/>
+                    <a:p>
+                      <a:pPr algn="l">
+                        <a:lnSpc>
+                          <a:spcPct val="105000"/>
+                        </a:lnSpc>
+                        <a:spcBef>
+                          <a:spcPts val="0"/>
+                        </a:spcBef>
+                        <a:spcAft>
+                          <a:spcPts val="0"/>
+                        </a:spcAft>
+                      </a:pPr>
+                      <a:r>
+                        <a:rPr sz="1500" b="0">
+                          <a:solidFill>
+                            <a:srgbClr val="333333"/>
+                          </a:solidFill>
+                          <a:latin typeface="Arial"/>
+                          <a:ea typeface="微软雅黑"/>
+                          <a:cs typeface="Arial"/>
+                        </a:rPr>
+                        <a:t>总体 AD 更高，乳铁蛋白等反而下降</a:t>
+                      </a:r>
+                    </a:p>
+                  </a:txBody>
+                  <a:tcPr marT="27432" marB="27432">
+                    <a:solidFill>
+                      <a:srgbClr val="FFFFFF"/>
+                    </a:solidFill>
+                  </a:tcPr>
+                </a:tc>
+                <a:tc>
+                  <a:txBody>
+                    <a:bodyPr/>
+                    <a:lstStyle/>
+                    <a:p>
+                      <a:pPr algn="l">
+                        <a:lnSpc>
+                          <a:spcPct val="105000"/>
+                        </a:lnSpc>
+                        <a:spcBef>
+                          <a:spcPts val="0"/>
+                        </a:spcBef>
+                        <a:spcAft>
+                          <a:spcPts val="0"/>
+                        </a:spcAft>
+                      </a:pPr>
+                      <a:r>
+                        <a:rPr sz="1500" b="0">
+                          <a:solidFill>
+                            <a:srgbClr val="333333"/>
+                          </a:solidFill>
+                          <a:latin typeface="Arial"/>
+                          <a:ea typeface="微软雅黑"/>
+                          <a:cs typeface="Arial"/>
+                        </a:rPr>
+                        <a:t>中</a:t>
+                      </a:r>
+                    </a:p>
+                  </a:txBody>
+                  <a:tcPr marT="27432" marB="27432">
+                    <a:solidFill>
+                      <a:srgbClr val="FFFFFF"/>
+                    </a:solidFill>
+                  </a:tcPr>
+                </a:tc>
+                <a:tc>
+                  <a:txBody>
+                    <a:bodyPr/>
+                    <a:lstStyle/>
+                    <a:p>
+                      <a:pPr algn="l">
+                        <a:lnSpc>
+                          <a:spcPct val="105000"/>
+                        </a:lnSpc>
+                        <a:spcBef>
+                          <a:spcPts val="0"/>
+                        </a:spcBef>
+                        <a:spcAft>
+                          <a:spcPts val="0"/>
+                        </a:spcAft>
+                      </a:pPr>
+                      <a:r>
+                        <a:rPr sz="1500" b="0">
+                          <a:solidFill>
+                            <a:srgbClr val="333333"/>
+                          </a:solidFill>
+                          <a:latin typeface="Arial"/>
+                          <a:ea typeface="微软雅黑"/>
+                          <a:cs typeface="Arial"/>
+                        </a:rPr>
+                        <a:t>[42][43][44]</a:t>
+                      </a:r>
+                    </a:p>
+                  </a:txBody>
+                  <a:tcPr marT="27432" marB="27432">
+                    <a:solidFill>
+                      <a:srgbClr val="FFFFFF"/>
+                    </a:solidFill>
+                  </a:tcPr>
                 </a:tc>
               </a:tr>
             </a:tbl>
@@ -6440,7 +7432,1414 @@
                 <a:ea typeface="微软雅黑"/>
                 <a:cs typeface="Arial"/>
               </a:rPr>
-              <a:t>12 / 12</a:t>
+              <a:t>13 / 14</a:t>
+            </a:r>
+          </a:p>
+        </p:txBody>
+      </p:sp>
+    </p:spTree>
+  </p:cSld>
+  <p:clrMapOvr>
+    <a:masterClrMapping/>
+  </p:clrMapOvr>
+</p:sld>
+</file>
+
+<file path=ppt/slides/slide14.xml><?xml version="1.0" encoding="utf-8"?>
+<p:sld xmlns:a="http://schemas.openxmlformats.org/drawingml/2006/main" xmlns:p="http://schemas.openxmlformats.org/presentationml/2006/main" xmlns:r="http://schemas.openxmlformats.org/officeDocument/2006/relationships">
+  <p:cSld>
+    <p:spTree>
+      <p:nvGrpSpPr>
+        <p:cNvPr id="1" name=""/>
+        <p:cNvGrpSpPr/>
+        <p:nvPr/>
+      </p:nvGrpSpPr>
+      <p:grpSpPr/>
+      <p:sp>
+        <p:nvSpPr>
+          <p:cNvPr id="2" name="TextBox 1"/>
+          <p:cNvSpPr txBox="1"/>
+          <p:nvPr/>
+        </p:nvSpPr>
+        <p:spPr>
+          <a:xfrm>
+            <a:off x="640080" y="365760"/>
+            <a:ext cx="10908792" cy="548640"/>
+          </a:xfrm>
+          <a:prstGeom prst="rect">
+            <a:avLst/>
+          </a:prstGeom>
+          <a:noFill/>
+        </p:spPr>
+        <p:txBody>
+          <a:bodyPr wrap="square" anchor="t" lIns="27432" rIns="27432" tIns="0" bIns="0">
+            <a:spAutoFit/>
+          </a:bodyPr>
+          <a:lstStyle/>
+          <a:p>
+            <a:pPr algn="l">
+              <a:lnSpc>
+                <a:spcPct val="100000"/>
+              </a:lnSpc>
+              <a:spcBef>
+                <a:spcPts val="0"/>
+              </a:spcBef>
+              <a:spcAft>
+                <a:spcPts val="0"/>
+              </a:spcAft>
+            </a:pPr>
+            <a:r>
+              <a:rPr sz="2500" b="1">
+                <a:solidFill>
+                  <a:srgbClr val="111111"/>
+                </a:solidFill>
+                <a:latin typeface="Arial"/>
+                <a:ea typeface="微软雅黑"/>
+                <a:cs typeface="Arial"/>
+              </a:rPr>
+              <a:t>文献支撑一览：每一环都有可溯源的原始研究</a:t>
+            </a:r>
+          </a:p>
+        </p:txBody>
+      </p:sp>
+      <p:sp>
+        <p:nvSpPr>
+          <p:cNvPr id="3" name="Rectangle 2"/>
+          <p:cNvSpPr/>
+          <p:nvPr/>
+        </p:nvSpPr>
+        <p:spPr>
+          <a:xfrm>
+            <a:off x="640080" y="969264"/>
+            <a:ext cx="10908792" cy="12700"/>
+          </a:xfrm>
+          <a:prstGeom prst="rect">
+            <a:avLst/>
+          </a:prstGeom>
+          <a:solidFill>
+            <a:srgbClr val="DDDDDA"/>
+          </a:solidFill>
+          <a:ln>
+            <a:noFill/>
+          </a:ln>
+          <a:effectLst/>
+        </p:spPr>
+        <p:style>
+          <a:lnRef idx="1">
+            <a:schemeClr val="accent1"/>
+          </a:lnRef>
+          <a:fillRef idx="3">
+            <a:schemeClr val="accent1"/>
+          </a:fillRef>
+          <a:effectRef idx="2">
+            <a:schemeClr val="accent1"/>
+          </a:effectRef>
+          <a:fontRef idx="minor">
+            <a:schemeClr val="lt1"/>
+          </a:fontRef>
+        </p:style>
+        <p:txBody>
+          <a:bodyPr rtlCol="0" anchor="ctr"/>
+          <a:lstStyle/>
+          <a:p>
+            <a:pPr algn="ctr"/>
+          </a:p>
+        </p:txBody>
+      </p:sp>
+      <p:graphicFrame>
+        <p:nvGraphicFramePr>
+          <p:cNvPr id="4" name="Table 3"/>
+          <p:cNvGraphicFramePr>
+            <a:graphicFrameLocks noGrp="1"/>
+          </p:cNvGraphicFramePr>
+          <p:nvPr/>
+        </p:nvGraphicFramePr>
+        <p:xfrm>
+          <a:off x="640080" y="1234440"/>
+          <a:ext cx="10908792" cy="4626864"/>
+        </p:xfrm>
+        <a:graphic>
+          <a:graphicData uri="http://schemas.openxmlformats.org/drawingml/2006/table">
+            <a:tbl>
+              <a:tblPr firstRow="1" bandRow="1">
+                <a:tableStyleId>{5C22544A-7EE6-4342-B048-85BDC9FD1C3A}</a:tableStyleId>
+              </a:tblPr>
+              <a:tblGrid>
+                <a:gridCol w="2697480"/>
+                <a:gridCol w="5623560"/>
+                <a:gridCol w="2587752"/>
+              </a:tblGrid>
+              <a:tr h="420624">
+                <a:tc>
+                  <a:txBody>
+                    <a:bodyPr/>
+                    <a:lstStyle/>
+                    <a:p>
+                      <a:pPr algn="l">
+                        <a:lnSpc>
+                          <a:spcPct val="105000"/>
+                        </a:lnSpc>
+                        <a:spcBef>
+                          <a:spcPts val="0"/>
+                        </a:spcBef>
+                        <a:spcAft>
+                          <a:spcPts val="0"/>
+                        </a:spcAft>
+                      </a:pPr>
+                      <a:r>
+                        <a:rPr sz="1500" b="1">
+                          <a:solidFill>
+                            <a:srgbClr val="111111"/>
+                          </a:solidFill>
+                          <a:latin typeface="Arial"/>
+                          <a:ea typeface="微软雅黑"/>
+                          <a:cs typeface="Arial"/>
+                        </a:rPr>
+                        <a:t>代表文献</a:t>
+                      </a:r>
+                    </a:p>
+                  </a:txBody>
+                  <a:tcPr marT="27432" marB="27432">
+                    <a:solidFill>
+                      <a:srgbClr val="F7F7F5"/>
+                    </a:solidFill>
+                  </a:tcPr>
+                </a:tc>
+                <a:tc>
+                  <a:txBody>
+                    <a:bodyPr/>
+                    <a:lstStyle/>
+                    <a:p>
+                      <a:pPr algn="l">
+                        <a:lnSpc>
+                          <a:spcPct val="105000"/>
+                        </a:lnSpc>
+                        <a:spcBef>
+                          <a:spcPts val="0"/>
+                        </a:spcBef>
+                        <a:spcAft>
+                          <a:spcPts val="0"/>
+                        </a:spcAft>
+                      </a:pPr>
+                      <a:r>
+                        <a:rPr sz="1500" b="1">
+                          <a:solidFill>
+                            <a:srgbClr val="111111"/>
+                          </a:solidFill>
+                          <a:latin typeface="Arial"/>
+                          <a:ea typeface="微软雅黑"/>
+                          <a:cs typeface="Arial"/>
+                        </a:rPr>
+                        <a:t>本课题引用它的哪条结论</a:t>
+                      </a:r>
+                    </a:p>
+                  </a:txBody>
+                  <a:tcPr marT="27432" marB="27432">
+                    <a:solidFill>
+                      <a:srgbClr val="F7F7F5"/>
+                    </a:solidFill>
+                  </a:tcPr>
+                </a:tc>
+                <a:tc>
+                  <a:txBody>
+                    <a:bodyPr/>
+                    <a:lstStyle/>
+                    <a:p>
+                      <a:pPr algn="l">
+                        <a:lnSpc>
+                          <a:spcPct val="105000"/>
+                        </a:lnSpc>
+                        <a:spcBef>
+                          <a:spcPts val="0"/>
+                        </a:spcBef>
+                        <a:spcAft>
+                          <a:spcPts val="0"/>
+                        </a:spcAft>
+                      </a:pPr>
+                      <a:r>
+                        <a:rPr sz="1500" b="1">
+                          <a:solidFill>
+                            <a:srgbClr val="111111"/>
+                          </a:solidFill>
+                          <a:latin typeface="Arial"/>
+                          <a:ea typeface="微软雅黑"/>
+                          <a:cs typeface="Arial"/>
+                        </a:rPr>
+                        <a:t>出处与编号</a:t>
+                      </a:r>
+                    </a:p>
+                  </a:txBody>
+                  <a:tcPr marT="27432" marB="27432">
+                    <a:solidFill>
+                      <a:srgbClr val="F7F7F5"/>
+                    </a:solidFill>
+                  </a:tcPr>
+                </a:tc>
+              </a:tr>
+              <a:tr h="420624">
+                <a:tc>
+                  <a:txBody>
+                    <a:bodyPr/>
+                    <a:lstStyle/>
+                    <a:p>
+                      <a:pPr algn="l">
+                        <a:lnSpc>
+                          <a:spcPct val="105000"/>
+                        </a:lnSpc>
+                        <a:spcBef>
+                          <a:spcPts val="0"/>
+                        </a:spcBef>
+                        <a:spcAft>
+                          <a:spcPts val="0"/>
+                        </a:spcAft>
+                      </a:pPr>
+                      <a:r>
+                        <a:rPr sz="1500" b="0">
+                          <a:solidFill>
+                            <a:srgbClr val="111111"/>
+                          </a:solidFill>
+                          <a:latin typeface="Arial"/>
+                          <a:ea typeface="微软雅黑"/>
+                          <a:cs typeface="Arial"/>
+                        </a:rPr>
+                        <a:t>Soscia 等 2010</a:t>
+                      </a:r>
+                    </a:p>
+                  </a:txBody>
+                  <a:tcPr marT="27432" marB="27432">
+                    <a:solidFill>
+                      <a:srgbClr val="FFFFFF"/>
+                    </a:solidFill>
+                  </a:tcPr>
+                </a:tc>
+                <a:tc>
+                  <a:txBody>
+                    <a:bodyPr/>
+                    <a:lstStyle/>
+                    <a:p>
+                      <a:pPr algn="l">
+                        <a:lnSpc>
+                          <a:spcPct val="105000"/>
+                        </a:lnSpc>
+                        <a:spcBef>
+                          <a:spcPts val="0"/>
+                        </a:spcBef>
+                        <a:spcAft>
+                          <a:spcPts val="0"/>
+                        </a:spcAft>
+                      </a:pPr>
+                      <a:r>
+                        <a:rPr sz="1500" b="0">
+                          <a:solidFill>
+                            <a:srgbClr val="333333"/>
+                          </a:solidFill>
+                          <a:latin typeface="Arial"/>
+                          <a:ea typeface="微软雅黑"/>
+                          <a:cs typeface="Arial"/>
+                        </a:rPr>
+                        <a:t>Aβ 对 8 种微生物有活性，AD 脑匀浆活性更高</a:t>
+                      </a:r>
+                    </a:p>
+                  </a:txBody>
+                  <a:tcPr marT="27432" marB="27432">
+                    <a:solidFill>
+                      <a:srgbClr val="FFFFFF"/>
+                    </a:solidFill>
+                  </a:tcPr>
+                </a:tc>
+                <a:tc>
+                  <a:txBody>
+                    <a:bodyPr/>
+                    <a:lstStyle/>
+                    <a:p>
+                      <a:pPr algn="l">
+                        <a:lnSpc>
+                          <a:spcPct val="105000"/>
+                        </a:lnSpc>
+                        <a:spcBef>
+                          <a:spcPts val="0"/>
+                        </a:spcBef>
+                        <a:spcAft>
+                          <a:spcPts val="0"/>
+                        </a:spcAft>
+                      </a:pPr>
+                      <a:r>
+                        <a:rPr sz="1500" b="0">
+                          <a:solidFill>
+                            <a:srgbClr val="333333"/>
+                          </a:solidFill>
+                          <a:latin typeface="Arial"/>
+                          <a:ea typeface="微软雅黑"/>
+                          <a:cs typeface="Arial"/>
+                        </a:rPr>
+                        <a:t>PLoS ONE [1]</a:t>
+                      </a:r>
+                    </a:p>
+                  </a:txBody>
+                  <a:tcPr marT="27432" marB="27432">
+                    <a:solidFill>
+                      <a:srgbClr val="FFFFFF"/>
+                    </a:solidFill>
+                  </a:tcPr>
+                </a:tc>
+              </a:tr>
+              <a:tr h="420624">
+                <a:tc>
+                  <a:txBody>
+                    <a:bodyPr/>
+                    <a:lstStyle/>
+                    <a:p>
+                      <a:pPr algn="l">
+                        <a:lnSpc>
+                          <a:spcPct val="105000"/>
+                        </a:lnSpc>
+                        <a:spcBef>
+                          <a:spcPts val="0"/>
+                        </a:spcBef>
+                        <a:spcAft>
+                          <a:spcPts val="0"/>
+                        </a:spcAft>
+                      </a:pPr>
+                      <a:r>
+                        <a:rPr sz="1500" b="0">
+                          <a:solidFill>
+                            <a:srgbClr val="111111"/>
+                          </a:solidFill>
+                          <a:latin typeface="Arial"/>
+                          <a:ea typeface="微软雅黑"/>
+                          <a:cs typeface="Arial"/>
+                        </a:rPr>
+                        <a:t>Kumar 等 2016</a:t>
+                      </a:r>
+                    </a:p>
+                  </a:txBody>
+                  <a:tcPr marT="27432" marB="27432">
+                    <a:solidFill>
+                      <a:srgbClr val="FFFFFF"/>
+                    </a:solidFill>
+                  </a:tcPr>
+                </a:tc>
+                <a:tc>
+                  <a:txBody>
+                    <a:bodyPr/>
+                    <a:lstStyle/>
+                    <a:p>
+                      <a:pPr algn="l">
+                        <a:lnSpc>
+                          <a:spcPct val="105000"/>
+                        </a:lnSpc>
+                        <a:spcBef>
+                          <a:spcPts val="0"/>
+                        </a:spcBef>
+                        <a:spcAft>
+                          <a:spcPts val="0"/>
+                        </a:spcAft>
+                      </a:pPr>
+                      <a:r>
+                        <a:rPr sz="1500" b="0">
+                          <a:solidFill>
+                            <a:srgbClr val="333333"/>
+                          </a:solidFill>
+                          <a:latin typeface="Arial"/>
+                          <a:ea typeface="微软雅黑"/>
+                          <a:cs typeface="Arial"/>
+                        </a:rPr>
+                        <a:t>表达 Aβ 的小鼠抗感染更强，寡聚化为活性必需</a:t>
+                      </a:r>
+                    </a:p>
+                  </a:txBody>
+                  <a:tcPr marT="27432" marB="27432">
+                    <a:solidFill>
+                      <a:srgbClr val="FFFFFF"/>
+                    </a:solidFill>
+                  </a:tcPr>
+                </a:tc>
+                <a:tc>
+                  <a:txBody>
+                    <a:bodyPr/>
+                    <a:lstStyle/>
+                    <a:p>
+                      <a:pPr algn="l">
+                        <a:lnSpc>
+                          <a:spcPct val="105000"/>
+                        </a:lnSpc>
+                        <a:spcBef>
+                          <a:spcPts val="0"/>
+                        </a:spcBef>
+                        <a:spcAft>
+                          <a:spcPts val="0"/>
+                        </a:spcAft>
+                      </a:pPr>
+                      <a:r>
+                        <a:rPr sz="1500" b="0">
+                          <a:solidFill>
+                            <a:srgbClr val="333333"/>
+                          </a:solidFill>
+                          <a:latin typeface="Arial"/>
+                          <a:ea typeface="微软雅黑"/>
+                          <a:cs typeface="Arial"/>
+                        </a:rPr>
+                        <a:t>Sci Transl Med [3]</a:t>
+                      </a:r>
+                    </a:p>
+                  </a:txBody>
+                  <a:tcPr marT="27432" marB="27432">
+                    <a:solidFill>
+                      <a:srgbClr val="FFFFFF"/>
+                    </a:solidFill>
+                  </a:tcPr>
+                </a:tc>
+              </a:tr>
+              <a:tr h="420624">
+                <a:tc>
+                  <a:txBody>
+                    <a:bodyPr/>
+                    <a:lstStyle/>
+                    <a:p>
+                      <a:pPr algn="l">
+                        <a:lnSpc>
+                          <a:spcPct val="105000"/>
+                        </a:lnSpc>
+                        <a:spcBef>
+                          <a:spcPts val="0"/>
+                        </a:spcBef>
+                        <a:spcAft>
+                          <a:spcPts val="0"/>
+                        </a:spcAft>
+                      </a:pPr>
+                      <a:r>
+                        <a:rPr sz="1500" b="0">
+                          <a:solidFill>
+                            <a:srgbClr val="111111"/>
+                          </a:solidFill>
+                          <a:latin typeface="Arial"/>
+                          <a:ea typeface="微软雅黑"/>
+                          <a:cs typeface="Arial"/>
+                        </a:rPr>
+                        <a:t>Eimer 等 2018</a:t>
+                      </a:r>
+                    </a:p>
+                  </a:txBody>
+                  <a:tcPr marT="27432" marB="27432">
+                    <a:solidFill>
+                      <a:srgbClr val="FFFFFF"/>
+                    </a:solidFill>
+                  </a:tcPr>
+                </a:tc>
+                <a:tc>
+                  <a:txBody>
+                    <a:bodyPr/>
+                    <a:lstStyle/>
+                    <a:p>
+                      <a:pPr algn="l">
+                        <a:lnSpc>
+                          <a:spcPct val="105000"/>
+                        </a:lnSpc>
+                        <a:spcBef>
+                          <a:spcPts val="0"/>
+                        </a:spcBef>
+                        <a:spcAft>
+                          <a:spcPts val="0"/>
+                        </a:spcAft>
+                      </a:pPr>
+                      <a:r>
+                        <a:rPr sz="1500" b="0">
+                          <a:solidFill>
+                            <a:srgbClr val="333333"/>
+                          </a:solidFill>
+                          <a:latin typeface="Arial"/>
+                          <a:ea typeface="微软雅黑"/>
+                          <a:cs typeface="Arial"/>
+                        </a:rPr>
+                        <a:t>Aβ 结合病毒糖蛋白并成纤维网捕获病毒</a:t>
+                      </a:r>
+                    </a:p>
+                  </a:txBody>
+                  <a:tcPr marT="27432" marB="27432">
+                    <a:solidFill>
+                      <a:srgbClr val="FFFFFF"/>
+                    </a:solidFill>
+                  </a:tcPr>
+                </a:tc>
+                <a:tc>
+                  <a:txBody>
+                    <a:bodyPr/>
+                    <a:lstStyle/>
+                    <a:p>
+                      <a:pPr algn="l">
+                        <a:lnSpc>
+                          <a:spcPct val="105000"/>
+                        </a:lnSpc>
+                        <a:spcBef>
+                          <a:spcPts val="0"/>
+                        </a:spcBef>
+                        <a:spcAft>
+                          <a:spcPts val="0"/>
+                        </a:spcAft>
+                      </a:pPr>
+                      <a:r>
+                        <a:rPr sz="1500" b="0">
+                          <a:solidFill>
+                            <a:srgbClr val="333333"/>
+                          </a:solidFill>
+                          <a:latin typeface="Arial"/>
+                          <a:ea typeface="微软雅黑"/>
+                          <a:cs typeface="Arial"/>
+                        </a:rPr>
+                        <a:t>Neuron [4]</a:t>
+                      </a:r>
+                    </a:p>
+                  </a:txBody>
+                  <a:tcPr marT="27432" marB="27432">
+                    <a:solidFill>
+                      <a:srgbClr val="FFFFFF"/>
+                    </a:solidFill>
+                  </a:tcPr>
+                </a:tc>
+              </a:tr>
+              <a:tr h="420624">
+                <a:tc>
+                  <a:txBody>
+                    <a:bodyPr/>
+                    <a:lstStyle/>
+                    <a:p>
+                      <a:pPr algn="l">
+                        <a:lnSpc>
+                          <a:spcPct val="105000"/>
+                        </a:lnSpc>
+                        <a:spcBef>
+                          <a:spcPts val="0"/>
+                        </a:spcBef>
+                        <a:spcAft>
+                          <a:spcPts val="0"/>
+                        </a:spcAft>
+                      </a:pPr>
+                      <a:r>
+                        <a:rPr sz="1500" b="0">
+                          <a:solidFill>
+                            <a:srgbClr val="111111"/>
+                          </a:solidFill>
+                          <a:latin typeface="Arial"/>
+                          <a:ea typeface="微软雅黑"/>
+                          <a:cs typeface="Arial"/>
+                        </a:rPr>
+                        <a:t>Chen 等 2022</a:t>
+                      </a:r>
+                    </a:p>
+                  </a:txBody>
+                  <a:tcPr marT="27432" marB="27432">
+                    <a:solidFill>
+                      <a:srgbClr val="FFFFFF"/>
+                    </a:solidFill>
+                  </a:tcPr>
+                </a:tc>
+                <a:tc>
+                  <a:txBody>
+                    <a:bodyPr/>
+                    <a:lstStyle/>
+                    <a:p>
+                      <a:pPr algn="l">
+                        <a:lnSpc>
+                          <a:spcPct val="105000"/>
+                        </a:lnSpc>
+                        <a:spcBef>
+                          <a:spcPts val="0"/>
+                        </a:spcBef>
+                        <a:spcAft>
+                          <a:spcPts val="0"/>
+                        </a:spcAft>
+                      </a:pPr>
+                      <a:r>
+                        <a:rPr sz="1500" b="0">
+                          <a:solidFill>
+                            <a:srgbClr val="333333"/>
+                          </a:solidFill>
+                          <a:latin typeface="Arial"/>
+                          <a:ea typeface="微软雅黑"/>
+                          <a:cs typeface="Arial"/>
+                        </a:rPr>
+                        <a:t>LL-37 经 CLIC1 引起小胶质活化与 AD 样病理</a:t>
+                      </a:r>
+                    </a:p>
+                  </a:txBody>
+                  <a:tcPr marT="27432" marB="27432">
+                    <a:solidFill>
+                      <a:srgbClr val="FFFFFF"/>
+                    </a:solidFill>
+                  </a:tcPr>
+                </a:tc>
+                <a:tc>
+                  <a:txBody>
+                    <a:bodyPr/>
+                    <a:lstStyle/>
+                    <a:p>
+                      <a:pPr algn="l">
+                        <a:lnSpc>
+                          <a:spcPct val="105000"/>
+                        </a:lnSpc>
+                        <a:spcBef>
+                          <a:spcPts val="0"/>
+                        </a:spcBef>
+                        <a:spcAft>
+                          <a:spcPts val="0"/>
+                        </a:spcAft>
+                      </a:pPr>
+                      <a:r>
+                        <a:rPr sz="1500" b="0">
+                          <a:solidFill>
+                            <a:srgbClr val="333333"/>
+                          </a:solidFill>
+                          <a:latin typeface="Arial"/>
+                          <a:ea typeface="微软雅黑"/>
+                          <a:cs typeface="Arial"/>
+                        </a:rPr>
+                        <a:t>Mol Psychiatry [6]</a:t>
+                      </a:r>
+                    </a:p>
+                  </a:txBody>
+                  <a:tcPr marT="27432" marB="27432">
+                    <a:solidFill>
+                      <a:srgbClr val="FFFFFF"/>
+                    </a:solidFill>
+                  </a:tcPr>
+                </a:tc>
+              </a:tr>
+              <a:tr h="420624">
+                <a:tc>
+                  <a:txBody>
+                    <a:bodyPr/>
+                    <a:lstStyle/>
+                    <a:p>
+                      <a:pPr algn="l">
+                        <a:lnSpc>
+                          <a:spcPct val="105000"/>
+                        </a:lnSpc>
+                        <a:spcBef>
+                          <a:spcPts val="0"/>
+                        </a:spcBef>
+                        <a:spcAft>
+                          <a:spcPts val="0"/>
+                        </a:spcAft>
+                      </a:pPr>
+                      <a:r>
+                        <a:rPr sz="1500" b="0">
+                          <a:solidFill>
+                            <a:srgbClr val="111111"/>
+                          </a:solidFill>
+                          <a:latin typeface="Arial"/>
+                          <a:ea typeface="微软雅黑"/>
+                          <a:cs typeface="Arial"/>
+                        </a:rPr>
+                        <a:t>Zhan 等 2018</a:t>
+                      </a:r>
+                    </a:p>
+                  </a:txBody>
+                  <a:tcPr marT="27432" marB="27432">
+                    <a:solidFill>
+                      <a:srgbClr val="FFFFFF"/>
+                    </a:solidFill>
+                  </a:tcPr>
+                </a:tc>
+                <a:tc>
+                  <a:txBody>
+                    <a:bodyPr/>
+                    <a:lstStyle/>
+                    <a:p>
+                      <a:pPr algn="l">
+                        <a:lnSpc>
+                          <a:spcPct val="105000"/>
+                        </a:lnSpc>
+                        <a:spcBef>
+                          <a:spcPts val="0"/>
+                        </a:spcBef>
+                        <a:spcAft>
+                          <a:spcPts val="0"/>
+                        </a:spcAft>
+                      </a:pPr>
+                      <a:r>
+                        <a:rPr sz="1500" b="0">
+                          <a:solidFill>
+                            <a:srgbClr val="333333"/>
+                          </a:solidFill>
+                          <a:latin typeface="Arial"/>
+                          <a:ea typeface="微软雅黑"/>
+                          <a:cs typeface="Arial"/>
+                        </a:rPr>
+                        <a:t>AD 脑与血中 LPS 升高，LPS 与斑块共定位</a:t>
+                      </a:r>
+                    </a:p>
+                  </a:txBody>
+                  <a:tcPr marT="27432" marB="27432">
+                    <a:solidFill>
+                      <a:srgbClr val="FFFFFF"/>
+                    </a:solidFill>
+                  </a:tcPr>
+                </a:tc>
+                <a:tc>
+                  <a:txBody>
+                    <a:bodyPr/>
+                    <a:lstStyle/>
+                    <a:p>
+                      <a:pPr algn="l">
+                        <a:lnSpc>
+                          <a:spcPct val="105000"/>
+                        </a:lnSpc>
+                        <a:spcBef>
+                          <a:spcPts val="0"/>
+                        </a:spcBef>
+                        <a:spcAft>
+                          <a:spcPts val="0"/>
+                        </a:spcAft>
+                      </a:pPr>
+                      <a:r>
+                        <a:rPr sz="1500" b="0">
+                          <a:solidFill>
+                            <a:srgbClr val="333333"/>
+                          </a:solidFill>
+                          <a:latin typeface="Arial"/>
+                          <a:ea typeface="微软雅黑"/>
+                          <a:cs typeface="Arial"/>
+                        </a:rPr>
+                        <a:t>Front Aging Neurosci [11]</a:t>
+                      </a:r>
+                    </a:p>
+                  </a:txBody>
+                  <a:tcPr marT="27432" marB="27432">
+                    <a:solidFill>
+                      <a:srgbClr val="FFFFFF"/>
+                    </a:solidFill>
+                  </a:tcPr>
+                </a:tc>
+              </a:tr>
+              <a:tr h="420624">
+                <a:tc>
+                  <a:txBody>
+                    <a:bodyPr/>
+                    <a:lstStyle/>
+                    <a:p>
+                      <a:pPr algn="l">
+                        <a:lnSpc>
+                          <a:spcPct val="105000"/>
+                        </a:lnSpc>
+                        <a:spcBef>
+                          <a:spcPts val="0"/>
+                        </a:spcBef>
+                        <a:spcAft>
+                          <a:spcPts val="0"/>
+                        </a:spcAft>
+                      </a:pPr>
+                      <a:r>
+                        <a:rPr sz="1500" b="0">
+                          <a:solidFill>
+                            <a:srgbClr val="111111"/>
+                          </a:solidFill>
+                          <a:latin typeface="Arial"/>
+                          <a:ea typeface="微软雅黑"/>
+                          <a:cs typeface="Arial"/>
+                        </a:rPr>
+                        <a:t>Emery 等 2017</a:t>
+                      </a:r>
+                    </a:p>
+                  </a:txBody>
+                  <a:tcPr marT="27432" marB="27432">
+                    <a:solidFill>
+                      <a:srgbClr val="FFFFFF"/>
+                    </a:solidFill>
+                  </a:tcPr>
+                </a:tc>
+                <a:tc>
+                  <a:txBody>
+                    <a:bodyPr/>
+                    <a:lstStyle/>
+                    <a:p>
+                      <a:pPr algn="l">
+                        <a:lnSpc>
+                          <a:spcPct val="105000"/>
+                        </a:lnSpc>
+                        <a:spcBef>
+                          <a:spcPts val="0"/>
+                        </a:spcBef>
+                        <a:spcAft>
+                          <a:spcPts val="0"/>
+                        </a:spcAft>
+                      </a:pPr>
+                      <a:r>
+                        <a:rPr sz="1500" b="0">
+                          <a:solidFill>
+                            <a:srgbClr val="333333"/>
+                          </a:solidFill>
+                          <a:latin typeface="Arial"/>
+                          <a:ea typeface="微软雅黑"/>
+                          <a:cs typeface="Arial"/>
+                        </a:rPr>
+                        <a:t>AD 脑细菌读段为对照的 5—10 倍</a:t>
+                      </a:r>
+                    </a:p>
+                  </a:txBody>
+                  <a:tcPr marT="27432" marB="27432">
+                    <a:solidFill>
+                      <a:srgbClr val="FFFFFF"/>
+                    </a:solidFill>
+                  </a:tcPr>
+                </a:tc>
+                <a:tc>
+                  <a:txBody>
+                    <a:bodyPr/>
+                    <a:lstStyle/>
+                    <a:p>
+                      <a:pPr algn="l">
+                        <a:lnSpc>
+                          <a:spcPct val="105000"/>
+                        </a:lnSpc>
+                        <a:spcBef>
+                          <a:spcPts val="0"/>
+                        </a:spcBef>
+                        <a:spcAft>
+                          <a:spcPts val="0"/>
+                        </a:spcAft>
+                      </a:pPr>
+                      <a:r>
+                        <a:rPr sz="1500" b="0">
+                          <a:solidFill>
+                            <a:srgbClr val="333333"/>
+                          </a:solidFill>
+                          <a:latin typeface="Arial"/>
+                          <a:ea typeface="微软雅黑"/>
+                          <a:cs typeface="Arial"/>
+                        </a:rPr>
+                        <a:t>Front Aging Neurosci [12]</a:t>
+                      </a:r>
+                    </a:p>
+                  </a:txBody>
+                  <a:tcPr marT="27432" marB="27432">
+                    <a:solidFill>
+                      <a:srgbClr val="FFFFFF"/>
+                    </a:solidFill>
+                  </a:tcPr>
+                </a:tc>
+              </a:tr>
+              <a:tr h="420624">
+                <a:tc>
+                  <a:txBody>
+                    <a:bodyPr/>
+                    <a:lstStyle/>
+                    <a:p>
+                      <a:pPr algn="l">
+                        <a:lnSpc>
+                          <a:spcPct val="105000"/>
+                        </a:lnSpc>
+                        <a:spcBef>
+                          <a:spcPts val="0"/>
+                        </a:spcBef>
+                        <a:spcAft>
+                          <a:spcPts val="0"/>
+                        </a:spcAft>
+                      </a:pPr>
+                      <a:r>
+                        <a:rPr sz="1500" b="0">
+                          <a:solidFill>
+                            <a:srgbClr val="111111"/>
+                          </a:solidFill>
+                          <a:latin typeface="Arial"/>
+                          <a:ea typeface="微软雅黑"/>
+                          <a:cs typeface="Arial"/>
+                        </a:rPr>
+                        <a:t>Ma 等 2022</a:t>
+                      </a:r>
+                    </a:p>
+                  </a:txBody>
+                  <a:tcPr marT="27432" marB="27432">
+                    <a:solidFill>
+                      <a:srgbClr val="FFFFFF"/>
+                    </a:solidFill>
+                  </a:tcPr>
+                </a:tc>
+                <a:tc>
+                  <a:txBody>
+                    <a:bodyPr/>
+                    <a:lstStyle/>
+                    <a:p>
+                      <a:pPr algn="l">
+                        <a:lnSpc>
+                          <a:spcPct val="105000"/>
+                        </a:lnSpc>
+                        <a:spcBef>
+                          <a:spcPts val="0"/>
+                        </a:spcBef>
+                        <a:spcAft>
+                          <a:spcPts val="0"/>
+                        </a:spcAft>
+                      </a:pPr>
+                      <a:r>
+                        <a:rPr sz="1500" b="0">
+                          <a:solidFill>
+                            <a:srgbClr val="333333"/>
+                          </a:solidFill>
+                          <a:latin typeface="Arial"/>
+                          <a:ea typeface="微软雅黑"/>
+                          <a:cs typeface="Arial"/>
+                        </a:rPr>
+                        <a:t>宏基因组 + 深度学习挖掘抗菌肽并有体外验证</a:t>
+                      </a:r>
+                    </a:p>
+                  </a:txBody>
+                  <a:tcPr marT="27432" marB="27432">
+                    <a:solidFill>
+                      <a:srgbClr val="FFFFFF"/>
+                    </a:solidFill>
+                  </a:tcPr>
+                </a:tc>
+                <a:tc>
+                  <a:txBody>
+                    <a:bodyPr/>
+                    <a:lstStyle/>
+                    <a:p>
+                      <a:pPr algn="l">
+                        <a:lnSpc>
+                          <a:spcPct val="105000"/>
+                        </a:lnSpc>
+                        <a:spcBef>
+                          <a:spcPts val="0"/>
+                        </a:spcBef>
+                        <a:spcAft>
+                          <a:spcPts val="0"/>
+                        </a:spcAft>
+                      </a:pPr>
+                      <a:r>
+                        <a:rPr sz="1500" b="0">
+                          <a:solidFill>
+                            <a:srgbClr val="333333"/>
+                          </a:solidFill>
+                          <a:latin typeface="Arial"/>
+                          <a:ea typeface="微软雅黑"/>
+                          <a:cs typeface="Arial"/>
+                        </a:rPr>
+                        <a:t>Nat Biotechnol [21]</a:t>
+                      </a:r>
+                    </a:p>
+                  </a:txBody>
+                  <a:tcPr marT="27432" marB="27432">
+                    <a:solidFill>
+                      <a:srgbClr val="FFFFFF"/>
+                    </a:solidFill>
+                  </a:tcPr>
+                </a:tc>
+              </a:tr>
+              <a:tr h="420624">
+                <a:tc>
+                  <a:txBody>
+                    <a:bodyPr/>
+                    <a:lstStyle/>
+                    <a:p>
+                      <a:pPr algn="l">
+                        <a:lnSpc>
+                          <a:spcPct val="105000"/>
+                        </a:lnSpc>
+                        <a:spcBef>
+                          <a:spcPts val="0"/>
+                        </a:spcBef>
+                        <a:spcAft>
+                          <a:spcPts val="0"/>
+                        </a:spcAft>
+                      </a:pPr>
+                      <a:r>
+                        <a:rPr sz="1500" b="0">
+                          <a:solidFill>
+                            <a:srgbClr val="111111"/>
+                          </a:solidFill>
+                          <a:latin typeface="Arial"/>
+                          <a:ea typeface="微软雅黑"/>
+                          <a:cs typeface="Arial"/>
+                        </a:rPr>
+                        <a:t>Atanasova 等 2020</a:t>
+                      </a:r>
+                    </a:p>
+                  </a:txBody>
+                  <a:tcPr marT="27432" marB="27432">
+                    <a:solidFill>
+                      <a:srgbClr val="FFFFFF"/>
+                    </a:solidFill>
+                  </a:tcPr>
+                </a:tc>
+                <a:tc>
+                  <a:txBody>
+                    <a:bodyPr/>
+                    <a:lstStyle/>
+                    <a:p>
+                      <a:pPr algn="l">
+                        <a:lnSpc>
+                          <a:spcPct val="105000"/>
+                        </a:lnSpc>
+                        <a:spcBef>
+                          <a:spcPts val="0"/>
+                        </a:spcBef>
+                        <a:spcAft>
+                          <a:spcPts val="0"/>
+                        </a:spcAft>
+                      </a:pPr>
+                      <a:r>
+                        <a:rPr sz="1500" b="0">
+                          <a:solidFill>
+                            <a:srgbClr val="333333"/>
+                          </a:solidFill>
+                          <a:latin typeface="Arial"/>
+                          <a:ea typeface="微软雅黑"/>
+                          <a:cs typeface="Arial"/>
+                        </a:rPr>
+                        <a:t>AChE–Aβ 复合物 1 μs 稳定，停留区段 344—361</a:t>
+                      </a:r>
+                    </a:p>
+                  </a:txBody>
+                  <a:tcPr marT="27432" marB="27432">
+                    <a:solidFill>
+                      <a:srgbClr val="FFFFFF"/>
+                    </a:solidFill>
+                  </a:tcPr>
+                </a:tc>
+                <a:tc>
+                  <a:txBody>
+                    <a:bodyPr/>
+                    <a:lstStyle/>
+                    <a:p>
+                      <a:pPr algn="l">
+                        <a:lnSpc>
+                          <a:spcPct val="105000"/>
+                        </a:lnSpc>
+                        <a:spcBef>
+                          <a:spcPts val="0"/>
+                        </a:spcBef>
+                        <a:spcAft>
+                          <a:spcPts val="0"/>
+                        </a:spcAft>
+                      </a:pPr>
+                      <a:r>
+                        <a:rPr sz="1500" b="0">
+                          <a:solidFill>
+                            <a:srgbClr val="333333"/>
+                          </a:solidFill>
+                          <a:latin typeface="Arial"/>
+                          <a:ea typeface="微软雅黑"/>
+                          <a:cs typeface="Arial"/>
+                        </a:rPr>
+                        <a:t>Cybernetics &amp; Inf Tech [31]</a:t>
+                      </a:r>
+                    </a:p>
+                  </a:txBody>
+                  <a:tcPr marT="27432" marB="27432">
+                    <a:solidFill>
+                      <a:srgbClr val="FFFFFF"/>
+                    </a:solidFill>
+                  </a:tcPr>
+                </a:tc>
+              </a:tr>
+              <a:tr h="420624">
+                <a:tc>
+                  <a:txBody>
+                    <a:bodyPr/>
+                    <a:lstStyle/>
+                    <a:p>
+                      <a:pPr algn="l">
+                        <a:lnSpc>
+                          <a:spcPct val="105000"/>
+                        </a:lnSpc>
+                        <a:spcBef>
+                          <a:spcPts val="0"/>
+                        </a:spcBef>
+                        <a:spcAft>
+                          <a:spcPts val="0"/>
+                        </a:spcAft>
+                      </a:pPr>
+                      <a:r>
+                        <a:rPr sz="1500" b="0">
+                          <a:solidFill>
+                            <a:srgbClr val="111111"/>
+                          </a:solidFill>
+                          <a:latin typeface="Arial"/>
+                          <a:ea typeface="微软雅黑"/>
+                          <a:cs typeface="Arial"/>
+                        </a:rPr>
+                        <a:t>Zheng 等 2026</a:t>
+                      </a:r>
+                    </a:p>
+                  </a:txBody>
+                  <a:tcPr marT="27432" marB="27432">
+                    <a:solidFill>
+                      <a:srgbClr val="FFFFFF"/>
+                    </a:solidFill>
+                  </a:tcPr>
+                </a:tc>
+                <a:tc>
+                  <a:txBody>
+                    <a:bodyPr/>
+                    <a:lstStyle/>
+                    <a:p>
+                      <a:pPr algn="l">
+                        <a:lnSpc>
+                          <a:spcPct val="105000"/>
+                        </a:lnSpc>
+                        <a:spcBef>
+                          <a:spcPts val="0"/>
+                        </a:spcBef>
+                        <a:spcAft>
+                          <a:spcPts val="0"/>
+                        </a:spcAft>
+                      </a:pPr>
+                      <a:r>
+                        <a:rPr sz="1500" b="0">
+                          <a:solidFill>
+                            <a:srgbClr val="333333"/>
+                          </a:solidFill>
+                          <a:latin typeface="Arial"/>
+                          <a:ea typeface="微软雅黑"/>
+                          <a:cs typeface="Arial"/>
+                        </a:rPr>
+                        <a:t>交叉成核三机制与病原—淀粉样正反馈环</a:t>
+                      </a:r>
+                    </a:p>
+                  </a:txBody>
+                  <a:tcPr marT="27432" marB="27432">
+                    <a:solidFill>
+                      <a:srgbClr val="FFFFFF"/>
+                    </a:solidFill>
+                  </a:tcPr>
+                </a:tc>
+                <a:tc>
+                  <a:txBody>
+                    <a:bodyPr/>
+                    <a:lstStyle/>
+                    <a:p>
+                      <a:pPr algn="l">
+                        <a:lnSpc>
+                          <a:spcPct val="105000"/>
+                        </a:lnSpc>
+                        <a:spcBef>
+                          <a:spcPts val="0"/>
+                        </a:spcBef>
+                        <a:spcAft>
+                          <a:spcPts val="0"/>
+                        </a:spcAft>
+                      </a:pPr>
+                      <a:r>
+                        <a:rPr sz="1500" b="0">
+                          <a:solidFill>
+                            <a:srgbClr val="333333"/>
+                          </a:solidFill>
+                          <a:latin typeface="Arial"/>
+                          <a:ea typeface="微软雅黑"/>
+                          <a:cs typeface="Arial"/>
+                        </a:rPr>
+                        <a:t>Research [36]</a:t>
+                      </a:r>
+                    </a:p>
+                  </a:txBody>
+                  <a:tcPr marT="27432" marB="27432">
+                    <a:solidFill>
+                      <a:srgbClr val="FFFFFF"/>
+                    </a:solidFill>
+                  </a:tcPr>
+                </a:tc>
+              </a:tr>
+              <a:tr h="420624">
+                <a:tc>
+                  <a:txBody>
+                    <a:bodyPr/>
+                    <a:lstStyle/>
+                    <a:p>
+                      <a:pPr algn="l">
+                        <a:lnSpc>
+                          <a:spcPct val="105000"/>
+                        </a:lnSpc>
+                        <a:spcBef>
+                          <a:spcPts val="0"/>
+                        </a:spcBef>
+                        <a:spcAft>
+                          <a:spcPts val="0"/>
+                        </a:spcAft>
+                      </a:pPr>
+                      <a:r>
+                        <a:rPr sz="1500" b="0">
+                          <a:solidFill>
+                            <a:srgbClr val="111111"/>
+                          </a:solidFill>
+                          <a:latin typeface="Arial"/>
+                          <a:ea typeface="微软雅黑"/>
+                          <a:cs typeface="Arial"/>
+                        </a:rPr>
+                        <a:t>LB 等 2023</a:t>
+                      </a:r>
+                    </a:p>
+                  </a:txBody>
+                  <a:tcPr marT="27432" marB="27432">
+                    <a:solidFill>
+                      <a:srgbClr val="FFFFFF"/>
+                    </a:solidFill>
+                  </a:tcPr>
+                </a:tc>
+                <a:tc>
+                  <a:txBody>
+                    <a:bodyPr/>
+                    <a:lstStyle/>
+                    <a:p>
+                      <a:pPr algn="l">
+                        <a:lnSpc>
+                          <a:spcPct val="105000"/>
+                        </a:lnSpc>
+                        <a:spcBef>
+                          <a:spcPts val="0"/>
+                        </a:spcBef>
+                        <a:spcAft>
+                          <a:spcPts val="0"/>
+                        </a:spcAft>
+                      </a:pPr>
+                      <a:r>
+                        <a:rPr sz="1500" b="0">
+                          <a:solidFill>
+                            <a:srgbClr val="333333"/>
+                          </a:solidFill>
+                          <a:latin typeface="Arial"/>
+                          <a:ea typeface="微软雅黑"/>
+                          <a:cs typeface="Arial"/>
+                        </a:rPr>
+                        <a:t>血清 LL-37 高者认知下降更快（OR 2.11）</a:t>
+                      </a:r>
+                    </a:p>
+                  </a:txBody>
+                  <a:tcPr marT="27432" marB="27432">
+                    <a:solidFill>
+                      <a:srgbClr val="FFFFFF"/>
+                    </a:solidFill>
+                  </a:tcPr>
+                </a:tc>
+                <a:tc>
+                  <a:txBody>
+                    <a:bodyPr/>
+                    <a:lstStyle/>
+                    <a:p>
+                      <a:pPr algn="l">
+                        <a:lnSpc>
+                          <a:spcPct val="105000"/>
+                        </a:lnSpc>
+                        <a:spcBef>
+                          <a:spcPts val="0"/>
+                        </a:spcBef>
+                        <a:spcAft>
+                          <a:spcPts val="0"/>
+                        </a:spcAft>
+                      </a:pPr>
+                      <a:r>
+                        <a:rPr sz="1500" b="0">
+                          <a:solidFill>
+                            <a:srgbClr val="333333"/>
+                          </a:solidFill>
+                          <a:latin typeface="Arial"/>
+                          <a:ea typeface="微软雅黑"/>
+                          <a:cs typeface="Arial"/>
+                        </a:rPr>
+                        <a:t>J Alzheimers Dis [42]</a:t>
+                      </a:r>
+                    </a:p>
+                  </a:txBody>
+                  <a:tcPr marT="27432" marB="27432">
+                    <a:solidFill>
+                      <a:srgbClr val="FFFFFF"/>
+                    </a:solidFill>
+                  </a:tcPr>
+                </a:tc>
+              </a:tr>
+            </a:tbl>
+          </a:graphicData>
+        </a:graphic>
+      </p:graphicFrame>
+      <p:sp>
+        <p:nvSpPr>
+          <p:cNvPr id="5" name="TextBox 4"/>
+          <p:cNvSpPr txBox="1"/>
+          <p:nvPr/>
+        </p:nvSpPr>
+        <p:spPr>
+          <a:xfrm>
+            <a:off x="640080" y="6419088"/>
+            <a:ext cx="8778240" cy="310896"/>
+          </a:xfrm>
+          <a:prstGeom prst="rect">
+            <a:avLst/>
+          </a:prstGeom>
+          <a:noFill/>
+        </p:spPr>
+        <p:txBody>
+          <a:bodyPr wrap="square" anchor="t" lIns="27432" rIns="27432" tIns="0" bIns="0">
+            <a:spAutoFit/>
+          </a:bodyPr>
+          <a:lstStyle/>
+          <a:p>
+            <a:pPr algn="l">
+              <a:lnSpc>
+                <a:spcPct val="100000"/>
+              </a:lnSpc>
+              <a:spcBef>
+                <a:spcPts val="0"/>
+              </a:spcBef>
+              <a:spcAft>
+                <a:spcPts val="0"/>
+              </a:spcAft>
+            </a:pPr>
+            <a:r>
+              <a:rPr sz="1500" b="0">
+                <a:solidFill>
+                  <a:srgbClr val="777777"/>
+                </a:solidFill>
+                <a:latin typeface="Arial"/>
+                <a:ea typeface="微软雅黑"/>
+                <a:cs typeface="Arial"/>
+              </a:rPr>
+              <a:t>研究生论文中期检查 · 文绍华</a:t>
+            </a:r>
+          </a:p>
+        </p:txBody>
+      </p:sp>
+      <p:sp>
+        <p:nvSpPr>
+          <p:cNvPr id="6" name="TextBox 5"/>
+          <p:cNvSpPr txBox="1"/>
+          <p:nvPr/>
+        </p:nvSpPr>
+        <p:spPr>
+          <a:xfrm>
+            <a:off x="10058400" y="6419088"/>
+            <a:ext cx="1490472" cy="310896"/>
+          </a:xfrm>
+          <a:prstGeom prst="rect">
+            <a:avLst/>
+          </a:prstGeom>
+          <a:noFill/>
+        </p:spPr>
+        <p:txBody>
+          <a:bodyPr wrap="square" anchor="t" lIns="27432" rIns="27432" tIns="0" bIns="0">
+            <a:spAutoFit/>
+          </a:bodyPr>
+          <a:lstStyle/>
+          <a:p>
+            <a:pPr algn="r">
+              <a:lnSpc>
+                <a:spcPct val="100000"/>
+              </a:lnSpc>
+              <a:spcBef>
+                <a:spcPts val="0"/>
+              </a:spcBef>
+              <a:spcAft>
+                <a:spcPts val="0"/>
+              </a:spcAft>
+            </a:pPr>
+            <a:r>
+              <a:rPr sz="1500" b="0">
+                <a:solidFill>
+                  <a:srgbClr val="777777"/>
+                </a:solidFill>
+                <a:latin typeface="Arial"/>
+                <a:ea typeface="微软雅黑"/>
+                <a:cs typeface="Arial"/>
+              </a:rPr>
+              <a:t>14 / 14</a:t>
             </a:r>
           </a:p>
         </p:txBody>
@@ -6877,7 +9276,7 @@
                 <a:ea typeface="微软雅黑"/>
                 <a:cs typeface="Arial"/>
               </a:rPr>
-              <a:t>2 / 12</a:t>
+              <a:t>2 / 14</a:t>
             </a:r>
           </a:p>
         </p:txBody>
@@ -7007,8 +9406,8 @@
         </p:blipFill>
         <p:spPr>
           <a:xfrm>
-            <a:off x="640080" y="1188720"/>
-            <a:ext cx="10908792" cy="4093667"/>
+            <a:off x="1074895" y="1188720"/>
+            <a:ext cx="10039162" cy="3767328"/>
           </a:xfrm>
           <a:prstGeom prst="rect">
             <a:avLst/>
@@ -7018,6 +9417,53 @@
       <p:sp>
         <p:nvSpPr>
           <p:cNvPr id="5" name="TextBox 4"/>
+          <p:cNvSpPr txBox="1"/>
+          <p:nvPr/>
+        </p:nvSpPr>
+        <p:spPr>
+          <a:xfrm>
+            <a:off x="640080" y="5074920"/>
+            <a:ext cx="10908792" cy="868680"/>
+          </a:xfrm>
+          <a:prstGeom prst="rect">
+            <a:avLst/>
+          </a:prstGeom>
+          <a:noFill/>
+        </p:spPr>
+        <p:txBody>
+          <a:bodyPr wrap="square" anchor="t" lIns="27432" rIns="27432" tIns="0" bIns="0">
+            <a:spAutoFit/>
+          </a:bodyPr>
+          <a:lstStyle/>
+          <a:p>
+            <a:pPr algn="l">
+              <a:lnSpc>
+                <a:spcPct val="130000"/>
+              </a:lnSpc>
+              <a:spcBef>
+                <a:spcPts val="0"/>
+              </a:spcBef>
+              <a:spcAft>
+                <a:spcPts val="0"/>
+              </a:spcAft>
+            </a:pPr>
+            <a:r>
+              <a:rPr sz="1700" b="0">
+                <a:solidFill>
+                  <a:srgbClr val="333333"/>
+                </a:solidFill>
+                <a:latin typeface="Arial"/>
+                <a:ea typeface="微软雅黑"/>
+                <a:cs typeface="Arial"/>
+              </a:rPr>
+              <a:t>数据与序列、预测、统计与表达三层已完成，功能层正在实施；整体进度与开题计划一致。</a:t>
+            </a:r>
+          </a:p>
+        </p:txBody>
+      </p:sp>
+      <p:sp>
+        <p:nvSpPr>
+          <p:cNvPr id="6" name="TextBox 5"/>
           <p:cNvSpPr txBox="1"/>
           <p:nvPr/>
         </p:nvSpPr>
@@ -7064,53 +9510,6 @@
       </p:sp>
       <p:sp>
         <p:nvSpPr>
-          <p:cNvPr id="6" name="TextBox 5"/>
-          <p:cNvSpPr txBox="1"/>
-          <p:nvPr/>
-        </p:nvSpPr>
-        <p:spPr>
-          <a:xfrm>
-            <a:off x="640080" y="4626864"/>
-            <a:ext cx="10908792" cy="1280160"/>
-          </a:xfrm>
-          <a:prstGeom prst="rect">
-            <a:avLst/>
-          </a:prstGeom>
-          <a:noFill/>
-        </p:spPr>
-        <p:txBody>
-          <a:bodyPr wrap="square" anchor="t" lIns="27432" rIns="27432" tIns="0" bIns="0">
-            <a:spAutoFit/>
-          </a:bodyPr>
-          <a:lstStyle/>
-          <a:p>
-            <a:pPr algn="l">
-              <a:lnSpc>
-                <a:spcPct val="130000"/>
-              </a:lnSpc>
-              <a:spcBef>
-                <a:spcPts val="0"/>
-              </a:spcBef>
-              <a:spcAft>
-                <a:spcPts val="0"/>
-              </a:spcAft>
-            </a:pPr>
-            <a:r>
-              <a:rPr sz="1700" b="0">
-                <a:solidFill>
-                  <a:srgbClr val="333333"/>
-                </a:solidFill>
-                <a:latin typeface="Arial"/>
-                <a:ea typeface="微软雅黑"/>
-                <a:cs typeface="Arial"/>
-              </a:rPr>
-              <a:t>数据与序列、预测、统计与表达三层已完成，功能层正在实施；整体进度与开题计划一致。</a:t>
-            </a:r>
-          </a:p>
-        </p:txBody>
-      </p:sp>
-      <p:sp>
-        <p:nvSpPr>
           <p:cNvPr id="7" name="TextBox 6"/>
           <p:cNvSpPr txBox="1"/>
           <p:nvPr/>
@@ -7198,7 +9597,7 @@
                 <a:ea typeface="微软雅黑"/>
                 <a:cs typeface="Arial"/>
               </a:rPr>
-              <a:t>3 / 12</a:t>
+              <a:t>3 / 14</a:t>
             </a:r>
           </a:p>
         </p:txBody>
@@ -7263,7 +9662,7 @@
                 <a:ea typeface="微软雅黑"/>
                 <a:cs typeface="Arial"/>
               </a:rPr>
-              <a:t>队列按认知功能分五个阶段，三模型一致阳性才纳入候选集合</a:t>
+              <a:t>宏基因组分析流程：从测序数据到候选抗菌肽清单</a:t>
             </a:r>
           </a:p>
         </p:txBody>
@@ -7312,40 +9711,16 @@
           </a:p>
         </p:txBody>
       </p:sp>
-      <p:pic>
-        <p:nvPicPr>
-          <p:cNvPr id="4" name="Picture 3" descr="figB_三模型预测.png"/>
-          <p:cNvPicPr>
-            <a:picLocks noChangeAspect="1"/>
-          </p:cNvPicPr>
-          <p:nvPr/>
-        </p:nvPicPr>
-        <p:blipFill>
-          <a:blip r:embed="rId2"/>
-          <a:stretch>
-            <a:fillRect/>
-          </a:stretch>
-        </p:blipFill>
-        <p:spPr>
-          <a:xfrm>
-            <a:off x="640080" y="1188720"/>
-            <a:ext cx="7863840" cy="2738225"/>
-          </a:xfrm>
-          <a:prstGeom prst="rect">
-            <a:avLst/>
-          </a:prstGeom>
-        </p:spPr>
-      </p:pic>
-      <p:sp>
-        <p:nvSpPr>
-          <p:cNvPr id="5" name="TextBox 4"/>
+      <p:sp>
+        <p:nvSpPr>
+          <p:cNvPr id="4" name="TextBox 3"/>
           <p:cNvSpPr txBox="1"/>
           <p:nvPr/>
         </p:nvSpPr>
         <p:spPr>
           <a:xfrm>
-            <a:off x="8549640" y="1188720"/>
-            <a:ext cx="2999232" cy="4480560"/>
+            <a:off x="640080" y="1024128"/>
+            <a:ext cx="10908792" cy="274320"/>
           </a:xfrm>
           <a:prstGeom prst="rect">
             <a:avLst/>
@@ -7360,7 +9735,7 @@
           <a:p>
             <a:pPr algn="l">
               <a:lnSpc>
-                <a:spcPct val="110000"/>
+                <a:spcPct val="100000"/>
               </a:lnSpc>
               <a:spcBef>
                 <a:spcPts val="0"/>
@@ -7370,7 +9745,72 @@
               </a:spcAft>
             </a:pPr>
             <a:r>
-              <a:rPr sz="1600" b="1">
+              <a:rPr sz="1500" b="0">
+                <a:solidFill>
+                  <a:srgbClr val="777777"/>
+                </a:solidFill>
+                <a:latin typeface="Arial"/>
+                <a:ea typeface="微软雅黑"/>
+                <a:cs typeface="Arial"/>
+              </a:rPr>
+              <a:t>流程按“数据 → 序列 → 预测 → 统计 → 功能”顺序推进，每一步的输入输出都可追溯。</a:t>
+            </a:r>
+          </a:p>
+        </p:txBody>
+      </p:sp>
+      <p:sp>
+        <p:nvSpPr>
+          <p:cNvPr id="5" name="Rectangle 4"/>
+          <p:cNvSpPr/>
+          <p:nvPr/>
+        </p:nvSpPr>
+        <p:spPr>
+          <a:xfrm>
+            <a:off x="640080" y="1335024"/>
+            <a:ext cx="1703832" cy="1536192"/>
+          </a:xfrm>
+          <a:prstGeom prst="rect">
+            <a:avLst/>
+          </a:prstGeom>
+          <a:solidFill>
+            <a:srgbClr val="F7F7F5"/>
+          </a:solidFill>
+          <a:ln>
+            <a:noFill/>
+          </a:ln>
+          <a:effectLst/>
+        </p:spPr>
+        <p:style>
+          <a:lnRef idx="1">
+            <a:schemeClr val="accent1"/>
+          </a:lnRef>
+          <a:fillRef idx="3">
+            <a:schemeClr val="accent1"/>
+          </a:fillRef>
+          <a:effectRef idx="2">
+            <a:schemeClr val="accent1"/>
+          </a:effectRef>
+          <a:fontRef idx="minor">
+            <a:schemeClr val="lt1"/>
+          </a:fontRef>
+        </p:style>
+        <p:txBody>
+          <a:bodyPr rtlCol="0" anchor="ctr" wrap="square" tIns="91440" bIns="54864"/>
+          <a:lstStyle/>
+          <a:p>
+            <a:pPr algn="ctr">
+              <a:lnSpc>
+                <a:spcPct val="112000"/>
+              </a:lnSpc>
+              <a:spcBef>
+                <a:spcPts val="0"/>
+              </a:spcBef>
+              <a:spcAft>
+                <a:spcPts val="0"/>
+              </a:spcAft>
+            </a:pPr>
+            <a:r>
+              <a:rPr sz="1500" b="1">
                 <a:solidFill>
                   <a:srgbClr val="2F5D62"/>
                 </a:solidFill>
@@ -7378,23 +9818,34 @@
                 <a:ea typeface="微软雅黑"/>
                 <a:cs typeface="Arial"/>
               </a:rPr>
-              <a:t>解读</a:t>
+              <a:t>① </a:t>
+            </a:r>
+            <a:r>
+              <a:rPr sz="1500" b="1">
+                <a:solidFill>
+                  <a:srgbClr val="111111"/>
+                </a:solidFill>
+                <a:latin typeface="Arial"/>
+                <a:ea typeface="微软雅黑"/>
+                <a:cs typeface="Arial"/>
+              </a:rPr>
+              <a:t>测序与质控</a:t>
             </a:r>
           </a:p>
           <a:p>
             <a:pPr algn="l">
               <a:lnSpc>
-                <a:spcPct val="130000"/>
+                <a:spcPct val="116000"/>
               </a:lnSpc>
               <a:spcBef>
-                <a:spcPts val="800"/>
+                <a:spcPts val="400"/>
               </a:spcBef>
               <a:spcAft>
                 <a:spcPts val="0"/>
               </a:spcAft>
             </a:pPr>
             <a:r>
-              <a:rPr sz="1600" b="0">
+              <a:rPr sz="1500" b="0">
                 <a:solidFill>
                   <a:srgbClr val="333333"/>
                 </a:solidFill>
@@ -7402,14 +9853,2310 @@
                 <a:ea typeface="微软雅黑"/>
                 <a:cs typeface="Arial"/>
               </a:rPr>
-              <a:t>队列按 NC、SCS、SCD、MCI 与 AD 五个认知阶段分组，样本与元数据一一对应；Attention、LSTM、BERT 三个模型相互独立地给出预测，只有三者一致判为阳性的序列才进入候选集合，以降低单一模型的偏倚。该步骤已完成。</a:t>
-            </a:r>
-          </a:p>
-        </p:txBody>
-      </p:sp>
-      <p:sp>
-        <p:nvSpPr>
-          <p:cNvPr id="6" name="TextBox 5"/>
+              <a:t>双端鸟枪法测序
+质控与去宿主</a:t>
+            </a:r>
+          </a:p>
+        </p:txBody>
+      </p:sp>
+      <p:sp>
+        <p:nvSpPr>
+          <p:cNvPr id="6" name="Rectangle 5"/>
+          <p:cNvSpPr/>
+          <p:nvPr/>
+        </p:nvSpPr>
+        <p:spPr>
+          <a:xfrm>
+            <a:off x="640080" y="1335024"/>
+            <a:ext cx="1703832" cy="38100"/>
+          </a:xfrm>
+          <a:prstGeom prst="rect">
+            <a:avLst/>
+          </a:prstGeom>
+          <a:solidFill>
+            <a:srgbClr val="2F5D62"/>
+          </a:solidFill>
+          <a:ln>
+            <a:noFill/>
+          </a:ln>
+          <a:effectLst/>
+        </p:spPr>
+        <p:style>
+          <a:lnRef idx="1">
+            <a:schemeClr val="accent1"/>
+          </a:lnRef>
+          <a:fillRef idx="3">
+            <a:schemeClr val="accent1"/>
+          </a:fillRef>
+          <a:effectRef idx="2">
+            <a:schemeClr val="accent1"/>
+          </a:effectRef>
+          <a:fontRef idx="minor">
+            <a:schemeClr val="lt1"/>
+          </a:fontRef>
+        </p:style>
+        <p:txBody>
+          <a:bodyPr rtlCol="0" anchor="ctr"/>
+          <a:lstStyle/>
+          <a:p>
+            <a:pPr algn="ctr"/>
+          </a:p>
+        </p:txBody>
+      </p:sp>
+      <p:sp>
+        <p:nvSpPr>
+          <p:cNvPr id="7" name="Right Arrow 6"/>
+          <p:cNvSpPr/>
+          <p:nvPr/>
+        </p:nvSpPr>
+        <p:spPr>
+          <a:xfrm>
+            <a:off x="2375916" y="2052828"/>
+            <a:ext cx="73151" cy="100584"/>
+          </a:xfrm>
+          <a:prstGeom prst="rightArrow">
+            <a:avLst/>
+          </a:prstGeom>
+          <a:solidFill>
+            <a:srgbClr val="777777"/>
+          </a:solidFill>
+          <a:ln>
+            <a:noFill/>
+          </a:ln>
+          <a:effectLst/>
+        </p:spPr>
+        <p:style>
+          <a:lnRef idx="1">
+            <a:schemeClr val="accent1"/>
+          </a:lnRef>
+          <a:fillRef idx="3">
+            <a:schemeClr val="accent1"/>
+          </a:fillRef>
+          <a:effectRef idx="2">
+            <a:schemeClr val="accent1"/>
+          </a:effectRef>
+          <a:fontRef idx="minor">
+            <a:schemeClr val="lt1"/>
+          </a:fontRef>
+        </p:style>
+        <p:txBody>
+          <a:bodyPr rtlCol="0" anchor="ctr"/>
+          <a:lstStyle/>
+          <a:p>
+            <a:pPr algn="ctr"/>
+          </a:p>
+        </p:txBody>
+      </p:sp>
+      <p:sp>
+        <p:nvSpPr>
+          <p:cNvPr id="8" name="Rectangle 7"/>
+          <p:cNvSpPr/>
+          <p:nvPr/>
+        </p:nvSpPr>
+        <p:spPr>
+          <a:xfrm>
+            <a:off x="2481072" y="1335024"/>
+            <a:ext cx="1703832" cy="1536192"/>
+          </a:xfrm>
+          <a:prstGeom prst="rect">
+            <a:avLst/>
+          </a:prstGeom>
+          <a:solidFill>
+            <a:srgbClr val="F7F7F5"/>
+          </a:solidFill>
+          <a:ln>
+            <a:noFill/>
+          </a:ln>
+          <a:effectLst/>
+        </p:spPr>
+        <p:style>
+          <a:lnRef idx="1">
+            <a:schemeClr val="accent1"/>
+          </a:lnRef>
+          <a:fillRef idx="3">
+            <a:schemeClr val="accent1"/>
+          </a:fillRef>
+          <a:effectRef idx="2">
+            <a:schemeClr val="accent1"/>
+          </a:effectRef>
+          <a:fontRef idx="minor">
+            <a:schemeClr val="lt1"/>
+          </a:fontRef>
+        </p:style>
+        <p:txBody>
+          <a:bodyPr rtlCol="0" anchor="ctr" wrap="square" tIns="91440" bIns="54864"/>
+          <a:lstStyle/>
+          <a:p>
+            <a:pPr algn="ctr">
+              <a:lnSpc>
+                <a:spcPct val="112000"/>
+              </a:lnSpc>
+              <a:spcBef>
+                <a:spcPts val="0"/>
+              </a:spcBef>
+              <a:spcAft>
+                <a:spcPts val="0"/>
+              </a:spcAft>
+            </a:pPr>
+            <a:r>
+              <a:rPr sz="1500" b="1">
+                <a:solidFill>
+                  <a:srgbClr val="2F5D62"/>
+                </a:solidFill>
+                <a:latin typeface="Arial"/>
+                <a:ea typeface="微软雅黑"/>
+                <a:cs typeface="Arial"/>
+              </a:rPr>
+              <a:t>② </a:t>
+            </a:r>
+            <a:r>
+              <a:rPr sz="1500" b="1">
+                <a:solidFill>
+                  <a:srgbClr val="111111"/>
+                </a:solidFill>
+                <a:latin typeface="Arial"/>
+                <a:ea typeface="微软雅黑"/>
+                <a:cs typeface="Arial"/>
+              </a:rPr>
+              <a:t>组装与分箱</a:t>
+            </a:r>
+          </a:p>
+          <a:p>
+            <a:pPr algn="l">
+              <a:lnSpc>
+                <a:spcPct val="116000"/>
+              </a:lnSpc>
+              <a:spcBef>
+                <a:spcPts val="400"/>
+              </a:spcBef>
+              <a:spcAft>
+                <a:spcPts val="0"/>
+              </a:spcAft>
+            </a:pPr>
+            <a:r>
+              <a:rPr sz="1500" b="0">
+                <a:solidFill>
+                  <a:srgbClr val="333333"/>
+                </a:solidFill>
+                <a:latin typeface="Arial"/>
+                <a:ea typeface="微软雅黑"/>
+                <a:cs typeface="Arial"/>
+              </a:rPr>
+              <a:t>序列组装与分箱
+分箱提纯</a:t>
+            </a:r>
+          </a:p>
+        </p:txBody>
+      </p:sp>
+      <p:sp>
+        <p:nvSpPr>
+          <p:cNvPr id="9" name="Rectangle 8"/>
+          <p:cNvSpPr/>
+          <p:nvPr/>
+        </p:nvSpPr>
+        <p:spPr>
+          <a:xfrm>
+            <a:off x="2481072" y="1335024"/>
+            <a:ext cx="1703832" cy="38100"/>
+          </a:xfrm>
+          <a:prstGeom prst="rect">
+            <a:avLst/>
+          </a:prstGeom>
+          <a:solidFill>
+            <a:srgbClr val="2F5D62"/>
+          </a:solidFill>
+          <a:ln>
+            <a:noFill/>
+          </a:ln>
+          <a:effectLst/>
+        </p:spPr>
+        <p:style>
+          <a:lnRef idx="1">
+            <a:schemeClr val="accent1"/>
+          </a:lnRef>
+          <a:fillRef idx="3">
+            <a:schemeClr val="accent1"/>
+          </a:fillRef>
+          <a:effectRef idx="2">
+            <a:schemeClr val="accent1"/>
+          </a:effectRef>
+          <a:fontRef idx="minor">
+            <a:schemeClr val="lt1"/>
+          </a:fontRef>
+        </p:style>
+        <p:txBody>
+          <a:bodyPr rtlCol="0" anchor="ctr"/>
+          <a:lstStyle/>
+          <a:p>
+            <a:pPr algn="ctr"/>
+          </a:p>
+        </p:txBody>
+      </p:sp>
+      <p:sp>
+        <p:nvSpPr>
+          <p:cNvPr id="10" name="Right Arrow 9"/>
+          <p:cNvSpPr/>
+          <p:nvPr/>
+        </p:nvSpPr>
+        <p:spPr>
+          <a:xfrm>
+            <a:off x="4216908" y="2052828"/>
+            <a:ext cx="73151" cy="100584"/>
+          </a:xfrm>
+          <a:prstGeom prst="rightArrow">
+            <a:avLst/>
+          </a:prstGeom>
+          <a:solidFill>
+            <a:srgbClr val="777777"/>
+          </a:solidFill>
+          <a:ln>
+            <a:noFill/>
+          </a:ln>
+          <a:effectLst/>
+        </p:spPr>
+        <p:style>
+          <a:lnRef idx="1">
+            <a:schemeClr val="accent1"/>
+          </a:lnRef>
+          <a:fillRef idx="3">
+            <a:schemeClr val="accent1"/>
+          </a:fillRef>
+          <a:effectRef idx="2">
+            <a:schemeClr val="accent1"/>
+          </a:effectRef>
+          <a:fontRef idx="minor">
+            <a:schemeClr val="lt1"/>
+          </a:fontRef>
+        </p:style>
+        <p:txBody>
+          <a:bodyPr rtlCol="0" anchor="ctr"/>
+          <a:lstStyle/>
+          <a:p>
+            <a:pPr algn="ctr"/>
+          </a:p>
+        </p:txBody>
+      </p:sp>
+      <p:sp>
+        <p:nvSpPr>
+          <p:cNvPr id="11" name="Rectangle 10"/>
+          <p:cNvSpPr/>
+          <p:nvPr/>
+        </p:nvSpPr>
+        <p:spPr>
+          <a:xfrm>
+            <a:off x="4322064" y="1335024"/>
+            <a:ext cx="1703832" cy="1536192"/>
+          </a:xfrm>
+          <a:prstGeom prst="rect">
+            <a:avLst/>
+          </a:prstGeom>
+          <a:solidFill>
+            <a:srgbClr val="F7F7F5"/>
+          </a:solidFill>
+          <a:ln>
+            <a:noFill/>
+          </a:ln>
+          <a:effectLst/>
+        </p:spPr>
+        <p:style>
+          <a:lnRef idx="1">
+            <a:schemeClr val="accent1"/>
+          </a:lnRef>
+          <a:fillRef idx="3">
+            <a:schemeClr val="accent1"/>
+          </a:fillRef>
+          <a:effectRef idx="2">
+            <a:schemeClr val="accent1"/>
+          </a:effectRef>
+          <a:fontRef idx="minor">
+            <a:schemeClr val="lt1"/>
+          </a:fontRef>
+        </p:style>
+        <p:txBody>
+          <a:bodyPr rtlCol="0" anchor="ctr" wrap="square" tIns="91440" bIns="54864"/>
+          <a:lstStyle/>
+          <a:p>
+            <a:pPr algn="ctr">
+              <a:lnSpc>
+                <a:spcPct val="112000"/>
+              </a:lnSpc>
+              <a:spcBef>
+                <a:spcPts val="0"/>
+              </a:spcBef>
+              <a:spcAft>
+                <a:spcPts val="0"/>
+              </a:spcAft>
+            </a:pPr>
+            <a:r>
+              <a:rPr sz="1500" b="1">
+                <a:solidFill>
+                  <a:srgbClr val="2F5D62"/>
+                </a:solidFill>
+                <a:latin typeface="Arial"/>
+                <a:ea typeface="微软雅黑"/>
+                <a:cs typeface="Arial"/>
+              </a:rPr>
+              <a:t>③ </a:t>
+            </a:r>
+            <a:r>
+              <a:rPr sz="1500" b="1">
+                <a:solidFill>
+                  <a:srgbClr val="111111"/>
+                </a:solidFill>
+                <a:latin typeface="Arial"/>
+                <a:ea typeface="微软雅黑"/>
+                <a:cs typeface="Arial"/>
+              </a:rPr>
+              <a:t>参考基因组集</a:t>
+            </a:r>
+          </a:p>
+          <a:p>
+            <a:pPr algn="l">
+              <a:lnSpc>
+                <a:spcPct val="116000"/>
+              </a:lnSpc>
+              <a:spcBef>
+                <a:spcPts val="400"/>
+              </a:spcBef>
+              <a:spcAft>
+                <a:spcPts val="0"/>
+              </a:spcAft>
+            </a:pPr>
+            <a:r>
+              <a:rPr sz="1500" b="0">
+                <a:solidFill>
+                  <a:srgbClr val="333333"/>
+                </a:solidFill>
+                <a:latin typeface="Arial"/>
+                <a:ea typeface="微软雅黑"/>
+                <a:cs typeface="Arial"/>
+              </a:rPr>
+              <a:t>种水平去冗余
+非冗余参考集</a:t>
+            </a:r>
+          </a:p>
+        </p:txBody>
+      </p:sp>
+      <p:sp>
+        <p:nvSpPr>
+          <p:cNvPr id="12" name="Rectangle 11"/>
+          <p:cNvSpPr/>
+          <p:nvPr/>
+        </p:nvSpPr>
+        <p:spPr>
+          <a:xfrm>
+            <a:off x="4322064" y="1335024"/>
+            <a:ext cx="1703832" cy="38100"/>
+          </a:xfrm>
+          <a:prstGeom prst="rect">
+            <a:avLst/>
+          </a:prstGeom>
+          <a:solidFill>
+            <a:srgbClr val="2F5D62"/>
+          </a:solidFill>
+          <a:ln>
+            <a:noFill/>
+          </a:ln>
+          <a:effectLst/>
+        </p:spPr>
+        <p:style>
+          <a:lnRef idx="1">
+            <a:schemeClr val="accent1"/>
+          </a:lnRef>
+          <a:fillRef idx="3">
+            <a:schemeClr val="accent1"/>
+          </a:fillRef>
+          <a:effectRef idx="2">
+            <a:schemeClr val="accent1"/>
+          </a:effectRef>
+          <a:fontRef idx="minor">
+            <a:schemeClr val="lt1"/>
+          </a:fontRef>
+        </p:style>
+        <p:txBody>
+          <a:bodyPr rtlCol="0" anchor="ctr"/>
+          <a:lstStyle/>
+          <a:p>
+            <a:pPr algn="ctr"/>
+          </a:p>
+        </p:txBody>
+      </p:sp>
+      <p:sp>
+        <p:nvSpPr>
+          <p:cNvPr id="13" name="Right Arrow 12"/>
+          <p:cNvSpPr/>
+          <p:nvPr/>
+        </p:nvSpPr>
+        <p:spPr>
+          <a:xfrm>
+            <a:off x="6057900" y="2052828"/>
+            <a:ext cx="73151" cy="100584"/>
+          </a:xfrm>
+          <a:prstGeom prst="rightArrow">
+            <a:avLst/>
+          </a:prstGeom>
+          <a:solidFill>
+            <a:srgbClr val="777777"/>
+          </a:solidFill>
+          <a:ln>
+            <a:noFill/>
+          </a:ln>
+          <a:effectLst/>
+        </p:spPr>
+        <p:style>
+          <a:lnRef idx="1">
+            <a:schemeClr val="accent1"/>
+          </a:lnRef>
+          <a:fillRef idx="3">
+            <a:schemeClr val="accent1"/>
+          </a:fillRef>
+          <a:effectRef idx="2">
+            <a:schemeClr val="accent1"/>
+          </a:effectRef>
+          <a:fontRef idx="minor">
+            <a:schemeClr val="lt1"/>
+          </a:fontRef>
+        </p:style>
+        <p:txBody>
+          <a:bodyPr rtlCol="0" anchor="ctr"/>
+          <a:lstStyle/>
+          <a:p>
+            <a:pPr algn="ctr"/>
+          </a:p>
+        </p:txBody>
+      </p:sp>
+      <p:sp>
+        <p:nvSpPr>
+          <p:cNvPr id="14" name="Rectangle 13"/>
+          <p:cNvSpPr/>
+          <p:nvPr/>
+        </p:nvSpPr>
+        <p:spPr>
+          <a:xfrm>
+            <a:off x="6163056" y="1335024"/>
+            <a:ext cx="1703832" cy="1536192"/>
+          </a:xfrm>
+          <a:prstGeom prst="rect">
+            <a:avLst/>
+          </a:prstGeom>
+          <a:solidFill>
+            <a:srgbClr val="F7F7F5"/>
+          </a:solidFill>
+          <a:ln>
+            <a:noFill/>
+          </a:ln>
+          <a:effectLst/>
+        </p:spPr>
+        <p:style>
+          <a:lnRef idx="1">
+            <a:schemeClr val="accent1"/>
+          </a:lnRef>
+          <a:fillRef idx="3">
+            <a:schemeClr val="accent1"/>
+          </a:fillRef>
+          <a:effectRef idx="2">
+            <a:schemeClr val="accent1"/>
+          </a:effectRef>
+          <a:fontRef idx="minor">
+            <a:schemeClr val="lt1"/>
+          </a:fontRef>
+        </p:style>
+        <p:txBody>
+          <a:bodyPr rtlCol="0" anchor="ctr" wrap="square" tIns="91440" bIns="54864"/>
+          <a:lstStyle/>
+          <a:p>
+            <a:pPr algn="ctr">
+              <a:lnSpc>
+                <a:spcPct val="112000"/>
+              </a:lnSpc>
+              <a:spcBef>
+                <a:spcPts val="0"/>
+              </a:spcBef>
+              <a:spcAft>
+                <a:spcPts val="0"/>
+              </a:spcAft>
+            </a:pPr>
+            <a:r>
+              <a:rPr sz="1500" b="1">
+                <a:solidFill>
+                  <a:srgbClr val="2F5D62"/>
+                </a:solidFill>
+                <a:latin typeface="Arial"/>
+                <a:ea typeface="微软雅黑"/>
+                <a:cs typeface="Arial"/>
+              </a:rPr>
+              <a:t>④ </a:t>
+            </a:r>
+            <a:r>
+              <a:rPr sz="1500" b="1">
+                <a:solidFill>
+                  <a:srgbClr val="111111"/>
+                </a:solidFill>
+                <a:latin typeface="Arial"/>
+                <a:ea typeface="微软雅黑"/>
+                <a:cs typeface="Arial"/>
+              </a:rPr>
+              <a:t>sORF 预测</a:t>
+            </a:r>
+          </a:p>
+          <a:p>
+            <a:pPr algn="l">
+              <a:lnSpc>
+                <a:spcPct val="116000"/>
+              </a:lnSpc>
+              <a:spcBef>
+                <a:spcPts val="400"/>
+              </a:spcBef>
+              <a:spcAft>
+                <a:spcPts val="0"/>
+              </a:spcAft>
+            </a:pPr>
+            <a:r>
+              <a:rPr sz="1500" b="0">
+                <a:solidFill>
+                  <a:srgbClr val="333333"/>
+                </a:solidFill>
+                <a:latin typeface="Arial"/>
+                <a:ea typeface="微软雅黑"/>
+                <a:cs typeface="Arial"/>
+              </a:rPr>
+              <a:t>小开放阅读框
+长度 5—50 aa</a:t>
+            </a:r>
+          </a:p>
+        </p:txBody>
+      </p:sp>
+      <p:sp>
+        <p:nvSpPr>
+          <p:cNvPr id="15" name="Rectangle 14"/>
+          <p:cNvSpPr/>
+          <p:nvPr/>
+        </p:nvSpPr>
+        <p:spPr>
+          <a:xfrm>
+            <a:off x="6163056" y="1335024"/>
+            <a:ext cx="1703832" cy="38100"/>
+          </a:xfrm>
+          <a:prstGeom prst="rect">
+            <a:avLst/>
+          </a:prstGeom>
+          <a:solidFill>
+            <a:srgbClr val="2F5D62"/>
+          </a:solidFill>
+          <a:ln>
+            <a:noFill/>
+          </a:ln>
+          <a:effectLst/>
+        </p:spPr>
+        <p:style>
+          <a:lnRef idx="1">
+            <a:schemeClr val="accent1"/>
+          </a:lnRef>
+          <a:fillRef idx="3">
+            <a:schemeClr val="accent1"/>
+          </a:fillRef>
+          <a:effectRef idx="2">
+            <a:schemeClr val="accent1"/>
+          </a:effectRef>
+          <a:fontRef idx="minor">
+            <a:schemeClr val="lt1"/>
+          </a:fontRef>
+        </p:style>
+        <p:txBody>
+          <a:bodyPr rtlCol="0" anchor="ctr"/>
+          <a:lstStyle/>
+          <a:p>
+            <a:pPr algn="ctr"/>
+          </a:p>
+        </p:txBody>
+      </p:sp>
+      <p:sp>
+        <p:nvSpPr>
+          <p:cNvPr id="16" name="Right Arrow 15"/>
+          <p:cNvSpPr/>
+          <p:nvPr/>
+        </p:nvSpPr>
+        <p:spPr>
+          <a:xfrm>
+            <a:off x="7898892" y="2052828"/>
+            <a:ext cx="73151" cy="100584"/>
+          </a:xfrm>
+          <a:prstGeom prst="rightArrow">
+            <a:avLst/>
+          </a:prstGeom>
+          <a:solidFill>
+            <a:srgbClr val="777777"/>
+          </a:solidFill>
+          <a:ln>
+            <a:noFill/>
+          </a:ln>
+          <a:effectLst/>
+        </p:spPr>
+        <p:style>
+          <a:lnRef idx="1">
+            <a:schemeClr val="accent1"/>
+          </a:lnRef>
+          <a:fillRef idx="3">
+            <a:schemeClr val="accent1"/>
+          </a:fillRef>
+          <a:effectRef idx="2">
+            <a:schemeClr val="accent1"/>
+          </a:effectRef>
+          <a:fontRef idx="minor">
+            <a:schemeClr val="lt1"/>
+          </a:fontRef>
+        </p:style>
+        <p:txBody>
+          <a:bodyPr rtlCol="0" anchor="ctr"/>
+          <a:lstStyle/>
+          <a:p>
+            <a:pPr algn="ctr"/>
+          </a:p>
+        </p:txBody>
+      </p:sp>
+      <p:sp>
+        <p:nvSpPr>
+          <p:cNvPr id="17" name="Rectangle 16"/>
+          <p:cNvSpPr/>
+          <p:nvPr/>
+        </p:nvSpPr>
+        <p:spPr>
+          <a:xfrm>
+            <a:off x="8004048" y="1335024"/>
+            <a:ext cx="1703832" cy="1536192"/>
+          </a:xfrm>
+          <a:prstGeom prst="rect">
+            <a:avLst/>
+          </a:prstGeom>
+          <a:solidFill>
+            <a:srgbClr val="F7F7F5"/>
+          </a:solidFill>
+          <a:ln>
+            <a:noFill/>
+          </a:ln>
+          <a:effectLst/>
+        </p:spPr>
+        <p:style>
+          <a:lnRef idx="1">
+            <a:schemeClr val="accent1"/>
+          </a:lnRef>
+          <a:fillRef idx="3">
+            <a:schemeClr val="accent1"/>
+          </a:fillRef>
+          <a:effectRef idx="2">
+            <a:schemeClr val="accent1"/>
+          </a:effectRef>
+          <a:fontRef idx="minor">
+            <a:schemeClr val="lt1"/>
+          </a:fontRef>
+        </p:style>
+        <p:txBody>
+          <a:bodyPr rtlCol="0" anchor="ctr" wrap="square" tIns="91440" bIns="54864"/>
+          <a:lstStyle/>
+          <a:p>
+            <a:pPr algn="ctr">
+              <a:lnSpc>
+                <a:spcPct val="112000"/>
+              </a:lnSpc>
+              <a:spcBef>
+                <a:spcPts val="0"/>
+              </a:spcBef>
+              <a:spcAft>
+                <a:spcPts val="0"/>
+              </a:spcAft>
+            </a:pPr>
+            <a:r>
+              <a:rPr sz="1500" b="1">
+                <a:solidFill>
+                  <a:srgbClr val="2F5D62"/>
+                </a:solidFill>
+                <a:latin typeface="Arial"/>
+                <a:ea typeface="微软雅黑"/>
+                <a:cs typeface="Arial"/>
+              </a:rPr>
+              <a:t>⑤ </a:t>
+            </a:r>
+            <a:r>
+              <a:rPr sz="1500" b="1">
+                <a:solidFill>
+                  <a:srgbClr val="111111"/>
+                </a:solidFill>
+                <a:latin typeface="Arial"/>
+                <a:ea typeface="微软雅黑"/>
+                <a:cs typeface="Arial"/>
+              </a:rPr>
+              <a:t>去冗余建库</a:t>
+            </a:r>
+          </a:p>
+          <a:p>
+            <a:pPr algn="l">
+              <a:lnSpc>
+                <a:spcPct val="116000"/>
+              </a:lnSpc>
+              <a:spcBef>
+                <a:spcPts val="400"/>
+              </a:spcBef>
+              <a:spcAft>
+                <a:spcPts val="0"/>
+              </a:spcAft>
+            </a:pPr>
+            <a:r>
+              <a:rPr sz="1500" b="0">
+                <a:solidFill>
+                  <a:srgbClr val="333333"/>
+                </a:solidFill>
+                <a:latin typeface="Arial"/>
+                <a:ea typeface="微软雅黑"/>
+                <a:cs typeface="Arial"/>
+              </a:rPr>
+              <a:t>序列级去冗余
+非冗余短肽库</a:t>
+            </a:r>
+          </a:p>
+        </p:txBody>
+      </p:sp>
+      <p:sp>
+        <p:nvSpPr>
+          <p:cNvPr id="18" name="Rectangle 17"/>
+          <p:cNvSpPr/>
+          <p:nvPr/>
+        </p:nvSpPr>
+        <p:spPr>
+          <a:xfrm>
+            <a:off x="8004048" y="1335024"/>
+            <a:ext cx="1703832" cy="38100"/>
+          </a:xfrm>
+          <a:prstGeom prst="rect">
+            <a:avLst/>
+          </a:prstGeom>
+          <a:solidFill>
+            <a:srgbClr val="2F5D62"/>
+          </a:solidFill>
+          <a:ln>
+            <a:noFill/>
+          </a:ln>
+          <a:effectLst/>
+        </p:spPr>
+        <p:style>
+          <a:lnRef idx="1">
+            <a:schemeClr val="accent1"/>
+          </a:lnRef>
+          <a:fillRef idx="3">
+            <a:schemeClr val="accent1"/>
+          </a:fillRef>
+          <a:effectRef idx="2">
+            <a:schemeClr val="accent1"/>
+          </a:effectRef>
+          <a:fontRef idx="minor">
+            <a:schemeClr val="lt1"/>
+          </a:fontRef>
+        </p:style>
+        <p:txBody>
+          <a:bodyPr rtlCol="0" anchor="ctr"/>
+          <a:lstStyle/>
+          <a:p>
+            <a:pPr algn="ctr"/>
+          </a:p>
+        </p:txBody>
+      </p:sp>
+      <p:sp>
+        <p:nvSpPr>
+          <p:cNvPr id="19" name="Right Arrow 18"/>
+          <p:cNvSpPr/>
+          <p:nvPr/>
+        </p:nvSpPr>
+        <p:spPr>
+          <a:xfrm>
+            <a:off x="9739884" y="2052828"/>
+            <a:ext cx="73151" cy="100584"/>
+          </a:xfrm>
+          <a:prstGeom prst="rightArrow">
+            <a:avLst/>
+          </a:prstGeom>
+          <a:solidFill>
+            <a:srgbClr val="777777"/>
+          </a:solidFill>
+          <a:ln>
+            <a:noFill/>
+          </a:ln>
+          <a:effectLst/>
+        </p:spPr>
+        <p:style>
+          <a:lnRef idx="1">
+            <a:schemeClr val="accent1"/>
+          </a:lnRef>
+          <a:fillRef idx="3">
+            <a:schemeClr val="accent1"/>
+          </a:fillRef>
+          <a:effectRef idx="2">
+            <a:schemeClr val="accent1"/>
+          </a:effectRef>
+          <a:fontRef idx="minor">
+            <a:schemeClr val="lt1"/>
+          </a:fontRef>
+        </p:style>
+        <p:txBody>
+          <a:bodyPr rtlCol="0" anchor="ctr"/>
+          <a:lstStyle/>
+          <a:p>
+            <a:pPr algn="ctr"/>
+          </a:p>
+        </p:txBody>
+      </p:sp>
+      <p:sp>
+        <p:nvSpPr>
+          <p:cNvPr id="20" name="Rectangle 19"/>
+          <p:cNvSpPr/>
+          <p:nvPr/>
+        </p:nvSpPr>
+        <p:spPr>
+          <a:xfrm>
+            <a:off x="9845040" y="1335024"/>
+            <a:ext cx="1703832" cy="1536192"/>
+          </a:xfrm>
+          <a:prstGeom prst="rect">
+            <a:avLst/>
+          </a:prstGeom>
+          <a:solidFill>
+            <a:srgbClr val="F7F7F5"/>
+          </a:solidFill>
+          <a:ln>
+            <a:noFill/>
+          </a:ln>
+          <a:effectLst/>
+        </p:spPr>
+        <p:style>
+          <a:lnRef idx="1">
+            <a:schemeClr val="accent1"/>
+          </a:lnRef>
+          <a:fillRef idx="3">
+            <a:schemeClr val="accent1"/>
+          </a:fillRef>
+          <a:effectRef idx="2">
+            <a:schemeClr val="accent1"/>
+          </a:effectRef>
+          <a:fontRef idx="minor">
+            <a:schemeClr val="lt1"/>
+          </a:fontRef>
+        </p:style>
+        <p:txBody>
+          <a:bodyPr rtlCol="0" anchor="ctr" wrap="square" tIns="91440" bIns="54864"/>
+          <a:lstStyle/>
+          <a:p>
+            <a:pPr algn="ctr">
+              <a:lnSpc>
+                <a:spcPct val="112000"/>
+              </a:lnSpc>
+              <a:spcBef>
+                <a:spcPts val="0"/>
+              </a:spcBef>
+              <a:spcAft>
+                <a:spcPts val="0"/>
+              </a:spcAft>
+            </a:pPr>
+            <a:r>
+              <a:rPr sz="1500" b="1">
+                <a:solidFill>
+                  <a:srgbClr val="2F5D62"/>
+                </a:solidFill>
+                <a:latin typeface="Arial"/>
+                <a:ea typeface="微软雅黑"/>
+                <a:cs typeface="Arial"/>
+              </a:rPr>
+              <a:t>⑥ </a:t>
+            </a:r>
+            <a:r>
+              <a:rPr sz="1500" b="1">
+                <a:solidFill>
+                  <a:srgbClr val="111111"/>
+                </a:solidFill>
+                <a:latin typeface="Arial"/>
+                <a:ea typeface="微软雅黑"/>
+                <a:cs typeface="Arial"/>
+              </a:rPr>
+              <a:t>共识预测</a:t>
+            </a:r>
+          </a:p>
+          <a:p>
+            <a:pPr algn="l">
+              <a:lnSpc>
+                <a:spcPct val="116000"/>
+              </a:lnSpc>
+              <a:spcBef>
+                <a:spcPts val="400"/>
+              </a:spcBef>
+              <a:spcAft>
+                <a:spcPts val="0"/>
+              </a:spcAft>
+            </a:pPr>
+            <a:r>
+              <a:rPr sz="1500" b="0">
+                <a:solidFill>
+                  <a:srgbClr val="333333"/>
+                </a:solidFill>
+                <a:latin typeface="Arial"/>
+                <a:ea typeface="微软雅黑"/>
+                <a:cs typeface="Arial"/>
+              </a:rPr>
+              <a:t>多模型独立预测
+一致阳性才纳入</a:t>
+            </a:r>
+          </a:p>
+        </p:txBody>
+      </p:sp>
+      <p:sp>
+        <p:nvSpPr>
+          <p:cNvPr id="21" name="Rectangle 20"/>
+          <p:cNvSpPr/>
+          <p:nvPr/>
+        </p:nvSpPr>
+        <p:spPr>
+          <a:xfrm>
+            <a:off x="9845040" y="1335024"/>
+            <a:ext cx="1703832" cy="38100"/>
+          </a:xfrm>
+          <a:prstGeom prst="rect">
+            <a:avLst/>
+          </a:prstGeom>
+          <a:solidFill>
+            <a:srgbClr val="2F5D62"/>
+          </a:solidFill>
+          <a:ln>
+            <a:noFill/>
+          </a:ln>
+          <a:effectLst/>
+        </p:spPr>
+        <p:style>
+          <a:lnRef idx="1">
+            <a:schemeClr val="accent1"/>
+          </a:lnRef>
+          <a:fillRef idx="3">
+            <a:schemeClr val="accent1"/>
+          </a:fillRef>
+          <a:effectRef idx="2">
+            <a:schemeClr val="accent1"/>
+          </a:effectRef>
+          <a:fontRef idx="minor">
+            <a:schemeClr val="lt1"/>
+          </a:fontRef>
+        </p:style>
+        <p:txBody>
+          <a:bodyPr rtlCol="0" anchor="ctr"/>
+          <a:lstStyle/>
+          <a:p>
+            <a:pPr algn="ctr"/>
+          </a:p>
+        </p:txBody>
+      </p:sp>
+      <p:sp>
+        <p:nvSpPr>
+          <p:cNvPr id="22" name="Down Arrow 21"/>
+          <p:cNvSpPr/>
+          <p:nvPr/>
+        </p:nvSpPr>
+        <p:spPr>
+          <a:xfrm>
+            <a:off x="10642092" y="2898648"/>
+            <a:ext cx="109728" cy="201168"/>
+          </a:xfrm>
+          <a:prstGeom prst="downArrow">
+            <a:avLst/>
+          </a:prstGeom>
+          <a:solidFill>
+            <a:srgbClr val="777777"/>
+          </a:solidFill>
+          <a:ln>
+            <a:noFill/>
+          </a:ln>
+          <a:effectLst/>
+        </p:spPr>
+        <p:style>
+          <a:lnRef idx="1">
+            <a:schemeClr val="accent1"/>
+          </a:lnRef>
+          <a:fillRef idx="3">
+            <a:schemeClr val="accent1"/>
+          </a:fillRef>
+          <a:effectRef idx="2">
+            <a:schemeClr val="accent1"/>
+          </a:effectRef>
+          <a:fontRef idx="minor">
+            <a:schemeClr val="lt1"/>
+          </a:fontRef>
+        </p:style>
+        <p:txBody>
+          <a:bodyPr rtlCol="0" anchor="ctr"/>
+          <a:lstStyle/>
+          <a:p>
+            <a:pPr algn="ctr"/>
+          </a:p>
+        </p:txBody>
+      </p:sp>
+      <p:sp>
+        <p:nvSpPr>
+          <p:cNvPr id="23" name="Rectangle 22"/>
+          <p:cNvSpPr/>
+          <p:nvPr/>
+        </p:nvSpPr>
+        <p:spPr>
+          <a:xfrm>
+            <a:off x="640080" y="3145536"/>
+            <a:ext cx="1703832" cy="1536192"/>
+          </a:xfrm>
+          <a:prstGeom prst="rect">
+            <a:avLst/>
+          </a:prstGeom>
+          <a:solidFill>
+            <a:srgbClr val="F7F7F5"/>
+          </a:solidFill>
+          <a:ln>
+            <a:noFill/>
+          </a:ln>
+          <a:effectLst/>
+        </p:spPr>
+        <p:style>
+          <a:lnRef idx="1">
+            <a:schemeClr val="accent1"/>
+          </a:lnRef>
+          <a:fillRef idx="3">
+            <a:schemeClr val="accent1"/>
+          </a:fillRef>
+          <a:effectRef idx="2">
+            <a:schemeClr val="accent1"/>
+          </a:effectRef>
+          <a:fontRef idx="minor">
+            <a:schemeClr val="lt1"/>
+          </a:fontRef>
+        </p:style>
+        <p:txBody>
+          <a:bodyPr rtlCol="0" anchor="ctr" wrap="square" tIns="91440" bIns="54864"/>
+          <a:lstStyle/>
+          <a:p>
+            <a:pPr algn="ctr">
+              <a:lnSpc>
+                <a:spcPct val="112000"/>
+              </a:lnSpc>
+              <a:spcBef>
+                <a:spcPts val="0"/>
+              </a:spcBef>
+              <a:spcAft>
+                <a:spcPts val="0"/>
+              </a:spcAft>
+            </a:pPr>
+            <a:r>
+              <a:rPr sz="1500" b="1">
+                <a:solidFill>
+                  <a:srgbClr val="2F5D62"/>
+                </a:solidFill>
+                <a:latin typeface="Arial"/>
+                <a:ea typeface="微软雅黑"/>
+                <a:cs typeface="Arial"/>
+              </a:rPr>
+              <a:t>⑦ </a:t>
+            </a:r>
+            <a:r>
+              <a:rPr sz="1500" b="1">
+                <a:solidFill>
+                  <a:srgbClr val="111111"/>
+                </a:solidFill>
+                <a:latin typeface="Arial"/>
+                <a:ea typeface="微软雅黑"/>
+                <a:cs typeface="Arial"/>
+              </a:rPr>
+              <a:t>阶段差异分析</a:t>
+            </a:r>
+          </a:p>
+          <a:p>
+            <a:pPr algn="l">
+              <a:lnSpc>
+                <a:spcPct val="116000"/>
+              </a:lnSpc>
+              <a:spcBef>
+                <a:spcPts val="400"/>
+              </a:spcBef>
+              <a:spcAft>
+                <a:spcPts val="0"/>
+              </a:spcAft>
+            </a:pPr>
+            <a:r>
+              <a:rPr sz="1500" b="0">
+                <a:solidFill>
+                  <a:srgbClr val="333333"/>
+                </a:solidFill>
+                <a:latin typeface="Arial"/>
+                <a:ea typeface="微软雅黑"/>
+                <a:cs typeface="Arial"/>
+              </a:rPr>
+              <a:t>按五个认知阶段
+比较组成与丰度</a:t>
+            </a:r>
+          </a:p>
+        </p:txBody>
+      </p:sp>
+      <p:sp>
+        <p:nvSpPr>
+          <p:cNvPr id="24" name="Rectangle 23"/>
+          <p:cNvSpPr/>
+          <p:nvPr/>
+        </p:nvSpPr>
+        <p:spPr>
+          <a:xfrm>
+            <a:off x="640080" y="3145536"/>
+            <a:ext cx="1703832" cy="38100"/>
+          </a:xfrm>
+          <a:prstGeom prst="rect">
+            <a:avLst/>
+          </a:prstGeom>
+          <a:solidFill>
+            <a:srgbClr val="2F5D62"/>
+          </a:solidFill>
+          <a:ln>
+            <a:noFill/>
+          </a:ln>
+          <a:effectLst/>
+        </p:spPr>
+        <p:style>
+          <a:lnRef idx="1">
+            <a:schemeClr val="accent1"/>
+          </a:lnRef>
+          <a:fillRef idx="3">
+            <a:schemeClr val="accent1"/>
+          </a:fillRef>
+          <a:effectRef idx="2">
+            <a:schemeClr val="accent1"/>
+          </a:effectRef>
+          <a:fontRef idx="minor">
+            <a:schemeClr val="lt1"/>
+          </a:fontRef>
+        </p:style>
+        <p:txBody>
+          <a:bodyPr rtlCol="0" anchor="ctr"/>
+          <a:lstStyle/>
+          <a:p>
+            <a:pPr algn="ctr"/>
+          </a:p>
+        </p:txBody>
+      </p:sp>
+      <p:sp>
+        <p:nvSpPr>
+          <p:cNvPr id="25" name="Left Arrow 24"/>
+          <p:cNvSpPr/>
+          <p:nvPr/>
+        </p:nvSpPr>
+        <p:spPr>
+          <a:xfrm>
+            <a:off x="2375916" y="3863340"/>
+            <a:ext cx="73151" cy="100584"/>
+          </a:xfrm>
+          <a:prstGeom prst="leftArrow">
+            <a:avLst/>
+          </a:prstGeom>
+          <a:solidFill>
+            <a:srgbClr val="777777"/>
+          </a:solidFill>
+          <a:ln>
+            <a:noFill/>
+          </a:ln>
+          <a:effectLst/>
+        </p:spPr>
+        <p:style>
+          <a:lnRef idx="1">
+            <a:schemeClr val="accent1"/>
+          </a:lnRef>
+          <a:fillRef idx="3">
+            <a:schemeClr val="accent1"/>
+          </a:fillRef>
+          <a:effectRef idx="2">
+            <a:schemeClr val="accent1"/>
+          </a:effectRef>
+          <a:fontRef idx="minor">
+            <a:schemeClr val="lt1"/>
+          </a:fontRef>
+        </p:style>
+        <p:txBody>
+          <a:bodyPr rtlCol="0" anchor="ctr"/>
+          <a:lstStyle/>
+          <a:p>
+            <a:pPr algn="ctr"/>
+          </a:p>
+        </p:txBody>
+      </p:sp>
+      <p:sp>
+        <p:nvSpPr>
+          <p:cNvPr id="26" name="Rectangle 25"/>
+          <p:cNvSpPr/>
+          <p:nvPr/>
+        </p:nvSpPr>
+        <p:spPr>
+          <a:xfrm>
+            <a:off x="2481072" y="3145536"/>
+            <a:ext cx="1703832" cy="1536192"/>
+          </a:xfrm>
+          <a:prstGeom prst="rect">
+            <a:avLst/>
+          </a:prstGeom>
+          <a:solidFill>
+            <a:srgbClr val="F7F7F5"/>
+          </a:solidFill>
+          <a:ln>
+            <a:noFill/>
+          </a:ln>
+          <a:effectLst/>
+        </p:spPr>
+        <p:style>
+          <a:lnRef idx="1">
+            <a:schemeClr val="accent1"/>
+          </a:lnRef>
+          <a:fillRef idx="3">
+            <a:schemeClr val="accent1"/>
+          </a:fillRef>
+          <a:effectRef idx="2">
+            <a:schemeClr val="accent1"/>
+          </a:effectRef>
+          <a:fontRef idx="minor">
+            <a:schemeClr val="lt1"/>
+          </a:fontRef>
+        </p:style>
+        <p:txBody>
+          <a:bodyPr rtlCol="0" anchor="ctr" wrap="square" tIns="91440" bIns="54864"/>
+          <a:lstStyle/>
+          <a:p>
+            <a:pPr algn="ctr">
+              <a:lnSpc>
+                <a:spcPct val="112000"/>
+              </a:lnSpc>
+              <a:spcBef>
+                <a:spcPts val="0"/>
+              </a:spcBef>
+              <a:spcAft>
+                <a:spcPts val="0"/>
+              </a:spcAft>
+            </a:pPr>
+            <a:r>
+              <a:rPr sz="1500" b="1">
+                <a:solidFill>
+                  <a:srgbClr val="2F5D62"/>
+                </a:solidFill>
+                <a:latin typeface="Arial"/>
+                <a:ea typeface="微软雅黑"/>
+                <a:cs typeface="Arial"/>
+              </a:rPr>
+              <a:t>⑧ </a:t>
+            </a:r>
+            <a:r>
+              <a:rPr sz="1500" b="1">
+                <a:solidFill>
+                  <a:srgbClr val="111111"/>
+                </a:solidFill>
+                <a:latin typeface="Arial"/>
+                <a:ea typeface="微软雅黑"/>
+                <a:cs typeface="Arial"/>
+              </a:rPr>
+              <a:t>表达证据去重</a:t>
+            </a:r>
+          </a:p>
+          <a:p>
+            <a:pPr algn="l">
+              <a:lnSpc>
+                <a:spcPct val="116000"/>
+              </a:lnSpc>
+              <a:spcBef>
+                <a:spcPts val="400"/>
+              </a:spcBef>
+              <a:spcAft>
+                <a:spcPts val="0"/>
+              </a:spcAft>
+            </a:pPr>
+            <a:r>
+              <a:rPr sz="1500" b="0">
+                <a:solidFill>
+                  <a:srgbClr val="333333"/>
+                </a:solidFill>
+                <a:latin typeface="Arial"/>
+                <a:ea typeface="微软雅黑"/>
+                <a:cs typeface="Arial"/>
+              </a:rPr>
+              <a:t>蛋白组二次去重
+剔除无表达序列</a:t>
+            </a:r>
+          </a:p>
+        </p:txBody>
+      </p:sp>
+      <p:sp>
+        <p:nvSpPr>
+          <p:cNvPr id="27" name="Rectangle 26"/>
+          <p:cNvSpPr/>
+          <p:nvPr/>
+        </p:nvSpPr>
+        <p:spPr>
+          <a:xfrm>
+            <a:off x="2481072" y="3145536"/>
+            <a:ext cx="1703832" cy="38100"/>
+          </a:xfrm>
+          <a:prstGeom prst="rect">
+            <a:avLst/>
+          </a:prstGeom>
+          <a:solidFill>
+            <a:srgbClr val="2F5D62"/>
+          </a:solidFill>
+          <a:ln>
+            <a:noFill/>
+          </a:ln>
+          <a:effectLst/>
+        </p:spPr>
+        <p:style>
+          <a:lnRef idx="1">
+            <a:schemeClr val="accent1"/>
+          </a:lnRef>
+          <a:fillRef idx="3">
+            <a:schemeClr val="accent1"/>
+          </a:fillRef>
+          <a:effectRef idx="2">
+            <a:schemeClr val="accent1"/>
+          </a:effectRef>
+          <a:fontRef idx="minor">
+            <a:schemeClr val="lt1"/>
+          </a:fontRef>
+        </p:style>
+        <p:txBody>
+          <a:bodyPr rtlCol="0" anchor="ctr"/>
+          <a:lstStyle/>
+          <a:p>
+            <a:pPr algn="ctr"/>
+          </a:p>
+        </p:txBody>
+      </p:sp>
+      <p:sp>
+        <p:nvSpPr>
+          <p:cNvPr id="28" name="Left Arrow 27"/>
+          <p:cNvSpPr/>
+          <p:nvPr/>
+        </p:nvSpPr>
+        <p:spPr>
+          <a:xfrm>
+            <a:off x="4216908" y="3863340"/>
+            <a:ext cx="73151" cy="100584"/>
+          </a:xfrm>
+          <a:prstGeom prst="leftArrow">
+            <a:avLst/>
+          </a:prstGeom>
+          <a:solidFill>
+            <a:srgbClr val="777777"/>
+          </a:solidFill>
+          <a:ln>
+            <a:noFill/>
+          </a:ln>
+          <a:effectLst/>
+        </p:spPr>
+        <p:style>
+          <a:lnRef idx="1">
+            <a:schemeClr val="accent1"/>
+          </a:lnRef>
+          <a:fillRef idx="3">
+            <a:schemeClr val="accent1"/>
+          </a:fillRef>
+          <a:effectRef idx="2">
+            <a:schemeClr val="accent1"/>
+          </a:effectRef>
+          <a:fontRef idx="minor">
+            <a:schemeClr val="lt1"/>
+          </a:fontRef>
+        </p:style>
+        <p:txBody>
+          <a:bodyPr rtlCol="0" anchor="ctr"/>
+          <a:lstStyle/>
+          <a:p>
+            <a:pPr algn="ctr"/>
+          </a:p>
+        </p:txBody>
+      </p:sp>
+      <p:sp>
+        <p:nvSpPr>
+          <p:cNvPr id="29" name="Rectangle 28"/>
+          <p:cNvSpPr/>
+          <p:nvPr/>
+        </p:nvSpPr>
+        <p:spPr>
+          <a:xfrm>
+            <a:off x="4322064" y="3145536"/>
+            <a:ext cx="1703832" cy="1536192"/>
+          </a:xfrm>
+          <a:prstGeom prst="rect">
+            <a:avLst/>
+          </a:prstGeom>
+          <a:solidFill>
+            <a:srgbClr val="F7F7F5"/>
+          </a:solidFill>
+          <a:ln>
+            <a:noFill/>
+          </a:ln>
+          <a:effectLst/>
+        </p:spPr>
+        <p:style>
+          <a:lnRef idx="1">
+            <a:schemeClr val="accent1"/>
+          </a:lnRef>
+          <a:fillRef idx="3">
+            <a:schemeClr val="accent1"/>
+          </a:fillRef>
+          <a:effectRef idx="2">
+            <a:schemeClr val="accent1"/>
+          </a:effectRef>
+          <a:fontRef idx="minor">
+            <a:schemeClr val="lt1"/>
+          </a:fontRef>
+        </p:style>
+        <p:txBody>
+          <a:bodyPr rtlCol="0" anchor="ctr" wrap="square" tIns="91440" bIns="54864"/>
+          <a:lstStyle/>
+          <a:p>
+            <a:pPr algn="ctr">
+              <a:lnSpc>
+                <a:spcPct val="112000"/>
+              </a:lnSpc>
+              <a:spcBef>
+                <a:spcPts val="0"/>
+              </a:spcBef>
+              <a:spcAft>
+                <a:spcPts val="0"/>
+              </a:spcAft>
+            </a:pPr>
+            <a:r>
+              <a:rPr sz="1500" b="1">
+                <a:solidFill>
+                  <a:srgbClr val="2F5D62"/>
+                </a:solidFill>
+                <a:latin typeface="Arial"/>
+                <a:ea typeface="微软雅黑"/>
+                <a:cs typeface="Arial"/>
+              </a:rPr>
+              <a:t>⑨ </a:t>
+            </a:r>
+            <a:r>
+              <a:rPr sz="1500" b="1">
+                <a:solidFill>
+                  <a:srgbClr val="111111"/>
+                </a:solidFill>
+                <a:latin typeface="Arial"/>
+                <a:ea typeface="微软雅黑"/>
+                <a:cs typeface="Arial"/>
+              </a:rPr>
+              <a:t>特有抗菌肽</a:t>
+            </a:r>
+          </a:p>
+          <a:p>
+            <a:pPr algn="l">
+              <a:lnSpc>
+                <a:spcPct val="116000"/>
+              </a:lnSpc>
+              <a:spcBef>
+                <a:spcPts val="400"/>
+              </a:spcBef>
+              <a:spcAft>
+                <a:spcPts val="0"/>
+              </a:spcAft>
+            </a:pPr>
+            <a:r>
+              <a:rPr sz="1500" b="0">
+                <a:solidFill>
+                  <a:srgbClr val="333333"/>
+                </a:solidFill>
+                <a:latin typeface="Arial"/>
+                <a:ea typeface="微软雅黑"/>
+                <a:cs typeface="Arial"/>
+              </a:rPr>
+              <a:t>健康人群特有肽
+各阶段特有肽</a:t>
+            </a:r>
+          </a:p>
+        </p:txBody>
+      </p:sp>
+      <p:sp>
+        <p:nvSpPr>
+          <p:cNvPr id="30" name="Rectangle 29"/>
+          <p:cNvSpPr/>
+          <p:nvPr/>
+        </p:nvSpPr>
+        <p:spPr>
+          <a:xfrm>
+            <a:off x="4322064" y="3145536"/>
+            <a:ext cx="1703832" cy="38100"/>
+          </a:xfrm>
+          <a:prstGeom prst="rect">
+            <a:avLst/>
+          </a:prstGeom>
+          <a:solidFill>
+            <a:srgbClr val="2F5D62"/>
+          </a:solidFill>
+          <a:ln>
+            <a:noFill/>
+          </a:ln>
+          <a:effectLst/>
+        </p:spPr>
+        <p:style>
+          <a:lnRef idx="1">
+            <a:schemeClr val="accent1"/>
+          </a:lnRef>
+          <a:fillRef idx="3">
+            <a:schemeClr val="accent1"/>
+          </a:fillRef>
+          <a:effectRef idx="2">
+            <a:schemeClr val="accent1"/>
+          </a:effectRef>
+          <a:fontRef idx="minor">
+            <a:schemeClr val="lt1"/>
+          </a:fontRef>
+        </p:style>
+        <p:txBody>
+          <a:bodyPr rtlCol="0" anchor="ctr"/>
+          <a:lstStyle/>
+          <a:p>
+            <a:pPr algn="ctr"/>
+          </a:p>
+        </p:txBody>
+      </p:sp>
+      <p:sp>
+        <p:nvSpPr>
+          <p:cNvPr id="31" name="Left Arrow 30"/>
+          <p:cNvSpPr/>
+          <p:nvPr/>
+        </p:nvSpPr>
+        <p:spPr>
+          <a:xfrm>
+            <a:off x="6057900" y="3863340"/>
+            <a:ext cx="73151" cy="100584"/>
+          </a:xfrm>
+          <a:prstGeom prst="leftArrow">
+            <a:avLst/>
+          </a:prstGeom>
+          <a:solidFill>
+            <a:srgbClr val="777777"/>
+          </a:solidFill>
+          <a:ln>
+            <a:noFill/>
+          </a:ln>
+          <a:effectLst/>
+        </p:spPr>
+        <p:style>
+          <a:lnRef idx="1">
+            <a:schemeClr val="accent1"/>
+          </a:lnRef>
+          <a:fillRef idx="3">
+            <a:schemeClr val="accent1"/>
+          </a:fillRef>
+          <a:effectRef idx="2">
+            <a:schemeClr val="accent1"/>
+          </a:effectRef>
+          <a:fontRef idx="minor">
+            <a:schemeClr val="lt1"/>
+          </a:fontRef>
+        </p:style>
+        <p:txBody>
+          <a:bodyPr rtlCol="0" anchor="ctr"/>
+          <a:lstStyle/>
+          <a:p>
+            <a:pPr algn="ctr"/>
+          </a:p>
+        </p:txBody>
+      </p:sp>
+      <p:sp>
+        <p:nvSpPr>
+          <p:cNvPr id="32" name="Rectangle 31"/>
+          <p:cNvSpPr/>
+          <p:nvPr/>
+        </p:nvSpPr>
+        <p:spPr>
+          <a:xfrm>
+            <a:off x="6163056" y="3145536"/>
+            <a:ext cx="1703832" cy="1536192"/>
+          </a:xfrm>
+          <a:prstGeom prst="rect">
+            <a:avLst/>
+          </a:prstGeom>
+          <a:solidFill>
+            <a:srgbClr val="F7F7F5"/>
+          </a:solidFill>
+          <a:ln>
+            <a:noFill/>
+          </a:ln>
+          <a:effectLst/>
+        </p:spPr>
+        <p:style>
+          <a:lnRef idx="1">
+            <a:schemeClr val="accent1"/>
+          </a:lnRef>
+          <a:fillRef idx="3">
+            <a:schemeClr val="accent1"/>
+          </a:fillRef>
+          <a:effectRef idx="2">
+            <a:schemeClr val="accent1"/>
+          </a:effectRef>
+          <a:fontRef idx="minor">
+            <a:schemeClr val="lt1"/>
+          </a:fontRef>
+        </p:style>
+        <p:txBody>
+          <a:bodyPr rtlCol="0" anchor="ctr" wrap="square" tIns="91440" bIns="54864"/>
+          <a:lstStyle/>
+          <a:p>
+            <a:pPr algn="ctr">
+              <a:lnSpc>
+                <a:spcPct val="112000"/>
+              </a:lnSpc>
+              <a:spcBef>
+                <a:spcPts val="0"/>
+              </a:spcBef>
+              <a:spcAft>
+                <a:spcPts val="0"/>
+              </a:spcAft>
+            </a:pPr>
+            <a:r>
+              <a:rPr sz="1500" b="1">
+                <a:solidFill>
+                  <a:srgbClr val="B03A2E"/>
+                </a:solidFill>
+                <a:latin typeface="Arial"/>
+                <a:ea typeface="微软雅黑"/>
+                <a:cs typeface="Arial"/>
+              </a:rPr>
+              <a:t>⑩ </a:t>
+            </a:r>
+            <a:r>
+              <a:rPr sz="1500" b="1">
+                <a:solidFill>
+                  <a:srgbClr val="111111"/>
+                </a:solidFill>
+                <a:latin typeface="Arial"/>
+                <a:ea typeface="微软雅黑"/>
+                <a:cs typeface="Arial"/>
+              </a:rPr>
+              <a:t>机制关联分析</a:t>
+            </a:r>
+          </a:p>
+          <a:p>
+            <a:pPr algn="l">
+              <a:lnSpc>
+                <a:spcPct val="116000"/>
+              </a:lnSpc>
+              <a:spcBef>
+                <a:spcPts val="400"/>
+              </a:spcBef>
+              <a:spcAft>
+                <a:spcPts val="0"/>
+              </a:spcAft>
+            </a:pPr>
+            <a:r>
+              <a:rPr sz="1500" b="0">
+                <a:solidFill>
+                  <a:srgbClr val="333333"/>
+                </a:solidFill>
+                <a:latin typeface="Arial"/>
+                <a:ea typeface="微软雅黑"/>
+                <a:cs typeface="Arial"/>
+              </a:rPr>
+              <a:t>对接与动力学
+给出候选优先序</a:t>
+            </a:r>
+          </a:p>
+        </p:txBody>
+      </p:sp>
+      <p:sp>
+        <p:nvSpPr>
+          <p:cNvPr id="33" name="Rectangle 32"/>
+          <p:cNvSpPr/>
+          <p:nvPr/>
+        </p:nvSpPr>
+        <p:spPr>
+          <a:xfrm>
+            <a:off x="6163056" y="3145536"/>
+            <a:ext cx="1703832" cy="38100"/>
+          </a:xfrm>
+          <a:prstGeom prst="rect">
+            <a:avLst/>
+          </a:prstGeom>
+          <a:solidFill>
+            <a:srgbClr val="D98A2B"/>
+          </a:solidFill>
+          <a:ln>
+            <a:noFill/>
+          </a:ln>
+          <a:effectLst/>
+        </p:spPr>
+        <p:style>
+          <a:lnRef idx="1">
+            <a:schemeClr val="accent1"/>
+          </a:lnRef>
+          <a:fillRef idx="3">
+            <a:schemeClr val="accent1"/>
+          </a:fillRef>
+          <a:effectRef idx="2">
+            <a:schemeClr val="accent1"/>
+          </a:effectRef>
+          <a:fontRef idx="minor">
+            <a:schemeClr val="lt1"/>
+          </a:fontRef>
+        </p:style>
+        <p:txBody>
+          <a:bodyPr rtlCol="0" anchor="ctr"/>
+          <a:lstStyle/>
+          <a:p>
+            <a:pPr algn="ctr"/>
+          </a:p>
+        </p:txBody>
+      </p:sp>
+      <p:sp>
+        <p:nvSpPr>
+          <p:cNvPr id="34" name="Left Arrow 33"/>
+          <p:cNvSpPr/>
+          <p:nvPr/>
+        </p:nvSpPr>
+        <p:spPr>
+          <a:xfrm>
+            <a:off x="7898892" y="3863340"/>
+            <a:ext cx="73151" cy="100584"/>
+          </a:xfrm>
+          <a:prstGeom prst="leftArrow">
+            <a:avLst/>
+          </a:prstGeom>
+          <a:solidFill>
+            <a:srgbClr val="777777"/>
+          </a:solidFill>
+          <a:ln>
+            <a:noFill/>
+          </a:ln>
+          <a:effectLst/>
+        </p:spPr>
+        <p:style>
+          <a:lnRef idx="1">
+            <a:schemeClr val="accent1"/>
+          </a:lnRef>
+          <a:fillRef idx="3">
+            <a:schemeClr val="accent1"/>
+          </a:fillRef>
+          <a:effectRef idx="2">
+            <a:schemeClr val="accent1"/>
+          </a:effectRef>
+          <a:fontRef idx="minor">
+            <a:schemeClr val="lt1"/>
+          </a:fontRef>
+        </p:style>
+        <p:txBody>
+          <a:bodyPr rtlCol="0" anchor="ctr"/>
+          <a:lstStyle/>
+          <a:p>
+            <a:pPr algn="ctr"/>
+          </a:p>
+        </p:txBody>
+      </p:sp>
+      <p:sp>
+        <p:nvSpPr>
+          <p:cNvPr id="35" name="Rectangle 34"/>
+          <p:cNvSpPr/>
+          <p:nvPr/>
+        </p:nvSpPr>
+        <p:spPr>
+          <a:xfrm>
+            <a:off x="8004048" y="3145536"/>
+            <a:ext cx="1703832" cy="1536192"/>
+          </a:xfrm>
+          <a:prstGeom prst="rect">
+            <a:avLst/>
+          </a:prstGeom>
+          <a:solidFill>
+            <a:srgbClr val="F7F7F5"/>
+          </a:solidFill>
+          <a:ln>
+            <a:noFill/>
+          </a:ln>
+          <a:effectLst/>
+        </p:spPr>
+        <p:style>
+          <a:lnRef idx="1">
+            <a:schemeClr val="accent1"/>
+          </a:lnRef>
+          <a:fillRef idx="3">
+            <a:schemeClr val="accent1"/>
+          </a:fillRef>
+          <a:effectRef idx="2">
+            <a:schemeClr val="accent1"/>
+          </a:effectRef>
+          <a:fontRef idx="minor">
+            <a:schemeClr val="lt1"/>
+          </a:fontRef>
+        </p:style>
+        <p:txBody>
+          <a:bodyPr rtlCol="0" anchor="ctr" wrap="square" tIns="91440" bIns="54864"/>
+          <a:lstStyle/>
+          <a:p>
+            <a:pPr algn="ctr">
+              <a:lnSpc>
+                <a:spcPct val="112000"/>
+              </a:lnSpc>
+              <a:spcBef>
+                <a:spcPts val="0"/>
+              </a:spcBef>
+              <a:spcAft>
+                <a:spcPts val="0"/>
+              </a:spcAft>
+            </a:pPr>
+            <a:r>
+              <a:rPr sz="1500" b="1">
+                <a:solidFill>
+                  <a:srgbClr val="B03A2E"/>
+                </a:solidFill>
+                <a:latin typeface="Arial"/>
+                <a:ea typeface="微软雅黑"/>
+                <a:cs typeface="Arial"/>
+              </a:rPr>
+              <a:t>⑪ </a:t>
+            </a:r>
+            <a:r>
+              <a:rPr sz="1500" b="1">
+                <a:solidFill>
+                  <a:srgbClr val="111111"/>
+                </a:solidFill>
+                <a:latin typeface="Arial"/>
+                <a:ea typeface="微软雅黑"/>
+                <a:cs typeface="Arial"/>
+              </a:rPr>
+              <a:t>抑菌实验验证</a:t>
+            </a:r>
+          </a:p>
+          <a:p>
+            <a:pPr algn="l">
+              <a:lnSpc>
+                <a:spcPct val="116000"/>
+              </a:lnSpc>
+              <a:spcBef>
+                <a:spcPts val="400"/>
+              </a:spcBef>
+              <a:spcAft>
+                <a:spcPts val="0"/>
+              </a:spcAft>
+            </a:pPr>
+            <a:r>
+              <a:rPr sz="1500" b="0">
+                <a:solidFill>
+                  <a:srgbClr val="333333"/>
+                </a:solidFill>
+                <a:latin typeface="Arial"/>
+                <a:ea typeface="微软雅黑"/>
+                <a:cs typeface="Arial"/>
+              </a:rPr>
+              <a:t>合成代表性肽
+纸片扩散法筛查
+肉汤稀释法 MIC</a:t>
+            </a:r>
+          </a:p>
+        </p:txBody>
+      </p:sp>
+      <p:sp>
+        <p:nvSpPr>
+          <p:cNvPr id="36" name="Rectangle 35"/>
+          <p:cNvSpPr/>
+          <p:nvPr/>
+        </p:nvSpPr>
+        <p:spPr>
+          <a:xfrm>
+            <a:off x="8004048" y="3145536"/>
+            <a:ext cx="1703832" cy="38100"/>
+          </a:xfrm>
+          <a:prstGeom prst="rect">
+            <a:avLst/>
+          </a:prstGeom>
+          <a:solidFill>
+            <a:srgbClr val="D98A2B"/>
+          </a:solidFill>
+          <a:ln>
+            <a:noFill/>
+          </a:ln>
+          <a:effectLst/>
+        </p:spPr>
+        <p:style>
+          <a:lnRef idx="1">
+            <a:schemeClr val="accent1"/>
+          </a:lnRef>
+          <a:fillRef idx="3">
+            <a:schemeClr val="accent1"/>
+          </a:fillRef>
+          <a:effectRef idx="2">
+            <a:schemeClr val="accent1"/>
+          </a:effectRef>
+          <a:fontRef idx="minor">
+            <a:schemeClr val="lt1"/>
+          </a:fontRef>
+        </p:style>
+        <p:txBody>
+          <a:bodyPr rtlCol="0" anchor="ctr"/>
+          <a:lstStyle/>
+          <a:p>
+            <a:pPr algn="ctr"/>
+          </a:p>
+        </p:txBody>
+      </p:sp>
+      <p:sp>
+        <p:nvSpPr>
+          <p:cNvPr id="37" name="Left Arrow 36"/>
+          <p:cNvSpPr/>
+          <p:nvPr/>
+        </p:nvSpPr>
+        <p:spPr>
+          <a:xfrm>
+            <a:off x="9739884" y="3863340"/>
+            <a:ext cx="73151" cy="100584"/>
+          </a:xfrm>
+          <a:prstGeom prst="leftArrow">
+            <a:avLst/>
+          </a:prstGeom>
+          <a:solidFill>
+            <a:srgbClr val="777777"/>
+          </a:solidFill>
+          <a:ln>
+            <a:noFill/>
+          </a:ln>
+          <a:effectLst/>
+        </p:spPr>
+        <p:style>
+          <a:lnRef idx="1">
+            <a:schemeClr val="accent1"/>
+          </a:lnRef>
+          <a:fillRef idx="3">
+            <a:schemeClr val="accent1"/>
+          </a:fillRef>
+          <a:effectRef idx="2">
+            <a:schemeClr val="accent1"/>
+          </a:effectRef>
+          <a:fontRef idx="minor">
+            <a:schemeClr val="lt1"/>
+          </a:fontRef>
+        </p:style>
+        <p:txBody>
+          <a:bodyPr rtlCol="0" anchor="ctr"/>
+          <a:lstStyle/>
+          <a:p>
+            <a:pPr algn="ctr"/>
+          </a:p>
+        </p:txBody>
+      </p:sp>
+      <p:sp>
+        <p:nvSpPr>
+          <p:cNvPr id="38" name="Rectangle 37"/>
+          <p:cNvSpPr/>
+          <p:nvPr/>
+        </p:nvSpPr>
+        <p:spPr>
+          <a:xfrm>
+            <a:off x="9845040" y="3145536"/>
+            <a:ext cx="1703832" cy="1536192"/>
+          </a:xfrm>
+          <a:prstGeom prst="rect">
+            <a:avLst/>
+          </a:prstGeom>
+          <a:solidFill>
+            <a:srgbClr val="F7F7F5"/>
+          </a:solidFill>
+          <a:ln>
+            <a:noFill/>
+          </a:ln>
+          <a:effectLst/>
+        </p:spPr>
+        <p:style>
+          <a:lnRef idx="1">
+            <a:schemeClr val="accent1"/>
+          </a:lnRef>
+          <a:fillRef idx="3">
+            <a:schemeClr val="accent1"/>
+          </a:fillRef>
+          <a:effectRef idx="2">
+            <a:schemeClr val="accent1"/>
+          </a:effectRef>
+          <a:fontRef idx="minor">
+            <a:schemeClr val="lt1"/>
+          </a:fontRef>
+        </p:style>
+        <p:txBody>
+          <a:bodyPr rtlCol="0" anchor="ctr" wrap="square" tIns="91440" bIns="54864"/>
+          <a:lstStyle/>
+          <a:p>
+            <a:pPr algn="ctr">
+              <a:lnSpc>
+                <a:spcPct val="112000"/>
+              </a:lnSpc>
+              <a:spcBef>
+                <a:spcPts val="0"/>
+              </a:spcBef>
+              <a:spcAft>
+                <a:spcPts val="0"/>
+              </a:spcAft>
+            </a:pPr>
+            <a:r>
+              <a:rPr sz="1500" b="1">
+                <a:solidFill>
+                  <a:srgbClr val="B03A2E"/>
+                </a:solidFill>
+                <a:latin typeface="Arial"/>
+                <a:ea typeface="微软雅黑"/>
+                <a:cs typeface="Arial"/>
+              </a:rPr>
+              <a:t>⑫ </a:t>
+            </a:r>
+            <a:r>
+              <a:rPr sz="1500" b="1">
+                <a:solidFill>
+                  <a:srgbClr val="111111"/>
+                </a:solidFill>
+                <a:latin typeface="Arial"/>
+                <a:ea typeface="微软雅黑"/>
+                <a:cs typeface="Arial"/>
+              </a:rPr>
+              <a:t>整理与撰写</a:t>
+            </a:r>
+          </a:p>
+          <a:p>
+            <a:pPr algn="l">
+              <a:lnSpc>
+                <a:spcPct val="116000"/>
+              </a:lnSpc>
+              <a:spcBef>
+                <a:spcPts val="400"/>
+              </a:spcBef>
+              <a:spcAft>
+                <a:spcPts val="0"/>
+              </a:spcAft>
+            </a:pPr>
+            <a:r>
+              <a:rPr sz="1500" b="0">
+                <a:solidFill>
+                  <a:srgbClr val="333333"/>
+                </a:solidFill>
+                <a:latin typeface="Arial"/>
+                <a:ea typeface="微软雅黑"/>
+                <a:cs typeface="Arial"/>
+              </a:rPr>
+              <a:t>学位论文与投稿
+结果汇总</a:t>
+            </a:r>
+          </a:p>
+        </p:txBody>
+      </p:sp>
+      <p:sp>
+        <p:nvSpPr>
+          <p:cNvPr id="39" name="Rectangle 38"/>
+          <p:cNvSpPr/>
+          <p:nvPr/>
+        </p:nvSpPr>
+        <p:spPr>
+          <a:xfrm>
+            <a:off x="9845040" y="3145536"/>
+            <a:ext cx="1703832" cy="38100"/>
+          </a:xfrm>
+          <a:prstGeom prst="rect">
+            <a:avLst/>
+          </a:prstGeom>
+          <a:solidFill>
+            <a:srgbClr val="D98A2B"/>
+          </a:solidFill>
+          <a:ln>
+            <a:noFill/>
+          </a:ln>
+          <a:effectLst/>
+        </p:spPr>
+        <p:style>
+          <a:lnRef idx="1">
+            <a:schemeClr val="accent1"/>
+          </a:lnRef>
+          <a:fillRef idx="3">
+            <a:schemeClr val="accent1"/>
+          </a:fillRef>
+          <a:effectRef idx="2">
+            <a:schemeClr val="accent1"/>
+          </a:effectRef>
+          <a:fontRef idx="minor">
+            <a:schemeClr val="lt1"/>
+          </a:fontRef>
+        </p:style>
+        <p:txBody>
+          <a:bodyPr rtlCol="0" anchor="ctr"/>
+          <a:lstStyle/>
+          <a:p>
+            <a:pPr algn="ctr"/>
+          </a:p>
+        </p:txBody>
+      </p:sp>
+      <p:sp>
+        <p:nvSpPr>
+          <p:cNvPr id="40" name="TextBox 39"/>
+          <p:cNvSpPr txBox="1"/>
+          <p:nvPr/>
+        </p:nvSpPr>
+        <p:spPr>
+          <a:xfrm>
+            <a:off x="640080" y="4846320"/>
+            <a:ext cx="3657600" cy="274320"/>
+          </a:xfrm>
+          <a:prstGeom prst="rect">
+            <a:avLst/>
+          </a:prstGeom>
+          <a:noFill/>
+        </p:spPr>
+        <p:txBody>
+          <a:bodyPr wrap="square" anchor="t" lIns="27432" rIns="27432" tIns="0" bIns="0">
+            <a:spAutoFit/>
+          </a:bodyPr>
+          <a:lstStyle/>
+          <a:p>
+            <a:pPr>
+              <a:lnSpc>
+                <a:spcPct val="100000"/>
+              </a:lnSpc>
+              <a:spcBef>
+                <a:spcPts val="0"/>
+              </a:spcBef>
+              <a:spcAft>
+                <a:spcPts val="0"/>
+              </a:spcAft>
+            </a:pPr>
+            <a:r>
+              <a:rPr sz="1500" b="1">
+                <a:solidFill>
+                  <a:srgbClr val="2F5D62"/>
+                </a:solidFill>
+                <a:latin typeface="Arial"/>
+                <a:ea typeface="微软雅黑"/>
+                <a:cs typeface="Arial"/>
+              </a:rPr>
+              <a:t>■ </a:t>
+            </a:r>
+            <a:r>
+              <a:rPr sz="1500" b="0">
+                <a:solidFill>
+                  <a:srgbClr val="333333"/>
+                </a:solidFill>
+                <a:latin typeface="Arial"/>
+                <a:ea typeface="微软雅黑"/>
+                <a:cs typeface="Arial"/>
+              </a:rPr>
+              <a:t>已完成　</a:t>
+            </a:r>
+            <a:r>
+              <a:rPr sz="1500" b="1">
+                <a:solidFill>
+                  <a:srgbClr val="D98A2B"/>
+                </a:solidFill>
+                <a:latin typeface="Arial"/>
+                <a:ea typeface="微软雅黑"/>
+                <a:cs typeface="Arial"/>
+              </a:rPr>
+              <a:t>■ </a:t>
+            </a:r>
+            <a:r>
+              <a:rPr sz="1500" b="0">
+                <a:solidFill>
+                  <a:srgbClr val="333333"/>
+                </a:solidFill>
+                <a:latin typeface="Arial"/>
+                <a:ea typeface="微软雅黑"/>
+                <a:cs typeface="Arial"/>
+              </a:rPr>
+              <a:t>正在推进</a:t>
+            </a:r>
+          </a:p>
+        </p:txBody>
+      </p:sp>
+      <p:sp>
+        <p:nvSpPr>
+          <p:cNvPr id="41" name="Rectangle 40"/>
+          <p:cNvSpPr/>
+          <p:nvPr/>
+        </p:nvSpPr>
+        <p:spPr>
+          <a:xfrm>
+            <a:off x="640080" y="5230368"/>
+            <a:ext cx="10908792" cy="566928"/>
+          </a:xfrm>
+          <a:prstGeom prst="rect">
+            <a:avLst/>
+          </a:prstGeom>
+          <a:solidFill>
+            <a:srgbClr val="F7F7F5"/>
+          </a:solidFill>
+          <a:ln>
+            <a:noFill/>
+          </a:ln>
+          <a:effectLst/>
+        </p:spPr>
+        <p:style>
+          <a:lnRef idx="1">
+            <a:schemeClr val="accent1"/>
+          </a:lnRef>
+          <a:fillRef idx="3">
+            <a:schemeClr val="accent1"/>
+          </a:fillRef>
+          <a:effectRef idx="2">
+            <a:schemeClr val="accent1"/>
+          </a:effectRef>
+          <a:fontRef idx="minor">
+            <a:schemeClr val="lt1"/>
+          </a:fontRef>
+        </p:style>
+        <p:txBody>
+          <a:bodyPr rtlCol="0" anchor="ctr"/>
+          <a:lstStyle/>
+          <a:p>
+            <a:pPr algn="ctr"/>
+          </a:p>
+        </p:txBody>
+      </p:sp>
+      <p:sp>
+        <p:nvSpPr>
+          <p:cNvPr id="42" name="TextBox 41"/>
+          <p:cNvSpPr txBox="1"/>
+          <p:nvPr/>
+        </p:nvSpPr>
+        <p:spPr>
+          <a:xfrm>
+            <a:off x="804672" y="5230368"/>
+            <a:ext cx="10607040" cy="566928"/>
+          </a:xfrm>
+          <a:prstGeom prst="rect">
+            <a:avLst/>
+          </a:prstGeom>
+          <a:noFill/>
+        </p:spPr>
+        <p:txBody>
+          <a:bodyPr wrap="square" anchor="ctr" lIns="27432" rIns="27432" tIns="0" bIns="0">
+            <a:spAutoFit/>
+          </a:bodyPr>
+          <a:lstStyle/>
+          <a:p>
+            <a:pPr algn="l">
+              <a:lnSpc>
+                <a:spcPct val="112000"/>
+              </a:lnSpc>
+              <a:spcBef>
+                <a:spcPts val="0"/>
+              </a:spcBef>
+              <a:spcAft>
+                <a:spcPts val="0"/>
+              </a:spcAft>
+            </a:pPr>
+            <a:r>
+              <a:rPr sz="1500" b="0">
+                <a:solidFill>
+                  <a:srgbClr val="333333"/>
+                </a:solidFill>
+                <a:latin typeface="Arial"/>
+                <a:ea typeface="微软雅黑"/>
+                <a:cs typeface="Arial"/>
+              </a:rPr>
+              <a:t>全流程使用同一套参考集与参数，样本的分组信息与测序数据一一对应；青色标注的步骤已完成，橙色标注的正在推进。</a:t>
+            </a:r>
+          </a:p>
+        </p:txBody>
+      </p:sp>
+      <p:sp>
+        <p:nvSpPr>
+          <p:cNvPr id="43" name="TextBox 42"/>
           <p:cNvSpPr txBox="1"/>
           <p:nvPr/>
         </p:nvSpPr>
@@ -7456,7 +12203,7 @@
       </p:sp>
       <p:sp>
         <p:nvSpPr>
-          <p:cNvPr id="7" name="TextBox 6"/>
+          <p:cNvPr id="44" name="TextBox 43"/>
           <p:cNvSpPr txBox="1"/>
           <p:nvPr/>
         </p:nvSpPr>
@@ -7496,7 +12243,7 @@
                 <a:ea typeface="微软雅黑"/>
                 <a:cs typeface="Arial"/>
               </a:rPr>
-              <a:t>4 / 12</a:t>
+              <a:t>4 / 14</a:t>
             </a:r>
           </a:p>
         </p:txBody>
@@ -7561,7 +12308,7 @@
                 <a:ea typeface="微软雅黑"/>
                 <a:cs typeface="Arial"/>
               </a:rPr>
-              <a:t>宏蛋白组表达证据二次去重后，得到健康人与各阶段特有抗菌肽</a:t>
+              <a:t>分阶段组的划分：阶段、性别、年龄三层匹配后再比较</a:t>
             </a:r>
           </a:p>
         </p:txBody>
@@ -7610,30 +12357,53 @@
           </a:p>
         </p:txBody>
       </p:sp>
-      <p:pic>
-        <p:nvPicPr>
-          <p:cNvPr id="4" name="Picture 3" descr="figD_宏蛋白组去重.png"/>
-          <p:cNvPicPr>
-            <a:picLocks noChangeAspect="1"/>
-          </p:cNvPicPr>
+      <p:sp>
+        <p:nvSpPr>
+          <p:cNvPr id="4" name="TextBox 3"/>
+          <p:cNvSpPr txBox="1"/>
           <p:nvPr/>
-        </p:nvPicPr>
-        <p:blipFill>
-          <a:blip r:embed="rId2"/>
-          <a:stretch>
-            <a:fillRect/>
-          </a:stretch>
-        </p:blipFill>
+        </p:nvSpPr>
         <p:spPr>
           <a:xfrm>
             <a:off x="640080" y="1188720"/>
-            <a:ext cx="10908792" cy="3525474"/>
+            <a:ext cx="10908792" cy="548640"/>
           </a:xfrm>
           <a:prstGeom prst="rect">
             <a:avLst/>
           </a:prstGeom>
-        </p:spPr>
-      </p:pic>
+          <a:noFill/>
+        </p:spPr>
+        <p:txBody>
+          <a:bodyPr wrap="square" anchor="t" lIns="27432" rIns="27432" tIns="0" bIns="0">
+            <a:spAutoFit/>
+          </a:bodyPr>
+          <a:lstStyle/>
+          <a:p>
+            <a:pPr algn="l">
+              <a:lnSpc>
+                <a:spcPct val="124000"/>
+              </a:lnSpc>
+              <a:spcBef>
+                <a:spcPts val="0"/>
+              </a:spcBef>
+              <a:spcAft>
+                <a:spcPts val="0"/>
+              </a:spcAft>
+            </a:pPr>
+            <a:r>
+              <a:rPr sz="1700" b="0">
+                <a:solidFill>
+                  <a:srgbClr val="333333"/>
+                </a:solidFill>
+                <a:latin typeface="Arial"/>
+                <a:ea typeface="微软雅黑"/>
+                <a:cs typeface="Arial"/>
+              </a:rPr>
+              <a:t>队列按认知功能分为五个阶段，并在每个阶段内按性别与年龄段匹配，保证阶段之间可直接比较。</a:t>
+            </a:r>
+          </a:p>
+        </p:txBody>
+      </p:sp>
       <p:sp>
         <p:nvSpPr>
           <p:cNvPr id="5" name="TextBox 4"/>
@@ -7642,8 +12412,55 @@
         </p:nvSpPr>
         <p:spPr>
           <a:xfrm>
-            <a:off x="640080" y="6053328"/>
-            <a:ext cx="10908792" cy="329184"/>
+            <a:off x="640080" y="1773936"/>
+            <a:ext cx="2544318" cy="420624"/>
+          </a:xfrm>
+          <a:prstGeom prst="rect">
+            <a:avLst/>
+          </a:prstGeom>
+          <a:noFill/>
+        </p:spPr>
+        <p:txBody>
+          <a:bodyPr wrap="square" anchor="t" lIns="27432" rIns="27432" tIns="0" bIns="0">
+            <a:spAutoFit/>
+          </a:bodyPr>
+          <a:lstStyle/>
+          <a:p>
+            <a:pPr algn="l">
+              <a:lnSpc>
+                <a:spcPct val="100000"/>
+              </a:lnSpc>
+              <a:spcBef>
+                <a:spcPts val="0"/>
+              </a:spcBef>
+              <a:spcAft>
+                <a:spcPts val="0"/>
+              </a:spcAft>
+            </a:pPr>
+            <a:r>
+              <a:rPr sz="2400" b="1">
+                <a:solidFill>
+                  <a:srgbClr val="2F5D62"/>
+                </a:solidFill>
+                <a:latin typeface="Arial"/>
+                <a:ea typeface="微软雅黑"/>
+                <a:cs typeface="Arial"/>
+              </a:rPr>
+              <a:t>5 个阶段</a:t>
+            </a:r>
+          </a:p>
+        </p:txBody>
+      </p:sp>
+      <p:sp>
+        <p:nvSpPr>
+          <p:cNvPr id="6" name="TextBox 5"/>
+          <p:cNvSpPr txBox="1"/>
+          <p:nvPr/>
+        </p:nvSpPr>
+        <p:spPr>
+          <a:xfrm>
+            <a:off x="640080" y="2212848"/>
+            <a:ext cx="2544318" cy="475488"/>
           </a:xfrm>
           <a:prstGeom prst="rect">
             <a:avLst/>
@@ -7676,21 +12493,21 @@
                 <a:ea typeface="微软雅黑"/>
                 <a:cs typeface="Arial"/>
               </a:rPr>
-              <a:t>图：本项目自制（results/figures）</a:t>
-            </a:r>
-          </a:p>
-        </p:txBody>
-      </p:sp>
-      <p:sp>
-        <p:nvSpPr>
-          <p:cNvPr id="6" name="TextBox 5"/>
+              <a:t>NC · SCS · SCD · MCI · AD</a:t>
+            </a:r>
+          </a:p>
+        </p:txBody>
+      </p:sp>
+      <p:sp>
+        <p:nvSpPr>
+          <p:cNvPr id="7" name="TextBox 6"/>
           <p:cNvSpPr txBox="1"/>
           <p:nvPr/>
         </p:nvSpPr>
         <p:spPr>
           <a:xfrm>
-            <a:off x="640080" y="4626864"/>
-            <a:ext cx="10908792" cy="1280160"/>
+            <a:off x="3367278" y="1773936"/>
+            <a:ext cx="2544318" cy="420624"/>
           </a:xfrm>
           <a:prstGeom prst="rect">
             <a:avLst/>
@@ -7705,7 +12522,7 @@
           <a:p>
             <a:pPr algn="l">
               <a:lnSpc>
-                <a:spcPct val="130000"/>
+                <a:spcPct val="100000"/>
               </a:lnSpc>
               <a:spcBef>
                 <a:spcPts val="0"/>
@@ -7715,7 +12532,424 @@
               </a:spcAft>
             </a:pPr>
             <a:r>
-              <a:rPr sz="1700" b="0">
+              <a:rPr sz="2400" b="1">
+                <a:solidFill>
+                  <a:srgbClr val="2F5D62"/>
+                </a:solidFill>
+                <a:latin typeface="Arial"/>
+                <a:ea typeface="微软雅黑"/>
+                <a:cs typeface="Arial"/>
+              </a:rPr>
+              <a:t>2 个性别</a:t>
+            </a:r>
+          </a:p>
+        </p:txBody>
+      </p:sp>
+      <p:sp>
+        <p:nvSpPr>
+          <p:cNvPr id="8" name="TextBox 7"/>
+          <p:cNvSpPr txBox="1"/>
+          <p:nvPr/>
+        </p:nvSpPr>
+        <p:spPr>
+          <a:xfrm>
+            <a:off x="3367278" y="2212848"/>
+            <a:ext cx="2544318" cy="475488"/>
+          </a:xfrm>
+          <a:prstGeom prst="rect">
+            <a:avLst/>
+          </a:prstGeom>
+          <a:noFill/>
+        </p:spPr>
+        <p:txBody>
+          <a:bodyPr wrap="square" anchor="t" lIns="27432" rIns="27432" tIns="0" bIns="0">
+            <a:spAutoFit/>
+          </a:bodyPr>
+          <a:lstStyle/>
+          <a:p>
+            <a:pPr algn="l">
+              <a:lnSpc>
+                <a:spcPct val="100000"/>
+              </a:lnSpc>
+              <a:spcBef>
+                <a:spcPts val="0"/>
+              </a:spcBef>
+              <a:spcAft>
+                <a:spcPts val="0"/>
+              </a:spcAft>
+            </a:pPr>
+            <a:r>
+              <a:rPr sz="1500" b="0">
+                <a:solidFill>
+                  <a:srgbClr val="777777"/>
+                </a:solidFill>
+                <a:latin typeface="Arial"/>
+                <a:ea typeface="微软雅黑"/>
+                <a:cs typeface="Arial"/>
+              </a:rPr>
+              <a:t>男女分别匹配</a:t>
+            </a:r>
+          </a:p>
+        </p:txBody>
+      </p:sp>
+      <p:sp>
+        <p:nvSpPr>
+          <p:cNvPr id="9" name="TextBox 8"/>
+          <p:cNvSpPr txBox="1"/>
+          <p:nvPr/>
+        </p:nvSpPr>
+        <p:spPr>
+          <a:xfrm>
+            <a:off x="6094476" y="1773936"/>
+            <a:ext cx="2544318" cy="420624"/>
+          </a:xfrm>
+          <a:prstGeom prst="rect">
+            <a:avLst/>
+          </a:prstGeom>
+          <a:noFill/>
+        </p:spPr>
+        <p:txBody>
+          <a:bodyPr wrap="square" anchor="t" lIns="27432" rIns="27432" tIns="0" bIns="0">
+            <a:spAutoFit/>
+          </a:bodyPr>
+          <a:lstStyle/>
+          <a:p>
+            <a:pPr algn="l">
+              <a:lnSpc>
+                <a:spcPct val="100000"/>
+              </a:lnSpc>
+              <a:spcBef>
+                <a:spcPts val="0"/>
+              </a:spcBef>
+              <a:spcAft>
+                <a:spcPts val="0"/>
+              </a:spcAft>
+            </a:pPr>
+            <a:r>
+              <a:rPr sz="2400" b="1">
+                <a:solidFill>
+                  <a:srgbClr val="2F5D62"/>
+                </a:solidFill>
+                <a:latin typeface="Arial"/>
+                <a:ea typeface="微软雅黑"/>
+                <a:cs typeface="Arial"/>
+              </a:rPr>
+              <a:t>3 个年龄段</a:t>
+            </a:r>
+          </a:p>
+        </p:txBody>
+      </p:sp>
+      <p:sp>
+        <p:nvSpPr>
+          <p:cNvPr id="10" name="TextBox 9"/>
+          <p:cNvSpPr txBox="1"/>
+          <p:nvPr/>
+        </p:nvSpPr>
+        <p:spPr>
+          <a:xfrm>
+            <a:off x="6094476" y="2212848"/>
+            <a:ext cx="2544318" cy="475488"/>
+          </a:xfrm>
+          <a:prstGeom prst="rect">
+            <a:avLst/>
+          </a:prstGeom>
+          <a:noFill/>
+        </p:spPr>
+        <p:txBody>
+          <a:bodyPr wrap="square" anchor="t" lIns="27432" rIns="27432" tIns="0" bIns="0">
+            <a:spAutoFit/>
+          </a:bodyPr>
+          <a:lstStyle/>
+          <a:p>
+            <a:pPr algn="l">
+              <a:lnSpc>
+                <a:spcPct val="100000"/>
+              </a:lnSpc>
+              <a:spcBef>
+                <a:spcPts val="0"/>
+              </a:spcBef>
+              <a:spcAft>
+                <a:spcPts val="0"/>
+              </a:spcAft>
+            </a:pPr>
+            <a:r>
+              <a:rPr sz="1500" b="0">
+                <a:solidFill>
+                  <a:srgbClr val="777777"/>
+                </a:solidFill>
+                <a:latin typeface="Arial"/>
+                <a:ea typeface="微软雅黑"/>
+                <a:cs typeface="Arial"/>
+              </a:rPr>
+              <a:t>60—69 · 70—79 · ≥80 岁</a:t>
+            </a:r>
+          </a:p>
+        </p:txBody>
+      </p:sp>
+      <p:sp>
+        <p:nvSpPr>
+          <p:cNvPr id="11" name="TextBox 10"/>
+          <p:cNvSpPr txBox="1"/>
+          <p:nvPr/>
+        </p:nvSpPr>
+        <p:spPr>
+          <a:xfrm>
+            <a:off x="8821674" y="1773936"/>
+            <a:ext cx="2544318" cy="420624"/>
+          </a:xfrm>
+          <a:prstGeom prst="rect">
+            <a:avLst/>
+          </a:prstGeom>
+          <a:noFill/>
+        </p:spPr>
+        <p:txBody>
+          <a:bodyPr wrap="square" anchor="t" lIns="27432" rIns="27432" tIns="0" bIns="0">
+            <a:spAutoFit/>
+          </a:bodyPr>
+          <a:lstStyle/>
+          <a:p>
+            <a:pPr algn="l">
+              <a:lnSpc>
+                <a:spcPct val="100000"/>
+              </a:lnSpc>
+              <a:spcBef>
+                <a:spcPts val="0"/>
+              </a:spcBef>
+              <a:spcAft>
+                <a:spcPts val="0"/>
+              </a:spcAft>
+            </a:pPr>
+            <a:r>
+              <a:rPr sz="2400" b="1">
+                <a:solidFill>
+                  <a:srgbClr val="2F5D62"/>
+                </a:solidFill>
+                <a:latin typeface="Arial"/>
+                <a:ea typeface="微软雅黑"/>
+                <a:cs typeface="Arial"/>
+              </a:rPr>
+              <a:t>30 个分层单元</a:t>
+            </a:r>
+          </a:p>
+        </p:txBody>
+      </p:sp>
+      <p:sp>
+        <p:nvSpPr>
+          <p:cNvPr id="12" name="TextBox 11"/>
+          <p:cNvSpPr txBox="1"/>
+          <p:nvPr/>
+        </p:nvSpPr>
+        <p:spPr>
+          <a:xfrm>
+            <a:off x="8821674" y="2212848"/>
+            <a:ext cx="2544318" cy="475488"/>
+          </a:xfrm>
+          <a:prstGeom prst="rect">
+            <a:avLst/>
+          </a:prstGeom>
+          <a:noFill/>
+        </p:spPr>
+        <p:txBody>
+          <a:bodyPr wrap="square" anchor="t" lIns="27432" rIns="27432" tIns="0" bIns="0">
+            <a:spAutoFit/>
+          </a:bodyPr>
+          <a:lstStyle/>
+          <a:p>
+            <a:pPr algn="l">
+              <a:lnSpc>
+                <a:spcPct val="100000"/>
+              </a:lnSpc>
+              <a:spcBef>
+                <a:spcPts val="0"/>
+              </a:spcBef>
+              <a:spcAft>
+                <a:spcPts val="0"/>
+              </a:spcAft>
+            </a:pPr>
+            <a:r>
+              <a:rPr sz="1500" b="0">
+                <a:solidFill>
+                  <a:srgbClr val="777777"/>
+                </a:solidFill>
+                <a:latin typeface="Arial"/>
+                <a:ea typeface="微软雅黑"/>
+                <a:cs typeface="Arial"/>
+              </a:rPr>
+              <a:t>阶段 × 性别 × 年龄</a:t>
+            </a:r>
+          </a:p>
+        </p:txBody>
+      </p:sp>
+      <p:sp>
+        <p:nvSpPr>
+          <p:cNvPr id="13" name="Rectangle 12"/>
+          <p:cNvSpPr/>
+          <p:nvPr/>
+        </p:nvSpPr>
+        <p:spPr>
+          <a:xfrm>
+            <a:off x="640080" y="2743200"/>
+            <a:ext cx="10908792" cy="12700"/>
+          </a:xfrm>
+          <a:prstGeom prst="rect">
+            <a:avLst/>
+          </a:prstGeom>
+          <a:solidFill>
+            <a:srgbClr val="DDDDDA"/>
+          </a:solidFill>
+          <a:ln>
+            <a:noFill/>
+          </a:ln>
+          <a:effectLst/>
+        </p:spPr>
+        <p:style>
+          <a:lnRef idx="1">
+            <a:schemeClr val="accent1"/>
+          </a:lnRef>
+          <a:fillRef idx="3">
+            <a:schemeClr val="accent1"/>
+          </a:fillRef>
+          <a:effectRef idx="2">
+            <a:schemeClr val="accent1"/>
+          </a:effectRef>
+          <a:fontRef idx="minor">
+            <a:schemeClr val="lt1"/>
+          </a:fontRef>
+        </p:style>
+        <p:txBody>
+          <a:bodyPr rtlCol="0" anchor="ctr"/>
+          <a:lstStyle/>
+          <a:p>
+            <a:pPr algn="ctr"/>
+          </a:p>
+        </p:txBody>
+      </p:sp>
+      <p:sp>
+        <p:nvSpPr>
+          <p:cNvPr id="14" name="Rectangle 13"/>
+          <p:cNvSpPr/>
+          <p:nvPr/>
+        </p:nvSpPr>
+        <p:spPr>
+          <a:xfrm>
+            <a:off x="640080" y="2889504"/>
+            <a:ext cx="1962302" cy="38100"/>
+          </a:xfrm>
+          <a:prstGeom prst="rect">
+            <a:avLst/>
+          </a:prstGeom>
+          <a:solidFill>
+            <a:srgbClr val="2F5D62"/>
+          </a:solidFill>
+          <a:ln>
+            <a:noFill/>
+          </a:ln>
+          <a:effectLst/>
+        </p:spPr>
+        <p:style>
+          <a:lnRef idx="1">
+            <a:schemeClr val="accent1"/>
+          </a:lnRef>
+          <a:fillRef idx="3">
+            <a:schemeClr val="accent1"/>
+          </a:fillRef>
+          <a:effectRef idx="2">
+            <a:schemeClr val="accent1"/>
+          </a:effectRef>
+          <a:fontRef idx="minor">
+            <a:schemeClr val="lt1"/>
+          </a:fontRef>
+        </p:style>
+        <p:txBody>
+          <a:bodyPr rtlCol="0" anchor="ctr"/>
+          <a:lstStyle/>
+          <a:p>
+            <a:pPr algn="ctr"/>
+          </a:p>
+        </p:txBody>
+      </p:sp>
+      <p:sp>
+        <p:nvSpPr>
+          <p:cNvPr id="15" name="TextBox 14"/>
+          <p:cNvSpPr txBox="1"/>
+          <p:nvPr/>
+        </p:nvSpPr>
+        <p:spPr>
+          <a:xfrm>
+            <a:off x="640080" y="3017520"/>
+            <a:ext cx="1998878" cy="365760"/>
+          </a:xfrm>
+          <a:prstGeom prst="rect">
+            <a:avLst/>
+          </a:prstGeom>
+          <a:noFill/>
+        </p:spPr>
+        <p:txBody>
+          <a:bodyPr wrap="square" anchor="t" lIns="27432" rIns="27432" tIns="0" bIns="0">
+            <a:spAutoFit/>
+          </a:bodyPr>
+          <a:lstStyle/>
+          <a:p>
+            <a:pPr algn="l">
+              <a:lnSpc>
+                <a:spcPct val="100000"/>
+              </a:lnSpc>
+              <a:spcBef>
+                <a:spcPts val="0"/>
+              </a:spcBef>
+              <a:spcAft>
+                <a:spcPts val="0"/>
+              </a:spcAft>
+            </a:pPr>
+            <a:r>
+              <a:rPr sz="1800" b="1">
+                <a:solidFill>
+                  <a:srgbClr val="111111"/>
+                </a:solidFill>
+                <a:latin typeface="Arial"/>
+                <a:ea typeface="微软雅黑"/>
+                <a:cs typeface="Arial"/>
+              </a:rPr>
+              <a:t>NC</a:t>
+            </a:r>
+          </a:p>
+        </p:txBody>
+      </p:sp>
+      <p:sp>
+        <p:nvSpPr>
+          <p:cNvPr id="16" name="TextBox 15"/>
+          <p:cNvSpPr txBox="1"/>
+          <p:nvPr/>
+        </p:nvSpPr>
+        <p:spPr>
+          <a:xfrm>
+            <a:off x="640080" y="3383280"/>
+            <a:ext cx="1998878" cy="1005840"/>
+          </a:xfrm>
+          <a:prstGeom prst="rect">
+            <a:avLst/>
+          </a:prstGeom>
+          <a:noFill/>
+        </p:spPr>
+        <p:txBody>
+          <a:bodyPr wrap="square" anchor="t" lIns="27432" rIns="27432" tIns="0" bIns="0">
+            <a:spAutoFit/>
+          </a:bodyPr>
+          <a:lstStyle/>
+          <a:p>
+            <a:pPr algn="l">
+              <a:lnSpc>
+                <a:spcPct val="116000"/>
+              </a:lnSpc>
+              <a:spcBef>
+                <a:spcPts val="0"/>
+              </a:spcBef>
+              <a:spcAft>
+                <a:spcPts val="0"/>
+              </a:spcAft>
+            </a:pPr>
+            <a:r>
+              <a:rPr sz="1600" b="0">
                 <a:solidFill>
                   <a:srgbClr val="333333"/>
                 </a:solidFill>
@@ -7723,14 +12957,944 @@
                 <a:ea typeface="微软雅黑"/>
                 <a:cs typeface="Arial"/>
               </a:rPr>
-              <a:t>先按认知阶段比较候选抗菌肽的丰度与组成差异，再引入宏蛋白组表达证据，剔除“有预测、无表达”的序列；二次去重后按组内共有、组间特比较，得到健康人群特有与各阶段特有的抗菌肽清单。该步骤已完成。</a:t>
-            </a:r>
-          </a:p>
-        </p:txBody>
-      </p:sp>
-      <p:sp>
-        <p:nvSpPr>
-          <p:cNvPr id="7" name="TextBox 6"/>
+              <a:t>认知正常（对照）</a:t>
+            </a:r>
+          </a:p>
+          <a:p>
+            <a:pPr algn="l">
+              <a:lnSpc>
+                <a:spcPct val="116000"/>
+              </a:lnSpc>
+              <a:spcBef>
+                <a:spcPts val="300"/>
+              </a:spcBef>
+              <a:spcAft>
+                <a:spcPts val="0"/>
+              </a:spcAft>
+            </a:pPr>
+            <a:r>
+              <a:rPr sz="1500" b="0">
+                <a:solidFill>
+                  <a:srgbClr val="333333"/>
+                </a:solidFill>
+                <a:latin typeface="Arial"/>
+                <a:ea typeface="微软雅黑"/>
+                <a:cs typeface="Arial"/>
+              </a:rPr>
+              <a:t>菌群多样性最高</a:t>
+            </a:r>
+          </a:p>
+          <a:p>
+            <a:pPr algn="l">
+              <a:lnSpc>
+                <a:spcPct val="116000"/>
+              </a:lnSpc>
+              <a:spcBef>
+                <a:spcPts val="300"/>
+              </a:spcBef>
+              <a:spcAft>
+                <a:spcPts val="0"/>
+              </a:spcAft>
+            </a:pPr>
+            <a:r>
+              <a:rPr sz="1500" b="0">
+                <a:solidFill>
+                  <a:srgbClr val="777777"/>
+                </a:solidFill>
+                <a:latin typeface="Arial"/>
+                <a:ea typeface="微软雅黑"/>
+                <a:cs typeface="Arial"/>
+              </a:rPr>
+              <a:t>作为比较基线</a:t>
+            </a:r>
+          </a:p>
+        </p:txBody>
+      </p:sp>
+      <p:sp>
+        <p:nvSpPr>
+          <p:cNvPr id="17" name="Rectangle 16"/>
+          <p:cNvSpPr/>
+          <p:nvPr/>
+        </p:nvSpPr>
+        <p:spPr>
+          <a:xfrm>
+            <a:off x="2821838" y="2889504"/>
+            <a:ext cx="1962302" cy="38100"/>
+          </a:xfrm>
+          <a:prstGeom prst="rect">
+            <a:avLst/>
+          </a:prstGeom>
+          <a:solidFill>
+            <a:srgbClr val="2F5D62"/>
+          </a:solidFill>
+          <a:ln>
+            <a:noFill/>
+          </a:ln>
+          <a:effectLst/>
+        </p:spPr>
+        <p:style>
+          <a:lnRef idx="1">
+            <a:schemeClr val="accent1"/>
+          </a:lnRef>
+          <a:fillRef idx="3">
+            <a:schemeClr val="accent1"/>
+          </a:fillRef>
+          <a:effectRef idx="2">
+            <a:schemeClr val="accent1"/>
+          </a:effectRef>
+          <a:fontRef idx="minor">
+            <a:schemeClr val="lt1"/>
+          </a:fontRef>
+        </p:style>
+        <p:txBody>
+          <a:bodyPr rtlCol="0" anchor="ctr"/>
+          <a:lstStyle/>
+          <a:p>
+            <a:pPr algn="ctr"/>
+          </a:p>
+        </p:txBody>
+      </p:sp>
+      <p:sp>
+        <p:nvSpPr>
+          <p:cNvPr id="18" name="TextBox 17"/>
+          <p:cNvSpPr txBox="1"/>
+          <p:nvPr/>
+        </p:nvSpPr>
+        <p:spPr>
+          <a:xfrm>
+            <a:off x="2821838" y="3017520"/>
+            <a:ext cx="1998878" cy="365760"/>
+          </a:xfrm>
+          <a:prstGeom prst="rect">
+            <a:avLst/>
+          </a:prstGeom>
+          <a:noFill/>
+        </p:spPr>
+        <p:txBody>
+          <a:bodyPr wrap="square" anchor="t" lIns="27432" rIns="27432" tIns="0" bIns="0">
+            <a:spAutoFit/>
+          </a:bodyPr>
+          <a:lstStyle/>
+          <a:p>
+            <a:pPr algn="l">
+              <a:lnSpc>
+                <a:spcPct val="100000"/>
+              </a:lnSpc>
+              <a:spcBef>
+                <a:spcPts val="0"/>
+              </a:spcBef>
+              <a:spcAft>
+                <a:spcPts val="0"/>
+              </a:spcAft>
+            </a:pPr>
+            <a:r>
+              <a:rPr sz="1800" b="1">
+                <a:solidFill>
+                  <a:srgbClr val="111111"/>
+                </a:solidFill>
+                <a:latin typeface="Arial"/>
+                <a:ea typeface="微软雅黑"/>
+                <a:cs typeface="Arial"/>
+              </a:rPr>
+              <a:t>SCS</a:t>
+            </a:r>
+          </a:p>
+        </p:txBody>
+      </p:sp>
+      <p:sp>
+        <p:nvSpPr>
+          <p:cNvPr id="19" name="TextBox 18"/>
+          <p:cNvSpPr txBox="1"/>
+          <p:nvPr/>
+        </p:nvSpPr>
+        <p:spPr>
+          <a:xfrm>
+            <a:off x="2821838" y="3383280"/>
+            <a:ext cx="1998878" cy="1005840"/>
+          </a:xfrm>
+          <a:prstGeom prst="rect">
+            <a:avLst/>
+          </a:prstGeom>
+          <a:noFill/>
+        </p:spPr>
+        <p:txBody>
+          <a:bodyPr wrap="square" anchor="t" lIns="27432" rIns="27432" tIns="0" bIns="0">
+            <a:spAutoFit/>
+          </a:bodyPr>
+          <a:lstStyle/>
+          <a:p>
+            <a:pPr algn="l">
+              <a:lnSpc>
+                <a:spcPct val="116000"/>
+              </a:lnSpc>
+              <a:spcBef>
+                <a:spcPts val="0"/>
+              </a:spcBef>
+              <a:spcAft>
+                <a:spcPts val="0"/>
+              </a:spcAft>
+            </a:pPr>
+            <a:r>
+              <a:rPr sz="1600" b="0">
+                <a:solidFill>
+                  <a:srgbClr val="333333"/>
+                </a:solidFill>
+                <a:latin typeface="Arial"/>
+                <a:ea typeface="微软雅黑"/>
+                <a:cs typeface="Arial"/>
+              </a:rPr>
+              <a:t>主观认知下降</a:t>
+            </a:r>
+          </a:p>
+          <a:p>
+            <a:pPr algn="l">
+              <a:lnSpc>
+                <a:spcPct val="116000"/>
+              </a:lnSpc>
+              <a:spcBef>
+                <a:spcPts val="300"/>
+              </a:spcBef>
+              <a:spcAft>
+                <a:spcPts val="0"/>
+              </a:spcAft>
+            </a:pPr>
+            <a:r>
+              <a:rPr sz="1500" b="0">
+                <a:solidFill>
+                  <a:srgbClr val="333333"/>
+                </a:solidFill>
+                <a:latin typeface="Arial"/>
+                <a:ea typeface="微软雅黑"/>
+                <a:cs typeface="Arial"/>
+              </a:rPr>
+              <a:t>组成已出现偏移</a:t>
+            </a:r>
+          </a:p>
+          <a:p>
+            <a:pPr algn="l">
+              <a:lnSpc>
+                <a:spcPct val="116000"/>
+              </a:lnSpc>
+              <a:spcBef>
+                <a:spcPts val="300"/>
+              </a:spcBef>
+              <a:spcAft>
+                <a:spcPts val="0"/>
+              </a:spcAft>
+            </a:pPr>
+            <a:r>
+              <a:rPr sz="1500" b="0">
+                <a:solidFill>
+                  <a:srgbClr val="777777"/>
+                </a:solidFill>
+                <a:latin typeface="Arial"/>
+                <a:ea typeface="微软雅黑"/>
+                <a:cs typeface="Arial"/>
+              </a:rPr>
+              <a:t>阶段特有菌属出现</a:t>
+            </a:r>
+          </a:p>
+        </p:txBody>
+      </p:sp>
+      <p:sp>
+        <p:nvSpPr>
+          <p:cNvPr id="20" name="Rectangle 19"/>
+          <p:cNvSpPr/>
+          <p:nvPr/>
+        </p:nvSpPr>
+        <p:spPr>
+          <a:xfrm>
+            <a:off x="5003596" y="2889504"/>
+            <a:ext cx="1962302" cy="38100"/>
+          </a:xfrm>
+          <a:prstGeom prst="rect">
+            <a:avLst/>
+          </a:prstGeom>
+          <a:solidFill>
+            <a:srgbClr val="D98A2B"/>
+          </a:solidFill>
+          <a:ln>
+            <a:noFill/>
+          </a:ln>
+          <a:effectLst/>
+        </p:spPr>
+        <p:style>
+          <a:lnRef idx="1">
+            <a:schemeClr val="accent1"/>
+          </a:lnRef>
+          <a:fillRef idx="3">
+            <a:schemeClr val="accent1"/>
+          </a:fillRef>
+          <a:effectRef idx="2">
+            <a:schemeClr val="accent1"/>
+          </a:effectRef>
+          <a:fontRef idx="minor">
+            <a:schemeClr val="lt1"/>
+          </a:fontRef>
+        </p:style>
+        <p:txBody>
+          <a:bodyPr rtlCol="0" anchor="ctr"/>
+          <a:lstStyle/>
+          <a:p>
+            <a:pPr algn="ctr"/>
+          </a:p>
+        </p:txBody>
+      </p:sp>
+      <p:sp>
+        <p:nvSpPr>
+          <p:cNvPr id="21" name="TextBox 20"/>
+          <p:cNvSpPr txBox="1"/>
+          <p:nvPr/>
+        </p:nvSpPr>
+        <p:spPr>
+          <a:xfrm>
+            <a:off x="5003596" y="3017520"/>
+            <a:ext cx="1998878" cy="365760"/>
+          </a:xfrm>
+          <a:prstGeom prst="rect">
+            <a:avLst/>
+          </a:prstGeom>
+          <a:noFill/>
+        </p:spPr>
+        <p:txBody>
+          <a:bodyPr wrap="square" anchor="t" lIns="27432" rIns="27432" tIns="0" bIns="0">
+            <a:spAutoFit/>
+          </a:bodyPr>
+          <a:lstStyle/>
+          <a:p>
+            <a:pPr algn="l">
+              <a:lnSpc>
+                <a:spcPct val="100000"/>
+              </a:lnSpc>
+              <a:spcBef>
+                <a:spcPts val="0"/>
+              </a:spcBef>
+              <a:spcAft>
+                <a:spcPts val="0"/>
+              </a:spcAft>
+            </a:pPr>
+            <a:r>
+              <a:rPr sz="1800" b="1">
+                <a:solidFill>
+                  <a:srgbClr val="111111"/>
+                </a:solidFill>
+                <a:latin typeface="Arial"/>
+                <a:ea typeface="微软雅黑"/>
+                <a:cs typeface="Arial"/>
+              </a:rPr>
+              <a:t>SCD</a:t>
+            </a:r>
+          </a:p>
+        </p:txBody>
+      </p:sp>
+      <p:sp>
+        <p:nvSpPr>
+          <p:cNvPr id="22" name="TextBox 21"/>
+          <p:cNvSpPr txBox="1"/>
+          <p:nvPr/>
+        </p:nvSpPr>
+        <p:spPr>
+          <a:xfrm>
+            <a:off x="5003596" y="3383280"/>
+            <a:ext cx="1998878" cy="1005840"/>
+          </a:xfrm>
+          <a:prstGeom prst="rect">
+            <a:avLst/>
+          </a:prstGeom>
+          <a:noFill/>
+        </p:spPr>
+        <p:txBody>
+          <a:bodyPr wrap="square" anchor="t" lIns="27432" rIns="27432" tIns="0" bIns="0">
+            <a:spAutoFit/>
+          </a:bodyPr>
+          <a:lstStyle/>
+          <a:p>
+            <a:pPr algn="l">
+              <a:lnSpc>
+                <a:spcPct val="116000"/>
+              </a:lnSpc>
+              <a:spcBef>
+                <a:spcPts val="0"/>
+              </a:spcBef>
+              <a:spcAft>
+                <a:spcPts val="0"/>
+              </a:spcAft>
+            </a:pPr>
+            <a:r>
+              <a:rPr sz="1600" b="0">
+                <a:solidFill>
+                  <a:srgbClr val="333333"/>
+                </a:solidFill>
+                <a:latin typeface="Arial"/>
+                <a:ea typeface="微软雅黑"/>
+                <a:cs typeface="Arial"/>
+              </a:rPr>
+              <a:t>可疑认知障碍</a:t>
+            </a:r>
+          </a:p>
+          <a:p>
+            <a:pPr algn="l">
+              <a:lnSpc>
+                <a:spcPct val="116000"/>
+              </a:lnSpc>
+              <a:spcBef>
+                <a:spcPts val="300"/>
+              </a:spcBef>
+              <a:spcAft>
+                <a:spcPts val="0"/>
+              </a:spcAft>
+            </a:pPr>
+            <a:r>
+              <a:rPr sz="1500" b="0">
+                <a:solidFill>
+                  <a:srgbClr val="333333"/>
+                </a:solidFill>
+                <a:latin typeface="Arial"/>
+                <a:ea typeface="微软雅黑"/>
+                <a:cs typeface="Arial"/>
+              </a:rPr>
+              <a:t>肠屏障标志物升高</a:t>
+            </a:r>
+          </a:p>
+          <a:p>
+            <a:pPr algn="l">
+              <a:lnSpc>
+                <a:spcPct val="116000"/>
+              </a:lnSpc>
+              <a:spcBef>
+                <a:spcPts val="300"/>
+              </a:spcBef>
+              <a:spcAft>
+                <a:spcPts val="0"/>
+              </a:spcAft>
+            </a:pPr>
+            <a:r>
+              <a:rPr sz="1500" b="0">
+                <a:solidFill>
+                  <a:srgbClr val="777777"/>
+                </a:solidFill>
+                <a:latin typeface="Arial"/>
+                <a:ea typeface="微软雅黑"/>
+                <a:cs typeface="Arial"/>
+              </a:rPr>
+              <a:t>改变早于痴呆</a:t>
+            </a:r>
+          </a:p>
+        </p:txBody>
+      </p:sp>
+      <p:sp>
+        <p:nvSpPr>
+          <p:cNvPr id="23" name="Rectangle 22"/>
+          <p:cNvSpPr/>
+          <p:nvPr/>
+        </p:nvSpPr>
+        <p:spPr>
+          <a:xfrm>
+            <a:off x="7185355" y="2889504"/>
+            <a:ext cx="1962302" cy="38100"/>
+          </a:xfrm>
+          <a:prstGeom prst="rect">
+            <a:avLst/>
+          </a:prstGeom>
+          <a:solidFill>
+            <a:srgbClr val="D98A2B"/>
+          </a:solidFill>
+          <a:ln>
+            <a:noFill/>
+          </a:ln>
+          <a:effectLst/>
+        </p:spPr>
+        <p:style>
+          <a:lnRef idx="1">
+            <a:schemeClr val="accent1"/>
+          </a:lnRef>
+          <a:fillRef idx="3">
+            <a:schemeClr val="accent1"/>
+          </a:fillRef>
+          <a:effectRef idx="2">
+            <a:schemeClr val="accent1"/>
+          </a:effectRef>
+          <a:fontRef idx="minor">
+            <a:schemeClr val="lt1"/>
+          </a:fontRef>
+        </p:style>
+        <p:txBody>
+          <a:bodyPr rtlCol="0" anchor="ctr"/>
+          <a:lstStyle/>
+          <a:p>
+            <a:pPr algn="ctr"/>
+          </a:p>
+        </p:txBody>
+      </p:sp>
+      <p:sp>
+        <p:nvSpPr>
+          <p:cNvPr id="24" name="TextBox 23"/>
+          <p:cNvSpPr txBox="1"/>
+          <p:nvPr/>
+        </p:nvSpPr>
+        <p:spPr>
+          <a:xfrm>
+            <a:off x="7185355" y="3017520"/>
+            <a:ext cx="1998878" cy="365760"/>
+          </a:xfrm>
+          <a:prstGeom prst="rect">
+            <a:avLst/>
+          </a:prstGeom>
+          <a:noFill/>
+        </p:spPr>
+        <p:txBody>
+          <a:bodyPr wrap="square" anchor="t" lIns="27432" rIns="27432" tIns="0" bIns="0">
+            <a:spAutoFit/>
+          </a:bodyPr>
+          <a:lstStyle/>
+          <a:p>
+            <a:pPr algn="l">
+              <a:lnSpc>
+                <a:spcPct val="100000"/>
+              </a:lnSpc>
+              <a:spcBef>
+                <a:spcPts val="0"/>
+              </a:spcBef>
+              <a:spcAft>
+                <a:spcPts val="0"/>
+              </a:spcAft>
+            </a:pPr>
+            <a:r>
+              <a:rPr sz="1800" b="1">
+                <a:solidFill>
+                  <a:srgbClr val="111111"/>
+                </a:solidFill>
+                <a:latin typeface="Arial"/>
+                <a:ea typeface="微软雅黑"/>
+                <a:cs typeface="Arial"/>
+              </a:rPr>
+              <a:t>MCI</a:t>
+            </a:r>
+          </a:p>
+        </p:txBody>
+      </p:sp>
+      <p:sp>
+        <p:nvSpPr>
+          <p:cNvPr id="25" name="TextBox 24"/>
+          <p:cNvSpPr txBox="1"/>
+          <p:nvPr/>
+        </p:nvSpPr>
+        <p:spPr>
+          <a:xfrm>
+            <a:off x="7185355" y="3383280"/>
+            <a:ext cx="1998878" cy="1005840"/>
+          </a:xfrm>
+          <a:prstGeom prst="rect">
+            <a:avLst/>
+          </a:prstGeom>
+          <a:noFill/>
+        </p:spPr>
+        <p:txBody>
+          <a:bodyPr wrap="square" anchor="t" lIns="27432" rIns="27432" tIns="0" bIns="0">
+            <a:spAutoFit/>
+          </a:bodyPr>
+          <a:lstStyle/>
+          <a:p>
+            <a:pPr algn="l">
+              <a:lnSpc>
+                <a:spcPct val="116000"/>
+              </a:lnSpc>
+              <a:spcBef>
+                <a:spcPts val="0"/>
+              </a:spcBef>
+              <a:spcAft>
+                <a:spcPts val="0"/>
+              </a:spcAft>
+            </a:pPr>
+            <a:r>
+              <a:rPr sz="1600" b="0">
+                <a:solidFill>
+                  <a:srgbClr val="333333"/>
+                </a:solidFill>
+                <a:latin typeface="Arial"/>
+                <a:ea typeface="微软雅黑"/>
+                <a:cs typeface="Arial"/>
+              </a:rPr>
+              <a:t>轻度认知障碍</a:t>
+            </a:r>
+          </a:p>
+          <a:p>
+            <a:pPr algn="l">
+              <a:lnSpc>
+                <a:spcPct val="116000"/>
+              </a:lnSpc>
+              <a:spcBef>
+                <a:spcPts val="300"/>
+              </a:spcBef>
+              <a:spcAft>
+                <a:spcPts val="0"/>
+              </a:spcAft>
+            </a:pPr>
+            <a:r>
+              <a:rPr sz="1500" b="0">
+                <a:solidFill>
+                  <a:srgbClr val="333333"/>
+                </a:solidFill>
+                <a:latin typeface="Arial"/>
+                <a:ea typeface="微软雅黑"/>
+                <a:cs typeface="Arial"/>
+              </a:rPr>
+              <a:t>菌群失衡最明显</a:t>
+            </a:r>
+          </a:p>
+          <a:p>
+            <a:pPr algn="l">
+              <a:lnSpc>
+                <a:spcPct val="116000"/>
+              </a:lnSpc>
+              <a:spcBef>
+                <a:spcPts val="300"/>
+              </a:spcBef>
+              <a:spcAft>
+                <a:spcPts val="0"/>
+              </a:spcAft>
+            </a:pPr>
+            <a:r>
+              <a:rPr sz="1500" b="0">
+                <a:solidFill>
+                  <a:srgbClr val="777777"/>
+                </a:solidFill>
+                <a:latin typeface="Arial"/>
+                <a:ea typeface="微软雅黑"/>
+                <a:cs typeface="Arial"/>
+              </a:rPr>
+              <a:t>与炎症指标相关</a:t>
+            </a:r>
+          </a:p>
+        </p:txBody>
+      </p:sp>
+      <p:sp>
+        <p:nvSpPr>
+          <p:cNvPr id="26" name="Rectangle 25"/>
+          <p:cNvSpPr/>
+          <p:nvPr/>
+        </p:nvSpPr>
+        <p:spPr>
+          <a:xfrm>
+            <a:off x="9367113" y="2889504"/>
+            <a:ext cx="1962302" cy="38100"/>
+          </a:xfrm>
+          <a:prstGeom prst="rect">
+            <a:avLst/>
+          </a:prstGeom>
+          <a:solidFill>
+            <a:srgbClr val="B03A2E"/>
+          </a:solidFill>
+          <a:ln>
+            <a:noFill/>
+          </a:ln>
+          <a:effectLst/>
+        </p:spPr>
+        <p:style>
+          <a:lnRef idx="1">
+            <a:schemeClr val="accent1"/>
+          </a:lnRef>
+          <a:fillRef idx="3">
+            <a:schemeClr val="accent1"/>
+          </a:fillRef>
+          <a:effectRef idx="2">
+            <a:schemeClr val="accent1"/>
+          </a:effectRef>
+          <a:fontRef idx="minor">
+            <a:schemeClr val="lt1"/>
+          </a:fontRef>
+        </p:style>
+        <p:txBody>
+          <a:bodyPr rtlCol="0" anchor="ctr"/>
+          <a:lstStyle/>
+          <a:p>
+            <a:pPr algn="ctr"/>
+          </a:p>
+        </p:txBody>
+      </p:sp>
+      <p:sp>
+        <p:nvSpPr>
+          <p:cNvPr id="27" name="TextBox 26"/>
+          <p:cNvSpPr txBox="1"/>
+          <p:nvPr/>
+        </p:nvSpPr>
+        <p:spPr>
+          <a:xfrm>
+            <a:off x="9367113" y="3017520"/>
+            <a:ext cx="1998878" cy="365760"/>
+          </a:xfrm>
+          <a:prstGeom prst="rect">
+            <a:avLst/>
+          </a:prstGeom>
+          <a:noFill/>
+        </p:spPr>
+        <p:txBody>
+          <a:bodyPr wrap="square" anchor="t" lIns="27432" rIns="27432" tIns="0" bIns="0">
+            <a:spAutoFit/>
+          </a:bodyPr>
+          <a:lstStyle/>
+          <a:p>
+            <a:pPr algn="l">
+              <a:lnSpc>
+                <a:spcPct val="100000"/>
+              </a:lnSpc>
+              <a:spcBef>
+                <a:spcPts val="0"/>
+              </a:spcBef>
+              <a:spcAft>
+                <a:spcPts val="0"/>
+              </a:spcAft>
+            </a:pPr>
+            <a:r>
+              <a:rPr sz="1800" b="1">
+                <a:solidFill>
+                  <a:srgbClr val="111111"/>
+                </a:solidFill>
+                <a:latin typeface="Arial"/>
+                <a:ea typeface="微软雅黑"/>
+                <a:cs typeface="Arial"/>
+              </a:rPr>
+              <a:t>AD</a:t>
+            </a:r>
+          </a:p>
+        </p:txBody>
+      </p:sp>
+      <p:sp>
+        <p:nvSpPr>
+          <p:cNvPr id="28" name="TextBox 27"/>
+          <p:cNvSpPr txBox="1"/>
+          <p:nvPr/>
+        </p:nvSpPr>
+        <p:spPr>
+          <a:xfrm>
+            <a:off x="9367113" y="3383280"/>
+            <a:ext cx="1998878" cy="1005840"/>
+          </a:xfrm>
+          <a:prstGeom prst="rect">
+            <a:avLst/>
+          </a:prstGeom>
+          <a:noFill/>
+        </p:spPr>
+        <p:txBody>
+          <a:bodyPr wrap="square" anchor="t" lIns="27432" rIns="27432" tIns="0" bIns="0">
+            <a:spAutoFit/>
+          </a:bodyPr>
+          <a:lstStyle/>
+          <a:p>
+            <a:pPr algn="l">
+              <a:lnSpc>
+                <a:spcPct val="116000"/>
+              </a:lnSpc>
+              <a:spcBef>
+                <a:spcPts val="0"/>
+              </a:spcBef>
+              <a:spcAft>
+                <a:spcPts val="0"/>
+              </a:spcAft>
+            </a:pPr>
+            <a:r>
+              <a:rPr sz="1600" b="0">
+                <a:solidFill>
+                  <a:srgbClr val="333333"/>
+                </a:solidFill>
+                <a:latin typeface="Arial"/>
+                <a:ea typeface="微软雅黑"/>
+                <a:cs typeface="Arial"/>
+              </a:rPr>
+              <a:t>阿尔茨海默症</a:t>
+            </a:r>
+          </a:p>
+          <a:p>
+            <a:pPr algn="l">
+              <a:lnSpc>
+                <a:spcPct val="116000"/>
+              </a:lnSpc>
+              <a:spcBef>
+                <a:spcPts val="300"/>
+              </a:spcBef>
+              <a:spcAft>
+                <a:spcPts val="0"/>
+              </a:spcAft>
+            </a:pPr>
+            <a:r>
+              <a:rPr sz="1500" b="0">
+                <a:solidFill>
+                  <a:srgbClr val="333333"/>
+                </a:solidFill>
+                <a:latin typeface="Arial"/>
+                <a:ea typeface="微软雅黑"/>
+                <a:cs typeface="Arial"/>
+              </a:rPr>
+              <a:t>菌群变化幅度最大</a:t>
+            </a:r>
+          </a:p>
+          <a:p>
+            <a:pPr algn="l">
+              <a:lnSpc>
+                <a:spcPct val="116000"/>
+              </a:lnSpc>
+              <a:spcBef>
+                <a:spcPts val="300"/>
+              </a:spcBef>
+              <a:spcAft>
+                <a:spcPts val="0"/>
+              </a:spcAft>
+            </a:pPr>
+            <a:r>
+              <a:rPr sz="1500" b="0">
+                <a:solidFill>
+                  <a:srgbClr val="777777"/>
+                </a:solidFill>
+                <a:latin typeface="Arial"/>
+                <a:ea typeface="微软雅黑"/>
+                <a:cs typeface="Arial"/>
+              </a:rPr>
+              <a:t>炎症—Aβ 环放大</a:t>
+            </a:r>
+          </a:p>
+        </p:txBody>
+      </p:sp>
+      <p:sp>
+        <p:nvSpPr>
+          <p:cNvPr id="29" name="Rectangle 28"/>
+          <p:cNvSpPr/>
+          <p:nvPr/>
+        </p:nvSpPr>
+        <p:spPr>
+          <a:xfrm>
+            <a:off x="640080" y="4480560"/>
+            <a:ext cx="10908792" cy="12700"/>
+          </a:xfrm>
+          <a:prstGeom prst="rect">
+            <a:avLst/>
+          </a:prstGeom>
+          <a:solidFill>
+            <a:srgbClr val="DDDDDA"/>
+          </a:solidFill>
+          <a:ln>
+            <a:noFill/>
+          </a:ln>
+          <a:effectLst/>
+        </p:spPr>
+        <p:style>
+          <a:lnRef idx="1">
+            <a:schemeClr val="accent1"/>
+          </a:lnRef>
+          <a:fillRef idx="3">
+            <a:schemeClr val="accent1"/>
+          </a:fillRef>
+          <a:effectRef idx="2">
+            <a:schemeClr val="accent1"/>
+          </a:effectRef>
+          <a:fontRef idx="minor">
+            <a:schemeClr val="lt1"/>
+          </a:fontRef>
+        </p:style>
+        <p:txBody>
+          <a:bodyPr rtlCol="0" anchor="ctr"/>
+          <a:lstStyle/>
+          <a:p>
+            <a:pPr algn="ctr"/>
+          </a:p>
+        </p:txBody>
+      </p:sp>
+      <p:sp>
+        <p:nvSpPr>
+          <p:cNvPr id="30" name="TextBox 29"/>
+          <p:cNvSpPr txBox="1"/>
+          <p:nvPr/>
+        </p:nvSpPr>
+        <p:spPr>
+          <a:xfrm>
+            <a:off x="640080" y="4626864"/>
+            <a:ext cx="10908792" cy="1188720"/>
+          </a:xfrm>
+          <a:prstGeom prst="rect">
+            <a:avLst/>
+          </a:prstGeom>
+          <a:noFill/>
+        </p:spPr>
+        <p:txBody>
+          <a:bodyPr wrap="square" anchor="t" lIns="27432" rIns="27432" tIns="0" bIns="0">
+            <a:spAutoFit/>
+          </a:bodyPr>
+          <a:lstStyle/>
+          <a:p>
+            <a:pPr algn="l">
+              <a:lnSpc>
+                <a:spcPct val="126000"/>
+              </a:lnSpc>
+              <a:spcBef>
+                <a:spcPts val="0"/>
+              </a:spcBef>
+              <a:spcAft>
+                <a:spcPts val="0"/>
+              </a:spcAft>
+            </a:pPr>
+            <a:r>
+              <a:rPr sz="1600" b="0">
+                <a:solidFill>
+                  <a:srgbClr val="333333"/>
+                </a:solidFill>
+                <a:latin typeface="Arial"/>
+                <a:ea typeface="微软雅黑"/>
+                <a:cs typeface="Arial"/>
+              </a:rPr>
+              <a:t>分层方式：5 个阶段 × 2 个性别 × 3 个年龄段（60—69、70—79、≥80 岁）= 30 个分层单元；每个单元内按年龄与性别匹配，得到结构一致的比较亚队列，保证阶段之间的差异不来自年龄与性别构成。</a:t>
+            </a:r>
+          </a:p>
+        </p:txBody>
+      </p:sp>
+      <p:sp>
+        <p:nvSpPr>
+          <p:cNvPr id="31" name="TextBox 30"/>
+          <p:cNvSpPr txBox="1"/>
+          <p:nvPr/>
+        </p:nvSpPr>
+        <p:spPr>
+          <a:xfrm>
+            <a:off x="640080" y="6053328"/>
+            <a:ext cx="10908792" cy="329184"/>
+          </a:xfrm>
+          <a:prstGeom prst="rect">
+            <a:avLst/>
+          </a:prstGeom>
+          <a:noFill/>
+        </p:spPr>
+        <p:txBody>
+          <a:bodyPr wrap="square" anchor="t" lIns="27432" rIns="27432" tIns="0" bIns="0">
+            <a:spAutoFit/>
+          </a:bodyPr>
+          <a:lstStyle/>
+          <a:p>
+            <a:pPr algn="l">
+              <a:lnSpc>
+                <a:spcPct val="100000"/>
+              </a:lnSpc>
+              <a:spcBef>
+                <a:spcPts val="0"/>
+              </a:spcBef>
+              <a:spcAft>
+                <a:spcPts val="0"/>
+              </a:spcAft>
+            </a:pPr>
+            <a:r>
+              <a:rPr sz="1500" b="0">
+                <a:solidFill>
+                  <a:srgbClr val="777777"/>
+                </a:solidFill>
+                <a:latin typeface="Arial"/>
+                <a:ea typeface="微软雅黑"/>
+                <a:cs typeface="Arial"/>
+              </a:rPr>
+              <a:t>分组与分层依据：已完成的全队列临床信息表（sources/已完成1.docx）</a:t>
+            </a:r>
+          </a:p>
+        </p:txBody>
+      </p:sp>
+      <p:sp>
+        <p:nvSpPr>
+          <p:cNvPr id="32" name="TextBox 31"/>
           <p:cNvSpPr txBox="1"/>
           <p:nvPr/>
         </p:nvSpPr>
@@ -7777,7 +13941,7 @@
       </p:sp>
       <p:sp>
         <p:nvSpPr>
-          <p:cNvPr id="8" name="TextBox 7"/>
+          <p:cNvPr id="33" name="TextBox 32"/>
           <p:cNvSpPr txBox="1"/>
           <p:nvPr/>
         </p:nvSpPr>
@@ -7817,7 +13981,7 @@
                 <a:ea typeface="微软雅黑"/>
                 <a:cs typeface="Arial"/>
               </a:rPr>
-              <a:t>5 / 12</a:t>
+              <a:t>5 / 14</a:t>
             </a:r>
           </a:p>
         </p:txBody>
@@ -7882,7 +14046,7 @@
                 <a:ea typeface="微软雅黑"/>
                 <a:cs typeface="Arial"/>
               </a:rPr>
-              <a:t>机制关联与抑菌实验验证正在开展</a:t>
+              <a:t>队列按认知功能分五个阶段，三模型一致阳性才纳入候选集合</a:t>
             </a:r>
           </a:p>
         </p:txBody>
@@ -7933,7 +14097,7 @@
       </p:sp>
       <p:pic>
         <p:nvPicPr>
-          <p:cNvPr id="4" name="Picture 3" descr="figE_机制关联.png"/>
+          <p:cNvPr id="4" name="Picture 3" descr="figB_三模型预测.png"/>
           <p:cNvPicPr>
             <a:picLocks noChangeAspect="1"/>
           </p:cNvPicPr>
@@ -7948,7 +14112,7 @@
         <p:spPr>
           <a:xfrm>
             <a:off x="640080" y="1188720"/>
-            <a:ext cx="7863840" cy="2726467"/>
+            <a:ext cx="7863840" cy="2738225"/>
           </a:xfrm>
           <a:prstGeom prst="rect">
             <a:avLst/>
@@ -8021,7 +14185,7 @@
                 <a:ea typeface="微软雅黑"/>
                 <a:cs typeface="Arial"/>
               </a:rPr>
-              <a:t>机制关联从三个方向展开：候选肽与 Aβ 的相互作用及其对聚集的影响、与 AChE 外周阴离子位点结合从而干扰成核的可能性、以及经免疫与炎症通路参与神经炎症的可能性，结论定位为线索发现。抑菌实验验证以代表性候选肽对大肠杆菌与金黄色葡萄球菌进行纸片扩散法初筛，并以微量肉汤稀释法测定最低抑菌浓度。</a:t>
+              <a:t>Attention、LSTM、BERT 三个模型相互独立地给出预测，只有三者一致判为阳性的序列进入候选集合，以降低单一模型的偏倚。该步骤已完成。</a:t>
             </a:r>
           </a:p>
         </p:txBody>
@@ -8115,7 +14279,7 @@
                 <a:ea typeface="微软雅黑"/>
                 <a:cs typeface="Arial"/>
               </a:rPr>
-              <a:t>6 / 12</a:t>
+              <a:t>6 / 14</a:t>
             </a:r>
           </a:p>
         </p:txBody>
@@ -8180,7 +14344,7 @@
                 <a:ea typeface="微软雅黑"/>
                 <a:cs typeface="Arial"/>
               </a:rPr>
-              <a:t>与开题计划相比，研究方向未变，预测与去重环节做了调整</a:t>
+              <a:t>宏蛋白组表达证据二次去重后，得到健康人与各阶段特有抗菌肽</a:t>
             </a:r>
           </a:p>
         </p:txBody>
@@ -8229,6 +14393,625 @@
           </a:p>
         </p:txBody>
       </p:sp>
+      <p:pic>
+        <p:nvPicPr>
+          <p:cNvPr id="4" name="Picture 3" descr="figD_宏蛋白组去重.png"/>
+          <p:cNvPicPr>
+            <a:picLocks noChangeAspect="1"/>
+          </p:cNvPicPr>
+          <p:nvPr/>
+        </p:nvPicPr>
+        <p:blipFill>
+          <a:blip r:embed="rId2"/>
+          <a:stretch>
+            <a:fillRect/>
+          </a:stretch>
+        </p:blipFill>
+        <p:spPr>
+          <a:xfrm>
+            <a:off x="640080" y="1188720"/>
+            <a:ext cx="10908792" cy="3525474"/>
+          </a:xfrm>
+          <a:prstGeom prst="rect">
+            <a:avLst/>
+          </a:prstGeom>
+        </p:spPr>
+      </p:pic>
+      <p:sp>
+        <p:nvSpPr>
+          <p:cNvPr id="5" name="TextBox 4"/>
+          <p:cNvSpPr txBox="1"/>
+          <p:nvPr/>
+        </p:nvSpPr>
+        <p:spPr>
+          <a:xfrm>
+            <a:off x="640080" y="4860498"/>
+            <a:ext cx="10908792" cy="868680"/>
+          </a:xfrm>
+          <a:prstGeom prst="rect">
+            <a:avLst/>
+          </a:prstGeom>
+          <a:noFill/>
+        </p:spPr>
+        <p:txBody>
+          <a:bodyPr wrap="square" anchor="t" lIns="27432" rIns="27432" tIns="0" bIns="0">
+            <a:spAutoFit/>
+          </a:bodyPr>
+          <a:lstStyle/>
+          <a:p>
+            <a:pPr algn="l">
+              <a:lnSpc>
+                <a:spcPct val="130000"/>
+              </a:lnSpc>
+              <a:spcBef>
+                <a:spcPts val="0"/>
+              </a:spcBef>
+              <a:spcAft>
+                <a:spcPts val="0"/>
+              </a:spcAft>
+            </a:pPr>
+            <a:r>
+              <a:rPr sz="1700" b="0">
+                <a:solidFill>
+                  <a:srgbClr val="333333"/>
+                </a:solidFill>
+                <a:latin typeface="Arial"/>
+                <a:ea typeface="微软雅黑"/>
+                <a:cs typeface="Arial"/>
+              </a:rPr>
+              <a:t>先按认知阶段比较丰度与组成差异，再引入宏蛋白组表达证据，剔除“有预测、无表达”的序列，得到健康人群特有与各阶段特有的抗菌肽清单。该步骤已完成。</a:t>
+            </a:r>
+          </a:p>
+        </p:txBody>
+      </p:sp>
+      <p:sp>
+        <p:nvSpPr>
+          <p:cNvPr id="6" name="TextBox 5"/>
+          <p:cNvSpPr txBox="1"/>
+          <p:nvPr/>
+        </p:nvSpPr>
+        <p:spPr>
+          <a:xfrm>
+            <a:off x="640080" y="6053328"/>
+            <a:ext cx="10908792" cy="329184"/>
+          </a:xfrm>
+          <a:prstGeom prst="rect">
+            <a:avLst/>
+          </a:prstGeom>
+          <a:noFill/>
+        </p:spPr>
+        <p:txBody>
+          <a:bodyPr wrap="square" anchor="t" lIns="27432" rIns="27432" tIns="0" bIns="0">
+            <a:spAutoFit/>
+          </a:bodyPr>
+          <a:lstStyle/>
+          <a:p>
+            <a:pPr algn="l">
+              <a:lnSpc>
+                <a:spcPct val="100000"/>
+              </a:lnSpc>
+              <a:spcBef>
+                <a:spcPts val="0"/>
+              </a:spcBef>
+              <a:spcAft>
+                <a:spcPts val="0"/>
+              </a:spcAft>
+            </a:pPr>
+            <a:r>
+              <a:rPr sz="1500" b="0">
+                <a:solidFill>
+                  <a:srgbClr val="777777"/>
+                </a:solidFill>
+                <a:latin typeface="Arial"/>
+                <a:ea typeface="微软雅黑"/>
+                <a:cs typeface="Arial"/>
+              </a:rPr>
+              <a:t>图：本项目自制（results/figures）</a:t>
+            </a:r>
+          </a:p>
+        </p:txBody>
+      </p:sp>
+      <p:sp>
+        <p:nvSpPr>
+          <p:cNvPr id="7" name="TextBox 6"/>
+          <p:cNvSpPr txBox="1"/>
+          <p:nvPr/>
+        </p:nvSpPr>
+        <p:spPr>
+          <a:xfrm>
+            <a:off x="640080" y="6419088"/>
+            <a:ext cx="8778240" cy="310896"/>
+          </a:xfrm>
+          <a:prstGeom prst="rect">
+            <a:avLst/>
+          </a:prstGeom>
+          <a:noFill/>
+        </p:spPr>
+        <p:txBody>
+          <a:bodyPr wrap="square" anchor="t" lIns="27432" rIns="27432" tIns="0" bIns="0">
+            <a:spAutoFit/>
+          </a:bodyPr>
+          <a:lstStyle/>
+          <a:p>
+            <a:pPr algn="l">
+              <a:lnSpc>
+                <a:spcPct val="100000"/>
+              </a:lnSpc>
+              <a:spcBef>
+                <a:spcPts val="0"/>
+              </a:spcBef>
+              <a:spcAft>
+                <a:spcPts val="0"/>
+              </a:spcAft>
+            </a:pPr>
+            <a:r>
+              <a:rPr sz="1500" b="0">
+                <a:solidFill>
+                  <a:srgbClr val="777777"/>
+                </a:solidFill>
+                <a:latin typeface="Arial"/>
+                <a:ea typeface="微软雅黑"/>
+                <a:cs typeface="Arial"/>
+              </a:rPr>
+              <a:t>研究生论文中期检查 · 文绍华</a:t>
+            </a:r>
+          </a:p>
+        </p:txBody>
+      </p:sp>
+      <p:sp>
+        <p:nvSpPr>
+          <p:cNvPr id="8" name="TextBox 7"/>
+          <p:cNvSpPr txBox="1"/>
+          <p:nvPr/>
+        </p:nvSpPr>
+        <p:spPr>
+          <a:xfrm>
+            <a:off x="10058400" y="6419088"/>
+            <a:ext cx="1490472" cy="310896"/>
+          </a:xfrm>
+          <a:prstGeom prst="rect">
+            <a:avLst/>
+          </a:prstGeom>
+          <a:noFill/>
+        </p:spPr>
+        <p:txBody>
+          <a:bodyPr wrap="square" anchor="t" lIns="27432" rIns="27432" tIns="0" bIns="0">
+            <a:spAutoFit/>
+          </a:bodyPr>
+          <a:lstStyle/>
+          <a:p>
+            <a:pPr algn="r">
+              <a:lnSpc>
+                <a:spcPct val="100000"/>
+              </a:lnSpc>
+              <a:spcBef>
+                <a:spcPts val="0"/>
+              </a:spcBef>
+              <a:spcAft>
+                <a:spcPts val="0"/>
+              </a:spcAft>
+            </a:pPr>
+            <a:r>
+              <a:rPr sz="1500" b="0">
+                <a:solidFill>
+                  <a:srgbClr val="777777"/>
+                </a:solidFill>
+                <a:latin typeface="Arial"/>
+                <a:ea typeface="微软雅黑"/>
+                <a:cs typeface="Arial"/>
+              </a:rPr>
+              <a:t>7 / 14</a:t>
+            </a:r>
+          </a:p>
+        </p:txBody>
+      </p:sp>
+    </p:spTree>
+  </p:cSld>
+  <p:clrMapOvr>
+    <a:masterClrMapping/>
+  </p:clrMapOvr>
+</p:sld>
+</file>
+
+<file path=ppt/slides/slide8.xml><?xml version="1.0" encoding="utf-8"?>
+<p:sld xmlns:a="http://schemas.openxmlformats.org/drawingml/2006/main" xmlns:p="http://schemas.openxmlformats.org/presentationml/2006/main" xmlns:r="http://schemas.openxmlformats.org/officeDocument/2006/relationships">
+  <p:cSld>
+    <p:spTree>
+      <p:nvGrpSpPr>
+        <p:cNvPr id="1" name=""/>
+        <p:cNvGrpSpPr/>
+        <p:nvPr/>
+      </p:nvGrpSpPr>
+      <p:grpSpPr/>
+      <p:sp>
+        <p:nvSpPr>
+          <p:cNvPr id="2" name="TextBox 1"/>
+          <p:cNvSpPr txBox="1"/>
+          <p:nvPr/>
+        </p:nvSpPr>
+        <p:spPr>
+          <a:xfrm>
+            <a:off x="640080" y="365760"/>
+            <a:ext cx="10908792" cy="548640"/>
+          </a:xfrm>
+          <a:prstGeom prst="rect">
+            <a:avLst/>
+          </a:prstGeom>
+          <a:noFill/>
+        </p:spPr>
+        <p:txBody>
+          <a:bodyPr wrap="square" anchor="t" lIns="27432" rIns="27432" tIns="0" bIns="0">
+            <a:spAutoFit/>
+          </a:bodyPr>
+          <a:lstStyle/>
+          <a:p>
+            <a:pPr algn="l">
+              <a:lnSpc>
+                <a:spcPct val="100000"/>
+              </a:lnSpc>
+              <a:spcBef>
+                <a:spcPts val="0"/>
+              </a:spcBef>
+              <a:spcAft>
+                <a:spcPts val="0"/>
+              </a:spcAft>
+            </a:pPr>
+            <a:r>
+              <a:rPr sz="2500" b="1">
+                <a:solidFill>
+                  <a:srgbClr val="111111"/>
+                </a:solidFill>
+                <a:latin typeface="Arial"/>
+                <a:ea typeface="微软雅黑"/>
+                <a:cs typeface="Arial"/>
+              </a:rPr>
+              <a:t>机制关联与抑菌实验验证正在开展</a:t>
+            </a:r>
+          </a:p>
+        </p:txBody>
+      </p:sp>
+      <p:sp>
+        <p:nvSpPr>
+          <p:cNvPr id="3" name="Rectangle 2"/>
+          <p:cNvSpPr/>
+          <p:nvPr/>
+        </p:nvSpPr>
+        <p:spPr>
+          <a:xfrm>
+            <a:off x="640080" y="969264"/>
+            <a:ext cx="10908792" cy="12700"/>
+          </a:xfrm>
+          <a:prstGeom prst="rect">
+            <a:avLst/>
+          </a:prstGeom>
+          <a:solidFill>
+            <a:srgbClr val="DDDDDA"/>
+          </a:solidFill>
+          <a:ln>
+            <a:noFill/>
+          </a:ln>
+          <a:effectLst/>
+        </p:spPr>
+        <p:style>
+          <a:lnRef idx="1">
+            <a:schemeClr val="accent1"/>
+          </a:lnRef>
+          <a:fillRef idx="3">
+            <a:schemeClr val="accent1"/>
+          </a:fillRef>
+          <a:effectRef idx="2">
+            <a:schemeClr val="accent1"/>
+          </a:effectRef>
+          <a:fontRef idx="minor">
+            <a:schemeClr val="lt1"/>
+          </a:fontRef>
+        </p:style>
+        <p:txBody>
+          <a:bodyPr rtlCol="0" anchor="ctr"/>
+          <a:lstStyle/>
+          <a:p>
+            <a:pPr algn="ctr"/>
+          </a:p>
+        </p:txBody>
+      </p:sp>
+      <p:pic>
+        <p:nvPicPr>
+          <p:cNvPr id="4" name="Picture 3" descr="figE_机制关联.png"/>
+          <p:cNvPicPr>
+            <a:picLocks noChangeAspect="1"/>
+          </p:cNvPicPr>
+          <p:nvPr/>
+        </p:nvPicPr>
+        <p:blipFill>
+          <a:blip r:embed="rId2"/>
+          <a:stretch>
+            <a:fillRect/>
+          </a:stretch>
+        </p:blipFill>
+        <p:spPr>
+          <a:xfrm>
+            <a:off x="640080" y="1188720"/>
+            <a:ext cx="7863840" cy="2726467"/>
+          </a:xfrm>
+          <a:prstGeom prst="rect">
+            <a:avLst/>
+          </a:prstGeom>
+        </p:spPr>
+      </p:pic>
+      <p:sp>
+        <p:nvSpPr>
+          <p:cNvPr id="5" name="TextBox 4"/>
+          <p:cNvSpPr txBox="1"/>
+          <p:nvPr/>
+        </p:nvSpPr>
+        <p:spPr>
+          <a:xfrm>
+            <a:off x="8549640" y="1188720"/>
+            <a:ext cx="2999232" cy="4480560"/>
+          </a:xfrm>
+          <a:prstGeom prst="rect">
+            <a:avLst/>
+          </a:prstGeom>
+          <a:noFill/>
+        </p:spPr>
+        <p:txBody>
+          <a:bodyPr wrap="square" anchor="t" lIns="27432" rIns="27432" tIns="0" bIns="0">
+            <a:spAutoFit/>
+          </a:bodyPr>
+          <a:lstStyle/>
+          <a:p>
+            <a:pPr algn="l">
+              <a:lnSpc>
+                <a:spcPct val="110000"/>
+              </a:lnSpc>
+              <a:spcBef>
+                <a:spcPts val="0"/>
+              </a:spcBef>
+              <a:spcAft>
+                <a:spcPts val="0"/>
+              </a:spcAft>
+            </a:pPr>
+            <a:r>
+              <a:rPr sz="1600" b="1">
+                <a:solidFill>
+                  <a:srgbClr val="2F5D62"/>
+                </a:solidFill>
+                <a:latin typeface="Arial"/>
+                <a:ea typeface="微软雅黑"/>
+                <a:cs typeface="Arial"/>
+              </a:rPr>
+              <a:t>解读</a:t>
+            </a:r>
+          </a:p>
+          <a:p>
+            <a:pPr algn="l">
+              <a:lnSpc>
+                <a:spcPct val="130000"/>
+              </a:lnSpc>
+              <a:spcBef>
+                <a:spcPts val="800"/>
+              </a:spcBef>
+              <a:spcAft>
+                <a:spcPts val="0"/>
+              </a:spcAft>
+            </a:pPr>
+            <a:r>
+              <a:rPr sz="1600" b="0">
+                <a:solidFill>
+                  <a:srgbClr val="333333"/>
+                </a:solidFill>
+                <a:latin typeface="Arial"/>
+                <a:ea typeface="微软雅黑"/>
+                <a:cs typeface="Arial"/>
+              </a:rPr>
+              <a:t>机制关联从三个方向展开：候选肽与 Aβ 的相互作用及其对聚集的影响、与 AChE 外周阴离子位点结合从而干扰成核的可能性、以及经免疫与炎症通路参与神经炎症的可能性，结论定位为线索发现。抑菌实验验证以代表性候选肽对大肠杆菌与金黄色葡萄球菌做纸片扩散法初筛，并以微量肉汤稀释法测定最低抑菌浓度。</a:t>
+            </a:r>
+          </a:p>
+        </p:txBody>
+      </p:sp>
+      <p:sp>
+        <p:nvSpPr>
+          <p:cNvPr id="6" name="TextBox 5"/>
+          <p:cNvSpPr txBox="1"/>
+          <p:nvPr/>
+        </p:nvSpPr>
+        <p:spPr>
+          <a:xfrm>
+            <a:off x="640080" y="6419088"/>
+            <a:ext cx="8778240" cy="310896"/>
+          </a:xfrm>
+          <a:prstGeom prst="rect">
+            <a:avLst/>
+          </a:prstGeom>
+          <a:noFill/>
+        </p:spPr>
+        <p:txBody>
+          <a:bodyPr wrap="square" anchor="t" lIns="27432" rIns="27432" tIns="0" bIns="0">
+            <a:spAutoFit/>
+          </a:bodyPr>
+          <a:lstStyle/>
+          <a:p>
+            <a:pPr algn="l">
+              <a:lnSpc>
+                <a:spcPct val="100000"/>
+              </a:lnSpc>
+              <a:spcBef>
+                <a:spcPts val="0"/>
+              </a:spcBef>
+              <a:spcAft>
+                <a:spcPts val="0"/>
+              </a:spcAft>
+            </a:pPr>
+            <a:r>
+              <a:rPr sz="1500" b="0">
+                <a:solidFill>
+                  <a:srgbClr val="777777"/>
+                </a:solidFill>
+                <a:latin typeface="Arial"/>
+                <a:ea typeface="微软雅黑"/>
+                <a:cs typeface="Arial"/>
+              </a:rPr>
+              <a:t>研究生论文中期检查 · 文绍华</a:t>
+            </a:r>
+          </a:p>
+        </p:txBody>
+      </p:sp>
+      <p:sp>
+        <p:nvSpPr>
+          <p:cNvPr id="7" name="TextBox 6"/>
+          <p:cNvSpPr txBox="1"/>
+          <p:nvPr/>
+        </p:nvSpPr>
+        <p:spPr>
+          <a:xfrm>
+            <a:off x="10058400" y="6419088"/>
+            <a:ext cx="1490472" cy="310896"/>
+          </a:xfrm>
+          <a:prstGeom prst="rect">
+            <a:avLst/>
+          </a:prstGeom>
+          <a:noFill/>
+        </p:spPr>
+        <p:txBody>
+          <a:bodyPr wrap="square" anchor="t" lIns="27432" rIns="27432" tIns="0" bIns="0">
+            <a:spAutoFit/>
+          </a:bodyPr>
+          <a:lstStyle/>
+          <a:p>
+            <a:pPr algn="r">
+              <a:lnSpc>
+                <a:spcPct val="100000"/>
+              </a:lnSpc>
+              <a:spcBef>
+                <a:spcPts val="0"/>
+              </a:spcBef>
+              <a:spcAft>
+                <a:spcPts val="0"/>
+              </a:spcAft>
+            </a:pPr>
+            <a:r>
+              <a:rPr sz="1500" b="0">
+                <a:solidFill>
+                  <a:srgbClr val="777777"/>
+                </a:solidFill>
+                <a:latin typeface="Arial"/>
+                <a:ea typeface="微软雅黑"/>
+                <a:cs typeface="Arial"/>
+              </a:rPr>
+              <a:t>8 / 14</a:t>
+            </a:r>
+          </a:p>
+        </p:txBody>
+      </p:sp>
+    </p:spTree>
+  </p:cSld>
+  <p:clrMapOvr>
+    <a:masterClrMapping/>
+  </p:clrMapOvr>
+</p:sld>
+</file>
+
+<file path=ppt/slides/slide9.xml><?xml version="1.0" encoding="utf-8"?>
+<p:sld xmlns:a="http://schemas.openxmlformats.org/drawingml/2006/main" xmlns:p="http://schemas.openxmlformats.org/presentationml/2006/main" xmlns:r="http://schemas.openxmlformats.org/officeDocument/2006/relationships">
+  <p:cSld>
+    <p:spTree>
+      <p:nvGrpSpPr>
+        <p:cNvPr id="1" name=""/>
+        <p:cNvGrpSpPr/>
+        <p:nvPr/>
+      </p:nvGrpSpPr>
+      <p:grpSpPr/>
+      <p:sp>
+        <p:nvSpPr>
+          <p:cNvPr id="2" name="TextBox 1"/>
+          <p:cNvSpPr txBox="1"/>
+          <p:nvPr/>
+        </p:nvSpPr>
+        <p:spPr>
+          <a:xfrm>
+            <a:off x="640080" y="365760"/>
+            <a:ext cx="10908792" cy="548640"/>
+          </a:xfrm>
+          <a:prstGeom prst="rect">
+            <a:avLst/>
+          </a:prstGeom>
+          <a:noFill/>
+        </p:spPr>
+        <p:txBody>
+          <a:bodyPr wrap="square" anchor="t" lIns="27432" rIns="27432" tIns="0" bIns="0">
+            <a:spAutoFit/>
+          </a:bodyPr>
+          <a:lstStyle/>
+          <a:p>
+            <a:pPr algn="l">
+              <a:lnSpc>
+                <a:spcPct val="100000"/>
+              </a:lnSpc>
+              <a:spcBef>
+                <a:spcPts val="0"/>
+              </a:spcBef>
+              <a:spcAft>
+                <a:spcPts val="0"/>
+              </a:spcAft>
+            </a:pPr>
+            <a:r>
+              <a:rPr sz="2500" b="1">
+                <a:solidFill>
+                  <a:srgbClr val="111111"/>
+                </a:solidFill>
+                <a:latin typeface="Arial"/>
+                <a:ea typeface="微软雅黑"/>
+                <a:cs typeface="Arial"/>
+              </a:rPr>
+              <a:t>与开题计划相比，研究方向未变，预测与去重环节做了调整</a:t>
+            </a:r>
+          </a:p>
+        </p:txBody>
+      </p:sp>
+      <p:sp>
+        <p:nvSpPr>
+          <p:cNvPr id="3" name="Rectangle 2"/>
+          <p:cNvSpPr/>
+          <p:nvPr/>
+        </p:nvSpPr>
+        <p:spPr>
+          <a:xfrm>
+            <a:off x="640080" y="969264"/>
+            <a:ext cx="10908792" cy="12700"/>
+          </a:xfrm>
+          <a:prstGeom prst="rect">
+            <a:avLst/>
+          </a:prstGeom>
+          <a:solidFill>
+            <a:srgbClr val="DDDDDA"/>
+          </a:solidFill>
+          <a:ln>
+            <a:noFill/>
+          </a:ln>
+          <a:effectLst/>
+        </p:spPr>
+        <p:style>
+          <a:lnRef idx="1">
+            <a:schemeClr val="accent1"/>
+          </a:lnRef>
+          <a:fillRef idx="3">
+            <a:schemeClr val="accent1"/>
+          </a:fillRef>
+          <a:effectRef idx="2">
+            <a:schemeClr val="accent1"/>
+          </a:effectRef>
+          <a:fontRef idx="minor">
+            <a:schemeClr val="lt1"/>
+          </a:fontRef>
+        </p:style>
+        <p:txBody>
+          <a:bodyPr rtlCol="0" anchor="ctr"/>
+          <a:lstStyle/>
+          <a:p>
+            <a:pPr algn="ctr"/>
+          </a:p>
+        </p:txBody>
+      </p:sp>
       <p:graphicFrame>
         <p:nvGraphicFramePr>
           <p:cNvPr id="4" name="Table 3"/>
@@ -8239,7 +15022,7 @@
         </p:nvGraphicFramePr>
         <p:xfrm>
           <a:off x="640080" y="1234440"/>
-          <a:ext cx="10908792" cy="2377440"/>
+          <a:ext cx="10908792" cy="2852928"/>
         </p:xfrm>
         <a:graphic>
           <a:graphicData uri="http://schemas.openxmlformats.org/drawingml/2006/table">
@@ -8282,7 +15065,7 @@
                       </a:r>
                     </a:p>
                   </a:txBody>
-                  <a:tcPr>
+                  <a:tcPr marT="27432" marB="27432">
                     <a:solidFill>
                       <a:srgbClr val="F7F7F5"/>
                     </a:solidFill>
@@ -8317,7 +15100,7 @@
                       </a:r>
                     </a:p>
                   </a:txBody>
-                  <a:tcPr>
+                  <a:tcPr marT="27432" marB="27432">
                     <a:solidFill>
                       <a:srgbClr val="F7F7F5"/>
                     </a:solidFill>
@@ -8352,7 +15135,7 @@
                       </a:r>
                     </a:p>
                   </a:txBody>
-                  <a:tcPr>
+                  <a:tcPr marT="27432" marB="27432">
                     <a:solidFill>
                       <a:srgbClr val="F7F7F5"/>
                     </a:solidFill>
@@ -8367,7 +15150,7 @@
                     <a:p>
                       <a:pPr algn="l">
                         <a:lnSpc>
-                          <a:spcPct val="110000"/>
+                          <a:spcPct val="105000"/>
                         </a:lnSpc>
                         <a:spcBef>
                           <a:spcPts val="0"/>
@@ -8379,7 +15162,7 @@
                       <a:r>
                         <a:rPr sz="1500" b="0">
                           <a:solidFill>
-                            <a:srgbClr val="333333"/>
+                            <a:srgbClr val="111111"/>
                           </a:solidFill>
                           <a:latin typeface="Arial"/>
                           <a:ea typeface="微软雅黑"/>
@@ -8389,7 +15172,11 @@
                       </a:r>
                     </a:p>
                   </a:txBody>
-                  <a:tcPr/>
+                  <a:tcPr marT="27432" marB="27432">
+                    <a:solidFill>
+                      <a:srgbClr val="FFFFFF"/>
+                    </a:solidFill>
+                  </a:tcPr>
                 </a:tc>
                 <a:tc>
                   <a:txBody>
@@ -8398,7 +15185,7 @@
                     <a:p>
                       <a:pPr algn="l">
                         <a:lnSpc>
-                          <a:spcPct val="110000"/>
+                          <a:spcPct val="105000"/>
                         </a:lnSpc>
                         <a:spcBef>
                           <a:spcPts val="0"/>
@@ -8420,7 +15207,11 @@
                       </a:r>
                     </a:p>
                   </a:txBody>
-                  <a:tcPr/>
+                  <a:tcPr marT="27432" marB="27432">
+                    <a:solidFill>
+                      <a:srgbClr val="FFFFFF"/>
+                    </a:solidFill>
+                  </a:tcPr>
                 </a:tc>
                 <a:tc>
                   <a:txBody>
@@ -8429,7 +15220,7 @@
                     <a:p>
                       <a:pPr algn="l">
                         <a:lnSpc>
-                          <a:spcPct val="110000"/>
+                          <a:spcPct val="105000"/>
                         </a:lnSpc>
                         <a:spcBef>
                           <a:spcPts val="0"/>
@@ -8451,7 +15242,11 @@
                       </a:r>
                     </a:p>
                   </a:txBody>
-                  <a:tcPr/>
+                  <a:tcPr marT="27432" marB="27432">
+                    <a:solidFill>
+                      <a:srgbClr val="FFFFFF"/>
+                    </a:solidFill>
+                  </a:tcPr>
                 </a:tc>
               </a:tr>
               <a:tr h="475488">
@@ -8462,7 +15257,7 @@
                     <a:p>
                       <a:pPr algn="l">
                         <a:lnSpc>
-                          <a:spcPct val="110000"/>
+                          <a:spcPct val="105000"/>
                         </a:lnSpc>
                         <a:spcBef>
                           <a:spcPts val="0"/>
@@ -8474,7 +15269,7 @@
                       <a:r>
                         <a:rPr sz="1500" b="0">
                           <a:solidFill>
-                            <a:srgbClr val="333333"/>
+                            <a:srgbClr val="111111"/>
                           </a:solidFill>
                           <a:latin typeface="Arial"/>
                           <a:ea typeface="微软雅黑"/>
@@ -8484,7 +15279,11 @@
                       </a:r>
                     </a:p>
                   </a:txBody>
-                  <a:tcPr/>
+                  <a:tcPr marT="27432" marB="27432">
+                    <a:solidFill>
+                      <a:srgbClr val="FFFFFF"/>
+                    </a:solidFill>
+                  </a:tcPr>
                 </a:tc>
                 <a:tc>
                   <a:txBody>
@@ -8493,7 +15292,7 @@
                     <a:p>
                       <a:pPr algn="l">
                         <a:lnSpc>
-                          <a:spcPct val="110000"/>
+                          <a:spcPct val="105000"/>
                         </a:lnSpc>
                         <a:spcBef>
                           <a:spcPts val="0"/>
@@ -8515,7 +15314,11 @@
                       </a:r>
                     </a:p>
                   </a:txBody>
-                  <a:tcPr/>
+                  <a:tcPr marT="27432" marB="27432">
+                    <a:solidFill>
+                      <a:srgbClr val="FFFFFF"/>
+                    </a:solidFill>
+                  </a:tcPr>
                 </a:tc>
                 <a:tc>
                   <a:txBody>
@@ -8524,7 +15327,7 @@
                     <a:p>
                       <a:pPr algn="l">
                         <a:lnSpc>
-                          <a:spcPct val="110000"/>
+                          <a:spcPct val="105000"/>
                         </a:lnSpc>
                         <a:spcBef>
                           <a:spcPts val="0"/>
@@ -8546,7 +15349,11 @@
                       </a:r>
                     </a:p>
                   </a:txBody>
-                  <a:tcPr/>
+                  <a:tcPr marT="27432" marB="27432">
+                    <a:solidFill>
+                      <a:srgbClr val="FFFFFF"/>
+                    </a:solidFill>
+                  </a:tcPr>
                 </a:tc>
               </a:tr>
               <a:tr h="475488">
@@ -8557,7 +15364,7 @@
                     <a:p>
                       <a:pPr algn="l">
                         <a:lnSpc>
-                          <a:spcPct val="110000"/>
+                          <a:spcPct val="105000"/>
                         </a:lnSpc>
                         <a:spcBef>
                           <a:spcPts val="0"/>
@@ -8569,7 +15376,7 @@
                       <a:r>
                         <a:rPr sz="1500" b="0">
                           <a:solidFill>
-                            <a:srgbClr val="333333"/>
+                            <a:srgbClr val="111111"/>
                           </a:solidFill>
                           <a:latin typeface="Arial"/>
                           <a:ea typeface="微软雅黑"/>
@@ -8579,7 +15386,11 @@
                       </a:r>
                     </a:p>
                   </a:txBody>
-                  <a:tcPr/>
+                  <a:tcPr marT="27432" marB="27432">
+                    <a:solidFill>
+                      <a:srgbClr val="FFFFFF"/>
+                    </a:solidFill>
+                  </a:tcPr>
                 </a:tc>
                 <a:tc>
                   <a:txBody>
@@ -8588,7 +15399,7 @@
                     <a:p>
                       <a:pPr algn="l">
                         <a:lnSpc>
-                          <a:spcPct val="110000"/>
+                          <a:spcPct val="105000"/>
                         </a:lnSpc>
                         <a:spcBef>
                           <a:spcPts val="0"/>
@@ -8610,7 +15421,11 @@
                       </a:r>
                     </a:p>
                   </a:txBody>
-                  <a:tcPr/>
+                  <a:tcPr marT="27432" marB="27432">
+                    <a:solidFill>
+                      <a:srgbClr val="FFFFFF"/>
+                    </a:solidFill>
+                  </a:tcPr>
                 </a:tc>
                 <a:tc>
                   <a:txBody>
@@ -8619,7 +15434,7 @@
                     <a:p>
                       <a:pPr algn="l">
                         <a:lnSpc>
-                          <a:spcPct val="110000"/>
+                          <a:spcPct val="105000"/>
                         </a:lnSpc>
                         <a:spcBef>
                           <a:spcPts val="0"/>
@@ -8641,7 +15456,11 @@
                       </a:r>
                     </a:p>
                   </a:txBody>
-                  <a:tcPr/>
+                  <a:tcPr marT="27432" marB="27432">
+                    <a:solidFill>
+                      <a:srgbClr val="FFFFFF"/>
+                    </a:solidFill>
+                  </a:tcPr>
                 </a:tc>
               </a:tr>
               <a:tr h="475488">
@@ -8652,7 +15471,42 @@
                     <a:p>
                       <a:pPr algn="l">
                         <a:lnSpc>
-                          <a:spcPct val="110000"/>
+                          <a:spcPct val="105000"/>
+                        </a:lnSpc>
+                        <a:spcBef>
+                          <a:spcPts val="0"/>
+                        </a:spcBef>
+                        <a:spcAft>
+                          <a:spcPts val="0"/>
+                        </a:spcAft>
+                      </a:pPr>
+                      <a:r>
+                        <a:rPr sz="1500" b="0">
+                          <a:solidFill>
+                            <a:srgbClr val="111111"/>
+                          </a:solidFill>
+                          <a:latin typeface="Arial"/>
+                          <a:ea typeface="微软雅黑"/>
+                          <a:cs typeface="Arial"/>
+                        </a:rPr>
+                        <a:t>模型方案</a:t>
+                      </a:r>
+                    </a:p>
+                  </a:txBody>
+                  <a:tcPr marT="27432" marB="27432">
+                    <a:solidFill>
+                      <a:srgbClr val="FFFFFF"/>
+                    </a:solidFill>
+                  </a:tcPr>
+                </a:tc>
+                <a:tc>
+                  <a:txBody>
+                    <a:bodyPr/>
+                    <a:lstStyle/>
+                    <a:p>
+                      <a:pPr algn="l">
+                        <a:lnSpc>
+                          <a:spcPct val="105000"/>
                         </a:lnSpc>
                         <a:spcBef>
                           <a:spcPts val="0"/>
@@ -8670,11 +15524,15 @@
                           <a:ea typeface="微软雅黑"/>
                           <a:cs typeface="Arial"/>
                         </a:rPr>
-                        <a:t>机制与验证</a:t>
+                        <a:t>拟构建 DeepMetaAMP</a:t>
                       </a:r>
                     </a:p>
                   </a:txBody>
-                  <a:tcPr/>
+                  <a:tcPr marT="27432" marB="27432">
+                    <a:solidFill>
+                      <a:srgbClr val="FFFFFF"/>
+                    </a:solidFill>
+                  </a:tcPr>
                 </a:tc>
                 <a:tc>
                   <a:txBody>
@@ -8683,7 +15541,79 @@
                     <a:p>
                       <a:pPr algn="l">
                         <a:lnSpc>
-                          <a:spcPct val="110000"/>
+                          <a:spcPct val="105000"/>
+                        </a:lnSpc>
+                        <a:spcBef>
+                          <a:spcPts val="0"/>
+                        </a:spcBef>
+                        <a:spcAft>
+                          <a:spcPts val="0"/>
+                        </a:spcAft>
+                      </a:pPr>
+                      <a:r>
+                        <a:rPr sz="1500" b="0">
+                          <a:solidFill>
+                            <a:srgbClr val="333333"/>
+                          </a:solidFill>
+                          <a:latin typeface="Arial"/>
+                          <a:ea typeface="微软雅黑"/>
+                          <a:cs typeface="Arial"/>
+                        </a:rPr>
+                        <a:t>改用 Attention / LSTM / BERT 三模型协同预测</a:t>
+                      </a:r>
+                    </a:p>
+                  </a:txBody>
+                  <a:tcPr marT="27432" marB="27432">
+                    <a:solidFill>
+                      <a:srgbClr val="FFFFFF"/>
+                    </a:solidFill>
+                  </a:tcPr>
+                </a:tc>
+              </a:tr>
+              <a:tr h="475488">
+                <a:tc>
+                  <a:txBody>
+                    <a:bodyPr/>
+                    <a:lstStyle/>
+                    <a:p>
+                      <a:pPr algn="l">
+                        <a:lnSpc>
+                          <a:spcPct val="105000"/>
+                        </a:lnSpc>
+                        <a:spcBef>
+                          <a:spcPts val="0"/>
+                        </a:spcBef>
+                        <a:spcAft>
+                          <a:spcPts val="0"/>
+                        </a:spcAft>
+                      </a:pPr>
+                      <a:r>
+                        <a:rPr sz="1500" b="0">
+                          <a:solidFill>
+                            <a:srgbClr val="111111"/>
+                          </a:solidFill>
+                          <a:latin typeface="Arial"/>
+                          <a:ea typeface="微软雅黑"/>
+                          <a:cs typeface="Arial"/>
+                        </a:rPr>
+                        <a:t>机制与验证</a:t>
+                      </a:r>
+                    </a:p>
+                  </a:txBody>
+                  <a:tcPr marT="27432" marB="27432">
+                    <a:solidFill>
+                      <a:srgbClr val="FFFFFF"/>
+                    </a:solidFill>
+                  </a:tcPr>
+                </a:tc>
+                <a:tc>
+                  <a:txBody>
+                    <a:bodyPr/>
+                    <a:lstStyle/>
+                    <a:p>
+                      <a:pPr algn="l">
+                        <a:lnSpc>
+                          <a:spcPct val="105000"/>
                         </a:lnSpc>
                         <a:spcBef>
                           <a:spcPts val="0"/>
@@ -8705,7 +15635,11 @@
                       </a:r>
                     </a:p>
                   </a:txBody>
-                  <a:tcPr/>
+                  <a:tcPr marT="27432" marB="27432">
+                    <a:solidFill>
+                      <a:srgbClr val="FFFFFF"/>
+                    </a:solidFill>
+                  </a:tcPr>
                 </a:tc>
                 <a:tc>
                   <a:txBody>
@@ -8714,7 +15648,7 @@
                     <a:p>
                       <a:pPr algn="l">
                         <a:lnSpc>
-                          <a:spcPct val="110000"/>
+                          <a:spcPct val="105000"/>
                         </a:lnSpc>
                         <a:spcBef>
                           <a:spcPts val="0"/>
@@ -8736,7 +15670,11 @@
                       </a:r>
                     </a:p>
                   </a:txBody>
-                  <a:tcPr/>
+                  <a:tcPr marT="27432" marB="27432">
+                    <a:solidFill>
+                      <a:srgbClr val="FFFFFF"/>
+                    </a:solidFill>
+                  </a:tcPr>
                 </a:tc>
               </a:tr>
             </a:tbl>
@@ -8832,717 +15770,7 @@
                 <a:ea typeface="微软雅黑"/>
                 <a:cs typeface="Arial"/>
               </a:rPr>
-              <a:t>7 / 12</a:t>
-            </a:r>
-          </a:p>
-        </p:txBody>
-      </p:sp>
-    </p:spTree>
-  </p:cSld>
-  <p:clrMapOvr>
-    <a:masterClrMapping/>
-  </p:clrMapOvr>
-</p:sld>
-</file>
-
-<file path=ppt/slides/slide8.xml><?xml version="1.0" encoding="utf-8"?>
-<p:sld xmlns:a="http://schemas.openxmlformats.org/drawingml/2006/main" xmlns:p="http://schemas.openxmlformats.org/presentationml/2006/main" xmlns:r="http://schemas.openxmlformats.org/officeDocument/2006/relationships">
-  <p:cSld>
-    <p:spTree>
-      <p:nvGrpSpPr>
-        <p:cNvPr id="1" name=""/>
-        <p:cNvGrpSpPr/>
-        <p:nvPr/>
-      </p:nvGrpSpPr>
-      <p:grpSpPr/>
-      <p:sp>
-        <p:nvSpPr>
-          <p:cNvPr id="2" name="TextBox 1"/>
-          <p:cNvSpPr txBox="1"/>
-          <p:nvPr/>
-        </p:nvSpPr>
-        <p:spPr>
-          <a:xfrm>
-            <a:off x="640080" y="365760"/>
-            <a:ext cx="10908792" cy="548640"/>
-          </a:xfrm>
-          <a:prstGeom prst="rect">
-            <a:avLst/>
-          </a:prstGeom>
-          <a:noFill/>
-        </p:spPr>
-        <p:txBody>
-          <a:bodyPr wrap="square" anchor="t" lIns="27432" rIns="27432" tIns="0" bIns="0">
-            <a:spAutoFit/>
-          </a:bodyPr>
-          <a:lstStyle/>
-          <a:p>
-            <a:pPr algn="l">
-              <a:lnSpc>
-                <a:spcPct val="100000"/>
-              </a:lnSpc>
-              <a:spcBef>
-                <a:spcPts val="0"/>
-              </a:spcBef>
-              <a:spcAft>
-                <a:spcPts val="0"/>
-              </a:spcAft>
-            </a:pPr>
-            <a:r>
-              <a:rPr sz="2500" b="1">
-                <a:solidFill>
-                  <a:srgbClr val="111111"/>
-                </a:solidFill>
-                <a:latin typeface="Arial"/>
-                <a:ea typeface="微软雅黑"/>
-                <a:cs typeface="Arial"/>
-              </a:rPr>
-              <a:t>主体分析已完成，后续安排集中在验证与撰写</a:t>
-            </a:r>
-          </a:p>
-        </p:txBody>
-      </p:sp>
-      <p:sp>
-        <p:nvSpPr>
-          <p:cNvPr id="3" name="Rectangle 2"/>
-          <p:cNvSpPr/>
-          <p:nvPr/>
-        </p:nvSpPr>
-        <p:spPr>
-          <a:xfrm>
-            <a:off x="640080" y="969264"/>
-            <a:ext cx="10908792" cy="12700"/>
-          </a:xfrm>
-          <a:prstGeom prst="rect">
-            <a:avLst/>
-          </a:prstGeom>
-          <a:solidFill>
-            <a:srgbClr val="DDDDDA"/>
-          </a:solidFill>
-          <a:ln>
-            <a:noFill/>
-          </a:ln>
-          <a:effectLst/>
-        </p:spPr>
-        <p:style>
-          <a:lnRef idx="1">
-            <a:schemeClr val="accent1"/>
-          </a:lnRef>
-          <a:fillRef idx="3">
-            <a:schemeClr val="accent1"/>
-          </a:fillRef>
-          <a:effectRef idx="2">
-            <a:schemeClr val="accent1"/>
-          </a:effectRef>
-          <a:fontRef idx="minor">
-            <a:schemeClr val="lt1"/>
-          </a:fontRef>
-        </p:style>
-        <p:txBody>
-          <a:bodyPr rtlCol="0" anchor="ctr"/>
-          <a:lstStyle/>
-          <a:p>
-            <a:pPr algn="ctr"/>
-          </a:p>
-        </p:txBody>
-      </p:sp>
-      <p:sp>
-        <p:nvSpPr>
-          <p:cNvPr id="4" name="TextBox 3"/>
-          <p:cNvSpPr txBox="1"/>
-          <p:nvPr/>
-        </p:nvSpPr>
-        <p:spPr>
-          <a:xfrm>
-            <a:off x="640080" y="1481328"/>
-            <a:ext cx="10424160" cy="3291840"/>
-          </a:xfrm>
-          <a:prstGeom prst="rect">
-            <a:avLst/>
-          </a:prstGeom>
-          <a:noFill/>
-        </p:spPr>
-        <p:txBody>
-          <a:bodyPr wrap="square" anchor="t" lIns="27432" rIns="27432" tIns="0" bIns="0">
-            <a:spAutoFit/>
-          </a:bodyPr>
-          <a:lstStyle/>
-          <a:p>
-            <a:pPr algn="l">
-              <a:lnSpc>
-                <a:spcPct val="134000"/>
-              </a:lnSpc>
-              <a:spcBef>
-                <a:spcPts val="0"/>
-              </a:spcBef>
-              <a:spcAft>
-                <a:spcPts val="0"/>
-              </a:spcAft>
-            </a:pPr>
-            <a:r>
-              <a:rPr sz="1800" b="0">
-                <a:solidFill>
-                  <a:srgbClr val="333333"/>
-                </a:solidFill>
-                <a:latin typeface="Arial"/>
-                <a:ea typeface="微软雅黑"/>
-                <a:cs typeface="Arial"/>
-              </a:rPr>
-              <a:t>已完成：数据资源与参考集、短肽库、三模型共识预测、分阶段差异分析、宏蛋白组二次去重与特有抗菌肽筛选。</a:t>
-            </a:r>
-          </a:p>
-          <a:p>
-            <a:pPr algn="l">
-              <a:lnSpc>
-                <a:spcPct val="134000"/>
-              </a:lnSpc>
-              <a:spcBef>
-                <a:spcPts val="1400"/>
-              </a:spcBef>
-              <a:spcAft>
-                <a:spcPts val="0"/>
-              </a:spcAft>
-            </a:pPr>
-            <a:r>
-              <a:rPr sz="1800" b="0">
-                <a:solidFill>
-                  <a:srgbClr val="333333"/>
-                </a:solidFill>
-                <a:latin typeface="Arial"/>
-                <a:ea typeface="微软雅黑"/>
-                <a:cs typeface="Arial"/>
-              </a:rPr>
-              <a:t>进行中：特有抗菌肽的机制关联分析、候选抗菌肽的抑菌实验验证，以及学位论文与以第一作者投稿的 SCI 论文撰写。</a:t>
-            </a:r>
-          </a:p>
-          <a:p>
-            <a:pPr algn="l">
-              <a:lnSpc>
-                <a:spcPct val="134000"/>
-              </a:lnSpc>
-              <a:spcBef>
-                <a:spcPts val="1400"/>
-              </a:spcBef>
-              <a:spcAft>
-                <a:spcPts val="0"/>
-              </a:spcAft>
-            </a:pPr>
-            <a:r>
-              <a:rPr sz="1800" b="0">
-                <a:solidFill>
-                  <a:srgbClr val="333333"/>
-                </a:solidFill>
-                <a:latin typeface="Arial"/>
-                <a:ea typeface="微软雅黑"/>
-                <a:cs typeface="Arial"/>
-              </a:rPr>
-              <a:t>时间安排：按开题计划推进，后续不依赖新的数据生产，整体风险可控。</a:t>
-            </a:r>
-          </a:p>
-        </p:txBody>
-      </p:sp>
-      <p:sp>
-        <p:nvSpPr>
-          <p:cNvPr id="5" name="Rectangle 4"/>
-          <p:cNvSpPr/>
-          <p:nvPr/>
-        </p:nvSpPr>
-        <p:spPr>
-          <a:xfrm>
-            <a:off x="640080" y="4846320"/>
-            <a:ext cx="1920240" cy="30480"/>
-          </a:xfrm>
-          <a:prstGeom prst="rect">
-            <a:avLst/>
-          </a:prstGeom>
-          <a:solidFill>
-            <a:srgbClr val="B03A2E"/>
-          </a:solidFill>
-          <a:ln>
-            <a:noFill/>
-          </a:ln>
-          <a:effectLst/>
-        </p:spPr>
-        <p:style>
-          <a:lnRef idx="1">
-            <a:schemeClr val="accent1"/>
-          </a:lnRef>
-          <a:fillRef idx="3">
-            <a:schemeClr val="accent1"/>
-          </a:fillRef>
-          <a:effectRef idx="2">
-            <a:schemeClr val="accent1"/>
-          </a:effectRef>
-          <a:fontRef idx="minor">
-            <a:schemeClr val="lt1"/>
-          </a:fontRef>
-        </p:style>
-        <p:txBody>
-          <a:bodyPr rtlCol="0" anchor="ctr"/>
-          <a:lstStyle/>
-          <a:p>
-            <a:pPr algn="ctr"/>
-          </a:p>
-        </p:txBody>
-      </p:sp>
-      <p:sp>
-        <p:nvSpPr>
-          <p:cNvPr id="6" name="TextBox 5"/>
-          <p:cNvSpPr txBox="1"/>
-          <p:nvPr/>
-        </p:nvSpPr>
-        <p:spPr>
-          <a:xfrm>
-            <a:off x="640080" y="5084064"/>
-            <a:ext cx="10424160" cy="731520"/>
-          </a:xfrm>
-          <a:prstGeom prst="rect">
-            <a:avLst/>
-          </a:prstGeom>
-          <a:noFill/>
-        </p:spPr>
-        <p:txBody>
-          <a:bodyPr wrap="square" anchor="t" lIns="27432" rIns="27432" tIns="0" bIns="0">
-            <a:spAutoFit/>
-          </a:bodyPr>
-          <a:lstStyle/>
-          <a:p>
-            <a:pPr algn="l">
-              <a:lnSpc>
-                <a:spcPct val="110000"/>
-              </a:lnSpc>
-              <a:spcBef>
-                <a:spcPts val="0"/>
-              </a:spcBef>
-              <a:spcAft>
-                <a:spcPts val="0"/>
-              </a:spcAft>
-            </a:pPr>
-            <a:r>
-              <a:rPr sz="2000" b="1">
-                <a:solidFill>
-                  <a:srgbClr val="111111"/>
-                </a:solidFill>
-                <a:latin typeface="Arial"/>
-                <a:ea typeface="微软雅黑"/>
-                <a:cs typeface="Arial"/>
-              </a:rPr>
-              <a:t>谢谢各位老师，请批评指正。</a:t>
-            </a:r>
-          </a:p>
-        </p:txBody>
-      </p:sp>
-      <p:sp>
-        <p:nvSpPr>
-          <p:cNvPr id="7" name="TextBox 6"/>
-          <p:cNvSpPr txBox="1"/>
-          <p:nvPr/>
-        </p:nvSpPr>
-        <p:spPr>
-          <a:xfrm>
-            <a:off x="640080" y="6419088"/>
-            <a:ext cx="8778240" cy="310896"/>
-          </a:xfrm>
-          <a:prstGeom prst="rect">
-            <a:avLst/>
-          </a:prstGeom>
-          <a:noFill/>
-        </p:spPr>
-        <p:txBody>
-          <a:bodyPr wrap="square" anchor="t" lIns="27432" rIns="27432" tIns="0" bIns="0">
-            <a:spAutoFit/>
-          </a:bodyPr>
-          <a:lstStyle/>
-          <a:p>
-            <a:pPr algn="l">
-              <a:lnSpc>
-                <a:spcPct val="100000"/>
-              </a:lnSpc>
-              <a:spcBef>
-                <a:spcPts val="0"/>
-              </a:spcBef>
-              <a:spcAft>
-                <a:spcPts val="0"/>
-              </a:spcAft>
-            </a:pPr>
-            <a:r>
-              <a:rPr sz="1500" b="0">
-                <a:solidFill>
-                  <a:srgbClr val="777777"/>
-                </a:solidFill>
-                <a:latin typeface="Arial"/>
-                <a:ea typeface="微软雅黑"/>
-                <a:cs typeface="Arial"/>
-              </a:rPr>
-              <a:t>研究生论文中期检查 · 文绍华</a:t>
-            </a:r>
-          </a:p>
-        </p:txBody>
-      </p:sp>
-      <p:sp>
-        <p:nvSpPr>
-          <p:cNvPr id="8" name="TextBox 7"/>
-          <p:cNvSpPr txBox="1"/>
-          <p:nvPr/>
-        </p:nvSpPr>
-        <p:spPr>
-          <a:xfrm>
-            <a:off x="10058400" y="6419088"/>
-            <a:ext cx="1490472" cy="310896"/>
-          </a:xfrm>
-          <a:prstGeom prst="rect">
-            <a:avLst/>
-          </a:prstGeom>
-          <a:noFill/>
-        </p:spPr>
-        <p:txBody>
-          <a:bodyPr wrap="square" anchor="t" lIns="27432" rIns="27432" tIns="0" bIns="0">
-            <a:spAutoFit/>
-          </a:bodyPr>
-          <a:lstStyle/>
-          <a:p>
-            <a:pPr algn="r">
-              <a:lnSpc>
-                <a:spcPct val="100000"/>
-              </a:lnSpc>
-              <a:spcBef>
-                <a:spcPts val="0"/>
-              </a:spcBef>
-              <a:spcAft>
-                <a:spcPts val="0"/>
-              </a:spcAft>
-            </a:pPr>
-            <a:r>
-              <a:rPr sz="1500" b="0">
-                <a:solidFill>
-                  <a:srgbClr val="777777"/>
-                </a:solidFill>
-                <a:latin typeface="Arial"/>
-                <a:ea typeface="微软雅黑"/>
-                <a:cs typeface="Arial"/>
-              </a:rPr>
-              <a:t>8 / 12</a:t>
-            </a:r>
-          </a:p>
-        </p:txBody>
-      </p:sp>
-    </p:spTree>
-  </p:cSld>
-  <p:clrMapOvr>
-    <a:masterClrMapping/>
-  </p:clrMapOvr>
-</p:sld>
-</file>
-
-<file path=ppt/slides/slide9.xml><?xml version="1.0" encoding="utf-8"?>
-<p:sld xmlns:a="http://schemas.openxmlformats.org/drawingml/2006/main" xmlns:p="http://schemas.openxmlformats.org/presentationml/2006/main" xmlns:r="http://schemas.openxmlformats.org/officeDocument/2006/relationships">
-  <p:cSld>
-    <p:spTree>
-      <p:nvGrpSpPr>
-        <p:cNvPr id="1" name=""/>
-        <p:cNvGrpSpPr/>
-        <p:nvPr/>
-      </p:nvGrpSpPr>
-      <p:grpSpPr/>
-      <p:sp>
-        <p:nvSpPr>
-          <p:cNvPr id="2" name="TextBox 1"/>
-          <p:cNvSpPr txBox="1"/>
-          <p:nvPr/>
-        </p:nvSpPr>
-        <p:spPr>
-          <a:xfrm>
-            <a:off x="640080" y="365760"/>
-            <a:ext cx="10908792" cy="548640"/>
-          </a:xfrm>
-          <a:prstGeom prst="rect">
-            <a:avLst/>
-          </a:prstGeom>
-          <a:noFill/>
-        </p:spPr>
-        <p:txBody>
-          <a:bodyPr wrap="square" anchor="t" lIns="27432" rIns="27432" tIns="0" bIns="0">
-            <a:spAutoFit/>
-          </a:bodyPr>
-          <a:lstStyle/>
-          <a:p>
-            <a:pPr algn="l">
-              <a:lnSpc>
-                <a:spcPct val="100000"/>
-              </a:lnSpc>
-              <a:spcBef>
-                <a:spcPts val="0"/>
-              </a:spcBef>
-              <a:spcAft>
-                <a:spcPts val="0"/>
-              </a:spcAft>
-            </a:pPr>
-            <a:r>
-              <a:rPr sz="2500" b="1">
-                <a:solidFill>
-                  <a:srgbClr val="111111"/>
-                </a:solidFill>
-                <a:latin typeface="Arial"/>
-                <a:ea typeface="微软雅黑"/>
-                <a:cs typeface="Arial"/>
-              </a:rPr>
-              <a:t>抗菌肽与 AD 的关联可以拆成七环，每环的证据强度不同</a:t>
-            </a:r>
-          </a:p>
-        </p:txBody>
-      </p:sp>
-      <p:sp>
-        <p:nvSpPr>
-          <p:cNvPr id="3" name="Rectangle 2"/>
-          <p:cNvSpPr/>
-          <p:nvPr/>
-        </p:nvSpPr>
-        <p:spPr>
-          <a:xfrm>
-            <a:off x="640080" y="969264"/>
-            <a:ext cx="10908792" cy="12700"/>
-          </a:xfrm>
-          <a:prstGeom prst="rect">
-            <a:avLst/>
-          </a:prstGeom>
-          <a:solidFill>
-            <a:srgbClr val="DDDDDA"/>
-          </a:solidFill>
-          <a:ln>
-            <a:noFill/>
-          </a:ln>
-          <a:effectLst/>
-        </p:spPr>
-        <p:style>
-          <a:lnRef idx="1">
-            <a:schemeClr val="accent1"/>
-          </a:lnRef>
-          <a:fillRef idx="3">
-            <a:schemeClr val="accent1"/>
-          </a:fillRef>
-          <a:effectRef idx="2">
-            <a:schemeClr val="accent1"/>
-          </a:effectRef>
-          <a:fontRef idx="minor">
-            <a:schemeClr val="lt1"/>
-          </a:fontRef>
-        </p:style>
-        <p:txBody>
-          <a:bodyPr rtlCol="0" anchor="ctr"/>
-          <a:lstStyle/>
-          <a:p>
-            <a:pPr algn="ctr"/>
-          </a:p>
-        </p:txBody>
-      </p:sp>
-      <p:pic>
-        <p:nvPicPr>
-          <p:cNvPr id="4" name="Picture 3" descr="figM1_关联逻辑链.png"/>
-          <p:cNvPicPr>
-            <a:picLocks noChangeAspect="1"/>
-          </p:cNvPicPr>
-          <p:nvPr/>
-        </p:nvPicPr>
-        <p:blipFill>
-          <a:blip r:embed="rId2"/>
-          <a:stretch>
-            <a:fillRect/>
-          </a:stretch>
-        </p:blipFill>
-        <p:spPr>
-          <a:xfrm>
-            <a:off x="640080" y="1188720"/>
-            <a:ext cx="10073906" cy="4315968"/>
-          </a:xfrm>
-          <a:prstGeom prst="rect">
-            <a:avLst/>
-          </a:prstGeom>
-        </p:spPr>
-      </p:pic>
-      <p:sp>
-        <p:nvSpPr>
-          <p:cNvPr id="5" name="TextBox 4"/>
-          <p:cNvSpPr txBox="1"/>
-          <p:nvPr/>
-        </p:nvSpPr>
-        <p:spPr>
-          <a:xfrm>
-            <a:off x="640080" y="6053328"/>
-            <a:ext cx="10908792" cy="329184"/>
-          </a:xfrm>
-          <a:prstGeom prst="rect">
-            <a:avLst/>
-          </a:prstGeom>
-          <a:noFill/>
-        </p:spPr>
-        <p:txBody>
-          <a:bodyPr wrap="square" anchor="t" lIns="27432" rIns="27432" tIns="0" bIns="0">
-            <a:spAutoFit/>
-          </a:bodyPr>
-          <a:lstStyle/>
-          <a:p>
-            <a:pPr algn="l">
-              <a:lnSpc>
-                <a:spcPct val="100000"/>
-              </a:lnSpc>
-              <a:spcBef>
-                <a:spcPts val="0"/>
-              </a:spcBef>
-              <a:spcAft>
-                <a:spcPts val="0"/>
-              </a:spcAft>
-            </a:pPr>
-            <a:r>
-              <a:rPr sz="1500" b="0">
-                <a:solidFill>
-                  <a:srgbClr val="777777"/>
-                </a:solidFill>
-                <a:latin typeface="Arial"/>
-                <a:ea typeface="微软雅黑"/>
-                <a:cs typeface="Arial"/>
-              </a:rPr>
-              <a:t>图：本项目自制（results/figures）</a:t>
-            </a:r>
-          </a:p>
-        </p:txBody>
-      </p:sp>
-      <p:sp>
-        <p:nvSpPr>
-          <p:cNvPr id="6" name="TextBox 5"/>
-          <p:cNvSpPr txBox="1"/>
-          <p:nvPr/>
-        </p:nvSpPr>
-        <p:spPr>
-          <a:xfrm>
-            <a:off x="640080" y="4626864"/>
-            <a:ext cx="10908792" cy="1280160"/>
-          </a:xfrm>
-          <a:prstGeom prst="rect">
-            <a:avLst/>
-          </a:prstGeom>
-          <a:noFill/>
-        </p:spPr>
-        <p:txBody>
-          <a:bodyPr wrap="square" anchor="t" lIns="27432" rIns="27432" tIns="0" bIns="0">
-            <a:spAutoFit/>
-          </a:bodyPr>
-          <a:lstStyle/>
-          <a:p>
-            <a:pPr algn="l">
-              <a:lnSpc>
-                <a:spcPct val="130000"/>
-              </a:lnSpc>
-              <a:spcBef>
-                <a:spcPts val="0"/>
-              </a:spcBef>
-              <a:spcAft>
-                <a:spcPts val="0"/>
-              </a:spcAft>
-            </a:pPr>
-            <a:r>
-              <a:rPr sz="1700" b="0">
-                <a:solidFill>
-                  <a:srgbClr val="333333"/>
-                </a:solidFill>
-                <a:latin typeface="Arial"/>
-                <a:ea typeface="微软雅黑"/>
-                <a:cs typeface="Arial"/>
-              </a:rPr>
-              <a:t>① AD 与感染相关、② 感染与炎症驱动抗菌肽与 Aβ 生成、③ Aβ 本身即抗菌肽；④ 抗菌活性可计算预测、⑤ AD 组特异抗菌肽随阶段变化、⑥ 双刃剑效应；⑦ 为什么 AD 更多与 AChE–Aβ 机制落点，是本课题要回答的部分。</a:t>
-            </a:r>
-          </a:p>
-        </p:txBody>
-      </p:sp>
-      <p:sp>
-        <p:nvSpPr>
-          <p:cNvPr id="7" name="TextBox 6"/>
-          <p:cNvSpPr txBox="1"/>
-          <p:nvPr/>
-        </p:nvSpPr>
-        <p:spPr>
-          <a:xfrm>
-            <a:off x="640080" y="6419088"/>
-            <a:ext cx="8778240" cy="310896"/>
-          </a:xfrm>
-          <a:prstGeom prst="rect">
-            <a:avLst/>
-          </a:prstGeom>
-          <a:noFill/>
-        </p:spPr>
-        <p:txBody>
-          <a:bodyPr wrap="square" anchor="t" lIns="27432" rIns="27432" tIns="0" bIns="0">
-            <a:spAutoFit/>
-          </a:bodyPr>
-          <a:lstStyle/>
-          <a:p>
-            <a:pPr algn="l">
-              <a:lnSpc>
-                <a:spcPct val="100000"/>
-              </a:lnSpc>
-              <a:spcBef>
-                <a:spcPts val="0"/>
-              </a:spcBef>
-              <a:spcAft>
-                <a:spcPts val="0"/>
-              </a:spcAft>
-            </a:pPr>
-            <a:r>
-              <a:rPr sz="1500" b="0">
-                <a:solidFill>
-                  <a:srgbClr val="777777"/>
-                </a:solidFill>
-                <a:latin typeface="Arial"/>
-                <a:ea typeface="微软雅黑"/>
-                <a:cs typeface="Arial"/>
-              </a:rPr>
-              <a:t>研究生论文中期检查 · 文绍华</a:t>
-            </a:r>
-          </a:p>
-        </p:txBody>
-      </p:sp>
-      <p:sp>
-        <p:nvSpPr>
-          <p:cNvPr id="8" name="TextBox 7"/>
-          <p:cNvSpPr txBox="1"/>
-          <p:nvPr/>
-        </p:nvSpPr>
-        <p:spPr>
-          <a:xfrm>
-            <a:off x="10058400" y="6419088"/>
-            <a:ext cx="1490472" cy="310896"/>
-          </a:xfrm>
-          <a:prstGeom prst="rect">
-            <a:avLst/>
-          </a:prstGeom>
-          <a:noFill/>
-        </p:spPr>
-        <p:txBody>
-          <a:bodyPr wrap="square" anchor="t" lIns="27432" rIns="27432" tIns="0" bIns="0">
-            <a:spAutoFit/>
-          </a:bodyPr>
-          <a:lstStyle/>
-          <a:p>
-            <a:pPr algn="r">
-              <a:lnSpc>
-                <a:spcPct val="100000"/>
-              </a:lnSpc>
-              <a:spcBef>
-                <a:spcPts val="0"/>
-              </a:spcBef>
-              <a:spcAft>
-                <a:spcPts val="0"/>
-              </a:spcAft>
-            </a:pPr>
-            <a:r>
-              <a:rPr sz="1500" b="0">
-                <a:solidFill>
-                  <a:srgbClr val="777777"/>
-                </a:solidFill>
-                <a:latin typeface="Arial"/>
-                <a:ea typeface="微软雅黑"/>
-                <a:cs typeface="Arial"/>
-              </a:rPr>
-              <a:t>9 / 12</a:t>
+              <a:t>9 / 14</a:t>
             </a:r>
           </a:p>
         </p:txBody>

--- a/中间版/中期答辩_H_nature风.pptx
+++ b/中间版/中期答辩_H_nature风.pptx
@@ -585,7 +585,7 @@
           <a:lstStyle/>
           <a:p>
             <a:r>
-              <a:t>主体分析工作已经在中期完成，后续是机制关联的结论整理、抑菌实验验证和论文撰写，整体风险可控。我的汇报到此结束，请各位老师批评指正。</a:t>
+              <a:t>这页把抗菌肽与 AD 的关联拆成七环，并标出每一环的证据强度：蓝色是已有实验或临床证据，绿色是计算方法能给出候选与优先序的部分，橙色是本课题要回答或需要验证的部分。老师问任何一环，都能说清这一环目前的证据到什么程度。</a:t>
             </a:r>
           </a:p>
         </p:txBody>
@@ -655,7 +655,7 @@
           <a:lstStyle/>
           <a:p>
             <a:r>
-              <a:t>这页把抗菌肽与 AD 的关联拆成七环，并标出每一环的证据强度：蓝色是已有实验或临床证据，绿色是计算方法能给出候选与优先序的部分，橙色是本课题要回答或需要验证的部分。老师问任何一环，都能说清这一环目前的证据到什么程度。</a:t>
+              <a:t>机制落点参照 AChE–Aβ 复合物的分子动力学研究：Aβ 对接进 PAS 后，复合物在 1 微秒模拟中保持稳定，主要停留区段是 344—361，该区段紧邻 PAS 但不受双位点抑制剂的位阻。同一界面的其他实验证据包括：丙锭可阻断 AChE 诱导的聚集而催化位点抑制剂无效、PAS 负电荷触发 β-发夹构象、丁酰胆碱酯酶反向延缓纤维形成。由此提出三个假设，并用对接与动力学给出优先序。</a:t>
             </a:r>
           </a:p>
         </p:txBody>
@@ -725,7 +725,7 @@
           <a:lstStyle/>
           <a:p>
             <a:r>
-              <a:t>机制落点参照 AChE–Aβ 复合物的分子动力学研究：Aβ 对接进 PAS 后，复合物在 1 微秒模拟中保持稳定，主要停留区段是 344—361，该区段紧邻 PAS 但不受双位点抑制剂的位阻。同一界面的其他实验证据包括：丙锭可阻断 AChE 诱导的聚集而催化位点抑制剂无效、PAS 负电荷触发 β-发夹构象、丁酰胆碱酯酶反向延缓纤维形成。由此提出三个假设，并用对接与动力学给出优先序。</a:t>
+              <a:t>这张表把老师提出的八个问题逐条列出，并给出答案要点与证据强度。需要说明的是：关联类结论的证据强度较高，方向类结论（谁更多、促进还是抑制）存在例外与条件依赖，因此标注为中；微生物源抗菌肽在 AD 中的变化属于待验证部分，正是本课题要补的一环。</a:t>
             </a:r>
           </a:p>
         </p:txBody>
@@ -795,7 +795,7 @@
           <a:lstStyle/>
           <a:p>
             <a:r>
-              <a:t>这张表把老师提出的八个问题逐条列出，并给出答案要点与证据强度。需要说明的是：关联类结论的证据强度较高，方向类结论（谁更多、促进还是抑制）存在例外与条件依赖，因此标注为中；微生物源抗菌肽在 AD 中的变化属于待验证部分，正是本课题要补的一环。</a:t>
+              <a:t>机制说明文档《抗菌肽与AD关联机制说明》共整理 46 条文献，覆盖 AD 与感染、宿主抗菌肽在 AD 中的变化、抗菌肽预测方法、菌群分期、AChE–Aβ 与交叉成核的分子模拟，以及作为反例的乳铁蛋白下降证据。这里列出其中十条代表性文献及其结论。</a:t>
             </a:r>
           </a:p>
         </p:txBody>
@@ -865,7 +865,7 @@
           <a:lstStyle/>
           <a:p>
             <a:r>
-              <a:t>机制说明文档《抗菌肽与AD关联机制说明》共整理 46 条文献，覆盖 AD 与感染、宿主抗菌肽在 AD 中的变化、抗菌肽预测方法、菌群分期、AChE–Aβ 与交叉成核的分子模拟，以及作为反例的乳铁蛋白下降证据。这里列出其中十条代表性文献及其结论。</a:t>
+              <a:t>主体分析工作已经在中期完成，后续是机制关联的结论整理、抑菌实验验证和论文撰写，整体风险可控。我的汇报到此结束，请各位老师批评指正。</a:t>
             </a:r>
           </a:p>
         </p:txBody>
@@ -1075,7 +1075,7 @@
           <a:lstStyle/>
           <a:p>
             <a:r>
-              <a:t>这页说明整体流程：从测序数据到候选抗菌肽清单，共十二步，输入输出都可追溯。前九步已经在中期前完成，最后三步正在推进——机制关联分析、抑菌实验验证与结果整理。</a:t>
+              <a:t>这页说明整体流程：从测序数据到候选抗菌肽清单，共十二步，输入输出都可追溯。工具链是 fastp 与 KneadData 做质控去宿主，MEGAHIT 组装，MetaBAT2、MaxBin2 与 CONCOCT 多算法联合分箱后 metaWRAP 提纯，dRep 按 95% ANI 去冗余得到参考基因组集，EMBOSS getorf 预测 sORF 并做序列级去冗余，Attention / LSTM / BERT 三模型一致阳性才纳入候选，CoverM 定量并做 CLR 变换，用 Kruskal-Wallis 与 Mann-Whitney U 做组间检验，再用宏蛋白组表达证据二次去重。前九步已经在中期前完成，最后三步正在推进——机制关联分析、抑菌实验验证与结果整理。</a:t>
             </a:r>
           </a:p>
         </p:txBody>
@@ -1145,7 +1145,7 @@
           <a:lstStyle/>
           <a:p>
             <a:r>
-              <a:t>分组方式是这页的重点：五个认知阶段，每阶段内再按性别与三个年龄段分层，共三十个分层单元；每个单元内按年龄与性别匹配，得到结构一致的比较亚队列。各阶段的样本量相同、性别构成相同、组间平均年龄差小于两岁，这样阶段之间的差异不会来自年龄与性别构成。</a:t>
+              <a:t>分组方式是这页的重点：五个认知阶段，每阶段内再按性别与三个年龄段分层，共三十个分层单元；每个单元内按年龄与性别匹配，最终选出 265 例匹配亚队列——各阶段 53 例、每组 35 女 / 18 男，组间平均年龄最大差 1.8 岁，这样阶段之间的差异不会来自年龄与性别构成。</a:t>
             </a:r>
           </a:p>
         </p:txBody>
@@ -4957,7 +4957,7 @@
                 <a:ea typeface="微软雅黑"/>
                 <a:cs typeface="Arial"/>
               </a:rPr>
-              <a:t>主体分析已完成，后续安排集中在验证与撰写</a:t>
+              <a:t>抗菌肽与 AD 的关联可以拆成七环，每环的证据强度不同</a:t>
             </a:r>
           </a:p>
         </p:txBody>
@@ -5006,16 +5006,40 @@
           </a:p>
         </p:txBody>
       </p:sp>
-      <p:sp>
-        <p:nvSpPr>
-          <p:cNvPr id="4" name="TextBox 3"/>
+      <p:pic>
+        <p:nvPicPr>
+          <p:cNvPr id="4" name="Picture 3" descr="figM1_关联逻辑链.png"/>
+          <p:cNvPicPr>
+            <a:picLocks noChangeAspect="1"/>
+          </p:cNvPicPr>
+          <p:nvPr/>
+        </p:nvPicPr>
+        <p:blipFill>
+          <a:blip r:embed="rId2"/>
+          <a:stretch>
+            <a:fillRect/>
+          </a:stretch>
+        </p:blipFill>
+        <p:spPr>
+          <a:xfrm>
+            <a:off x="1697813" y="1188720"/>
+            <a:ext cx="8793325" cy="3767328"/>
+          </a:xfrm>
+          <a:prstGeom prst="rect">
+            <a:avLst/>
+          </a:prstGeom>
+        </p:spPr>
+      </p:pic>
+      <p:sp>
+        <p:nvSpPr>
+          <p:cNvPr id="5" name="TextBox 4"/>
           <p:cNvSpPr txBox="1"/>
           <p:nvPr/>
         </p:nvSpPr>
         <p:spPr>
           <a:xfrm>
-            <a:off x="640080" y="1481328"/>
-            <a:ext cx="10424160" cy="3291840"/>
+            <a:off x="640080" y="5074920"/>
+            <a:ext cx="10908792" cy="868680"/>
           </a:xfrm>
           <a:prstGeom prst="rect">
             <a:avLst/>
@@ -5030,7 +5054,7 @@
           <a:p>
             <a:pPr algn="l">
               <a:lnSpc>
-                <a:spcPct val="134000"/>
+                <a:spcPct val="130000"/>
               </a:lnSpc>
               <a:spcBef>
                 <a:spcPts val="0"/>
@@ -5040,7 +5064,7 @@
               </a:spcAft>
             </a:pPr>
             <a:r>
-              <a:rPr sz="1800" b="0">
+              <a:rPr sz="1700" b="0">
                 <a:solidFill>
                   <a:srgbClr val="333333"/>
                 </a:solidFill>
@@ -5048,153 +5072,14 @@
                 <a:ea typeface="微软雅黑"/>
                 <a:cs typeface="Arial"/>
               </a:rPr>
-              <a:t>已完成：数据资源与参考集、短肽库、三模型共识预测、分阶段差异分析、宏蛋白组二次去重与特有抗菌肽筛选。</a:t>
-            </a:r>
-          </a:p>
-          <a:p>
-            <a:pPr algn="l">
-              <a:lnSpc>
-                <a:spcPct val="134000"/>
-              </a:lnSpc>
-              <a:spcBef>
-                <a:spcPts val="1400"/>
-              </a:spcBef>
-              <a:spcAft>
-                <a:spcPts val="0"/>
-              </a:spcAft>
-            </a:pPr>
-            <a:r>
-              <a:rPr sz="1800" b="0">
-                <a:solidFill>
-                  <a:srgbClr val="333333"/>
-                </a:solidFill>
-                <a:latin typeface="Arial"/>
-                <a:ea typeface="微软雅黑"/>
-                <a:cs typeface="Arial"/>
-              </a:rPr>
-              <a:t>进行中：特有抗菌肽的机制关联分析、候选抗菌肽的抑菌实验验证，以及学位论文与以第一作者投稿的 SCI 论文撰写。</a:t>
-            </a:r>
-          </a:p>
-          <a:p>
-            <a:pPr algn="l">
-              <a:lnSpc>
-                <a:spcPct val="134000"/>
-              </a:lnSpc>
-              <a:spcBef>
-                <a:spcPts val="1400"/>
-              </a:spcBef>
-              <a:spcAft>
-                <a:spcPts val="0"/>
-              </a:spcAft>
-            </a:pPr>
-            <a:r>
-              <a:rPr sz="1800" b="0">
-                <a:solidFill>
-                  <a:srgbClr val="333333"/>
-                </a:solidFill>
-                <a:latin typeface="Arial"/>
-                <a:ea typeface="微软雅黑"/>
-                <a:cs typeface="Arial"/>
-              </a:rPr>
-              <a:t>时间安排：按开题计划推进，后续不依赖新的数据生产，整体风险可控。</a:t>
-            </a:r>
-          </a:p>
-        </p:txBody>
-      </p:sp>
-      <p:sp>
-        <p:nvSpPr>
-          <p:cNvPr id="5" name="Rectangle 4"/>
-          <p:cNvSpPr/>
-          <p:nvPr/>
-        </p:nvSpPr>
-        <p:spPr>
-          <a:xfrm>
-            <a:off x="640080" y="4846320"/>
-            <a:ext cx="1920240" cy="30480"/>
-          </a:xfrm>
-          <a:prstGeom prst="rect">
-            <a:avLst/>
-          </a:prstGeom>
-          <a:solidFill>
-            <a:srgbClr val="B03A2E"/>
-          </a:solidFill>
-          <a:ln>
-            <a:noFill/>
-          </a:ln>
-          <a:effectLst/>
-        </p:spPr>
-        <p:style>
-          <a:lnRef idx="1">
-            <a:schemeClr val="accent1"/>
-          </a:lnRef>
-          <a:fillRef idx="3">
-            <a:schemeClr val="accent1"/>
-          </a:fillRef>
-          <a:effectRef idx="2">
-            <a:schemeClr val="accent1"/>
-          </a:effectRef>
-          <a:fontRef idx="minor">
-            <a:schemeClr val="lt1"/>
-          </a:fontRef>
-        </p:style>
-        <p:txBody>
-          <a:bodyPr rtlCol="0" anchor="ctr"/>
-          <a:lstStyle/>
-          <a:p>
-            <a:pPr algn="ctr"/>
+              <a:t>① AD 与感染相关、② 感染与炎症驱动抗菌肽与 Aβ 生成、③ Aβ 本身即抗菌肽；④ 抗菌活性可计算预测、⑤ AD 组特异抗菌肽随阶段变化、⑥ 双刃剑效应；⑦ 为什么 AD 更多与分子机制落点，是本课题要回答的部分。</a:t>
+            </a:r>
           </a:p>
         </p:txBody>
       </p:sp>
       <p:sp>
         <p:nvSpPr>
           <p:cNvPr id="6" name="TextBox 5"/>
-          <p:cNvSpPr txBox="1"/>
-          <p:nvPr/>
-        </p:nvSpPr>
-        <p:spPr>
-          <a:xfrm>
-            <a:off x="640080" y="5084064"/>
-            <a:ext cx="10424160" cy="731520"/>
-          </a:xfrm>
-          <a:prstGeom prst="rect">
-            <a:avLst/>
-          </a:prstGeom>
-          <a:noFill/>
-        </p:spPr>
-        <p:txBody>
-          <a:bodyPr wrap="square" anchor="t" lIns="27432" rIns="27432" tIns="0" bIns="0">
-            <a:spAutoFit/>
-          </a:bodyPr>
-          <a:lstStyle/>
-          <a:p>
-            <a:pPr algn="l">
-              <a:lnSpc>
-                <a:spcPct val="110000"/>
-              </a:lnSpc>
-              <a:spcBef>
-                <a:spcPts val="0"/>
-              </a:spcBef>
-              <a:spcAft>
-                <a:spcPts val="0"/>
-              </a:spcAft>
-            </a:pPr>
-            <a:r>
-              <a:rPr sz="2000" b="1">
-                <a:solidFill>
-                  <a:srgbClr val="111111"/>
-                </a:solidFill>
-                <a:latin typeface="Arial"/>
-                <a:ea typeface="微软雅黑"/>
-                <a:cs typeface="Arial"/>
-              </a:rPr>
-              <a:t>谢谢各位老师，请批评指正。</a:t>
-            </a:r>
-          </a:p>
-        </p:txBody>
-      </p:sp>
-      <p:sp>
-        <p:nvSpPr>
-          <p:cNvPr id="7" name="TextBox 6"/>
           <p:cNvSpPr txBox="1"/>
           <p:nvPr/>
         </p:nvSpPr>
@@ -5241,7 +5126,7 @@
       </p:sp>
       <p:sp>
         <p:nvSpPr>
-          <p:cNvPr id="8" name="TextBox 7"/>
+          <p:cNvPr id="7" name="TextBox 6"/>
           <p:cNvSpPr txBox="1"/>
           <p:nvPr/>
         </p:nvSpPr>
@@ -5346,327 +5231,6 @@
                 <a:ea typeface="微软雅黑"/>
                 <a:cs typeface="Arial"/>
               </a:rPr>
-              <a:t>抗菌肽与 AD 的关联可以拆成七环，每环的证据强度不同</a:t>
-            </a:r>
-          </a:p>
-        </p:txBody>
-      </p:sp>
-      <p:sp>
-        <p:nvSpPr>
-          <p:cNvPr id="3" name="Rectangle 2"/>
-          <p:cNvSpPr/>
-          <p:nvPr/>
-        </p:nvSpPr>
-        <p:spPr>
-          <a:xfrm>
-            <a:off x="640080" y="969264"/>
-            <a:ext cx="10908792" cy="12700"/>
-          </a:xfrm>
-          <a:prstGeom prst="rect">
-            <a:avLst/>
-          </a:prstGeom>
-          <a:solidFill>
-            <a:srgbClr val="DDDDDA"/>
-          </a:solidFill>
-          <a:ln>
-            <a:noFill/>
-          </a:ln>
-          <a:effectLst/>
-        </p:spPr>
-        <p:style>
-          <a:lnRef idx="1">
-            <a:schemeClr val="accent1"/>
-          </a:lnRef>
-          <a:fillRef idx="3">
-            <a:schemeClr val="accent1"/>
-          </a:fillRef>
-          <a:effectRef idx="2">
-            <a:schemeClr val="accent1"/>
-          </a:effectRef>
-          <a:fontRef idx="minor">
-            <a:schemeClr val="lt1"/>
-          </a:fontRef>
-        </p:style>
-        <p:txBody>
-          <a:bodyPr rtlCol="0" anchor="ctr"/>
-          <a:lstStyle/>
-          <a:p>
-            <a:pPr algn="ctr"/>
-          </a:p>
-        </p:txBody>
-      </p:sp>
-      <p:pic>
-        <p:nvPicPr>
-          <p:cNvPr id="4" name="Picture 3" descr="figM1_关联逻辑链.png"/>
-          <p:cNvPicPr>
-            <a:picLocks noChangeAspect="1"/>
-          </p:cNvPicPr>
-          <p:nvPr/>
-        </p:nvPicPr>
-        <p:blipFill>
-          <a:blip r:embed="rId2"/>
-          <a:stretch>
-            <a:fillRect/>
-          </a:stretch>
-        </p:blipFill>
-        <p:spPr>
-          <a:xfrm>
-            <a:off x="1697813" y="1188720"/>
-            <a:ext cx="8793325" cy="3767328"/>
-          </a:xfrm>
-          <a:prstGeom prst="rect">
-            <a:avLst/>
-          </a:prstGeom>
-        </p:spPr>
-      </p:pic>
-      <p:sp>
-        <p:nvSpPr>
-          <p:cNvPr id="5" name="TextBox 4"/>
-          <p:cNvSpPr txBox="1"/>
-          <p:nvPr/>
-        </p:nvSpPr>
-        <p:spPr>
-          <a:xfrm>
-            <a:off x="640080" y="5074920"/>
-            <a:ext cx="10908792" cy="868680"/>
-          </a:xfrm>
-          <a:prstGeom prst="rect">
-            <a:avLst/>
-          </a:prstGeom>
-          <a:noFill/>
-        </p:spPr>
-        <p:txBody>
-          <a:bodyPr wrap="square" anchor="t" lIns="27432" rIns="27432" tIns="0" bIns="0">
-            <a:spAutoFit/>
-          </a:bodyPr>
-          <a:lstStyle/>
-          <a:p>
-            <a:pPr algn="l">
-              <a:lnSpc>
-                <a:spcPct val="130000"/>
-              </a:lnSpc>
-              <a:spcBef>
-                <a:spcPts val="0"/>
-              </a:spcBef>
-              <a:spcAft>
-                <a:spcPts val="0"/>
-              </a:spcAft>
-            </a:pPr>
-            <a:r>
-              <a:rPr sz="1700" b="0">
-                <a:solidFill>
-                  <a:srgbClr val="333333"/>
-                </a:solidFill>
-                <a:latin typeface="Arial"/>
-                <a:ea typeface="微软雅黑"/>
-                <a:cs typeface="Arial"/>
-              </a:rPr>
-              <a:t>① AD 与感染相关、② 感染与炎症驱动抗菌肽与 Aβ 生成、③ Aβ 本身即抗菌肽；④ 抗菌活性可计算预测、⑤ AD 组特异抗菌肽随阶段变化、⑥ 双刃剑效应；⑦ 为什么 AD 更多与分子机制落点，是本课题要回答的部分。</a:t>
-            </a:r>
-          </a:p>
-        </p:txBody>
-      </p:sp>
-      <p:sp>
-        <p:nvSpPr>
-          <p:cNvPr id="6" name="TextBox 5"/>
-          <p:cNvSpPr txBox="1"/>
-          <p:nvPr/>
-        </p:nvSpPr>
-        <p:spPr>
-          <a:xfrm>
-            <a:off x="640080" y="6053328"/>
-            <a:ext cx="10908792" cy="329184"/>
-          </a:xfrm>
-          <a:prstGeom prst="rect">
-            <a:avLst/>
-          </a:prstGeom>
-          <a:noFill/>
-        </p:spPr>
-        <p:txBody>
-          <a:bodyPr wrap="square" anchor="t" lIns="27432" rIns="27432" tIns="0" bIns="0">
-            <a:spAutoFit/>
-          </a:bodyPr>
-          <a:lstStyle/>
-          <a:p>
-            <a:pPr algn="l">
-              <a:lnSpc>
-                <a:spcPct val="100000"/>
-              </a:lnSpc>
-              <a:spcBef>
-                <a:spcPts val="0"/>
-              </a:spcBef>
-              <a:spcAft>
-                <a:spcPts val="0"/>
-              </a:spcAft>
-            </a:pPr>
-            <a:r>
-              <a:rPr sz="1500" b="0">
-                <a:solidFill>
-                  <a:srgbClr val="777777"/>
-                </a:solidFill>
-                <a:latin typeface="Arial"/>
-                <a:ea typeface="微软雅黑"/>
-                <a:cs typeface="Arial"/>
-              </a:rPr>
-              <a:t>图：本项目自制（results/figures）</a:t>
-            </a:r>
-          </a:p>
-        </p:txBody>
-      </p:sp>
-      <p:sp>
-        <p:nvSpPr>
-          <p:cNvPr id="7" name="TextBox 6"/>
-          <p:cNvSpPr txBox="1"/>
-          <p:nvPr/>
-        </p:nvSpPr>
-        <p:spPr>
-          <a:xfrm>
-            <a:off x="640080" y="6419088"/>
-            <a:ext cx="8778240" cy="310896"/>
-          </a:xfrm>
-          <a:prstGeom prst="rect">
-            <a:avLst/>
-          </a:prstGeom>
-          <a:noFill/>
-        </p:spPr>
-        <p:txBody>
-          <a:bodyPr wrap="square" anchor="t" lIns="27432" rIns="27432" tIns="0" bIns="0">
-            <a:spAutoFit/>
-          </a:bodyPr>
-          <a:lstStyle/>
-          <a:p>
-            <a:pPr algn="l">
-              <a:lnSpc>
-                <a:spcPct val="100000"/>
-              </a:lnSpc>
-              <a:spcBef>
-                <a:spcPts val="0"/>
-              </a:spcBef>
-              <a:spcAft>
-                <a:spcPts val="0"/>
-              </a:spcAft>
-            </a:pPr>
-            <a:r>
-              <a:rPr sz="1500" b="0">
-                <a:solidFill>
-                  <a:srgbClr val="777777"/>
-                </a:solidFill>
-                <a:latin typeface="Arial"/>
-                <a:ea typeface="微软雅黑"/>
-                <a:cs typeface="Arial"/>
-              </a:rPr>
-              <a:t>研究生论文中期检查 · 文绍华</a:t>
-            </a:r>
-          </a:p>
-        </p:txBody>
-      </p:sp>
-      <p:sp>
-        <p:nvSpPr>
-          <p:cNvPr id="8" name="TextBox 7"/>
-          <p:cNvSpPr txBox="1"/>
-          <p:nvPr/>
-        </p:nvSpPr>
-        <p:spPr>
-          <a:xfrm>
-            <a:off x="10058400" y="6419088"/>
-            <a:ext cx="1490472" cy="310896"/>
-          </a:xfrm>
-          <a:prstGeom prst="rect">
-            <a:avLst/>
-          </a:prstGeom>
-          <a:noFill/>
-        </p:spPr>
-        <p:txBody>
-          <a:bodyPr wrap="square" anchor="t" lIns="27432" rIns="27432" tIns="0" bIns="0">
-            <a:spAutoFit/>
-          </a:bodyPr>
-          <a:lstStyle/>
-          <a:p>
-            <a:pPr algn="r">
-              <a:lnSpc>
-                <a:spcPct val="100000"/>
-              </a:lnSpc>
-              <a:spcBef>
-                <a:spcPts val="0"/>
-              </a:spcBef>
-              <a:spcAft>
-                <a:spcPts val="0"/>
-              </a:spcAft>
-            </a:pPr>
-            <a:r>
-              <a:rPr sz="1500" b="0">
-                <a:solidFill>
-                  <a:srgbClr val="777777"/>
-                </a:solidFill>
-                <a:latin typeface="Arial"/>
-                <a:ea typeface="微软雅黑"/>
-                <a:cs typeface="Arial"/>
-              </a:rPr>
-              <a:t>11 / 14</a:t>
-            </a:r>
-          </a:p>
-        </p:txBody>
-      </p:sp>
-    </p:spTree>
-  </p:cSld>
-  <p:clrMapOvr>
-    <a:masterClrMapping/>
-  </p:clrMapOvr>
-</p:sld>
-</file>
-
-<file path=ppt/slides/slide12.xml><?xml version="1.0" encoding="utf-8"?>
-<p:sld xmlns:a="http://schemas.openxmlformats.org/drawingml/2006/main" xmlns:p="http://schemas.openxmlformats.org/presentationml/2006/main" xmlns:r="http://schemas.openxmlformats.org/officeDocument/2006/relationships">
-  <p:cSld>
-    <p:spTree>
-      <p:nvGrpSpPr>
-        <p:cNvPr id="1" name=""/>
-        <p:cNvGrpSpPr/>
-        <p:nvPr/>
-      </p:nvGrpSpPr>
-      <p:grpSpPr/>
-      <p:sp>
-        <p:nvSpPr>
-          <p:cNvPr id="2" name="TextBox 1"/>
-          <p:cNvSpPr txBox="1"/>
-          <p:nvPr/>
-        </p:nvSpPr>
-        <p:spPr>
-          <a:xfrm>
-            <a:off x="640080" y="365760"/>
-            <a:ext cx="10908792" cy="548640"/>
-          </a:xfrm>
-          <a:prstGeom prst="rect">
-            <a:avLst/>
-          </a:prstGeom>
-          <a:noFill/>
-        </p:spPr>
-        <p:txBody>
-          <a:bodyPr wrap="square" anchor="t" lIns="27432" rIns="27432" tIns="0" bIns="0">
-            <a:spAutoFit/>
-          </a:bodyPr>
-          <a:lstStyle/>
-          <a:p>
-            <a:pPr algn="l">
-              <a:lnSpc>
-                <a:spcPct val="100000"/>
-              </a:lnSpc>
-              <a:spcBef>
-                <a:spcPts val="0"/>
-              </a:spcBef>
-              <a:spcAft>
-                <a:spcPts val="0"/>
-              </a:spcAft>
-            </a:pPr>
-            <a:r>
-              <a:rPr sz="2500" b="1">
-                <a:solidFill>
-                  <a:srgbClr val="111111"/>
-                </a:solidFill>
-                <a:latin typeface="Arial"/>
-                <a:ea typeface="微软雅黑"/>
-                <a:cs typeface="Arial"/>
-              </a:rPr>
               <a:t>分子机制（一）：AChE–Aβ 复合物的动力学要点</a:t>
             </a:r>
           </a:p>
@@ -5795,53 +5359,6 @@
         </p:nvSpPr>
         <p:spPr>
           <a:xfrm>
-            <a:off x="640080" y="6053328"/>
-            <a:ext cx="10908792" cy="329184"/>
-          </a:xfrm>
-          <a:prstGeom prst="rect">
-            <a:avLst/>
-          </a:prstGeom>
-          <a:noFill/>
-        </p:spPr>
-        <p:txBody>
-          <a:bodyPr wrap="square" anchor="t" lIns="27432" rIns="27432" tIns="0" bIns="0">
-            <a:spAutoFit/>
-          </a:bodyPr>
-          <a:lstStyle/>
-          <a:p>
-            <a:pPr algn="l">
-              <a:lnSpc>
-                <a:spcPct val="100000"/>
-              </a:lnSpc>
-              <a:spcBef>
-                <a:spcPts val="0"/>
-              </a:spcBef>
-              <a:spcAft>
-                <a:spcPts val="0"/>
-              </a:spcAft>
-            </a:pPr>
-            <a:r>
-              <a:rPr sz="1500" b="0">
-                <a:solidFill>
-                  <a:srgbClr val="777777"/>
-                </a:solidFill>
-                <a:latin typeface="Arial"/>
-                <a:ea typeface="微软雅黑"/>
-                <a:cs typeface="Arial"/>
-              </a:rPr>
-              <a:t>图：本项目自制（results/figures/figM2）</a:t>
-            </a:r>
-          </a:p>
-        </p:txBody>
-      </p:sp>
-      <p:sp>
-        <p:nvSpPr>
-          <p:cNvPr id="7" name="TextBox 6"/>
-          <p:cNvSpPr txBox="1"/>
-          <p:nvPr/>
-        </p:nvSpPr>
-        <p:spPr>
-          <a:xfrm>
             <a:off x="640080" y="6419088"/>
             <a:ext cx="8778240" cy="310896"/>
           </a:xfrm>
@@ -5883,7 +5400,7 @@
       </p:sp>
       <p:sp>
         <p:nvSpPr>
-          <p:cNvPr id="8" name="TextBox 7"/>
+          <p:cNvPr id="7" name="TextBox 6"/>
           <p:cNvSpPr txBox="1"/>
           <p:nvPr/>
         </p:nvSpPr>
@@ -5923,7 +5440,7 @@
                 <a:ea typeface="微软雅黑"/>
                 <a:cs typeface="Arial"/>
               </a:rPr>
-              <a:t>12 / 14</a:t>
+              <a:t>11 / 14</a:t>
             </a:r>
           </a:p>
         </p:txBody>
@@ -5936,7 +5453,7 @@
 </p:sld>
 </file>
 
-<file path=ppt/slides/slide13.xml><?xml version="1.0" encoding="utf-8"?>
+<file path=ppt/slides/slide12.xml><?xml version="1.0" encoding="utf-8"?>
 <p:sld xmlns:a="http://schemas.openxmlformats.org/drawingml/2006/main" xmlns:p="http://schemas.openxmlformats.org/presentationml/2006/main" xmlns:r="http://schemas.openxmlformats.org/officeDocument/2006/relationships">
   <p:cSld>
     <p:spTree>
@@ -7432,7 +6949,7 @@
                 <a:ea typeface="微软雅黑"/>
                 <a:cs typeface="Arial"/>
               </a:rPr>
-              <a:t>13 / 14</a:t>
+              <a:t>12 / 14</a:t>
             </a:r>
           </a:p>
         </p:txBody>
@@ -7445,7 +6962,7 @@
 </p:sld>
 </file>
 
-<file path=ppt/slides/slide14.xml><?xml version="1.0" encoding="utf-8"?>
+<file path=ppt/slides/slide13.xml><?xml version="1.0" encoding="utf-8"?>
 <p:sld xmlns:a="http://schemas.openxmlformats.org/drawingml/2006/main" xmlns:p="http://schemas.openxmlformats.org/presentationml/2006/main" xmlns:r="http://schemas.openxmlformats.org/officeDocument/2006/relationships">
   <p:cSld>
     <p:spTree>
@@ -8839,6 +8356,395 @@
                 <a:ea typeface="微软雅黑"/>
                 <a:cs typeface="Arial"/>
               </a:rPr>
+              <a:t>13 / 14</a:t>
+            </a:r>
+          </a:p>
+        </p:txBody>
+      </p:sp>
+    </p:spTree>
+  </p:cSld>
+  <p:clrMapOvr>
+    <a:masterClrMapping/>
+  </p:clrMapOvr>
+</p:sld>
+</file>
+
+<file path=ppt/slides/slide14.xml><?xml version="1.0" encoding="utf-8"?>
+<p:sld xmlns:a="http://schemas.openxmlformats.org/drawingml/2006/main" xmlns:p="http://schemas.openxmlformats.org/presentationml/2006/main" xmlns:r="http://schemas.openxmlformats.org/officeDocument/2006/relationships">
+  <p:cSld>
+    <p:spTree>
+      <p:nvGrpSpPr>
+        <p:cNvPr id="1" name=""/>
+        <p:cNvGrpSpPr/>
+        <p:nvPr/>
+      </p:nvGrpSpPr>
+      <p:grpSpPr/>
+      <p:sp>
+        <p:nvSpPr>
+          <p:cNvPr id="2" name="TextBox 1"/>
+          <p:cNvSpPr txBox="1"/>
+          <p:nvPr/>
+        </p:nvSpPr>
+        <p:spPr>
+          <a:xfrm>
+            <a:off x="640080" y="365760"/>
+            <a:ext cx="10908792" cy="548640"/>
+          </a:xfrm>
+          <a:prstGeom prst="rect">
+            <a:avLst/>
+          </a:prstGeom>
+          <a:noFill/>
+        </p:spPr>
+        <p:txBody>
+          <a:bodyPr wrap="square" anchor="t" lIns="27432" rIns="27432" tIns="0" bIns="0">
+            <a:spAutoFit/>
+          </a:bodyPr>
+          <a:lstStyle/>
+          <a:p>
+            <a:pPr algn="l">
+              <a:lnSpc>
+                <a:spcPct val="100000"/>
+              </a:lnSpc>
+              <a:spcBef>
+                <a:spcPts val="0"/>
+              </a:spcBef>
+              <a:spcAft>
+                <a:spcPts val="0"/>
+              </a:spcAft>
+            </a:pPr>
+            <a:r>
+              <a:rPr sz="2500" b="1">
+                <a:solidFill>
+                  <a:srgbClr val="111111"/>
+                </a:solidFill>
+                <a:latin typeface="Arial"/>
+                <a:ea typeface="微软雅黑"/>
+                <a:cs typeface="Arial"/>
+              </a:rPr>
+              <a:t>主体分析已完成，后续安排集中在验证与撰写</a:t>
+            </a:r>
+          </a:p>
+        </p:txBody>
+      </p:sp>
+      <p:sp>
+        <p:nvSpPr>
+          <p:cNvPr id="3" name="Rectangle 2"/>
+          <p:cNvSpPr/>
+          <p:nvPr/>
+        </p:nvSpPr>
+        <p:spPr>
+          <a:xfrm>
+            <a:off x="640080" y="969264"/>
+            <a:ext cx="10908792" cy="12700"/>
+          </a:xfrm>
+          <a:prstGeom prst="rect">
+            <a:avLst/>
+          </a:prstGeom>
+          <a:solidFill>
+            <a:srgbClr val="DDDDDA"/>
+          </a:solidFill>
+          <a:ln>
+            <a:noFill/>
+          </a:ln>
+          <a:effectLst/>
+        </p:spPr>
+        <p:style>
+          <a:lnRef idx="1">
+            <a:schemeClr val="accent1"/>
+          </a:lnRef>
+          <a:fillRef idx="3">
+            <a:schemeClr val="accent1"/>
+          </a:fillRef>
+          <a:effectRef idx="2">
+            <a:schemeClr val="accent1"/>
+          </a:effectRef>
+          <a:fontRef idx="minor">
+            <a:schemeClr val="lt1"/>
+          </a:fontRef>
+        </p:style>
+        <p:txBody>
+          <a:bodyPr rtlCol="0" anchor="ctr"/>
+          <a:lstStyle/>
+          <a:p>
+            <a:pPr algn="ctr"/>
+          </a:p>
+        </p:txBody>
+      </p:sp>
+      <p:sp>
+        <p:nvSpPr>
+          <p:cNvPr id="4" name="TextBox 3"/>
+          <p:cNvSpPr txBox="1"/>
+          <p:nvPr/>
+        </p:nvSpPr>
+        <p:spPr>
+          <a:xfrm>
+            <a:off x="640080" y="1481328"/>
+            <a:ext cx="10424160" cy="3291840"/>
+          </a:xfrm>
+          <a:prstGeom prst="rect">
+            <a:avLst/>
+          </a:prstGeom>
+          <a:noFill/>
+        </p:spPr>
+        <p:txBody>
+          <a:bodyPr wrap="square" anchor="t" lIns="27432" rIns="27432" tIns="0" bIns="0">
+            <a:spAutoFit/>
+          </a:bodyPr>
+          <a:lstStyle/>
+          <a:p>
+            <a:pPr algn="l">
+              <a:lnSpc>
+                <a:spcPct val="134000"/>
+              </a:lnSpc>
+              <a:spcBef>
+                <a:spcPts val="0"/>
+              </a:spcBef>
+              <a:spcAft>
+                <a:spcPts val="0"/>
+              </a:spcAft>
+            </a:pPr>
+            <a:r>
+              <a:rPr sz="1800" b="0">
+                <a:solidFill>
+                  <a:srgbClr val="333333"/>
+                </a:solidFill>
+                <a:latin typeface="Arial"/>
+                <a:ea typeface="微软雅黑"/>
+                <a:cs typeface="Arial"/>
+              </a:rPr>
+              <a:t>已完成：数据资源与参考集、短肽库、三模型共识预测、分阶段差异分析、宏蛋白组二次去重与特有抗菌肽筛选。</a:t>
+            </a:r>
+          </a:p>
+          <a:p>
+            <a:pPr algn="l">
+              <a:lnSpc>
+                <a:spcPct val="134000"/>
+              </a:lnSpc>
+              <a:spcBef>
+                <a:spcPts val="1400"/>
+              </a:spcBef>
+              <a:spcAft>
+                <a:spcPts val="0"/>
+              </a:spcAft>
+            </a:pPr>
+            <a:r>
+              <a:rPr sz="1800" b="0">
+                <a:solidFill>
+                  <a:srgbClr val="333333"/>
+                </a:solidFill>
+                <a:latin typeface="Arial"/>
+                <a:ea typeface="微软雅黑"/>
+                <a:cs typeface="Arial"/>
+              </a:rPr>
+              <a:t>进行中：特有抗菌肽的机制关联分析、候选抗菌肽的抑菌实验验证，以及学位论文与以第一作者投稿的 SCI 论文撰写。</a:t>
+            </a:r>
+          </a:p>
+          <a:p>
+            <a:pPr algn="l">
+              <a:lnSpc>
+                <a:spcPct val="134000"/>
+              </a:lnSpc>
+              <a:spcBef>
+                <a:spcPts val="1400"/>
+              </a:spcBef>
+              <a:spcAft>
+                <a:spcPts val="0"/>
+              </a:spcAft>
+            </a:pPr>
+            <a:r>
+              <a:rPr sz="1800" b="0">
+                <a:solidFill>
+                  <a:srgbClr val="333333"/>
+                </a:solidFill>
+                <a:latin typeface="Arial"/>
+                <a:ea typeface="微软雅黑"/>
+                <a:cs typeface="Arial"/>
+              </a:rPr>
+              <a:t>时间安排：按开题计划推进，后续不依赖新的数据生产，整体风险可控。</a:t>
+            </a:r>
+          </a:p>
+        </p:txBody>
+      </p:sp>
+      <p:sp>
+        <p:nvSpPr>
+          <p:cNvPr id="5" name="Rectangle 4"/>
+          <p:cNvSpPr/>
+          <p:nvPr/>
+        </p:nvSpPr>
+        <p:spPr>
+          <a:xfrm>
+            <a:off x="640080" y="4846320"/>
+            <a:ext cx="1920240" cy="30480"/>
+          </a:xfrm>
+          <a:prstGeom prst="rect">
+            <a:avLst/>
+          </a:prstGeom>
+          <a:solidFill>
+            <a:srgbClr val="B03A2E"/>
+          </a:solidFill>
+          <a:ln>
+            <a:noFill/>
+          </a:ln>
+          <a:effectLst/>
+        </p:spPr>
+        <p:style>
+          <a:lnRef idx="1">
+            <a:schemeClr val="accent1"/>
+          </a:lnRef>
+          <a:fillRef idx="3">
+            <a:schemeClr val="accent1"/>
+          </a:fillRef>
+          <a:effectRef idx="2">
+            <a:schemeClr val="accent1"/>
+          </a:effectRef>
+          <a:fontRef idx="minor">
+            <a:schemeClr val="lt1"/>
+          </a:fontRef>
+        </p:style>
+        <p:txBody>
+          <a:bodyPr rtlCol="0" anchor="ctr"/>
+          <a:lstStyle/>
+          <a:p>
+            <a:pPr algn="ctr"/>
+          </a:p>
+        </p:txBody>
+      </p:sp>
+      <p:sp>
+        <p:nvSpPr>
+          <p:cNvPr id="6" name="TextBox 5"/>
+          <p:cNvSpPr txBox="1"/>
+          <p:nvPr/>
+        </p:nvSpPr>
+        <p:spPr>
+          <a:xfrm>
+            <a:off x="640080" y="5084064"/>
+            <a:ext cx="10424160" cy="731520"/>
+          </a:xfrm>
+          <a:prstGeom prst="rect">
+            <a:avLst/>
+          </a:prstGeom>
+          <a:noFill/>
+        </p:spPr>
+        <p:txBody>
+          <a:bodyPr wrap="square" anchor="t" lIns="27432" rIns="27432" tIns="0" bIns="0">
+            <a:spAutoFit/>
+          </a:bodyPr>
+          <a:lstStyle/>
+          <a:p>
+            <a:pPr algn="l">
+              <a:lnSpc>
+                <a:spcPct val="110000"/>
+              </a:lnSpc>
+              <a:spcBef>
+                <a:spcPts val="0"/>
+              </a:spcBef>
+              <a:spcAft>
+                <a:spcPts val="0"/>
+              </a:spcAft>
+            </a:pPr>
+            <a:r>
+              <a:rPr sz="2000" b="1">
+                <a:solidFill>
+                  <a:srgbClr val="111111"/>
+                </a:solidFill>
+                <a:latin typeface="Arial"/>
+                <a:ea typeface="微软雅黑"/>
+                <a:cs typeface="Arial"/>
+              </a:rPr>
+              <a:t>谢谢各位老师，请批评指正。</a:t>
+            </a:r>
+          </a:p>
+        </p:txBody>
+      </p:sp>
+      <p:sp>
+        <p:nvSpPr>
+          <p:cNvPr id="7" name="TextBox 6"/>
+          <p:cNvSpPr txBox="1"/>
+          <p:nvPr/>
+        </p:nvSpPr>
+        <p:spPr>
+          <a:xfrm>
+            <a:off x="640080" y="6419088"/>
+            <a:ext cx="8778240" cy="310896"/>
+          </a:xfrm>
+          <a:prstGeom prst="rect">
+            <a:avLst/>
+          </a:prstGeom>
+          <a:noFill/>
+        </p:spPr>
+        <p:txBody>
+          <a:bodyPr wrap="square" anchor="t" lIns="27432" rIns="27432" tIns="0" bIns="0">
+            <a:spAutoFit/>
+          </a:bodyPr>
+          <a:lstStyle/>
+          <a:p>
+            <a:pPr algn="l">
+              <a:lnSpc>
+                <a:spcPct val="100000"/>
+              </a:lnSpc>
+              <a:spcBef>
+                <a:spcPts val="0"/>
+              </a:spcBef>
+              <a:spcAft>
+                <a:spcPts val="0"/>
+              </a:spcAft>
+            </a:pPr>
+            <a:r>
+              <a:rPr sz="1500" b="0">
+                <a:solidFill>
+                  <a:srgbClr val="777777"/>
+                </a:solidFill>
+                <a:latin typeface="Arial"/>
+                <a:ea typeface="微软雅黑"/>
+                <a:cs typeface="Arial"/>
+              </a:rPr>
+              <a:t>研究生论文中期检查 · 文绍华</a:t>
+            </a:r>
+          </a:p>
+        </p:txBody>
+      </p:sp>
+      <p:sp>
+        <p:nvSpPr>
+          <p:cNvPr id="8" name="TextBox 7"/>
+          <p:cNvSpPr txBox="1"/>
+          <p:nvPr/>
+        </p:nvSpPr>
+        <p:spPr>
+          <a:xfrm>
+            <a:off x="10058400" y="6419088"/>
+            <a:ext cx="1490472" cy="310896"/>
+          </a:xfrm>
+          <a:prstGeom prst="rect">
+            <a:avLst/>
+          </a:prstGeom>
+          <a:noFill/>
+        </p:spPr>
+        <p:txBody>
+          <a:bodyPr wrap="square" anchor="t" lIns="27432" rIns="27432" tIns="0" bIns="0">
+            <a:spAutoFit/>
+          </a:bodyPr>
+          <a:lstStyle/>
+          <a:p>
+            <a:pPr algn="r">
+              <a:lnSpc>
+                <a:spcPct val="100000"/>
+              </a:lnSpc>
+              <a:spcBef>
+                <a:spcPts val="0"/>
+              </a:spcBef>
+              <a:spcAft>
+                <a:spcPts val="0"/>
+              </a:spcAft>
+            </a:pPr>
+            <a:r>
+              <a:rPr sz="1500" b="0">
+                <a:solidFill>
+                  <a:srgbClr val="777777"/>
+                </a:solidFill>
+                <a:latin typeface="Arial"/>
+                <a:ea typeface="微软雅黑"/>
+                <a:cs typeface="Arial"/>
+              </a:rPr>
               <a:t>14 / 14</a:t>
             </a:r>
           </a:p>
@@ -9469,53 +9375,6 @@
         </p:nvSpPr>
         <p:spPr>
           <a:xfrm>
-            <a:off x="640080" y="6053328"/>
-            <a:ext cx="10908792" cy="329184"/>
-          </a:xfrm>
-          <a:prstGeom prst="rect">
-            <a:avLst/>
-          </a:prstGeom>
-          <a:noFill/>
-        </p:spPr>
-        <p:txBody>
-          <a:bodyPr wrap="square" anchor="t" lIns="27432" rIns="27432" tIns="0" bIns="0">
-            <a:spAutoFit/>
-          </a:bodyPr>
-          <a:lstStyle/>
-          <a:p>
-            <a:pPr algn="l">
-              <a:lnSpc>
-                <a:spcPct val="100000"/>
-              </a:lnSpc>
-              <a:spcBef>
-                <a:spcPts val="0"/>
-              </a:spcBef>
-              <a:spcAft>
-                <a:spcPts val="0"/>
-              </a:spcAft>
-            </a:pPr>
-            <a:r>
-              <a:rPr sz="1500" b="0">
-                <a:solidFill>
-                  <a:srgbClr val="777777"/>
-                </a:solidFill>
-                <a:latin typeface="Arial"/>
-                <a:ea typeface="微软雅黑"/>
-                <a:cs typeface="Arial"/>
-              </a:rPr>
-              <a:t>图：本项目自制（results/figures）</a:t>
-            </a:r>
-          </a:p>
-        </p:txBody>
-      </p:sp>
-      <p:sp>
-        <p:nvSpPr>
-          <p:cNvPr id="7" name="TextBox 6"/>
-          <p:cNvSpPr txBox="1"/>
-          <p:nvPr/>
-        </p:nvSpPr>
-        <p:spPr>
-          <a:xfrm>
             <a:off x="640080" y="6419088"/>
             <a:ext cx="8778240" cy="310896"/>
           </a:xfrm>
@@ -9557,7 +9416,7 @@
       </p:sp>
       <p:sp>
         <p:nvSpPr>
-          <p:cNvPr id="8" name="TextBox 7"/>
+          <p:cNvPr id="7" name="TextBox 6"/>
           <p:cNvSpPr txBox="1"/>
           <p:nvPr/>
         </p:nvSpPr>
@@ -9853,8 +9712,8 @@
                 <a:ea typeface="微软雅黑"/>
                 <a:cs typeface="Arial"/>
               </a:rPr>
-              <a:t>双端鸟枪法测序
-质控与去宿主</a:t>
+              <a:t>fastp 质控
+KneadData 去宿主</a:t>
             </a:r>
           </a:p>
         </p:txBody>
@@ -10042,8 +9901,9 @@
                 <a:ea typeface="微软雅黑"/>
                 <a:cs typeface="Arial"/>
               </a:rPr>
-              <a:t>序列组装与分箱
-分箱提纯</a:t>
+              <a:t>MEGAHIT 组装
+MetaBAT2 分箱
+CONCOCT 分箱</a:t>
             </a:r>
           </a:p>
         </p:txBody>
@@ -10231,8 +10091,8 @@
                 <a:ea typeface="微软雅黑"/>
                 <a:cs typeface="Arial"/>
               </a:rPr>
-              <a:t>种水平去冗余
-非冗余参考集</a:t>
+              <a:t>metaWRAP 提纯
+dRep 去冗余</a:t>
             </a:r>
           </a:p>
         </p:txBody>
@@ -10420,7 +10280,7 @@
                 <a:ea typeface="微软雅黑"/>
                 <a:cs typeface="Arial"/>
               </a:rPr>
-              <a:t>小开放阅读框
+              <a:t>EMBOSS getorf
 长度 5—50 aa</a:t>
             </a:r>
           </a:p>
@@ -10609,7 +10469,7 @@
                 <a:ea typeface="微软雅黑"/>
                 <a:cs typeface="Arial"/>
               </a:rPr>
-              <a:t>序列级去冗余
+              <a:t>序列级精确去冗余
 非冗余短肽库</a:t>
             </a:r>
           </a:p>
@@ -10798,8 +10658,8 @@
                 <a:ea typeface="微软雅黑"/>
                 <a:cs typeface="Arial"/>
               </a:rPr>
-              <a:t>多模型独立预测
-一致阳性才纳入</a:t>
+              <a:t>Attention / LSTM
+/ BERT 一致阳性</a:t>
             </a:r>
           </a:p>
         </p:txBody>
@@ -10987,8 +10847,9 @@
                 <a:ea typeface="微软雅黑"/>
                 <a:cs typeface="Arial"/>
               </a:rPr>
-              <a:t>按五个认知阶段
-比较组成与丰度</a:t>
+              <a:t>CoverM 定量
+CLR 变换
+Kruskal-Wallis</a:t>
             </a:r>
           </a:p>
         </p:txBody>
@@ -11176,7 +11037,7 @@
                 <a:ea typeface="微软雅黑"/>
                 <a:cs typeface="Arial"/>
               </a:rPr>
-              <a:t>蛋白组二次去重
+              <a:t>宏蛋白组二次去重
 剔除无表达序列</a:t>
             </a:r>
           </a:p>
@@ -11554,7 +11415,7 @@
                 <a:ea typeface="微软雅黑"/>
                 <a:cs typeface="Arial"/>
               </a:rPr>
-              <a:t>对接与动力学
+              <a:t>分子对接 + 动力学
 给出候选优先序</a:t>
             </a:r>
           </a:p>
@@ -11743,9 +11604,8 @@
                 <a:ea typeface="微软雅黑"/>
                 <a:cs typeface="Arial"/>
               </a:rPr>
-              <a:t>合成代表性肽
-纸片扩散法筛查
-肉汤稀释法 MIC</a:t>
+              <a:t>纸片扩散法筛查
+微量肉汤稀释法 MIC</a:t>
             </a:r>
           </a:p>
         </p:txBody>
@@ -12446,7 +12306,7 @@
                 <a:ea typeface="微软雅黑"/>
                 <a:cs typeface="Arial"/>
               </a:rPr>
-              <a:t>5 个阶段</a:t>
+              <a:t>265 例</a:t>
             </a:r>
           </a:p>
         </p:txBody>
@@ -12493,7 +12353,7 @@
                 <a:ea typeface="微软雅黑"/>
                 <a:cs typeface="Arial"/>
               </a:rPr>
-              <a:t>NC · SCS · SCD · MCI · AD</a:t>
+              <a:t>匹配亚队列 · 各阶段 53 例</a:t>
             </a:r>
           </a:p>
         </p:txBody>
@@ -12540,7 +12400,7 @@
                 <a:ea typeface="微软雅黑"/>
                 <a:cs typeface="Arial"/>
               </a:rPr>
-              <a:t>2 个性别</a:t>
+              <a:t>53 例</a:t>
             </a:r>
           </a:p>
         </p:txBody>
@@ -12587,7 +12447,7 @@
                 <a:ea typeface="微软雅黑"/>
                 <a:cs typeface="Arial"/>
               </a:rPr>
-              <a:t>男女分别匹配</a:t>
+              <a:t>每阶段样本量 · 每组 35 女 / 18 男</a:t>
             </a:r>
           </a:p>
         </p:txBody>
@@ -12728,7 +12588,7 @@
                 <a:ea typeface="微软雅黑"/>
                 <a:cs typeface="Arial"/>
               </a:rPr>
-              <a:t>30 个分层单元</a:t>
+              <a:t>68.2—70.0 岁</a:t>
             </a:r>
           </a:p>
         </p:txBody>
@@ -12775,7 +12635,7 @@
                 <a:ea typeface="微软雅黑"/>
                 <a:cs typeface="Arial"/>
               </a:rPr>
-              <a:t>阶段 × 性别 × 年龄</a:t>
+              <a:t>各阶段平均年龄 · 组间差 ≤1.8 岁</a:t>
             </a:r>
           </a:p>
         </p:txBody>
@@ -12876,8 +12736,8 @@
         </p:nvSpPr>
         <p:spPr>
           <a:xfrm>
-            <a:off x="640080" y="3017520"/>
-            <a:ext cx="1998878" cy="365760"/>
+            <a:off x="640080" y="2999232"/>
+            <a:ext cx="1998878" cy="310896"/>
           </a:xfrm>
           <a:prstGeom prst="rect">
             <a:avLst/>
@@ -12923,8 +12783,8 @@
         </p:nvSpPr>
         <p:spPr>
           <a:xfrm>
-            <a:off x="640080" y="3383280"/>
-            <a:ext cx="1998878" cy="1005840"/>
+            <a:off x="640080" y="3310128"/>
+            <a:ext cx="1998878" cy="1097280"/>
           </a:xfrm>
           <a:prstGeom prst="rect">
             <a:avLst/>
@@ -12939,7 +12799,7 @@
           <a:p>
             <a:pPr algn="l">
               <a:lnSpc>
-                <a:spcPct val="116000"/>
+                <a:spcPct val="114000"/>
               </a:lnSpc>
               <a:spcBef>
                 <a:spcPts val="0"/>
@@ -12963,7 +12823,7 @@
           <a:p>
             <a:pPr algn="l">
               <a:lnSpc>
-                <a:spcPct val="116000"/>
+                <a:spcPct val="114000"/>
               </a:lnSpc>
               <a:spcBef>
                 <a:spcPts val="300"/>
@@ -12975,19 +12835,19 @@
             <a:r>
               <a:rPr sz="1500" b="0">
                 <a:solidFill>
-                  <a:srgbClr val="333333"/>
+                  <a:srgbClr val="2F5D62"/>
                 </a:solidFill>
                 <a:latin typeface="Arial"/>
                 <a:ea typeface="微软雅黑"/>
                 <a:cs typeface="Arial"/>
               </a:rPr>
-              <a:t>菌群多样性最高</a:t>
+              <a:t>53 例 ｜ 35 女 / 18 男</a:t>
             </a:r>
           </a:p>
           <a:p>
             <a:pPr algn="l">
               <a:lnSpc>
-                <a:spcPct val="116000"/>
+                <a:spcPct val="114000"/>
               </a:lnSpc>
               <a:spcBef>
                 <a:spcPts val="300"/>
@@ -13005,7 +12865,7 @@
                 <a:ea typeface="微软雅黑"/>
                 <a:cs typeface="Arial"/>
               </a:rPr>
-              <a:t>作为比较基线</a:t>
+              <a:t>平均 68.4 岁 · 多样性最高</a:t>
             </a:r>
           </a:p>
         </p:txBody>
@@ -13062,8 +12922,8 @@
         </p:nvSpPr>
         <p:spPr>
           <a:xfrm>
-            <a:off x="2821838" y="3017520"/>
-            <a:ext cx="1998878" cy="365760"/>
+            <a:off x="2821838" y="2999232"/>
+            <a:ext cx="1998878" cy="310896"/>
           </a:xfrm>
           <a:prstGeom prst="rect">
             <a:avLst/>
@@ -13109,8 +12969,8 @@
         </p:nvSpPr>
         <p:spPr>
           <a:xfrm>
-            <a:off x="2821838" y="3383280"/>
-            <a:ext cx="1998878" cy="1005840"/>
+            <a:off x="2821838" y="3310128"/>
+            <a:ext cx="1998878" cy="1097280"/>
           </a:xfrm>
           <a:prstGeom prst="rect">
             <a:avLst/>
@@ -13125,7 +12985,7 @@
           <a:p>
             <a:pPr algn="l">
               <a:lnSpc>
-                <a:spcPct val="116000"/>
+                <a:spcPct val="114000"/>
               </a:lnSpc>
               <a:spcBef>
                 <a:spcPts val="0"/>
@@ -13149,7 +13009,7 @@
           <a:p>
             <a:pPr algn="l">
               <a:lnSpc>
-                <a:spcPct val="116000"/>
+                <a:spcPct val="114000"/>
               </a:lnSpc>
               <a:spcBef>
                 <a:spcPts val="300"/>
@@ -13161,19 +13021,19 @@
             <a:r>
               <a:rPr sz="1500" b="0">
                 <a:solidFill>
-                  <a:srgbClr val="333333"/>
+                  <a:srgbClr val="2F5D62"/>
                 </a:solidFill>
                 <a:latin typeface="Arial"/>
                 <a:ea typeface="微软雅黑"/>
                 <a:cs typeface="Arial"/>
               </a:rPr>
-              <a:t>组成已出现偏移</a:t>
+              <a:t>53 例 ｜ 35 女 / 18 男</a:t>
             </a:r>
           </a:p>
           <a:p>
             <a:pPr algn="l">
               <a:lnSpc>
-                <a:spcPct val="116000"/>
+                <a:spcPct val="114000"/>
               </a:lnSpc>
               <a:spcBef>
                 <a:spcPts val="300"/>
@@ -13191,7 +13051,7 @@
                 <a:ea typeface="微软雅黑"/>
                 <a:cs typeface="Arial"/>
               </a:rPr>
-              <a:t>阶段特有菌属出现</a:t>
+              <a:t>平均 68.2 岁 · 组成偏移</a:t>
             </a:r>
           </a:p>
         </p:txBody>
@@ -13248,8 +13108,8 @@
         </p:nvSpPr>
         <p:spPr>
           <a:xfrm>
-            <a:off x="5003596" y="3017520"/>
-            <a:ext cx="1998878" cy="365760"/>
+            <a:off x="5003596" y="2999232"/>
+            <a:ext cx="1998878" cy="310896"/>
           </a:xfrm>
           <a:prstGeom prst="rect">
             <a:avLst/>
@@ -13295,8 +13155,8 @@
         </p:nvSpPr>
         <p:spPr>
           <a:xfrm>
-            <a:off x="5003596" y="3383280"/>
-            <a:ext cx="1998878" cy="1005840"/>
+            <a:off x="5003596" y="3310128"/>
+            <a:ext cx="1998878" cy="1097280"/>
           </a:xfrm>
           <a:prstGeom prst="rect">
             <a:avLst/>
@@ -13311,7 +13171,7 @@
           <a:p>
             <a:pPr algn="l">
               <a:lnSpc>
-                <a:spcPct val="116000"/>
+                <a:spcPct val="114000"/>
               </a:lnSpc>
               <a:spcBef>
                 <a:spcPts val="0"/>
@@ -13335,7 +13195,7 @@
           <a:p>
             <a:pPr algn="l">
               <a:lnSpc>
-                <a:spcPct val="116000"/>
+                <a:spcPct val="114000"/>
               </a:lnSpc>
               <a:spcBef>
                 <a:spcPts val="300"/>
@@ -13347,19 +13207,19 @@
             <a:r>
               <a:rPr sz="1500" b="0">
                 <a:solidFill>
-                  <a:srgbClr val="333333"/>
+                  <a:srgbClr val="2F5D62"/>
                 </a:solidFill>
                 <a:latin typeface="Arial"/>
                 <a:ea typeface="微软雅黑"/>
                 <a:cs typeface="Arial"/>
               </a:rPr>
-              <a:t>肠屏障标志物升高</a:t>
+              <a:t>53 例 ｜ 35 女 / 18 男</a:t>
             </a:r>
           </a:p>
           <a:p>
             <a:pPr algn="l">
               <a:lnSpc>
-                <a:spcPct val="116000"/>
+                <a:spcPct val="114000"/>
               </a:lnSpc>
               <a:spcBef>
                 <a:spcPts val="300"/>
@@ -13377,7 +13237,7 @@
                 <a:ea typeface="微软雅黑"/>
                 <a:cs typeface="Arial"/>
               </a:rPr>
-              <a:t>改变早于痴呆</a:t>
+              <a:t>平均 69.1 岁 · 屏障标志↑</a:t>
             </a:r>
           </a:p>
         </p:txBody>
@@ -13434,8 +13294,8 @@
         </p:nvSpPr>
         <p:spPr>
           <a:xfrm>
-            <a:off x="7185355" y="3017520"/>
-            <a:ext cx="1998878" cy="365760"/>
+            <a:off x="7185355" y="2999232"/>
+            <a:ext cx="1998878" cy="310896"/>
           </a:xfrm>
           <a:prstGeom prst="rect">
             <a:avLst/>
@@ -13481,8 +13341,8 @@
         </p:nvSpPr>
         <p:spPr>
           <a:xfrm>
-            <a:off x="7185355" y="3383280"/>
-            <a:ext cx="1998878" cy="1005840"/>
+            <a:off x="7185355" y="3310128"/>
+            <a:ext cx="1998878" cy="1097280"/>
           </a:xfrm>
           <a:prstGeom prst="rect">
             <a:avLst/>
@@ -13497,7 +13357,7 @@
           <a:p>
             <a:pPr algn="l">
               <a:lnSpc>
-                <a:spcPct val="116000"/>
+                <a:spcPct val="114000"/>
               </a:lnSpc>
               <a:spcBef>
                 <a:spcPts val="0"/>
@@ -13521,7 +13381,7 @@
           <a:p>
             <a:pPr algn="l">
               <a:lnSpc>
-                <a:spcPct val="116000"/>
+                <a:spcPct val="114000"/>
               </a:lnSpc>
               <a:spcBef>
                 <a:spcPts val="300"/>
@@ -13533,19 +13393,19 @@
             <a:r>
               <a:rPr sz="1500" b="0">
                 <a:solidFill>
-                  <a:srgbClr val="333333"/>
+                  <a:srgbClr val="2F5D62"/>
                 </a:solidFill>
                 <a:latin typeface="Arial"/>
                 <a:ea typeface="微软雅黑"/>
                 <a:cs typeface="Arial"/>
               </a:rPr>
-              <a:t>菌群失衡最明显</a:t>
+              <a:t>53 例 ｜ 35 女 / 18 男</a:t>
             </a:r>
           </a:p>
           <a:p>
             <a:pPr algn="l">
               <a:lnSpc>
-                <a:spcPct val="116000"/>
+                <a:spcPct val="114000"/>
               </a:lnSpc>
               <a:spcBef>
                 <a:spcPts val="300"/>
@@ -13563,7 +13423,7 @@
                 <a:ea typeface="微软雅黑"/>
                 <a:cs typeface="Arial"/>
               </a:rPr>
-              <a:t>与炎症指标相关</a:t>
+              <a:t>平均 68.8 岁 · 失衡最明显</a:t>
             </a:r>
           </a:p>
         </p:txBody>
@@ -13620,8 +13480,8 @@
         </p:nvSpPr>
         <p:spPr>
           <a:xfrm>
-            <a:off x="9367113" y="3017520"/>
-            <a:ext cx="1998878" cy="365760"/>
+            <a:off x="9367113" y="2999232"/>
+            <a:ext cx="1998878" cy="310896"/>
           </a:xfrm>
           <a:prstGeom prst="rect">
             <a:avLst/>
@@ -13667,8 +13527,8 @@
         </p:nvSpPr>
         <p:spPr>
           <a:xfrm>
-            <a:off x="9367113" y="3383280"/>
-            <a:ext cx="1998878" cy="1005840"/>
+            <a:off x="9367113" y="3310128"/>
+            <a:ext cx="1998878" cy="1097280"/>
           </a:xfrm>
           <a:prstGeom prst="rect">
             <a:avLst/>
@@ -13683,7 +13543,7 @@
           <a:p>
             <a:pPr algn="l">
               <a:lnSpc>
-                <a:spcPct val="116000"/>
+                <a:spcPct val="114000"/>
               </a:lnSpc>
               <a:spcBef>
                 <a:spcPts val="0"/>
@@ -13707,7 +13567,7 @@
           <a:p>
             <a:pPr algn="l">
               <a:lnSpc>
-                <a:spcPct val="116000"/>
+                <a:spcPct val="114000"/>
               </a:lnSpc>
               <a:spcBef>
                 <a:spcPts val="300"/>
@@ -13719,19 +13579,19 @@
             <a:r>
               <a:rPr sz="1500" b="0">
                 <a:solidFill>
-                  <a:srgbClr val="333333"/>
+                  <a:srgbClr val="2F5D62"/>
                 </a:solidFill>
                 <a:latin typeface="Arial"/>
                 <a:ea typeface="微软雅黑"/>
                 <a:cs typeface="Arial"/>
               </a:rPr>
-              <a:t>菌群变化幅度最大</a:t>
+              <a:t>53 例 ｜ 35 女 / 18 男</a:t>
             </a:r>
           </a:p>
           <a:p>
             <a:pPr algn="l">
               <a:lnSpc>
-                <a:spcPct val="116000"/>
+                <a:spcPct val="114000"/>
               </a:lnSpc>
               <a:spcBef>
                 <a:spcPts val="300"/>
@@ -13749,7 +13609,7 @@
                 <a:ea typeface="微软雅黑"/>
                 <a:cs typeface="Arial"/>
               </a:rPr>
-              <a:t>炎症—Aβ 环放大</a:t>
+              <a:t>平均 70.0 岁 · 变化幅度最大</a:t>
             </a:r>
           </a:p>
         </p:txBody>
@@ -13840,7 +13700,7 @@
                 <a:ea typeface="微软雅黑"/>
                 <a:cs typeface="Arial"/>
               </a:rPr>
-              <a:t>分层方式：5 个阶段 × 2 个性别 × 3 个年龄段（60—69、70—79、≥80 岁）= 30 个分层单元；每个单元内按年龄与性别匹配，得到结构一致的比较亚队列，保证阶段之间的差异不来自年龄与性别构成。</a:t>
+              <a:t>分层方式：5 个阶段 × 2 个性别 × 3 个年龄段（60—69、70—79、≥80 岁）= 30 个分层单元；每个单元内按年龄与性别匹配，最终选出 265 例匹配亚队列——各阶段 53 例、每组 35 女 / 18 男，组间平均年龄最大差 1.8 岁，保证阶段之间的差异不来自年龄与性别构成。</a:t>
             </a:r>
           </a:p>
         </p:txBody>
@@ -13848,53 +13708,6 @@
       <p:sp>
         <p:nvSpPr>
           <p:cNvPr id="31" name="TextBox 30"/>
-          <p:cNvSpPr txBox="1"/>
-          <p:nvPr/>
-        </p:nvSpPr>
-        <p:spPr>
-          <a:xfrm>
-            <a:off x="640080" y="6053328"/>
-            <a:ext cx="10908792" cy="329184"/>
-          </a:xfrm>
-          <a:prstGeom prst="rect">
-            <a:avLst/>
-          </a:prstGeom>
-          <a:noFill/>
-        </p:spPr>
-        <p:txBody>
-          <a:bodyPr wrap="square" anchor="t" lIns="27432" rIns="27432" tIns="0" bIns="0">
-            <a:spAutoFit/>
-          </a:bodyPr>
-          <a:lstStyle/>
-          <a:p>
-            <a:pPr algn="l">
-              <a:lnSpc>
-                <a:spcPct val="100000"/>
-              </a:lnSpc>
-              <a:spcBef>
-                <a:spcPts val="0"/>
-              </a:spcBef>
-              <a:spcAft>
-                <a:spcPts val="0"/>
-              </a:spcAft>
-            </a:pPr>
-            <a:r>
-              <a:rPr sz="1500" b="0">
-                <a:solidFill>
-                  <a:srgbClr val="777777"/>
-                </a:solidFill>
-                <a:latin typeface="Arial"/>
-                <a:ea typeface="微软雅黑"/>
-                <a:cs typeface="Arial"/>
-              </a:rPr>
-              <a:t>分组与分层依据：已完成的全队列临床信息表（sources/已完成1.docx）</a:t>
-            </a:r>
-          </a:p>
-        </p:txBody>
-      </p:sp>
-      <p:sp>
-        <p:nvSpPr>
-          <p:cNvPr id="32" name="TextBox 31"/>
           <p:cNvSpPr txBox="1"/>
           <p:nvPr/>
         </p:nvSpPr>
@@ -13941,7 +13754,7 @@
       </p:sp>
       <p:sp>
         <p:nvSpPr>
-          <p:cNvPr id="33" name="TextBox 32"/>
+          <p:cNvPr id="32" name="TextBox 31"/>
           <p:cNvSpPr txBox="1"/>
           <p:nvPr/>
         </p:nvSpPr>
@@ -14472,53 +14285,6 @@
         </p:nvSpPr>
         <p:spPr>
           <a:xfrm>
-            <a:off x="640080" y="6053328"/>
-            <a:ext cx="10908792" cy="329184"/>
-          </a:xfrm>
-          <a:prstGeom prst="rect">
-            <a:avLst/>
-          </a:prstGeom>
-          <a:noFill/>
-        </p:spPr>
-        <p:txBody>
-          <a:bodyPr wrap="square" anchor="t" lIns="27432" rIns="27432" tIns="0" bIns="0">
-            <a:spAutoFit/>
-          </a:bodyPr>
-          <a:lstStyle/>
-          <a:p>
-            <a:pPr algn="l">
-              <a:lnSpc>
-                <a:spcPct val="100000"/>
-              </a:lnSpc>
-              <a:spcBef>
-                <a:spcPts val="0"/>
-              </a:spcBef>
-              <a:spcAft>
-                <a:spcPts val="0"/>
-              </a:spcAft>
-            </a:pPr>
-            <a:r>
-              <a:rPr sz="1500" b="0">
-                <a:solidFill>
-                  <a:srgbClr val="777777"/>
-                </a:solidFill>
-                <a:latin typeface="Arial"/>
-                <a:ea typeface="微软雅黑"/>
-                <a:cs typeface="Arial"/>
-              </a:rPr>
-              <a:t>图：本项目自制（results/figures）</a:t>
-            </a:r>
-          </a:p>
-        </p:txBody>
-      </p:sp>
-      <p:sp>
-        <p:nvSpPr>
-          <p:cNvPr id="7" name="TextBox 6"/>
-          <p:cNvSpPr txBox="1"/>
-          <p:nvPr/>
-        </p:nvSpPr>
-        <p:spPr>
-          <a:xfrm>
             <a:off x="640080" y="6419088"/>
             <a:ext cx="8778240" cy="310896"/>
           </a:xfrm>
@@ -14560,7 +14326,7 @@
       </p:sp>
       <p:sp>
         <p:nvSpPr>
-          <p:cNvPr id="8" name="TextBox 7"/>
+          <p:cNvPr id="7" name="TextBox 6"/>
           <p:cNvSpPr txBox="1"/>
           <p:nvPr/>
         </p:nvSpPr>

--- a/中间版/中期答辩_H_nature风.pptx
+++ b/中间版/中期答辩_H_nature风.pptx
@@ -585,7 +585,7 @@
           <a:lstStyle/>
           <a:p>
             <a:r>
-              <a:t>这页把抗菌肽与 AD 的关联拆成七环，并标出每一环的证据强度：蓝色是已有实验或临床证据，绿色是计算方法能给出候选与优先序的部分，橙色是本课题要回答或需要验证的部分。老师问任何一环，都能说清这一环目前的证据到什么程度。</a:t>
+              <a:t>这页把抗菌肽与 AD 的关联拆成七环，并标出每一环的证据强度：蓝色是已有实验或临床证据，绿色是计算方法能给出候选与优先序的部分，橙色是本课题要回答或需要验证的部分。第六环要特别说清楚：本课题验证的是致病方向——筛选出的候选抗菌肽是否像 FapC、CsgA 与 LL-37 那样推动 Aβ 成核聚集与神经炎症，而不是去证明它抑制 AD。老师问任何一环，都能说清这一环目前的证据到什么程度。</a:t>
             </a:r>
           </a:p>
         </p:txBody>
@@ -655,7 +655,7 @@
           <a:lstStyle/>
           <a:p>
             <a:r>
-              <a:t>机制落点参照 AChE–Aβ 复合物的分子动力学研究：Aβ 对接进 PAS 后，复合物在 1 微秒模拟中保持稳定，主要停留区段是 344—361，该区段紧邻 PAS 但不受双位点抑制剂的位阻。同一界面的其他实验证据包括：丙锭可阻断 AChE 诱导的聚集而催化位点抑制剂无效、PAS 负电荷触发 β-发夹构象、丁酰胆碱酯酶反向延缓纤维形成。由此提出三个假设，并用对接与动力学给出优先序。</a:t>
+              <a:t>机制落点参照 AChE–Aβ 复合物的分子动力学研究：Aβ 对接进 PAS 后，复合物在 1 微秒模拟中保持稳定，主要停留区段是 344—361，该区段紧邻 PAS 但不受双位点抑制剂的位阻。这一段界面既是 Aβ 成核的场所，也是候选抗菌肽最可能介入的位置。与按“抑制聚集”提问不同，本课题的动力学按致病方向设计——检验候选肽是否促进成核与聚集，这样设计的依据是微生物来源的淀粉样蛋白与内毒素已有直接先例：FapC 与 CsgA 种子催化 Aβ 纤维化并在动物模型中加重病理 [47][48]，LPS 缩短滞后期、其内毒素血症模型中 7—9 天出现 Aβ 斑块与 p-tau [49][50]，LL-37 与 Aβ40 形成异源团簇、生成更毒的聚集体并经 CLIC1 造成小鼠与猴模型的 AD 样病理 [6][53]。由此提出三个假设：H1 结合 PAS 与 344—361 促进成核与聚集、H2 结合 Aβ 生成区加速纤维化或推向更毒寡聚体、H3 在膜与小胶质水平放大炎症信号；验证路径是先用对接与动力学给出致病方向的优先序，再用 ThT 聚集动力学、电镜形态与细胞毒性实验给证据。</a:t>
             </a:r>
           </a:p>
         </p:txBody>
@@ -725,7 +725,7 @@
           <a:lstStyle/>
           <a:p>
             <a:r>
-              <a:t>这张表把老师提出的八个问题逐条列出，并给出答案要点与证据强度。需要说明的是：关联类结论的证据强度较高，方向类结论（谁更多、促进还是抑制）存在例外与条件依赖，因此标注为中；微生物源抗菌肽在 AD 中的变化属于待验证部分，正是本课题要补的一环。</a:t>
+              <a:t>这张表把老师提出的八个问题逐条列出，并给出答案要点与证据强度。需要说明两件事：第一，机制与动力学一律按致病方向表述——只问候选抗菌肽是否推动 AD，不写“抑制 AD”，抗菌活性放在第六问作为本职功能；第二，致病方向的体内外证据已经存在（细菌淀粉样蛋白、内毒素与 LL-37），但针对本课题筛出的候选肽仍属假设，因此标注为中—强；微生物源抗菌肽在 AD 中的变化正是本课题要补的一环。</a:t>
             </a:r>
           </a:p>
         </p:txBody>
@@ -795,7 +795,7 @@
           <a:lstStyle/>
           <a:p>
             <a:r>
-              <a:t>机制说明文档《抗菌肽与AD关联机制说明》共整理 46 条文献，覆盖 AD 与感染、宿主抗菌肽在 AD 中的变化、抗菌肽预测方法、菌群分期、AChE–Aβ 与交叉成核的分子模拟，以及作为反例的乳铁蛋白下降证据。这里列出其中十条代表性文献及其结论。</a:t>
+              <a:t>机制说明文档《抗菌肽与AD关联机制说明》共整理 58 条文献，覆盖 AD 与感染、宿主抗菌肽在 AD 中的变化、抗菌肽预测方法、菌群分期、AChE–Aβ 与交叉成核的分子模拟、细菌淀粉样蛋白与内毒素推动 Aβ 聚集的致病方向证据，以及作为反例的乳铁蛋白下降与α-防御素抑制纤维化的证据。这里列出其中十三条代表性文献及其结论。</a:t>
             </a:r>
           </a:p>
         </p:txBody>
@@ -1355,7 +1355,7 @@
           <a:lstStyle/>
           <a:p>
             <a:r>
-              <a:t>机制关联参照乙酰胆碱酯酶—β-淀粉样肽复合物分子模拟研究的思路，从三个方向展开，把结论定位为线索发现；抑菌实验验证选取有代表性的候选抗菌肽人工合成，以大肠杆菌与金黄色葡萄球菌为指示菌，先用纸片扩散法初筛，再用微量肉汤稀释法测最低抑菌浓度。</a:t>
+              <a:t>机制关联参照乙酰胆碱酯酶—β-淀粉样肽复合物分子模拟研究的思路，方向按致病方向设定：微生物来源的淀粉样蛋白与内毒素已有先例（FapC、CsgA 加速 Aβ 纤维化并在动物模型中加重病理，LPS 诱导斑块与 p-tau，LL-37 与 Aβ 形成异源团簇），所以考察的是候选肽是否促进 Aβ 成核与聚集、是否经 AChE 外周阴离子位点推动成核、是否经免疫与炎症通路放大神经炎症，而不是去证明它抑制 AD；结论定位为线索发现。抑菌实验验证选取有代表性的候选抗菌肽人工合成，以大肠杆菌与金黄色葡萄球菌为指示菌，先用纸片扩散法初筛，再用微量肉汤稀释法测最低抑菌浓度。</a:t>
             </a:r>
           </a:p>
         </p:txBody>
@@ -5072,7 +5072,7 @@
                 <a:ea typeface="微软雅黑"/>
                 <a:cs typeface="Arial"/>
               </a:rPr>
-              <a:t>① AD 与感染相关、② 感染与炎症驱动抗菌肽与 Aβ 生成、③ Aβ 本身即抗菌肽；④ 抗菌活性可计算预测、⑤ AD 组特异抗菌肽随阶段变化、⑥ 双刃剑效应；⑦ 为什么 AD 更多与分子机制落点，是本课题要回答的部分。</a:t>
+              <a:t>① AD 与感染相关、② 炎症驱动抗菌肽与 Aβ 生成、③ Aβ 本身即抗菌肽；④ 抗菌活性可计算预测、⑤ 特异抗菌肽随阶段变化、⑥ 致病方向：促进 Aβ 聚集；⑦ 为什么 AD 更多与机制落点是本课题要回答的部分。</a:t>
             </a:r>
           </a:p>
         </p:txBody>
@@ -5231,7 +5231,7 @@
                 <a:ea typeface="微软雅黑"/>
                 <a:cs typeface="Arial"/>
               </a:rPr>
-              <a:t>分子机制（一）：AChE–Aβ 复合物的动力学要点</a:t>
+              <a:t>分子机制（一）：动力学如何验证候选肽的致病方向</a:t>
             </a:r>
           </a:p>
         </p:txBody>
@@ -5346,7 +5346,7 @@
                 <a:ea typeface="微软雅黑"/>
                 <a:cs typeface="Arial"/>
               </a:rPr>
-              <a:t>PAS 是 Aβ 聚集的成核中心：1 μs 模拟中复合物稳定，Aβ 主要停留于 344—361 区段，不受双位点抑制剂位阻 [31]；丙锭阻断 PAS 后聚集被抑制 [33]。</a:t>
+              <a:t>PAS 是 Aβ 的成核界面：1 μs 模拟中复合物稳定，Aβ 主要停留于 344—361 区段 [31]；本课题据此检验候选肽在这一界面是促进成核与聚集，还是把产物推向更毒的寡聚体。</a:t>
             </a:r>
           </a:p>
         </p:txBody>
@@ -6314,7 +6314,7 @@
                           <a:ea typeface="微软雅黑"/>
                           <a:cs typeface="Arial"/>
                         </a:rPr>
-                        <a:t>⑤ 促进还是抑制</a:t>
+                        <a:t>⑤ 是否导致 AD（致病方向）</a:t>
                       </a:r>
                     </a:p>
                   </a:txBody>
@@ -6349,7 +6349,7 @@
                           <a:ea typeface="微软雅黑"/>
                           <a:cs typeface="Arial"/>
                         </a:rPr>
-                        <a:t>两者同时成立：低浓度抗菌，长期过量致病</a:t>
+                        <a:t>FapC/CsgA 加速 Aβ 纤维化；LPS 促斑块与 p-tau；LL-37 经 CLIC1 致 AD 样病理</a:t>
                       </a:r>
                     </a:p>
                   </a:txBody>
@@ -6419,7 +6419,7 @@
                           <a:ea typeface="微软雅黑"/>
                           <a:cs typeface="Arial"/>
                         </a:rPr>
-                        <a:t>[1][3][6][20]</a:t>
+                        <a:t>[6][47][49][53]</a:t>
                       </a:r>
                     </a:p>
                   </a:txBody>
@@ -6456,7 +6456,7 @@
                           <a:ea typeface="微软雅黑"/>
                           <a:cs typeface="Arial"/>
                         </a:rPr>
-                        <a:t>⑥ 抑制感染证据</a:t>
+                        <a:t>⑥ 抗菌活性（本职功能）</a:t>
                       </a:r>
                     </a:p>
                   </a:txBody>
@@ -6491,7 +6491,7 @@
                           <a:ea typeface="微软雅黑"/>
                           <a:cs typeface="Arial"/>
                         </a:rPr>
-                        <a:t>小鼠抗感染更强；纤维网捕获病原体</a:t>
+                        <a:t>小鼠抗感染更强；纤维网捕获病原体；不作为“抑制 AD”结论</a:t>
                       </a:r>
                     </a:p>
                   </a:txBody>
@@ -7073,7 +7073,7 @@
         </p:nvGraphicFramePr>
         <p:xfrm>
           <a:off x="640080" y="1234440"/>
-          <a:ext cx="10908792" cy="4626864"/>
+          <a:ext cx="10908792" cy="5376672"/>
         </p:xfrm>
         <a:graphic>
           <a:graphicData uri="http://schemas.openxmlformats.org/drawingml/2006/table">
@@ -7086,7 +7086,7 @@
                 <a:gridCol w="5623560"/>
                 <a:gridCol w="2587752"/>
               </a:tblGrid>
-              <a:tr h="420624">
+              <a:tr h="384048">
                 <a:tc>
                   <a:txBody>
                     <a:bodyPr/>
@@ -7193,7 +7193,7 @@
                   </a:tcPr>
                 </a:tc>
               </a:tr>
-              <a:tr h="420624">
+              <a:tr h="384048">
                 <a:tc>
                   <a:txBody>
                     <a:bodyPr/>
@@ -7300,7 +7300,7 @@
                   </a:tcPr>
                 </a:tc>
               </a:tr>
-              <a:tr h="420624">
+              <a:tr h="384048">
                 <a:tc>
                   <a:txBody>
                     <a:bodyPr/>
@@ -7407,7 +7407,7 @@
                   </a:tcPr>
                 </a:tc>
               </a:tr>
-              <a:tr h="420624">
+              <a:tr h="384048">
                 <a:tc>
                   <a:txBody>
                     <a:bodyPr/>
@@ -7514,7 +7514,7 @@
                   </a:tcPr>
                 </a:tc>
               </a:tr>
-              <a:tr h="420624">
+              <a:tr h="384048">
                 <a:tc>
                   <a:txBody>
                     <a:bodyPr/>
@@ -7621,7 +7621,7 @@
                   </a:tcPr>
                 </a:tc>
               </a:tr>
-              <a:tr h="420624">
+              <a:tr h="384048">
                 <a:tc>
                   <a:txBody>
                     <a:bodyPr/>
@@ -7728,7 +7728,7 @@
                   </a:tcPr>
                 </a:tc>
               </a:tr>
-              <a:tr h="420624">
+              <a:tr h="384048">
                 <a:tc>
                   <a:txBody>
                     <a:bodyPr/>
@@ -7835,7 +7835,7 @@
                   </a:tcPr>
                 </a:tc>
               </a:tr>
-              <a:tr h="420624">
+              <a:tr h="384048">
                 <a:tc>
                   <a:txBody>
                     <a:bodyPr/>
@@ -7942,7 +7942,7 @@
                   </a:tcPr>
                 </a:tc>
               </a:tr>
-              <a:tr h="420624">
+              <a:tr h="384048">
                 <a:tc>
                   <a:txBody>
                     <a:bodyPr/>
@@ -8049,7 +8049,7 @@
                   </a:tcPr>
                 </a:tc>
               </a:tr>
-              <a:tr h="420624">
+              <a:tr h="384048">
                 <a:tc>
                   <a:txBody>
                     <a:bodyPr/>
@@ -8156,7 +8156,7 @@
                   </a:tcPr>
                 </a:tc>
               </a:tr>
-              <a:tr h="420624">
+              <a:tr h="384048">
                 <a:tc>
                   <a:txBody>
                     <a:bodyPr/>
@@ -8263,6 +8263,327 @@
                   </a:tcPr>
                 </a:tc>
               </a:tr>
+              <a:tr h="384048">
+                <a:tc>
+                  <a:txBody>
+                    <a:bodyPr/>
+                    <a:lstStyle/>
+                    <a:p>
+                      <a:pPr algn="l">
+                        <a:lnSpc>
+                          <a:spcPct val="105000"/>
+                        </a:lnSpc>
+                        <a:spcBef>
+                          <a:spcPts val="0"/>
+                        </a:spcBef>
+                        <a:spcAft>
+                          <a:spcPts val="0"/>
+                        </a:spcAft>
+                      </a:pPr>
+                      <a:r>
+                        <a:rPr sz="1500" b="0">
+                          <a:solidFill>
+                            <a:srgbClr val="111111"/>
+                          </a:solidFill>
+                          <a:latin typeface="Arial"/>
+                          <a:ea typeface="微软雅黑"/>
+                          <a:cs typeface="Arial"/>
+                        </a:rPr>
+                        <a:t>Javed 等 2020</a:t>
+                      </a:r>
+                    </a:p>
+                  </a:txBody>
+                  <a:tcPr marT="27432" marB="27432">
+                    <a:solidFill>
+                      <a:srgbClr val="FFFFFF"/>
+                    </a:solidFill>
+                  </a:tcPr>
+                </a:tc>
+                <a:tc>
+                  <a:txBody>
+                    <a:bodyPr/>
+                    <a:lstStyle/>
+                    <a:p>
+                      <a:pPr algn="l">
+                        <a:lnSpc>
+                          <a:spcPct val="105000"/>
+                        </a:lnSpc>
+                        <a:spcBef>
+                          <a:spcPts val="0"/>
+                        </a:spcBef>
+                        <a:spcAft>
+                          <a:spcPts val="0"/>
+                        </a:spcAft>
+                      </a:pPr>
+                      <a:r>
+                        <a:rPr sz="1500" b="0">
+                          <a:solidFill>
+                            <a:srgbClr val="333333"/>
+                          </a:solidFill>
+                          <a:latin typeface="Arial"/>
+                          <a:ea typeface="微软雅黑"/>
+                          <a:cs typeface="Arial"/>
+                        </a:rPr>
+                        <a:t>FapC 种子加速 Aβ 纤维化，斑马鱼中加重病理</a:t>
+                      </a:r>
+                    </a:p>
+                  </a:txBody>
+                  <a:tcPr marT="27432" marB="27432">
+                    <a:solidFill>
+                      <a:srgbClr val="FFFFFF"/>
+                    </a:solidFill>
+                  </a:tcPr>
+                </a:tc>
+                <a:tc>
+                  <a:txBody>
+                    <a:bodyPr/>
+                    <a:lstStyle/>
+                    <a:p>
+                      <a:pPr algn="l">
+                        <a:lnSpc>
+                          <a:spcPct val="105000"/>
+                        </a:lnSpc>
+                        <a:spcBef>
+                          <a:spcPts val="0"/>
+                        </a:spcBef>
+                        <a:spcAft>
+                          <a:spcPts val="0"/>
+                        </a:spcAft>
+                      </a:pPr>
+                      <a:r>
+                        <a:rPr sz="1500" b="0">
+                          <a:solidFill>
+                            <a:srgbClr val="333333"/>
+                          </a:solidFill>
+                          <a:latin typeface="Arial"/>
+                          <a:ea typeface="微软雅黑"/>
+                          <a:cs typeface="Arial"/>
+                        </a:rPr>
+                        <a:t>Adv Sci [47]</a:t>
+                      </a:r>
+                    </a:p>
+                  </a:txBody>
+                  <a:tcPr marT="27432" marB="27432">
+                    <a:solidFill>
+                      <a:srgbClr val="FFFFFF"/>
+                    </a:solidFill>
+                  </a:tcPr>
+                </a:tc>
+              </a:tr>
+              <a:tr h="384048">
+                <a:tc>
+                  <a:txBody>
+                    <a:bodyPr/>
+                    <a:lstStyle/>
+                    <a:p>
+                      <a:pPr algn="l">
+                        <a:lnSpc>
+                          <a:spcPct val="105000"/>
+                        </a:lnSpc>
+                        <a:spcBef>
+                          <a:spcPts val="0"/>
+                        </a:spcBef>
+                        <a:spcAft>
+                          <a:spcPts val="0"/>
+                        </a:spcAft>
+                      </a:pPr>
+                      <a:r>
+                        <a:rPr sz="1500" b="0">
+                          <a:solidFill>
+                            <a:srgbClr val="111111"/>
+                          </a:solidFill>
+                          <a:latin typeface="Arial"/>
+                          <a:ea typeface="微软雅黑"/>
+                          <a:cs typeface="Arial"/>
+                        </a:rPr>
+                        <a:t>Wang 等 2018</a:t>
+                      </a:r>
+                    </a:p>
+                  </a:txBody>
+                  <a:tcPr marT="27432" marB="27432">
+                    <a:solidFill>
+                      <a:srgbClr val="FFFFFF"/>
+                    </a:solidFill>
+                  </a:tcPr>
+                </a:tc>
+                <a:tc>
+                  <a:txBody>
+                    <a:bodyPr/>
+                    <a:lstStyle/>
+                    <a:p>
+                      <a:pPr algn="l">
+                        <a:lnSpc>
+                          <a:spcPct val="105000"/>
+                        </a:lnSpc>
+                        <a:spcBef>
+                          <a:spcPts val="0"/>
+                        </a:spcBef>
+                        <a:spcAft>
+                          <a:spcPts val="0"/>
+                        </a:spcAft>
+                      </a:pPr>
+                      <a:r>
+                        <a:rPr sz="1500" b="0">
+                          <a:solidFill>
+                            <a:srgbClr val="333333"/>
+                          </a:solidFill>
+                          <a:latin typeface="Arial"/>
+                          <a:ea typeface="微软雅黑"/>
+                          <a:cs typeface="Arial"/>
+                        </a:rPr>
+                        <a:t>LPS 内毒素血症诱导 Aβ 斑块与 p-tau</a:t>
+                      </a:r>
+                    </a:p>
+                  </a:txBody>
+                  <a:tcPr marT="27432" marB="27432">
+                    <a:solidFill>
+                      <a:srgbClr val="FFFFFF"/>
+                    </a:solidFill>
+                  </a:tcPr>
+                </a:tc>
+                <a:tc>
+                  <a:txBody>
+                    <a:bodyPr/>
+                    <a:lstStyle/>
+                    <a:p>
+                      <a:pPr algn="l">
+                        <a:lnSpc>
+                          <a:spcPct val="105000"/>
+                        </a:lnSpc>
+                        <a:spcBef>
+                          <a:spcPts val="0"/>
+                        </a:spcBef>
+                        <a:spcAft>
+                          <a:spcPts val="0"/>
+                        </a:spcAft>
+                      </a:pPr>
+                      <a:r>
+                        <a:rPr sz="1500" b="0">
+                          <a:solidFill>
+                            <a:srgbClr val="333333"/>
+                          </a:solidFill>
+                          <a:latin typeface="Arial"/>
+                          <a:ea typeface="微软雅黑"/>
+                          <a:cs typeface="Arial"/>
+                        </a:rPr>
+                        <a:t>Am J Nucl Med Mol Imaging [50]</a:t>
+                      </a:r>
+                    </a:p>
+                  </a:txBody>
+                  <a:tcPr marT="27432" marB="27432">
+                    <a:solidFill>
+                      <a:srgbClr val="FFFFFF"/>
+                    </a:solidFill>
+                  </a:tcPr>
+                </a:tc>
+              </a:tr>
+              <a:tr h="384048">
+                <a:tc>
+                  <a:txBody>
+                    <a:bodyPr/>
+                    <a:lstStyle/>
+                    <a:p>
+                      <a:pPr algn="l">
+                        <a:lnSpc>
+                          <a:spcPct val="105000"/>
+                        </a:lnSpc>
+                        <a:spcBef>
+                          <a:spcPts val="0"/>
+                        </a:spcBef>
+                        <a:spcAft>
+                          <a:spcPts val="0"/>
+                        </a:spcAft>
+                      </a:pPr>
+                      <a:r>
+                        <a:rPr sz="1500" b="0">
+                          <a:solidFill>
+                            <a:srgbClr val="111111"/>
+                          </a:solidFill>
+                          <a:latin typeface="Arial"/>
+                          <a:ea typeface="微软雅黑"/>
+                          <a:cs typeface="Arial"/>
+                        </a:rPr>
+                        <a:t>Wang 等 2025</a:t>
+                      </a:r>
+                    </a:p>
+                  </a:txBody>
+                  <a:tcPr marT="27432" marB="27432">
+                    <a:solidFill>
+                      <a:srgbClr val="FFFFFF"/>
+                    </a:solidFill>
+                  </a:tcPr>
+                </a:tc>
+                <a:tc>
+                  <a:txBody>
+                    <a:bodyPr/>
+                    <a:lstStyle/>
+                    <a:p>
+                      <a:pPr algn="l">
+                        <a:lnSpc>
+                          <a:spcPct val="105000"/>
+                        </a:lnSpc>
+                        <a:spcBef>
+                          <a:spcPts val="0"/>
+                        </a:spcBef>
+                        <a:spcAft>
+                          <a:spcPts val="0"/>
+                        </a:spcAft>
+                      </a:pPr>
+                      <a:r>
+                        <a:rPr sz="1500" b="0">
+                          <a:solidFill>
+                            <a:srgbClr val="333333"/>
+                          </a:solidFill>
+                          <a:latin typeface="Arial"/>
+                          <a:ea typeface="微软雅黑"/>
+                          <a:cs typeface="Arial"/>
+                        </a:rPr>
+                        <a:t>LL-37 与 Aβ40 形成异源团簇，产物更毒</a:t>
+                      </a:r>
+                    </a:p>
+                  </a:txBody>
+                  <a:tcPr marT="27432" marB="27432">
+                    <a:solidFill>
+                      <a:srgbClr val="FFFFFF"/>
+                    </a:solidFill>
+                  </a:tcPr>
+                </a:tc>
+                <a:tc>
+                  <a:txBody>
+                    <a:bodyPr/>
+                    <a:lstStyle/>
+                    <a:p>
+                      <a:pPr algn="l">
+                        <a:lnSpc>
+                          <a:spcPct val="105000"/>
+                        </a:lnSpc>
+                        <a:spcBef>
+                          <a:spcPts val="0"/>
+                        </a:spcBef>
+                        <a:spcAft>
+                          <a:spcPts val="0"/>
+                        </a:spcAft>
+                      </a:pPr>
+                      <a:r>
+                        <a:rPr sz="1500" b="0">
+                          <a:solidFill>
+                            <a:srgbClr val="333333"/>
+                          </a:solidFill>
+                          <a:latin typeface="Arial"/>
+                          <a:ea typeface="微软雅黑"/>
+                          <a:cs typeface="Arial"/>
+                        </a:rPr>
+                        <a:t>Angew Chem Int Ed [53]</a:t>
+                      </a:r>
+                    </a:p>
+                  </a:txBody>
+                  <a:tcPr marT="27432" marB="27432">
+                    <a:solidFill>
+                      <a:srgbClr val="FFFFFF"/>
+                    </a:solidFill>
+                  </a:tcPr>
+                </a:tc>
+              </a:tr>
             </a:tbl>
           </a:graphicData>
         </a:graphic>
@@ -14570,7 +14891,7 @@
                 <a:ea typeface="微软雅黑"/>
                 <a:cs typeface="Arial"/>
               </a:rPr>
-              <a:t>机制关联从三个方向展开：候选肽与 Aβ 的相互作用及其对聚集的影响、与 AChE 外周阴离子位点结合从而干扰成核的可能性、以及经免疫与炎症通路参与神经炎症的可能性，结论定位为线索发现。抑菌实验验证以代表性候选肽对大肠杆菌与金黄色葡萄球菌做纸片扩散法初筛，并以微量肉汤稀释法测定最低抑菌浓度。</a:t>
+              <a:t>机制关联按致病方向展开：候选肽是否促进 Aβ 成核与聚集、是否经 AChE 外周阴离子位点推动成核、是否经免疫与炎症通路放大神经炎症；结论定位为线索发现与优先序。抑菌实验验证以代表性候选肽对大肠杆菌与金黄色葡萄球菌做纸片扩散法初筛，并以微量肉汤稀释法测定最低抑菌浓度。</a:t>
             </a:r>
           </a:p>
         </p:txBody>

--- a/中间版/中期答辩_H_nature风.pptx
+++ b/中间版/中期答辩_H_nature风.pptx
@@ -585,7 +585,7 @@
           <a:lstStyle/>
           <a:p>
             <a:r>
-              <a:t>这页把抗菌肽与 AD 的关联拆成七环，并标出每一环的证据强度：蓝色是已有实验或临床证据，绿色是计算方法能给出候选与优先序的部分，橙色是本课题要回答或需要验证的部分。第六环要特别说清楚：本课题验证的是致病方向——筛选出的候选抗菌肽是否像 FapC、CsgA 与 LL-37 那样推动 Aβ 成核聚集与神经炎症，而不是去证明它抑制 AD。老师问任何一环，都能说清这一环目前的证据到什么程度。</a:t>
+              <a:t>这页把抗菌肽与 AD 的关联拆成七环，并标出每一环的证据强度：蓝色是已有实验或临床证据，绿色是计算与文献比对能给出关联线索的部分，橙色是本课题要回答或需要验证的部分。第六环要特别说清楚：本课题验证的是致病方向——筛选出的候选抗菌肽是否像 FapC、CsgA 与 LL-37 那样推动 Aβ 成核聚集与神经炎症，而不是去证明它抑制 AD。老师问任何一环，都能说清这一环目前的证据到什么程度。</a:t>
             </a:r>
           </a:p>
         </p:txBody>
@@ -655,7 +655,7 @@
           <a:lstStyle/>
           <a:p>
             <a:r>
-              <a:t>机制落点参照 AChE–Aβ 复合物的分子动力学研究：Aβ 对接进 PAS 后，复合物在 1 微秒模拟中保持稳定，主要停留区段是 344—361，该区段紧邻 PAS 但不受双位点抑制剂的位阻。这一段界面既是 Aβ 成核的场所，也是候选抗菌肽最可能介入的位置。与按“抑制聚集”提问不同，本课题的动力学按致病方向设计——检验候选肽是否促进成核与聚集，这样设计的依据是微生物来源的淀粉样蛋白与内毒素已有直接先例：FapC 与 CsgA 种子催化 Aβ 纤维化并在动物模型中加重病理 [47][48]，LPS 缩短滞后期、其内毒素血症模型中 7—9 天出现 Aβ 斑块与 p-tau [49][50]，LL-37 与 Aβ40 形成异源团簇、生成更毒的聚集体并经 CLIC1 造成小鼠与猴模型的 AD 样病理 [6][53]。由此提出三个假设：H1 结合 PAS 与 344—361 促进成核与聚集、H2 结合 Aβ 生成区加速纤维化或推向更毒寡聚体、H3 在膜与小胶质水平放大炎症信号；验证路径是先用对接与动力学给出致病方向的优先序，再用 ThT 聚集动力学、电镜形态与细胞毒性实验给证据。</a:t>
+              <a:t>机制落点参照 AChE–Aβ 复合物的分子动力学研究：Aβ 对接进 PAS 后，复合物在 1 微秒模拟中保持稳定，主要停留区段是 344—361，该区段紧邻 PAS 但不受双位点抑制剂的位阻。这一段界面既是 Aβ 成核的场所，也是 AD 特异性特有肽最可能起作用的位置。与按“抑制聚集”提问不同，本课题的动力学按致病方向设计——检验 AD 特有肽是否促进成核与聚集，这样设计的依据是微生物来源的淀粉样蛋白与内毒素已有直接先例：FapC 与 CsgA 种子催化 Aβ 纤维化并在动物模型中加重病理 [47][48]，LPS 缩短滞后期、其内毒素血症模型中 7—9 天出现 Aβ 斑块与 p-tau [49][50]，LL-37 与 Aβ40 形成异源团簇、生成更毒的聚集体并经 CLIC1 造成小鼠与猴模型的 AD 样病理 [6][53]。由此提出三个假设：H1 结合 PAS 与 344—361 促进成核与聚集、H2 结合 Aβ 生成区加速纤维化或推向更毒寡聚体、H3 在膜与小胶质水平放大炎症信号；验证路径是先用对接与动力学判断关联方向（是否促进成核与聚集、是否把产物推向更毒寡聚体），再用 ThT 聚集动力学、电镜形态与细胞毒性实验给证据。</a:t>
             </a:r>
           </a:p>
         </p:txBody>
@@ -1075,7 +1075,7 @@
           <a:lstStyle/>
           <a:p>
             <a:r>
-              <a:t>这页说明整体流程：从测序数据到候选抗菌肽清单，共十二步，输入输出都可追溯。工具链是 fastp 与 KneadData 做质控去宿主，MEGAHIT 组装，MetaBAT2、MaxBin2 与 CONCOCT 多算法联合分箱后 metaWRAP 提纯，dRep 按 95% ANI 去冗余得到参考基因组集，EMBOSS getorf 预测 sORF 并做序列级去冗余，Attention / LSTM / BERT 三模型一致阳性才纳入候选，CoverM 定量并做 CLR 变换，用 Kruskal-Wallis 与 Mann-Whitney U 做组间检验，再用宏蛋白组表达证据二次去重。前九步已经在中期前完成，最后三步正在推进——机制关联分析、抑菌实验验证与结果整理。</a:t>
+              <a:t>这页说明整体流程：从测序数据到候选抗菌肽清单，共十二步，输入输出都可追溯。工具链是 fastp 与 KneadData 做质控去宿主，MEGAHIT 组装，MetaBAT2、MaxBin2 与 CONCOCT 三个分箱算法分别分箱，再用 metaWRAP 提纯，dRep 按 95% ANI 去冗余得到参考基因组集，EMBOSS getorf 预测 sORF 并做序列级去冗余，Attention / LSTM / BERT 三模型一致阳性才纳入候选，CoverM 定量并做 CLR 变换，用 Kruskal-Wallis 与 Mann-Whitney U 做组间检验，再用宏蛋白组表达证据二次去重。前九步已经在中期前完成，最后三步正在推进——机制关联分析、抑菌实验验证与结果整理。</a:t>
             </a:r>
           </a:p>
         </p:txBody>
@@ -1285,7 +1285,7 @@
           <a:lstStyle/>
           <a:p>
             <a:r>
-              <a:t>序列层面去冗余解决重复；宏蛋白组表达证据解决“有预测、无表达”的假阳性。二次去重后按组内共有、组间特比较，得到健康人群特有与各疾病阶段特有的抗菌肽清单。</a:t>
+              <a:t>序列层面去冗余解决重复；宏蛋白组表达证据解决“有预测、无表达”的假阳性。二次去重后按组内共有、组间特比较，得到 AD 组特有（AD 特异性）的抗菌肽清单。</a:t>
             </a:r>
           </a:p>
         </p:txBody>
@@ -1355,7 +1355,7 @@
           <a:lstStyle/>
           <a:p>
             <a:r>
-              <a:t>机制关联参照乙酰胆碱酯酶—β-淀粉样肽复合物分子模拟研究的思路，方向按致病方向设定：微生物来源的淀粉样蛋白与内毒素已有先例（FapC、CsgA 加速 Aβ 纤维化并在动物模型中加重病理，LPS 诱导斑块与 p-tau，LL-37 与 Aβ 形成异源团簇），所以考察的是候选肽是否促进 Aβ 成核与聚集、是否经 AChE 外周阴离子位点推动成核、是否经免疫与炎症通路放大神经炎症，而不是去证明它抑制 AD；结论定位为线索发现。抑菌实验验证选取有代表性的候选抗菌肽人工合成，以大肠杆菌与金黄色葡萄球菌为指示菌，先用纸片扩散法初筛，再用微量肉汤稀释法测最低抑菌浓度。</a:t>
+              <a:t>机制关联参照乙酰胆碱酯酶—β-淀粉样肽复合物分子模拟研究的思路，方向按致病方向设定：微生物来源的淀粉样蛋白与内毒素已有先例（FapC、CsgA 加速 Aβ 纤维化并在动物模型中加重病理，LPS 诱导斑块与 p-tau，LL-37 与 Aβ 形成异源团簇），所以考察的是 AD 特有肽是否促进 Aβ 成核与聚集、是否经 AChE 外周阴离子位点推动成核、是否经免疫与炎症通路放大神经炎症，而不是去证明它抑制 AD；结论定位为线索发现。抑菌实验验证选取有代表性的 AD 特有肽人工合成，以大肠杆菌与金黄色葡萄球菌为指示菌，先用纸片扩散法初筛，再用微量肉汤稀释法测最低抑菌浓度。</a:t>
             </a:r>
           </a:p>
         </p:txBody>
@@ -5022,8 +5022,8 @@
         </p:blipFill>
         <p:spPr>
           <a:xfrm>
-            <a:off x="1697813" y="1188720"/>
-            <a:ext cx="8793325" cy="3767328"/>
+            <a:off x="1606668" y="1188720"/>
+            <a:ext cx="8975615" cy="3767328"/>
           </a:xfrm>
           <a:prstGeom prst="rect">
             <a:avLst/>
@@ -5072,7 +5072,7 @@
                 <a:ea typeface="微软雅黑"/>
                 <a:cs typeface="Arial"/>
               </a:rPr>
-              <a:t>① AD 与感染相关、② 炎症驱动抗菌肽与 Aβ 生成、③ Aβ 本身即抗菌肽；④ 抗菌活性可计算预测、⑤ 特异抗菌肽随阶段变化、⑥ 致病方向：促进 Aβ 聚集；⑦ 为什么 AD 更多与机制落点是本课题要回答的部分。</a:t>
+              <a:t>① AD 与感染相关、② 炎症驱动抗菌肽与 Aβ 生成、③ Aβ 本身即抗菌肽；④ 抗菌活性可计算预测、⑤ AD 特异性特有肽随阶段变化、⑥ 致病方向：促进 Aβ 聚集；⑦ 为什么 AD 更多与 AD 特有肽与 AD 的关联是本课题要回答的部分。</a:t>
             </a:r>
           </a:p>
         </p:txBody>
@@ -5231,7 +5231,7 @@
                 <a:ea typeface="微软雅黑"/>
                 <a:cs typeface="Arial"/>
               </a:rPr>
-              <a:t>分子机制（一）：动力学如何验证候选肽的致病方向</a:t>
+              <a:t>分子机制（一）：动力学如何检验 AD 特有肽与 AD 的关联</a:t>
             </a:r>
           </a:p>
         </p:txBody>
@@ -5346,7 +5346,7 @@
                 <a:ea typeface="微软雅黑"/>
                 <a:cs typeface="Arial"/>
               </a:rPr>
-              <a:t>PAS 是 Aβ 的成核界面：1 μs 模拟中复合物稳定，Aβ 主要停留于 344—361 区段 [31]；本课题据此检验候选肽在这一界面是促进成核与聚集，还是把产物推向更毒的寡聚体。</a:t>
+              <a:t>PAS 是 Aβ 的成核界面：1 μs 模拟中复合物稳定，Aβ 主要停留于 344—361 区段 [31]；本课题据此检验 AD 特异性特有肽在这一界面是促进成核与聚集，还是把产物推向更毒的寡聚体。</a:t>
             </a:r>
           </a:p>
         </p:txBody>
@@ -6172,7 +6172,7 @@
                           <a:ea typeface="微软雅黑"/>
                           <a:cs typeface="Arial"/>
                         </a:rPr>
-                        <a:t>④ AD 组特有肽</a:t>
+                        <a:t>④ AD 特异性特有肽</a:t>
                       </a:r>
                     </a:p>
                   </a:txBody>
@@ -6207,7 +6207,7 @@
                           <a:ea typeface="微软雅黑"/>
                           <a:cs typeface="Arial"/>
                         </a:rPr>
-                        <a:t>菌群随认知阶段梯度变化，阶段特有肽有依据</a:t>
+                        <a:t>AD 组特异的菌种与功能特征有据；特有肽判定需表达证据</a:t>
                       </a:r>
                     </a:p>
                   </a:txBody>
@@ -6277,7 +6277,7 @@
                           <a:ea typeface="微软雅黑"/>
                           <a:cs typeface="Arial"/>
                         </a:rPr>
-                        <a:t>[26][28][30]</a:t>
+                        <a:t>[26][28][30][59]</a:t>
                       </a:r>
                     </a:p>
                   </a:txBody>
@@ -8833,7 +8833,7 @@
                 <a:ea typeface="微软雅黑"/>
                 <a:cs typeface="Arial"/>
               </a:rPr>
-              <a:t>已完成：数据资源与参考集、短肽库、三模型共识预测、分阶段差异分析、宏蛋白组二次去重与特有抗菌肽筛选。</a:t>
+              <a:t>已完成：数据资源与参考集、短肽库、三模型共识预测、分阶段差异分析、宏蛋白组二次去重与 AD 特异性特有抗菌肽筛选。</a:t>
             </a:r>
           </a:p>
           <a:p>
@@ -8857,7 +8857,7 @@
                 <a:ea typeface="微软雅黑"/>
                 <a:cs typeface="Arial"/>
               </a:rPr>
-              <a:t>进行中：特有抗菌肽的机制关联分析、候选抗菌肽的抑菌实验验证，以及学位论文与以第一作者投稿的 SCI 论文撰写。</a:t>
+              <a:t>进行中：AD 特异性特有抗菌肽与 AD 的关联分析、候选抗菌肽的抑菌实验验证，以及学位论文与以第一作者投稿的 SCI 论文撰写。</a:t>
             </a:r>
           </a:p>
           <a:p>
@@ -10223,8 +10223,8 @@
                 <a:cs typeface="Arial"/>
               </a:rPr>
               <a:t>MEGAHIT 组装
-MetaBAT2 分箱
-CONCOCT 分箱</a:t>
+MetaBAT2 · MaxBin2
+· CONCOCT 分箱</a:t>
             </a:r>
           </a:p>
         </p:txBody>
@@ -11523,7 +11523,7 @@
                 <a:ea typeface="微软雅黑"/>
                 <a:cs typeface="Arial"/>
               </a:rPr>
-              <a:t>特有抗菌肽</a:t>
+              <a:t>AD 特有抗菌肽</a:t>
             </a:r>
           </a:p>
           <a:p>
@@ -11547,8 +11547,8 @@
                 <a:ea typeface="微软雅黑"/>
                 <a:cs typeface="Arial"/>
               </a:rPr>
-              <a:t>健康人群特有肽
-各阶段特有肽</a:t>
+              <a:t>AD 组特有（特异性）
+各阶段 AD 特有肽</a:t>
             </a:r>
           </a:p>
         </p:txBody>
@@ -11712,7 +11712,7 @@
                 <a:ea typeface="微软雅黑"/>
                 <a:cs typeface="Arial"/>
               </a:rPr>
-              <a:t>机制关联分析</a:t>
+              <a:t>AD 特有肽与 AD 关联</a:t>
             </a:r>
           </a:p>
           <a:p>
@@ -11737,7 +11737,7 @@
                 <a:cs typeface="Arial"/>
               </a:rPr>
               <a:t>分子对接 + 动力学
-给出候选优先序</a:t>
+文献比对与机制判定</a:t>
             </a:r>
           </a:p>
         </p:txBody>
@@ -14478,7 +14478,7 @@
                 <a:ea typeface="微软雅黑"/>
                 <a:cs typeface="Arial"/>
               </a:rPr>
-              <a:t>宏蛋白组表达证据二次去重后，得到健康人与各阶段特有抗菌肽</a:t>
+              <a:t>宏蛋白组表达证据二次去重后，得到 AD 特异性特有抗菌肽</a:t>
             </a:r>
           </a:p>
         </p:txBody>
@@ -14593,7 +14593,7 @@
                 <a:ea typeface="微软雅黑"/>
                 <a:cs typeface="Arial"/>
               </a:rPr>
-              <a:t>先按认知阶段比较丰度与组成差异，再引入宏蛋白组表达证据，剔除“有预测、无表达”的序列，得到健康人群特有与各阶段特有的抗菌肽清单。该步骤已完成。</a:t>
+              <a:t>先按认知阶段比较丰度与组成差异，再引入宏蛋白组表达证据，剔除“有预测、无表达”的序列，得到 AD 组特有（AD 特异性）的抗菌肽清单。该步骤已完成。</a:t>
             </a:r>
           </a:p>
         </p:txBody>
@@ -14752,7 +14752,7 @@
                 <a:ea typeface="微软雅黑"/>
                 <a:cs typeface="Arial"/>
               </a:rPr>
-              <a:t>机制关联与抑菌实验验证正在开展</a:t>
+              <a:t>AD 特有肽与 AD 的关联分析与抑菌实验验证正在开展</a:t>
             </a:r>
           </a:p>
         </p:txBody>
@@ -14891,7 +14891,7 @@
                 <a:ea typeface="微软雅黑"/>
                 <a:cs typeface="Arial"/>
               </a:rPr>
-              <a:t>机制关联按致病方向展开：候选肽是否促进 Aβ 成核与聚集、是否经 AChE 外周阴离子位点推动成核、是否经免疫与炎症通路放大神经炎症；结论定位为线索发现与优先序。抑菌实验验证以代表性候选肽对大肠杆菌与金黄色葡萄球菌做纸片扩散法初筛，并以微量肉汤稀释法测定最低抑菌浓度。</a:t>
+              <a:t>AD 特有肽与 AD 的关联按致病方向展开：是否促进 Aβ 成核与聚集、是否经 AChE 外周阴离子位点推动成核、是否经免疫与炎症通路放大神经炎症；结论定位为线索发现。抑菌实验验证以代表性候选肽对大肠杆菌与金黄色葡萄球菌做纸片扩散法初筛，并以微量肉汤稀释法测定最低抑菌浓度。</a:t>
             </a:r>
           </a:p>
         </p:txBody>
